--- a/spec/Diagrams/InformationStructure/InformationStructure.pptx
+++ b/spec/Diagrams/InformationStructure/InformationStructure.pptx
@@ -5,10 +5,11 @@
     <p:sldMasterId id="2147483732" r:id="rId1"/>
   </p:sldMasterIdLst>
   <p:notesMasterIdLst>
-    <p:notesMasterId r:id="rId3"/>
+    <p:notesMasterId r:id="rId4"/>
   </p:notesMasterIdLst>
   <p:sldIdLst>
     <p:sldId id="302" r:id="rId2"/>
+    <p:sldId id="303" r:id="rId3"/>
   </p:sldIdLst>
   <p:sldSz cx="23399750" cy="18000663"/>
   <p:notesSz cx="6858000" cy="9144000"/>
@@ -197,7 +198,7 @@
           <a:p>
             <a:fld id="{37CCF725-7468-4D3D-9E24-A16745BBBA77}" type="datetimeFigureOut">
               <a:rPr lang="de-DE" smtClean="0"/>
-              <a:t>29.04.2025</a:t>
+              <a:t>30.04.2025</a:t>
             </a:fld>
             <a:endParaRPr lang="de-DE"/>
           </a:p>
@@ -595,7 +596,7 @@
           <a:p>
             <a:fld id="{9A2764DB-E7DF-4EA7-A1AF-05A77C280FCA}" type="datetimeFigureOut">
               <a:rPr lang="de-DE" smtClean="0"/>
-              <a:t>29.04.2025</a:t>
+              <a:t>30.04.2025</a:t>
             </a:fld>
             <a:endParaRPr lang="de-DE"/>
           </a:p>
@@ -765,7 +766,7 @@
           <a:p>
             <a:fld id="{9A2764DB-E7DF-4EA7-A1AF-05A77C280FCA}" type="datetimeFigureOut">
               <a:rPr lang="de-DE" smtClean="0"/>
-              <a:t>29.04.2025</a:t>
+              <a:t>30.04.2025</a:t>
             </a:fld>
             <a:endParaRPr lang="de-DE"/>
           </a:p>
@@ -945,7 +946,7 @@
           <a:p>
             <a:fld id="{9A2764DB-E7DF-4EA7-A1AF-05A77C280FCA}" type="datetimeFigureOut">
               <a:rPr lang="de-DE" smtClean="0"/>
-              <a:t>29.04.2025</a:t>
+              <a:t>30.04.2025</a:t>
             </a:fld>
             <a:endParaRPr lang="de-DE"/>
           </a:p>
@@ -1115,7 +1116,7 @@
           <a:p>
             <a:fld id="{9A2764DB-E7DF-4EA7-A1AF-05A77C280FCA}" type="datetimeFigureOut">
               <a:rPr lang="de-DE" smtClean="0"/>
-              <a:t>29.04.2025</a:t>
+              <a:t>30.04.2025</a:t>
             </a:fld>
             <a:endParaRPr lang="de-DE"/>
           </a:p>
@@ -1361,7 +1362,7 @@
           <a:p>
             <a:fld id="{9A2764DB-E7DF-4EA7-A1AF-05A77C280FCA}" type="datetimeFigureOut">
               <a:rPr lang="de-DE" smtClean="0"/>
-              <a:t>29.04.2025</a:t>
+              <a:t>30.04.2025</a:t>
             </a:fld>
             <a:endParaRPr lang="de-DE"/>
           </a:p>
@@ -1593,7 +1594,7 @@
           <a:p>
             <a:fld id="{9A2764DB-E7DF-4EA7-A1AF-05A77C280FCA}" type="datetimeFigureOut">
               <a:rPr lang="de-DE" smtClean="0"/>
-              <a:t>29.04.2025</a:t>
+              <a:t>30.04.2025</a:t>
             </a:fld>
             <a:endParaRPr lang="de-DE"/>
           </a:p>
@@ -1960,7 +1961,7 @@
           <a:p>
             <a:fld id="{9A2764DB-E7DF-4EA7-A1AF-05A77C280FCA}" type="datetimeFigureOut">
               <a:rPr lang="de-DE" smtClean="0"/>
-              <a:t>29.04.2025</a:t>
+              <a:t>30.04.2025</a:t>
             </a:fld>
             <a:endParaRPr lang="de-DE"/>
           </a:p>
@@ -2078,7 +2079,7 @@
           <a:p>
             <a:fld id="{9A2764DB-E7DF-4EA7-A1AF-05A77C280FCA}" type="datetimeFigureOut">
               <a:rPr lang="de-DE" smtClean="0"/>
-              <a:t>29.04.2025</a:t>
+              <a:t>30.04.2025</a:t>
             </a:fld>
             <a:endParaRPr lang="de-DE"/>
           </a:p>
@@ -2173,7 +2174,7 @@
           <a:p>
             <a:fld id="{9A2764DB-E7DF-4EA7-A1AF-05A77C280FCA}" type="datetimeFigureOut">
               <a:rPr lang="de-DE" smtClean="0"/>
-              <a:t>29.04.2025</a:t>
+              <a:t>30.04.2025</a:t>
             </a:fld>
             <a:endParaRPr lang="de-DE"/>
           </a:p>
@@ -2450,7 +2451,7 @@
           <a:p>
             <a:fld id="{9A2764DB-E7DF-4EA7-A1AF-05A77C280FCA}" type="datetimeFigureOut">
               <a:rPr lang="de-DE" smtClean="0"/>
-              <a:t>29.04.2025</a:t>
+              <a:t>30.04.2025</a:t>
             </a:fld>
             <a:endParaRPr lang="de-DE"/>
           </a:p>
@@ -2707,7 +2708,7 @@
           <a:p>
             <a:fld id="{9A2764DB-E7DF-4EA7-A1AF-05A77C280FCA}" type="datetimeFigureOut">
               <a:rPr lang="de-DE" smtClean="0"/>
-              <a:t>29.04.2025</a:t>
+              <a:t>30.04.2025</a:t>
             </a:fld>
             <a:endParaRPr lang="de-DE"/>
           </a:p>
@@ -2920,7 +2921,7 @@
           <a:p>
             <a:fld id="{9A2764DB-E7DF-4EA7-A1AF-05A77C280FCA}" type="datetimeFigureOut">
               <a:rPr lang="de-DE" smtClean="0"/>
-              <a:t>29.04.2025</a:t>
+              <a:t>30.04.2025</a:t>
             </a:fld>
             <a:endParaRPr lang="de-DE"/>
           </a:p>
@@ -7170,6 +7171,1803 @@
     <p:extLst>
       <p:ext uri="{BB962C8B-B14F-4D97-AF65-F5344CB8AC3E}">
         <p14:creationId xmlns:p14="http://schemas.microsoft.com/office/powerpoint/2010/main" val="1618497423"/>
+      </p:ext>
+    </p:extLst>
+  </p:cSld>
+  <p:clrMapOvr>
+    <a:masterClrMapping/>
+  </p:clrMapOvr>
+</p:sld>
+</file>
+
+<file path=ppt/slides/slide2.xml><?xml version="1.0" encoding="utf-8"?>
+<p:sld xmlns:a="http://schemas.openxmlformats.org/drawingml/2006/main" xmlns:r="http://schemas.openxmlformats.org/officeDocument/2006/relationships" xmlns:p="http://schemas.openxmlformats.org/presentationml/2006/main">
+  <p:cSld>
+    <p:spTree>
+      <p:nvGrpSpPr>
+        <p:cNvPr id="1" name=""/>
+        <p:cNvGrpSpPr/>
+        <p:nvPr/>
+      </p:nvGrpSpPr>
+      <p:grpSpPr>
+        <a:xfrm>
+          <a:off x="0" y="0"/>
+          <a:ext cx="0" cy="0"/>
+          <a:chOff x="0" y="0"/>
+          <a:chExt cx="0" cy="0"/>
+        </a:xfrm>
+      </p:grpSpPr>
+      <p:sp>
+        <p:nvSpPr>
+          <p:cNvPr id="2" name="Textfeld 1">
+            <a:extLst>
+              <a:ext uri="{FF2B5EF4-FFF2-40B4-BE49-F238E27FC236}">
+                <a16:creationId xmlns:a16="http://schemas.microsoft.com/office/drawing/2014/main" id="{6ADAE2AF-3BC3-B985-466C-CCCF136C0C4D}"/>
+              </a:ext>
+            </a:extLst>
+          </p:cNvPr>
+          <p:cNvSpPr txBox="1"/>
+          <p:nvPr/>
+        </p:nvSpPr>
+        <p:spPr>
+          <a:xfrm>
+            <a:off x="821635" y="808383"/>
+            <a:ext cx="999248" cy="369332"/>
+          </a:xfrm>
+          <a:prstGeom prst="rect">
+            <a:avLst/>
+          </a:prstGeom>
+          <a:noFill/>
+        </p:spPr>
+        <p:txBody>
+          <a:bodyPr wrap="none" rtlCol="0">
+            <a:spAutoFit/>
+          </a:bodyPr>
+          <a:lstStyle/>
+          <a:p>
+            <a:r>
+              <a:rPr lang="de-DE"/>
+              <a:t>Running</a:t>
+            </a:r>
+          </a:p>
+        </p:txBody>
+      </p:sp>
+      <p:sp>
+        <p:nvSpPr>
+          <p:cNvPr id="4" name="Abgerundetes Rechteck 1">
+            <a:extLst>
+              <a:ext uri="{FF2B5EF4-FFF2-40B4-BE49-F238E27FC236}">
+                <a16:creationId xmlns:a16="http://schemas.microsoft.com/office/drawing/2014/main" id="{097003FE-453E-AC0E-A4B5-B46C5038573A}"/>
+              </a:ext>
+            </a:extLst>
+          </p:cNvPr>
+          <p:cNvSpPr/>
+          <p:nvPr/>
+        </p:nvSpPr>
+        <p:spPr>
+          <a:xfrm>
+            <a:off x="1052609" y="1544015"/>
+            <a:ext cx="537299" cy="445572"/>
+          </a:xfrm>
+          <a:prstGeom prst="roundRect">
+            <a:avLst/>
+          </a:prstGeom>
+          <a:solidFill>
+            <a:sysClr val="window" lastClr="FFFFFF">
+              <a:lumMod val="65000"/>
+            </a:sysClr>
+          </a:solidFill>
+          <a:ln w="12700" cap="flat" cmpd="sng" algn="ctr">
+            <a:solidFill>
+              <a:sysClr val="window" lastClr="FFFFFF">
+                <a:lumMod val="50000"/>
+              </a:sysClr>
+            </a:solidFill>
+            <a:prstDash val="solid"/>
+            <a:miter lim="800000"/>
+          </a:ln>
+          <a:effectLst>
+            <a:outerShdw blurRad="50800" dist="38100" dir="2700000" algn="tl" rotWithShape="0">
+              <a:prstClr val="black">
+                <a:alpha val="40000"/>
+              </a:prstClr>
+            </a:outerShdw>
+          </a:effectLst>
+        </p:spPr>
+        <p:txBody>
+          <a:bodyPr rtlCol="0" anchor="ctr"/>
+          <a:lstStyle/>
+          <a:p>
+            <a:pPr algn="ctr" defTabSz="914400">
+              <a:defRPr/>
+            </a:pPr>
+            <a:r>
+              <a:rPr lang="de-DE" sz="1050" kern="0" dirty="0">
+                <a:solidFill>
+                  <a:prstClr val="white"/>
+                </a:solidFill>
+                <a:latin typeface="Calibri" panose="020F0502020204030204"/>
+              </a:rPr>
+              <a:t>CC</a:t>
+            </a:r>
+          </a:p>
+        </p:txBody>
+      </p:sp>
+      <p:sp>
+        <p:nvSpPr>
+          <p:cNvPr id="5" name="Abgerundetes Rechteck 89">
+            <a:extLst>
+              <a:ext uri="{FF2B5EF4-FFF2-40B4-BE49-F238E27FC236}">
+                <a16:creationId xmlns:a16="http://schemas.microsoft.com/office/drawing/2014/main" id="{A73EEBF5-20C9-6DC9-1197-BEB3C18B3BC2}"/>
+              </a:ext>
+            </a:extLst>
+          </p:cNvPr>
+          <p:cNvSpPr/>
+          <p:nvPr/>
+        </p:nvSpPr>
+        <p:spPr>
+          <a:xfrm>
+            <a:off x="2366379" y="1544015"/>
+            <a:ext cx="1161453" cy="445572"/>
+          </a:xfrm>
+          <a:prstGeom prst="roundRect">
+            <a:avLst/>
+          </a:prstGeom>
+          <a:solidFill>
+            <a:srgbClr val="4472C4">
+              <a:lumMod val="60000"/>
+              <a:lumOff val="40000"/>
+            </a:srgbClr>
+          </a:solidFill>
+          <a:ln w="12700" cap="flat" cmpd="sng" algn="ctr">
+            <a:solidFill>
+              <a:srgbClr val="4472C4">
+                <a:lumMod val="75000"/>
+              </a:srgbClr>
+            </a:solidFill>
+            <a:prstDash val="solid"/>
+            <a:miter lim="800000"/>
+          </a:ln>
+          <a:effectLst>
+            <a:outerShdw blurRad="50800" dist="38100" dir="2700000" algn="tl" rotWithShape="0">
+              <a:prstClr val="black">
+                <a:alpha val="40000"/>
+              </a:prstClr>
+            </a:outerShdw>
+          </a:effectLst>
+        </p:spPr>
+        <p:txBody>
+          <a:bodyPr rtlCol="0" anchor="ctr"/>
+          <a:lstStyle/>
+          <a:p>
+            <a:pPr algn="ctr" defTabSz="914400">
+              <a:defRPr/>
+            </a:pPr>
+            <a:r>
+              <a:rPr lang="de-DE" sz="1050" kern="0">
+                <a:solidFill>
+                  <a:prstClr val="white"/>
+                </a:solidFill>
+                <a:latin typeface="Calibri" panose="020F0502020204030204"/>
+              </a:rPr>
+              <a:t>AirInterface #1</a:t>
+            </a:r>
+          </a:p>
+        </p:txBody>
+      </p:sp>
+      <p:sp>
+        <p:nvSpPr>
+          <p:cNvPr id="6" name="Abgerundetes Rechteck 89">
+            <a:extLst>
+              <a:ext uri="{FF2B5EF4-FFF2-40B4-BE49-F238E27FC236}">
+                <a16:creationId xmlns:a16="http://schemas.microsoft.com/office/drawing/2014/main" id="{D63C9685-F3F2-8E04-C177-78A3FE8378C5}"/>
+              </a:ext>
+            </a:extLst>
+          </p:cNvPr>
+          <p:cNvSpPr/>
+          <p:nvPr/>
+        </p:nvSpPr>
+        <p:spPr>
+          <a:xfrm>
+            <a:off x="2366379" y="2312641"/>
+            <a:ext cx="1161453" cy="445572"/>
+          </a:xfrm>
+          <a:prstGeom prst="roundRect">
+            <a:avLst/>
+          </a:prstGeom>
+          <a:solidFill>
+            <a:srgbClr val="4472C4">
+              <a:lumMod val="60000"/>
+              <a:lumOff val="40000"/>
+            </a:srgbClr>
+          </a:solidFill>
+          <a:ln w="12700" cap="flat" cmpd="sng" algn="ctr">
+            <a:solidFill>
+              <a:srgbClr val="4472C4">
+                <a:lumMod val="75000"/>
+              </a:srgbClr>
+            </a:solidFill>
+            <a:prstDash val="solid"/>
+            <a:miter lim="800000"/>
+          </a:ln>
+          <a:effectLst>
+            <a:outerShdw blurRad="50800" dist="38100" dir="2700000" algn="tl" rotWithShape="0">
+              <a:prstClr val="black">
+                <a:alpha val="40000"/>
+              </a:prstClr>
+            </a:outerShdw>
+          </a:effectLst>
+        </p:spPr>
+        <p:txBody>
+          <a:bodyPr rtlCol="0" anchor="ctr"/>
+          <a:lstStyle/>
+          <a:p>
+            <a:pPr algn="ctr" defTabSz="914400">
+              <a:defRPr/>
+            </a:pPr>
+            <a:r>
+              <a:rPr lang="de-DE" sz="1050" kern="0">
+                <a:solidFill>
+                  <a:prstClr val="white"/>
+                </a:solidFill>
+                <a:latin typeface="Calibri" panose="020F0502020204030204"/>
+              </a:rPr>
+              <a:t>AirInterface #2</a:t>
+            </a:r>
+          </a:p>
+        </p:txBody>
+      </p:sp>
+      <p:cxnSp>
+        <p:nvCxnSpPr>
+          <p:cNvPr id="8" name="Gerader Verbinder 7">
+            <a:extLst>
+              <a:ext uri="{FF2B5EF4-FFF2-40B4-BE49-F238E27FC236}">
+                <a16:creationId xmlns:a16="http://schemas.microsoft.com/office/drawing/2014/main" id="{ED36A46A-7808-A295-096B-5F9A7202D1D0}"/>
+              </a:ext>
+            </a:extLst>
+          </p:cNvPr>
+          <p:cNvCxnSpPr>
+            <a:stCxn id="4" idx="3"/>
+            <a:endCxn id="5" idx="1"/>
+          </p:cNvCxnSpPr>
+          <p:nvPr/>
+        </p:nvCxnSpPr>
+        <p:spPr>
+          <a:xfrm>
+            <a:off x="1589908" y="1766801"/>
+            <a:ext cx="776471" cy="0"/>
+          </a:xfrm>
+          <a:prstGeom prst="line">
+            <a:avLst/>
+          </a:prstGeom>
+          <a:ln>
+            <a:prstDash val="dash"/>
+          </a:ln>
+        </p:spPr>
+        <p:style>
+          <a:lnRef idx="2">
+            <a:schemeClr val="accent1"/>
+          </a:lnRef>
+          <a:fillRef idx="0">
+            <a:schemeClr val="accent1"/>
+          </a:fillRef>
+          <a:effectRef idx="1">
+            <a:schemeClr val="accent1"/>
+          </a:effectRef>
+          <a:fontRef idx="minor">
+            <a:schemeClr val="tx1"/>
+          </a:fontRef>
+        </p:style>
+      </p:cxnSp>
+      <p:cxnSp>
+        <p:nvCxnSpPr>
+          <p:cNvPr id="9" name="Gerader Verbinder 8">
+            <a:extLst>
+              <a:ext uri="{FF2B5EF4-FFF2-40B4-BE49-F238E27FC236}">
+                <a16:creationId xmlns:a16="http://schemas.microsoft.com/office/drawing/2014/main" id="{4A75D0C9-0AFC-826C-4E93-E0C9EDDE277B}"/>
+              </a:ext>
+            </a:extLst>
+          </p:cNvPr>
+          <p:cNvCxnSpPr>
+            <a:cxnSpLocks/>
+            <a:stCxn id="4" idx="3"/>
+            <a:endCxn id="6" idx="1"/>
+          </p:cNvCxnSpPr>
+          <p:nvPr/>
+        </p:nvCxnSpPr>
+        <p:spPr>
+          <a:xfrm>
+            <a:off x="1589908" y="1766801"/>
+            <a:ext cx="776471" cy="768626"/>
+          </a:xfrm>
+          <a:prstGeom prst="line">
+            <a:avLst/>
+          </a:prstGeom>
+          <a:ln>
+            <a:prstDash val="dash"/>
+          </a:ln>
+        </p:spPr>
+        <p:style>
+          <a:lnRef idx="2">
+            <a:schemeClr val="accent1"/>
+          </a:lnRef>
+          <a:fillRef idx="0">
+            <a:schemeClr val="accent1"/>
+          </a:fillRef>
+          <a:effectRef idx="1">
+            <a:schemeClr val="accent1"/>
+          </a:effectRef>
+          <a:fontRef idx="minor">
+            <a:schemeClr val="tx1"/>
+          </a:fontRef>
+        </p:style>
+      </p:cxnSp>
+      <p:sp>
+        <p:nvSpPr>
+          <p:cNvPr id="21" name="Abgerundetes Rechteck 1">
+            <a:extLst>
+              <a:ext uri="{FF2B5EF4-FFF2-40B4-BE49-F238E27FC236}">
+                <a16:creationId xmlns:a16="http://schemas.microsoft.com/office/drawing/2014/main" id="{2F4BDD46-8FE1-E9EE-4668-7A5E0F5811DC}"/>
+              </a:ext>
+            </a:extLst>
+          </p:cNvPr>
+          <p:cNvSpPr/>
+          <p:nvPr/>
+        </p:nvSpPr>
+        <p:spPr>
+          <a:xfrm>
+            <a:off x="7215284" y="1544015"/>
+            <a:ext cx="537299" cy="445572"/>
+          </a:xfrm>
+          <a:prstGeom prst="roundRect">
+            <a:avLst/>
+          </a:prstGeom>
+          <a:solidFill>
+            <a:sysClr val="window" lastClr="FFFFFF">
+              <a:lumMod val="65000"/>
+            </a:sysClr>
+          </a:solidFill>
+          <a:ln w="12700" cap="flat" cmpd="sng" algn="ctr">
+            <a:solidFill>
+              <a:sysClr val="window" lastClr="FFFFFF">
+                <a:lumMod val="50000"/>
+              </a:sysClr>
+            </a:solidFill>
+            <a:prstDash val="solid"/>
+            <a:miter lim="800000"/>
+          </a:ln>
+          <a:effectLst>
+            <a:outerShdw blurRad="50800" dist="38100" dir="2700000" algn="tl" rotWithShape="0">
+              <a:prstClr val="black">
+                <a:alpha val="40000"/>
+              </a:prstClr>
+            </a:outerShdw>
+          </a:effectLst>
+        </p:spPr>
+        <p:txBody>
+          <a:bodyPr rtlCol="0" anchor="ctr"/>
+          <a:lstStyle/>
+          <a:p>
+            <a:pPr algn="ctr" defTabSz="914400">
+              <a:defRPr/>
+            </a:pPr>
+            <a:r>
+              <a:rPr lang="de-DE" sz="1050" kern="0" dirty="0">
+                <a:solidFill>
+                  <a:prstClr val="white"/>
+                </a:solidFill>
+                <a:latin typeface="Calibri" panose="020F0502020204030204"/>
+              </a:rPr>
+              <a:t>CC</a:t>
+            </a:r>
+          </a:p>
+        </p:txBody>
+      </p:sp>
+      <p:sp>
+        <p:nvSpPr>
+          <p:cNvPr id="22" name="Abgerundetes Rechteck 89">
+            <a:extLst>
+              <a:ext uri="{FF2B5EF4-FFF2-40B4-BE49-F238E27FC236}">
+                <a16:creationId xmlns:a16="http://schemas.microsoft.com/office/drawing/2014/main" id="{AF828BBC-FDF8-3379-5936-D4C8B43EDF10}"/>
+              </a:ext>
+            </a:extLst>
+          </p:cNvPr>
+          <p:cNvSpPr/>
+          <p:nvPr/>
+        </p:nvSpPr>
+        <p:spPr>
+          <a:xfrm>
+            <a:off x="5261979" y="1544015"/>
+            <a:ext cx="1161453" cy="445572"/>
+          </a:xfrm>
+          <a:prstGeom prst="roundRect">
+            <a:avLst/>
+          </a:prstGeom>
+          <a:solidFill>
+            <a:srgbClr val="4472C4">
+              <a:lumMod val="60000"/>
+              <a:lumOff val="40000"/>
+            </a:srgbClr>
+          </a:solidFill>
+          <a:ln w="12700" cap="flat" cmpd="sng" algn="ctr">
+            <a:solidFill>
+              <a:srgbClr val="4472C4">
+                <a:lumMod val="75000"/>
+              </a:srgbClr>
+            </a:solidFill>
+            <a:prstDash val="solid"/>
+            <a:miter lim="800000"/>
+          </a:ln>
+          <a:effectLst>
+            <a:outerShdw blurRad="50800" dist="38100" dir="2700000" algn="tl" rotWithShape="0">
+              <a:prstClr val="black">
+                <a:alpha val="40000"/>
+              </a:prstClr>
+            </a:outerShdw>
+          </a:effectLst>
+        </p:spPr>
+        <p:txBody>
+          <a:bodyPr rtlCol="0" anchor="ctr"/>
+          <a:lstStyle/>
+          <a:p>
+            <a:pPr algn="ctr" defTabSz="914400">
+              <a:defRPr/>
+            </a:pPr>
+            <a:r>
+              <a:rPr lang="de-DE" sz="1050" kern="0">
+                <a:solidFill>
+                  <a:prstClr val="white"/>
+                </a:solidFill>
+                <a:latin typeface="Calibri" panose="020F0502020204030204"/>
+              </a:rPr>
+              <a:t>AirInterface #1</a:t>
+            </a:r>
+          </a:p>
+        </p:txBody>
+      </p:sp>
+      <p:sp>
+        <p:nvSpPr>
+          <p:cNvPr id="23" name="Abgerundetes Rechteck 89">
+            <a:extLst>
+              <a:ext uri="{FF2B5EF4-FFF2-40B4-BE49-F238E27FC236}">
+                <a16:creationId xmlns:a16="http://schemas.microsoft.com/office/drawing/2014/main" id="{60C35A7C-1F33-05C5-F673-9127704DC48A}"/>
+              </a:ext>
+            </a:extLst>
+          </p:cNvPr>
+          <p:cNvSpPr/>
+          <p:nvPr/>
+        </p:nvSpPr>
+        <p:spPr>
+          <a:xfrm>
+            <a:off x="5261979" y="2312641"/>
+            <a:ext cx="1161453" cy="445572"/>
+          </a:xfrm>
+          <a:prstGeom prst="roundRect">
+            <a:avLst/>
+          </a:prstGeom>
+          <a:solidFill>
+            <a:srgbClr val="4472C4">
+              <a:lumMod val="60000"/>
+              <a:lumOff val="40000"/>
+            </a:srgbClr>
+          </a:solidFill>
+          <a:ln w="12700" cap="flat" cmpd="sng" algn="ctr">
+            <a:solidFill>
+              <a:srgbClr val="4472C4">
+                <a:lumMod val="75000"/>
+              </a:srgbClr>
+            </a:solidFill>
+            <a:prstDash val="solid"/>
+            <a:miter lim="800000"/>
+          </a:ln>
+          <a:effectLst>
+            <a:outerShdw blurRad="50800" dist="38100" dir="2700000" algn="tl" rotWithShape="0">
+              <a:prstClr val="black">
+                <a:alpha val="40000"/>
+              </a:prstClr>
+            </a:outerShdw>
+          </a:effectLst>
+        </p:spPr>
+        <p:txBody>
+          <a:bodyPr rtlCol="0" anchor="ctr"/>
+          <a:lstStyle/>
+          <a:p>
+            <a:pPr algn="ctr" defTabSz="914400">
+              <a:defRPr/>
+            </a:pPr>
+            <a:r>
+              <a:rPr lang="de-DE" sz="1050" kern="0">
+                <a:solidFill>
+                  <a:prstClr val="white"/>
+                </a:solidFill>
+                <a:latin typeface="Calibri" panose="020F0502020204030204"/>
+              </a:rPr>
+              <a:t>AirInterface #2</a:t>
+            </a:r>
+          </a:p>
+        </p:txBody>
+      </p:sp>
+      <p:cxnSp>
+        <p:nvCxnSpPr>
+          <p:cNvPr id="24" name="Gerader Verbinder 23">
+            <a:extLst>
+              <a:ext uri="{FF2B5EF4-FFF2-40B4-BE49-F238E27FC236}">
+                <a16:creationId xmlns:a16="http://schemas.microsoft.com/office/drawing/2014/main" id="{3D1EF9AE-C8C0-C87E-28E2-46BE1C9DDB11}"/>
+              </a:ext>
+            </a:extLst>
+          </p:cNvPr>
+          <p:cNvCxnSpPr>
+            <a:cxnSpLocks/>
+            <a:stCxn id="21" idx="1"/>
+            <a:endCxn id="22" idx="3"/>
+          </p:cNvCxnSpPr>
+          <p:nvPr/>
+        </p:nvCxnSpPr>
+        <p:spPr>
+          <a:xfrm flipH="1">
+            <a:off x="6423432" y="1766801"/>
+            <a:ext cx="791852" cy="0"/>
+          </a:xfrm>
+          <a:prstGeom prst="line">
+            <a:avLst/>
+          </a:prstGeom>
+          <a:ln>
+            <a:prstDash val="dash"/>
+          </a:ln>
+        </p:spPr>
+        <p:style>
+          <a:lnRef idx="2">
+            <a:schemeClr val="accent1"/>
+          </a:lnRef>
+          <a:fillRef idx="0">
+            <a:schemeClr val="accent1"/>
+          </a:fillRef>
+          <a:effectRef idx="1">
+            <a:schemeClr val="accent1"/>
+          </a:effectRef>
+          <a:fontRef idx="minor">
+            <a:schemeClr val="tx1"/>
+          </a:fontRef>
+        </p:style>
+      </p:cxnSp>
+      <p:cxnSp>
+        <p:nvCxnSpPr>
+          <p:cNvPr id="25" name="Gerader Verbinder 24">
+            <a:extLst>
+              <a:ext uri="{FF2B5EF4-FFF2-40B4-BE49-F238E27FC236}">
+                <a16:creationId xmlns:a16="http://schemas.microsoft.com/office/drawing/2014/main" id="{961DC7F2-4A58-3FE7-B7FA-47F176F07CFF}"/>
+              </a:ext>
+            </a:extLst>
+          </p:cNvPr>
+          <p:cNvCxnSpPr>
+            <a:cxnSpLocks/>
+            <a:stCxn id="21" idx="1"/>
+            <a:endCxn id="23" idx="3"/>
+          </p:cNvCxnSpPr>
+          <p:nvPr/>
+        </p:nvCxnSpPr>
+        <p:spPr>
+          <a:xfrm flipH="1">
+            <a:off x="6423432" y="1766801"/>
+            <a:ext cx="791852" cy="768626"/>
+          </a:xfrm>
+          <a:prstGeom prst="line">
+            <a:avLst/>
+          </a:prstGeom>
+          <a:ln>
+            <a:prstDash val="dash"/>
+          </a:ln>
+        </p:spPr>
+        <p:style>
+          <a:lnRef idx="2">
+            <a:schemeClr val="accent1"/>
+          </a:lnRef>
+          <a:fillRef idx="0">
+            <a:schemeClr val="accent1"/>
+          </a:fillRef>
+          <a:effectRef idx="1">
+            <a:schemeClr val="accent1"/>
+          </a:effectRef>
+          <a:fontRef idx="minor">
+            <a:schemeClr val="tx1"/>
+          </a:fontRef>
+        </p:style>
+      </p:cxnSp>
+      <p:cxnSp>
+        <p:nvCxnSpPr>
+          <p:cNvPr id="32" name="Gerader Verbinder 31">
+            <a:extLst>
+              <a:ext uri="{FF2B5EF4-FFF2-40B4-BE49-F238E27FC236}">
+                <a16:creationId xmlns:a16="http://schemas.microsoft.com/office/drawing/2014/main" id="{008127D1-09C5-341F-523E-3EE26B417D75}"/>
+              </a:ext>
+            </a:extLst>
+          </p:cNvPr>
+          <p:cNvCxnSpPr>
+            <a:stCxn id="5" idx="3"/>
+            <a:endCxn id="22" idx="1"/>
+          </p:cNvCxnSpPr>
+          <p:nvPr/>
+        </p:nvCxnSpPr>
+        <p:spPr>
+          <a:xfrm>
+            <a:off x="3527832" y="1766801"/>
+            <a:ext cx="1734147" cy="0"/>
+          </a:xfrm>
+          <a:prstGeom prst="line">
+            <a:avLst/>
+          </a:prstGeom>
+        </p:spPr>
+        <p:style>
+          <a:lnRef idx="2">
+            <a:schemeClr val="accent5"/>
+          </a:lnRef>
+          <a:fillRef idx="0">
+            <a:schemeClr val="accent5"/>
+          </a:fillRef>
+          <a:effectRef idx="1">
+            <a:schemeClr val="accent5"/>
+          </a:effectRef>
+          <a:fontRef idx="minor">
+            <a:schemeClr val="tx1"/>
+          </a:fontRef>
+        </p:style>
+      </p:cxnSp>
+      <p:cxnSp>
+        <p:nvCxnSpPr>
+          <p:cNvPr id="33" name="Gerader Verbinder 32">
+            <a:extLst>
+              <a:ext uri="{FF2B5EF4-FFF2-40B4-BE49-F238E27FC236}">
+                <a16:creationId xmlns:a16="http://schemas.microsoft.com/office/drawing/2014/main" id="{12384DB8-9AFF-BC4F-2EB8-85D4BA01BB22}"/>
+              </a:ext>
+            </a:extLst>
+          </p:cNvPr>
+          <p:cNvCxnSpPr>
+            <a:cxnSpLocks/>
+            <a:stCxn id="6" idx="3"/>
+            <a:endCxn id="23" idx="1"/>
+          </p:cNvCxnSpPr>
+          <p:nvPr/>
+        </p:nvCxnSpPr>
+        <p:spPr>
+          <a:xfrm>
+            <a:off x="3527832" y="2535427"/>
+            <a:ext cx="1734147" cy="0"/>
+          </a:xfrm>
+          <a:prstGeom prst="line">
+            <a:avLst/>
+          </a:prstGeom>
+        </p:spPr>
+        <p:style>
+          <a:lnRef idx="2">
+            <a:schemeClr val="accent6"/>
+          </a:lnRef>
+          <a:fillRef idx="0">
+            <a:schemeClr val="accent6"/>
+          </a:fillRef>
+          <a:effectRef idx="1">
+            <a:schemeClr val="accent6"/>
+          </a:effectRef>
+          <a:fontRef idx="minor">
+            <a:schemeClr val="tx1"/>
+          </a:fontRef>
+        </p:style>
+      </p:cxnSp>
+      <p:sp>
+        <p:nvSpPr>
+          <p:cNvPr id="37" name="Rechteck 36">
+            <a:extLst>
+              <a:ext uri="{FF2B5EF4-FFF2-40B4-BE49-F238E27FC236}">
+                <a16:creationId xmlns:a16="http://schemas.microsoft.com/office/drawing/2014/main" id="{388D120D-4A2F-B01C-C4C8-08A762172B49}"/>
+              </a:ext>
+            </a:extLst>
+          </p:cNvPr>
+          <p:cNvSpPr/>
+          <p:nvPr/>
+        </p:nvSpPr>
+        <p:spPr>
+          <a:xfrm>
+            <a:off x="4183282" y="1531105"/>
+            <a:ext cx="573690" cy="211283"/>
+          </a:xfrm>
+          <a:prstGeom prst="rect">
+            <a:avLst/>
+          </a:prstGeom>
+          <a:noFill/>
+          <a:ln w="12700" cap="flat" cmpd="sng" algn="ctr">
+            <a:noFill/>
+            <a:prstDash val="solid"/>
+            <a:miter lim="800000"/>
+          </a:ln>
+          <a:effectLst/>
+        </p:spPr>
+        <p:txBody>
+          <a:bodyPr lIns="36000" tIns="36000" rIns="36000" bIns="36000" rtlCol="0" anchor="t"/>
+          <a:lstStyle/>
+          <a:p>
+            <a:pPr defTabSz="914400"/>
+            <a:r>
+              <a:rPr lang="de-DE" sz="800" kern="0">
+                <a:solidFill>
+                  <a:prstClr val="black"/>
+                </a:solidFill>
+                <a:latin typeface="Calibri" panose="020F0502020204030204"/>
+              </a:rPr>
+              <a:t>305550001</a:t>
+            </a:r>
+          </a:p>
+        </p:txBody>
+      </p:sp>
+      <p:sp>
+        <p:nvSpPr>
+          <p:cNvPr id="38" name="Rechteck 37">
+            <a:extLst>
+              <a:ext uri="{FF2B5EF4-FFF2-40B4-BE49-F238E27FC236}">
+                <a16:creationId xmlns:a16="http://schemas.microsoft.com/office/drawing/2014/main" id="{512F6955-AA4A-84AE-140B-59FD36659D13}"/>
+              </a:ext>
+            </a:extLst>
+          </p:cNvPr>
+          <p:cNvSpPr/>
+          <p:nvPr/>
+        </p:nvSpPr>
+        <p:spPr>
+          <a:xfrm>
+            <a:off x="4183282" y="2326842"/>
+            <a:ext cx="573690" cy="211283"/>
+          </a:xfrm>
+          <a:prstGeom prst="rect">
+            <a:avLst/>
+          </a:prstGeom>
+          <a:noFill/>
+          <a:ln w="12700" cap="flat" cmpd="sng" algn="ctr">
+            <a:noFill/>
+            <a:prstDash val="solid"/>
+            <a:miter lim="800000"/>
+          </a:ln>
+          <a:effectLst/>
+        </p:spPr>
+        <p:txBody>
+          <a:bodyPr lIns="36000" tIns="36000" rIns="36000" bIns="36000" rtlCol="0" anchor="t"/>
+          <a:lstStyle/>
+          <a:p>
+            <a:pPr defTabSz="914400"/>
+            <a:r>
+              <a:rPr lang="de-DE" sz="800" kern="0">
+                <a:solidFill>
+                  <a:prstClr val="black"/>
+                </a:solidFill>
+                <a:latin typeface="Calibri" panose="020F0502020204030204"/>
+              </a:rPr>
+              <a:t>305550002</a:t>
+            </a:r>
+          </a:p>
+        </p:txBody>
+      </p:sp>
+      <p:sp>
+        <p:nvSpPr>
+          <p:cNvPr id="39" name="Textfeld 38">
+            <a:extLst>
+              <a:ext uri="{FF2B5EF4-FFF2-40B4-BE49-F238E27FC236}">
+                <a16:creationId xmlns:a16="http://schemas.microsoft.com/office/drawing/2014/main" id="{284D07A6-EA84-5FBE-1754-A3762D04FCA5}"/>
+              </a:ext>
+            </a:extLst>
+          </p:cNvPr>
+          <p:cNvSpPr txBox="1"/>
+          <p:nvPr/>
+        </p:nvSpPr>
+        <p:spPr>
+          <a:xfrm>
+            <a:off x="821635" y="3551810"/>
+            <a:ext cx="1361976" cy="369332"/>
+          </a:xfrm>
+          <a:prstGeom prst="rect">
+            <a:avLst/>
+          </a:prstGeom>
+          <a:noFill/>
+        </p:spPr>
+        <p:txBody>
+          <a:bodyPr wrap="none" rtlCol="0">
+            <a:spAutoFit/>
+          </a:bodyPr>
+          <a:lstStyle/>
+          <a:p>
+            <a:r>
+              <a:rPr lang="de-DE"/>
+              <a:t>Operational</a:t>
+            </a:r>
+          </a:p>
+        </p:txBody>
+      </p:sp>
+      <p:sp>
+        <p:nvSpPr>
+          <p:cNvPr id="40" name="Abgerundetes Rechteck 1">
+            <a:extLst>
+              <a:ext uri="{FF2B5EF4-FFF2-40B4-BE49-F238E27FC236}">
+                <a16:creationId xmlns:a16="http://schemas.microsoft.com/office/drawing/2014/main" id="{B0B13C56-89FA-AA8E-E079-1FD37F597A57}"/>
+              </a:ext>
+            </a:extLst>
+          </p:cNvPr>
+          <p:cNvSpPr/>
+          <p:nvPr/>
+        </p:nvSpPr>
+        <p:spPr>
+          <a:xfrm>
+            <a:off x="1052609" y="4287442"/>
+            <a:ext cx="537299" cy="445572"/>
+          </a:xfrm>
+          <a:prstGeom prst="roundRect">
+            <a:avLst/>
+          </a:prstGeom>
+          <a:solidFill>
+            <a:sysClr val="window" lastClr="FFFFFF">
+              <a:lumMod val="65000"/>
+            </a:sysClr>
+          </a:solidFill>
+          <a:ln w="12700" cap="flat" cmpd="sng" algn="ctr">
+            <a:solidFill>
+              <a:sysClr val="window" lastClr="FFFFFF">
+                <a:lumMod val="50000"/>
+              </a:sysClr>
+            </a:solidFill>
+            <a:prstDash val="solid"/>
+            <a:miter lim="800000"/>
+          </a:ln>
+          <a:effectLst>
+            <a:outerShdw blurRad="50800" dist="38100" dir="2700000" algn="tl" rotWithShape="0">
+              <a:prstClr val="black">
+                <a:alpha val="40000"/>
+              </a:prstClr>
+            </a:outerShdw>
+          </a:effectLst>
+        </p:spPr>
+        <p:txBody>
+          <a:bodyPr rtlCol="0" anchor="ctr"/>
+          <a:lstStyle/>
+          <a:p>
+            <a:pPr algn="ctr" defTabSz="914400">
+              <a:defRPr/>
+            </a:pPr>
+            <a:r>
+              <a:rPr lang="de-DE" sz="1050" kern="0" dirty="0">
+                <a:solidFill>
+                  <a:prstClr val="white"/>
+                </a:solidFill>
+                <a:latin typeface="Calibri" panose="020F0502020204030204"/>
+              </a:rPr>
+              <a:t>CC</a:t>
+            </a:r>
+          </a:p>
+        </p:txBody>
+      </p:sp>
+      <p:sp>
+        <p:nvSpPr>
+          <p:cNvPr id="41" name="Abgerundetes Rechteck 89">
+            <a:extLst>
+              <a:ext uri="{FF2B5EF4-FFF2-40B4-BE49-F238E27FC236}">
+                <a16:creationId xmlns:a16="http://schemas.microsoft.com/office/drawing/2014/main" id="{BCDD76B0-741C-42B5-AB68-5521380CADAF}"/>
+              </a:ext>
+            </a:extLst>
+          </p:cNvPr>
+          <p:cNvSpPr/>
+          <p:nvPr/>
+        </p:nvSpPr>
+        <p:spPr>
+          <a:xfrm>
+            <a:off x="2366379" y="4287442"/>
+            <a:ext cx="1161453" cy="445572"/>
+          </a:xfrm>
+          <a:prstGeom prst="roundRect">
+            <a:avLst/>
+          </a:prstGeom>
+          <a:solidFill>
+            <a:srgbClr val="4472C4">
+              <a:lumMod val="60000"/>
+              <a:lumOff val="40000"/>
+            </a:srgbClr>
+          </a:solidFill>
+          <a:ln w="12700" cap="flat" cmpd="sng" algn="ctr">
+            <a:solidFill>
+              <a:srgbClr val="4472C4">
+                <a:lumMod val="75000"/>
+              </a:srgbClr>
+            </a:solidFill>
+            <a:prstDash val="solid"/>
+            <a:miter lim="800000"/>
+          </a:ln>
+          <a:effectLst>
+            <a:outerShdw blurRad="50800" dist="38100" dir="2700000" algn="tl" rotWithShape="0">
+              <a:prstClr val="black">
+                <a:alpha val="40000"/>
+              </a:prstClr>
+            </a:outerShdw>
+          </a:effectLst>
+        </p:spPr>
+        <p:txBody>
+          <a:bodyPr rtlCol="0" anchor="ctr"/>
+          <a:lstStyle/>
+          <a:p>
+            <a:pPr algn="ctr" defTabSz="914400">
+              <a:defRPr/>
+            </a:pPr>
+            <a:r>
+              <a:rPr lang="de-DE" sz="1050" kern="0">
+                <a:solidFill>
+                  <a:prstClr val="white"/>
+                </a:solidFill>
+                <a:latin typeface="Calibri" panose="020F0502020204030204"/>
+              </a:rPr>
+              <a:t>AirInterface #1</a:t>
+            </a:r>
+          </a:p>
+        </p:txBody>
+      </p:sp>
+      <p:sp>
+        <p:nvSpPr>
+          <p:cNvPr id="42" name="Abgerundetes Rechteck 89">
+            <a:extLst>
+              <a:ext uri="{FF2B5EF4-FFF2-40B4-BE49-F238E27FC236}">
+                <a16:creationId xmlns:a16="http://schemas.microsoft.com/office/drawing/2014/main" id="{CD89B2EC-98C4-5751-7D75-90E6AADE6688}"/>
+              </a:ext>
+            </a:extLst>
+          </p:cNvPr>
+          <p:cNvSpPr/>
+          <p:nvPr/>
+        </p:nvSpPr>
+        <p:spPr>
+          <a:xfrm>
+            <a:off x="2366379" y="5056068"/>
+            <a:ext cx="1161453" cy="445572"/>
+          </a:xfrm>
+          <a:prstGeom prst="roundRect">
+            <a:avLst/>
+          </a:prstGeom>
+          <a:solidFill>
+            <a:srgbClr val="4472C4">
+              <a:lumMod val="60000"/>
+              <a:lumOff val="40000"/>
+            </a:srgbClr>
+          </a:solidFill>
+          <a:ln w="12700" cap="flat" cmpd="sng" algn="ctr">
+            <a:solidFill>
+              <a:srgbClr val="4472C4">
+                <a:lumMod val="75000"/>
+              </a:srgbClr>
+            </a:solidFill>
+            <a:prstDash val="solid"/>
+            <a:miter lim="800000"/>
+          </a:ln>
+          <a:effectLst>
+            <a:outerShdw blurRad="50800" dist="38100" dir="2700000" algn="tl" rotWithShape="0">
+              <a:prstClr val="black">
+                <a:alpha val="40000"/>
+              </a:prstClr>
+            </a:outerShdw>
+          </a:effectLst>
+        </p:spPr>
+        <p:txBody>
+          <a:bodyPr rtlCol="0" anchor="ctr"/>
+          <a:lstStyle/>
+          <a:p>
+            <a:pPr algn="ctr" defTabSz="914400">
+              <a:defRPr/>
+            </a:pPr>
+            <a:r>
+              <a:rPr lang="de-DE" sz="1050" kern="0">
+                <a:solidFill>
+                  <a:prstClr val="white"/>
+                </a:solidFill>
+                <a:latin typeface="Calibri" panose="020F0502020204030204"/>
+              </a:rPr>
+              <a:t>AirInterface #2</a:t>
+            </a:r>
+          </a:p>
+        </p:txBody>
+      </p:sp>
+      <p:cxnSp>
+        <p:nvCxnSpPr>
+          <p:cNvPr id="43" name="Gerader Verbinder 42">
+            <a:extLst>
+              <a:ext uri="{FF2B5EF4-FFF2-40B4-BE49-F238E27FC236}">
+                <a16:creationId xmlns:a16="http://schemas.microsoft.com/office/drawing/2014/main" id="{65F00F75-9332-4172-2DDB-6E0B344EC0B1}"/>
+              </a:ext>
+            </a:extLst>
+          </p:cNvPr>
+          <p:cNvCxnSpPr>
+            <a:stCxn id="40" idx="3"/>
+            <a:endCxn id="41" idx="1"/>
+          </p:cNvCxnSpPr>
+          <p:nvPr/>
+        </p:nvCxnSpPr>
+        <p:spPr>
+          <a:xfrm>
+            <a:off x="1589908" y="4510228"/>
+            <a:ext cx="776471" cy="0"/>
+          </a:xfrm>
+          <a:prstGeom prst="line">
+            <a:avLst/>
+          </a:prstGeom>
+          <a:ln>
+            <a:prstDash val="dash"/>
+          </a:ln>
+        </p:spPr>
+        <p:style>
+          <a:lnRef idx="2">
+            <a:schemeClr val="accent1"/>
+          </a:lnRef>
+          <a:fillRef idx="0">
+            <a:schemeClr val="accent1"/>
+          </a:fillRef>
+          <a:effectRef idx="1">
+            <a:schemeClr val="accent1"/>
+          </a:effectRef>
+          <a:fontRef idx="minor">
+            <a:schemeClr val="tx1"/>
+          </a:fontRef>
+        </p:style>
+      </p:cxnSp>
+      <p:cxnSp>
+        <p:nvCxnSpPr>
+          <p:cNvPr id="44" name="Gerader Verbinder 43">
+            <a:extLst>
+              <a:ext uri="{FF2B5EF4-FFF2-40B4-BE49-F238E27FC236}">
+                <a16:creationId xmlns:a16="http://schemas.microsoft.com/office/drawing/2014/main" id="{F522E477-B472-AFA5-96CB-25ECB63AF621}"/>
+              </a:ext>
+            </a:extLst>
+          </p:cNvPr>
+          <p:cNvCxnSpPr>
+            <a:cxnSpLocks/>
+            <a:stCxn id="40" idx="3"/>
+            <a:endCxn id="42" idx="1"/>
+          </p:cNvCxnSpPr>
+          <p:nvPr/>
+        </p:nvCxnSpPr>
+        <p:spPr>
+          <a:xfrm>
+            <a:off x="1589908" y="4510228"/>
+            <a:ext cx="776471" cy="768626"/>
+          </a:xfrm>
+          <a:prstGeom prst="line">
+            <a:avLst/>
+          </a:prstGeom>
+          <a:ln>
+            <a:prstDash val="dash"/>
+          </a:ln>
+        </p:spPr>
+        <p:style>
+          <a:lnRef idx="2">
+            <a:schemeClr val="accent1"/>
+          </a:lnRef>
+          <a:fillRef idx="0">
+            <a:schemeClr val="accent1"/>
+          </a:fillRef>
+          <a:effectRef idx="1">
+            <a:schemeClr val="accent1"/>
+          </a:effectRef>
+          <a:fontRef idx="minor">
+            <a:schemeClr val="tx1"/>
+          </a:fontRef>
+        </p:style>
+      </p:cxnSp>
+      <p:sp>
+        <p:nvSpPr>
+          <p:cNvPr id="45" name="Abgerundetes Rechteck 1">
+            <a:extLst>
+              <a:ext uri="{FF2B5EF4-FFF2-40B4-BE49-F238E27FC236}">
+                <a16:creationId xmlns:a16="http://schemas.microsoft.com/office/drawing/2014/main" id="{520B201F-A6CD-E1B9-7FE2-479A6B320884}"/>
+              </a:ext>
+            </a:extLst>
+          </p:cNvPr>
+          <p:cNvSpPr/>
+          <p:nvPr/>
+        </p:nvSpPr>
+        <p:spPr>
+          <a:xfrm>
+            <a:off x="7215284" y="4287442"/>
+            <a:ext cx="537299" cy="445572"/>
+          </a:xfrm>
+          <a:prstGeom prst="roundRect">
+            <a:avLst/>
+          </a:prstGeom>
+          <a:solidFill>
+            <a:sysClr val="window" lastClr="FFFFFF">
+              <a:lumMod val="65000"/>
+            </a:sysClr>
+          </a:solidFill>
+          <a:ln w="12700" cap="flat" cmpd="sng" algn="ctr">
+            <a:solidFill>
+              <a:sysClr val="window" lastClr="FFFFFF">
+                <a:lumMod val="50000"/>
+              </a:sysClr>
+            </a:solidFill>
+            <a:prstDash val="solid"/>
+            <a:miter lim="800000"/>
+          </a:ln>
+          <a:effectLst>
+            <a:outerShdw blurRad="50800" dist="38100" dir="2700000" algn="tl" rotWithShape="0">
+              <a:prstClr val="black">
+                <a:alpha val="40000"/>
+              </a:prstClr>
+            </a:outerShdw>
+          </a:effectLst>
+        </p:spPr>
+        <p:txBody>
+          <a:bodyPr rtlCol="0" anchor="ctr"/>
+          <a:lstStyle/>
+          <a:p>
+            <a:pPr algn="ctr" defTabSz="914400">
+              <a:defRPr/>
+            </a:pPr>
+            <a:r>
+              <a:rPr lang="de-DE" sz="1050" kern="0" dirty="0">
+                <a:solidFill>
+                  <a:prstClr val="white"/>
+                </a:solidFill>
+                <a:latin typeface="Calibri" panose="020F0502020204030204"/>
+              </a:rPr>
+              <a:t>CC</a:t>
+            </a:r>
+          </a:p>
+        </p:txBody>
+      </p:sp>
+      <p:sp>
+        <p:nvSpPr>
+          <p:cNvPr id="46" name="Abgerundetes Rechteck 89">
+            <a:extLst>
+              <a:ext uri="{FF2B5EF4-FFF2-40B4-BE49-F238E27FC236}">
+                <a16:creationId xmlns:a16="http://schemas.microsoft.com/office/drawing/2014/main" id="{D8EEDDD9-7BCA-0949-4D91-E71A66A0FBE0}"/>
+              </a:ext>
+            </a:extLst>
+          </p:cNvPr>
+          <p:cNvSpPr/>
+          <p:nvPr/>
+        </p:nvSpPr>
+        <p:spPr>
+          <a:xfrm>
+            <a:off x="5261979" y="4287442"/>
+            <a:ext cx="1161453" cy="445572"/>
+          </a:xfrm>
+          <a:prstGeom prst="roundRect">
+            <a:avLst/>
+          </a:prstGeom>
+          <a:solidFill>
+            <a:srgbClr val="4472C4">
+              <a:lumMod val="60000"/>
+              <a:lumOff val="40000"/>
+            </a:srgbClr>
+          </a:solidFill>
+          <a:ln w="12700" cap="flat" cmpd="sng" algn="ctr">
+            <a:solidFill>
+              <a:srgbClr val="4472C4">
+                <a:lumMod val="75000"/>
+              </a:srgbClr>
+            </a:solidFill>
+            <a:prstDash val="solid"/>
+            <a:miter lim="800000"/>
+          </a:ln>
+          <a:effectLst>
+            <a:outerShdw blurRad="50800" dist="38100" dir="2700000" algn="tl" rotWithShape="0">
+              <a:prstClr val="black">
+                <a:alpha val="40000"/>
+              </a:prstClr>
+            </a:outerShdw>
+          </a:effectLst>
+        </p:spPr>
+        <p:txBody>
+          <a:bodyPr rtlCol="0" anchor="ctr"/>
+          <a:lstStyle/>
+          <a:p>
+            <a:pPr algn="ctr" defTabSz="914400">
+              <a:defRPr/>
+            </a:pPr>
+            <a:r>
+              <a:rPr lang="de-DE" sz="1050" kern="0">
+                <a:solidFill>
+                  <a:prstClr val="white"/>
+                </a:solidFill>
+                <a:latin typeface="Calibri" panose="020F0502020204030204"/>
+              </a:rPr>
+              <a:t>AirInterface #1</a:t>
+            </a:r>
+          </a:p>
+        </p:txBody>
+      </p:sp>
+      <p:sp>
+        <p:nvSpPr>
+          <p:cNvPr id="47" name="Abgerundetes Rechteck 89">
+            <a:extLst>
+              <a:ext uri="{FF2B5EF4-FFF2-40B4-BE49-F238E27FC236}">
+                <a16:creationId xmlns:a16="http://schemas.microsoft.com/office/drawing/2014/main" id="{EE56F161-F939-C026-587D-C7E655A3ECB4}"/>
+              </a:ext>
+            </a:extLst>
+          </p:cNvPr>
+          <p:cNvSpPr/>
+          <p:nvPr/>
+        </p:nvSpPr>
+        <p:spPr>
+          <a:xfrm>
+            <a:off x="5261979" y="5056068"/>
+            <a:ext cx="1161453" cy="445572"/>
+          </a:xfrm>
+          <a:prstGeom prst="roundRect">
+            <a:avLst/>
+          </a:prstGeom>
+          <a:solidFill>
+            <a:srgbClr val="4472C4">
+              <a:lumMod val="60000"/>
+              <a:lumOff val="40000"/>
+            </a:srgbClr>
+          </a:solidFill>
+          <a:ln w="12700" cap="flat" cmpd="sng" algn="ctr">
+            <a:solidFill>
+              <a:srgbClr val="4472C4">
+                <a:lumMod val="75000"/>
+              </a:srgbClr>
+            </a:solidFill>
+            <a:prstDash val="solid"/>
+            <a:miter lim="800000"/>
+          </a:ln>
+          <a:effectLst>
+            <a:outerShdw blurRad="50800" dist="38100" dir="2700000" algn="tl" rotWithShape="0">
+              <a:prstClr val="black">
+                <a:alpha val="40000"/>
+              </a:prstClr>
+            </a:outerShdw>
+          </a:effectLst>
+        </p:spPr>
+        <p:txBody>
+          <a:bodyPr rtlCol="0" anchor="ctr"/>
+          <a:lstStyle/>
+          <a:p>
+            <a:pPr algn="ctr" defTabSz="914400">
+              <a:defRPr/>
+            </a:pPr>
+            <a:r>
+              <a:rPr lang="de-DE" sz="1050" kern="0">
+                <a:solidFill>
+                  <a:prstClr val="white"/>
+                </a:solidFill>
+                <a:latin typeface="Calibri" panose="020F0502020204030204"/>
+              </a:rPr>
+              <a:t>AirInterface #2</a:t>
+            </a:r>
+          </a:p>
+        </p:txBody>
+      </p:sp>
+      <p:cxnSp>
+        <p:nvCxnSpPr>
+          <p:cNvPr id="48" name="Gerader Verbinder 47">
+            <a:extLst>
+              <a:ext uri="{FF2B5EF4-FFF2-40B4-BE49-F238E27FC236}">
+                <a16:creationId xmlns:a16="http://schemas.microsoft.com/office/drawing/2014/main" id="{345CF39A-DBCC-FC7E-5648-B9014E0BDE58}"/>
+              </a:ext>
+            </a:extLst>
+          </p:cNvPr>
+          <p:cNvCxnSpPr>
+            <a:cxnSpLocks/>
+            <a:stCxn id="45" idx="1"/>
+            <a:endCxn id="46" idx="3"/>
+          </p:cNvCxnSpPr>
+          <p:nvPr/>
+        </p:nvCxnSpPr>
+        <p:spPr>
+          <a:xfrm flipH="1">
+            <a:off x="6423432" y="4510228"/>
+            <a:ext cx="791852" cy="0"/>
+          </a:xfrm>
+          <a:prstGeom prst="line">
+            <a:avLst/>
+          </a:prstGeom>
+          <a:ln>
+            <a:prstDash val="dash"/>
+          </a:ln>
+        </p:spPr>
+        <p:style>
+          <a:lnRef idx="2">
+            <a:schemeClr val="accent1"/>
+          </a:lnRef>
+          <a:fillRef idx="0">
+            <a:schemeClr val="accent1"/>
+          </a:fillRef>
+          <a:effectRef idx="1">
+            <a:schemeClr val="accent1"/>
+          </a:effectRef>
+          <a:fontRef idx="minor">
+            <a:schemeClr val="tx1"/>
+          </a:fontRef>
+        </p:style>
+      </p:cxnSp>
+      <p:cxnSp>
+        <p:nvCxnSpPr>
+          <p:cNvPr id="49" name="Gerader Verbinder 48">
+            <a:extLst>
+              <a:ext uri="{FF2B5EF4-FFF2-40B4-BE49-F238E27FC236}">
+                <a16:creationId xmlns:a16="http://schemas.microsoft.com/office/drawing/2014/main" id="{07AE9BCE-CFA2-3FA6-0928-265A117A3000}"/>
+              </a:ext>
+            </a:extLst>
+          </p:cNvPr>
+          <p:cNvCxnSpPr>
+            <a:cxnSpLocks/>
+            <a:stCxn id="45" idx="1"/>
+            <a:endCxn id="47" idx="3"/>
+          </p:cNvCxnSpPr>
+          <p:nvPr/>
+        </p:nvCxnSpPr>
+        <p:spPr>
+          <a:xfrm flipH="1">
+            <a:off x="6423432" y="4510228"/>
+            <a:ext cx="791852" cy="768626"/>
+          </a:xfrm>
+          <a:prstGeom prst="line">
+            <a:avLst/>
+          </a:prstGeom>
+          <a:ln>
+            <a:prstDash val="dash"/>
+          </a:ln>
+        </p:spPr>
+        <p:style>
+          <a:lnRef idx="2">
+            <a:schemeClr val="accent1"/>
+          </a:lnRef>
+          <a:fillRef idx="0">
+            <a:schemeClr val="accent1"/>
+          </a:fillRef>
+          <a:effectRef idx="1">
+            <a:schemeClr val="accent1"/>
+          </a:effectRef>
+          <a:fontRef idx="minor">
+            <a:schemeClr val="tx1"/>
+          </a:fontRef>
+        </p:style>
+      </p:cxnSp>
+      <p:cxnSp>
+        <p:nvCxnSpPr>
+          <p:cNvPr id="50" name="Gerader Verbinder 49">
+            <a:extLst>
+              <a:ext uri="{FF2B5EF4-FFF2-40B4-BE49-F238E27FC236}">
+                <a16:creationId xmlns:a16="http://schemas.microsoft.com/office/drawing/2014/main" id="{1486B58F-4900-8663-716A-24B8DECCED56}"/>
+              </a:ext>
+            </a:extLst>
+          </p:cNvPr>
+          <p:cNvCxnSpPr>
+            <a:stCxn id="41" idx="3"/>
+            <a:endCxn id="46" idx="1"/>
+          </p:cNvCxnSpPr>
+          <p:nvPr/>
+        </p:nvCxnSpPr>
+        <p:spPr>
+          <a:xfrm>
+            <a:off x="3527832" y="4510228"/>
+            <a:ext cx="1734147" cy="0"/>
+          </a:xfrm>
+          <a:prstGeom prst="line">
+            <a:avLst/>
+          </a:prstGeom>
+        </p:spPr>
+        <p:style>
+          <a:lnRef idx="2">
+            <a:schemeClr val="accent5"/>
+          </a:lnRef>
+          <a:fillRef idx="0">
+            <a:schemeClr val="accent5"/>
+          </a:fillRef>
+          <a:effectRef idx="1">
+            <a:schemeClr val="accent5"/>
+          </a:effectRef>
+          <a:fontRef idx="minor">
+            <a:schemeClr val="tx1"/>
+          </a:fontRef>
+        </p:style>
+      </p:cxnSp>
+      <p:cxnSp>
+        <p:nvCxnSpPr>
+          <p:cNvPr id="51" name="Gerader Verbinder 50">
+            <a:extLst>
+              <a:ext uri="{FF2B5EF4-FFF2-40B4-BE49-F238E27FC236}">
+                <a16:creationId xmlns:a16="http://schemas.microsoft.com/office/drawing/2014/main" id="{DC4F5D91-905B-8A82-30F0-6F28ACEED8AB}"/>
+              </a:ext>
+            </a:extLst>
+          </p:cNvPr>
+          <p:cNvCxnSpPr>
+            <a:cxnSpLocks/>
+            <a:stCxn id="42" idx="3"/>
+            <a:endCxn id="47" idx="1"/>
+          </p:cNvCxnSpPr>
+          <p:nvPr/>
+        </p:nvCxnSpPr>
+        <p:spPr>
+          <a:xfrm>
+            <a:off x="3527832" y="5278854"/>
+            <a:ext cx="1734147" cy="0"/>
+          </a:xfrm>
+          <a:prstGeom prst="line">
+            <a:avLst/>
+          </a:prstGeom>
+        </p:spPr>
+        <p:style>
+          <a:lnRef idx="2">
+            <a:schemeClr val="accent6"/>
+          </a:lnRef>
+          <a:fillRef idx="0">
+            <a:schemeClr val="accent6"/>
+          </a:fillRef>
+          <a:effectRef idx="1">
+            <a:schemeClr val="accent6"/>
+          </a:effectRef>
+          <a:fontRef idx="minor">
+            <a:schemeClr val="tx1"/>
+          </a:fontRef>
+        </p:style>
+      </p:cxnSp>
+      <p:cxnSp>
+        <p:nvCxnSpPr>
+          <p:cNvPr id="54" name="Gerader Verbinder 53">
+            <a:extLst>
+              <a:ext uri="{FF2B5EF4-FFF2-40B4-BE49-F238E27FC236}">
+                <a16:creationId xmlns:a16="http://schemas.microsoft.com/office/drawing/2014/main" id="{2AE42F98-2B38-D26A-8D2F-7D1F20273934}"/>
+              </a:ext>
+            </a:extLst>
+          </p:cNvPr>
+          <p:cNvCxnSpPr>
+            <a:cxnSpLocks/>
+            <a:stCxn id="41" idx="3"/>
+            <a:endCxn id="47" idx="1"/>
+          </p:cNvCxnSpPr>
+          <p:nvPr/>
+        </p:nvCxnSpPr>
+        <p:spPr>
+          <a:xfrm>
+            <a:off x="3527832" y="4510228"/>
+            <a:ext cx="1734147" cy="768626"/>
+          </a:xfrm>
+          <a:prstGeom prst="line">
+            <a:avLst/>
+          </a:prstGeom>
+        </p:spPr>
+        <p:style>
+          <a:lnRef idx="2">
+            <a:schemeClr val="accent5"/>
+          </a:lnRef>
+          <a:fillRef idx="0">
+            <a:schemeClr val="accent5"/>
+          </a:fillRef>
+          <a:effectRef idx="1">
+            <a:schemeClr val="accent5"/>
+          </a:effectRef>
+          <a:fontRef idx="minor">
+            <a:schemeClr val="tx1"/>
+          </a:fontRef>
+        </p:style>
+      </p:cxnSp>
+      <p:cxnSp>
+        <p:nvCxnSpPr>
+          <p:cNvPr id="57" name="Gerader Verbinder 56">
+            <a:extLst>
+              <a:ext uri="{FF2B5EF4-FFF2-40B4-BE49-F238E27FC236}">
+                <a16:creationId xmlns:a16="http://schemas.microsoft.com/office/drawing/2014/main" id="{AD779AC9-FD1D-260E-3F8E-E86C53F4FD02}"/>
+              </a:ext>
+            </a:extLst>
+          </p:cNvPr>
+          <p:cNvCxnSpPr>
+            <a:cxnSpLocks/>
+            <a:stCxn id="42" idx="3"/>
+            <a:endCxn id="46" idx="1"/>
+          </p:cNvCxnSpPr>
+          <p:nvPr/>
+        </p:nvCxnSpPr>
+        <p:spPr>
+          <a:xfrm flipV="1">
+            <a:off x="3527832" y="4510228"/>
+            <a:ext cx="1734147" cy="768626"/>
+          </a:xfrm>
+          <a:prstGeom prst="line">
+            <a:avLst/>
+          </a:prstGeom>
+        </p:spPr>
+        <p:style>
+          <a:lnRef idx="2">
+            <a:schemeClr val="accent5"/>
+          </a:lnRef>
+          <a:fillRef idx="0">
+            <a:schemeClr val="accent5"/>
+          </a:fillRef>
+          <a:effectRef idx="1">
+            <a:schemeClr val="accent5"/>
+          </a:effectRef>
+          <a:fontRef idx="minor">
+            <a:schemeClr val="tx1"/>
+          </a:fontRef>
+        </p:style>
+      </p:cxnSp>
+      <p:cxnSp>
+        <p:nvCxnSpPr>
+          <p:cNvPr id="60" name="Gerader Verbinder 59">
+            <a:extLst>
+              <a:ext uri="{FF2B5EF4-FFF2-40B4-BE49-F238E27FC236}">
+                <a16:creationId xmlns:a16="http://schemas.microsoft.com/office/drawing/2014/main" id="{A033104E-4A3B-522F-2238-2C63530AEB74}"/>
+              </a:ext>
+            </a:extLst>
+          </p:cNvPr>
+          <p:cNvCxnSpPr>
+            <a:cxnSpLocks/>
+            <a:stCxn id="42" idx="3"/>
+          </p:cNvCxnSpPr>
+          <p:nvPr/>
+        </p:nvCxnSpPr>
+        <p:spPr>
+          <a:xfrm flipV="1">
+            <a:off x="3527832" y="4628721"/>
+            <a:ext cx="1734147" cy="650133"/>
+          </a:xfrm>
+          <a:prstGeom prst="line">
+            <a:avLst/>
+          </a:prstGeom>
+        </p:spPr>
+        <p:style>
+          <a:lnRef idx="2">
+            <a:schemeClr val="accent6"/>
+          </a:lnRef>
+          <a:fillRef idx="0">
+            <a:schemeClr val="accent6"/>
+          </a:fillRef>
+          <a:effectRef idx="1">
+            <a:schemeClr val="accent6"/>
+          </a:effectRef>
+          <a:fontRef idx="minor">
+            <a:schemeClr val="tx1"/>
+          </a:fontRef>
+        </p:style>
+      </p:cxnSp>
+      <p:cxnSp>
+        <p:nvCxnSpPr>
+          <p:cNvPr id="62" name="Gerader Verbinder 61">
+            <a:extLst>
+              <a:ext uri="{FF2B5EF4-FFF2-40B4-BE49-F238E27FC236}">
+                <a16:creationId xmlns:a16="http://schemas.microsoft.com/office/drawing/2014/main" id="{BF032092-E26D-1B90-BD2E-72B3E4C7AD94}"/>
+              </a:ext>
+            </a:extLst>
+          </p:cNvPr>
+          <p:cNvCxnSpPr>
+            <a:cxnSpLocks/>
+            <a:stCxn id="41" idx="3"/>
+          </p:cNvCxnSpPr>
+          <p:nvPr/>
+        </p:nvCxnSpPr>
+        <p:spPr>
+          <a:xfrm>
+            <a:off x="3527832" y="4510228"/>
+            <a:ext cx="1734147" cy="639421"/>
+          </a:xfrm>
+          <a:prstGeom prst="line">
+            <a:avLst/>
+          </a:prstGeom>
+        </p:spPr>
+        <p:style>
+          <a:lnRef idx="2">
+            <a:schemeClr val="accent6"/>
+          </a:lnRef>
+          <a:fillRef idx="0">
+            <a:schemeClr val="accent6"/>
+          </a:fillRef>
+          <a:effectRef idx="1">
+            <a:schemeClr val="accent6"/>
+          </a:effectRef>
+          <a:fontRef idx="minor">
+            <a:schemeClr val="tx1"/>
+          </a:fontRef>
+        </p:style>
+      </p:cxnSp>
+      <p:cxnSp>
+        <p:nvCxnSpPr>
+          <p:cNvPr id="71" name="Gerader Verbinder 70">
+            <a:extLst>
+              <a:ext uri="{FF2B5EF4-FFF2-40B4-BE49-F238E27FC236}">
+                <a16:creationId xmlns:a16="http://schemas.microsoft.com/office/drawing/2014/main" id="{73E7F552-6247-942F-149B-B2F4BE1088D8}"/>
+              </a:ext>
+            </a:extLst>
+          </p:cNvPr>
+          <p:cNvCxnSpPr/>
+          <p:nvPr/>
+        </p:nvCxnSpPr>
+        <p:spPr>
+          <a:xfrm>
+            <a:off x="3527832" y="5386528"/>
+            <a:ext cx="1734147" cy="0"/>
+          </a:xfrm>
+          <a:prstGeom prst="line">
+            <a:avLst/>
+          </a:prstGeom>
+        </p:spPr>
+        <p:style>
+          <a:lnRef idx="2">
+            <a:schemeClr val="accent5"/>
+          </a:lnRef>
+          <a:fillRef idx="0">
+            <a:schemeClr val="accent5"/>
+          </a:fillRef>
+          <a:effectRef idx="1">
+            <a:schemeClr val="accent5"/>
+          </a:effectRef>
+          <a:fontRef idx="minor">
+            <a:schemeClr val="tx1"/>
+          </a:fontRef>
+        </p:style>
+      </p:cxnSp>
+      <p:cxnSp>
+        <p:nvCxnSpPr>
+          <p:cNvPr id="72" name="Gerader Verbinder 71">
+            <a:extLst>
+              <a:ext uri="{FF2B5EF4-FFF2-40B4-BE49-F238E27FC236}">
+                <a16:creationId xmlns:a16="http://schemas.microsoft.com/office/drawing/2014/main" id="{C9A4C412-BCBB-33AC-984B-B1834B53C4BF}"/>
+              </a:ext>
+            </a:extLst>
+          </p:cNvPr>
+          <p:cNvCxnSpPr>
+            <a:cxnSpLocks/>
+          </p:cNvCxnSpPr>
+          <p:nvPr/>
+        </p:nvCxnSpPr>
+        <p:spPr>
+          <a:xfrm>
+            <a:off x="3527832" y="4420050"/>
+            <a:ext cx="1734147" cy="0"/>
+          </a:xfrm>
+          <a:prstGeom prst="line">
+            <a:avLst/>
+          </a:prstGeom>
+        </p:spPr>
+        <p:style>
+          <a:lnRef idx="2">
+            <a:schemeClr val="accent6"/>
+          </a:lnRef>
+          <a:fillRef idx="0">
+            <a:schemeClr val="accent6"/>
+          </a:fillRef>
+          <a:effectRef idx="1">
+            <a:schemeClr val="accent6"/>
+          </a:effectRef>
+          <a:fontRef idx="minor">
+            <a:schemeClr val="tx1"/>
+          </a:fontRef>
+        </p:style>
+      </p:cxnSp>
+      <p:sp>
+        <p:nvSpPr>
+          <p:cNvPr id="73" name="Rechteck 72">
+            <a:extLst>
+              <a:ext uri="{FF2B5EF4-FFF2-40B4-BE49-F238E27FC236}">
+                <a16:creationId xmlns:a16="http://schemas.microsoft.com/office/drawing/2014/main" id="{FC89CEB9-D499-084D-0F30-40B9451B7F13}"/>
+              </a:ext>
+            </a:extLst>
+          </p:cNvPr>
+          <p:cNvSpPr/>
+          <p:nvPr/>
+        </p:nvSpPr>
+        <p:spPr>
+          <a:xfrm>
+            <a:off x="4379355" y="4199486"/>
+            <a:ext cx="573690" cy="211283"/>
+          </a:xfrm>
+          <a:prstGeom prst="rect">
+            <a:avLst/>
+          </a:prstGeom>
+          <a:noFill/>
+          <a:ln w="12700" cap="flat" cmpd="sng" algn="ctr">
+            <a:noFill/>
+            <a:prstDash val="solid"/>
+            <a:miter lim="800000"/>
+          </a:ln>
+          <a:effectLst/>
+        </p:spPr>
+        <p:txBody>
+          <a:bodyPr lIns="36000" tIns="36000" rIns="36000" bIns="36000" rtlCol="0" anchor="t"/>
+          <a:lstStyle/>
+          <a:p>
+            <a:pPr defTabSz="914400"/>
+            <a:r>
+              <a:rPr lang="de-DE" sz="800" kern="0">
+                <a:solidFill>
+                  <a:prstClr val="black"/>
+                </a:solidFill>
+                <a:latin typeface="Calibri" panose="020F0502020204030204"/>
+              </a:rPr>
+              <a:t>?</a:t>
+            </a:r>
+          </a:p>
+        </p:txBody>
+      </p:sp>
+      <p:sp>
+        <p:nvSpPr>
+          <p:cNvPr id="74" name="Rechteck 73">
+            <a:extLst>
+              <a:ext uri="{FF2B5EF4-FFF2-40B4-BE49-F238E27FC236}">
+                <a16:creationId xmlns:a16="http://schemas.microsoft.com/office/drawing/2014/main" id="{60BA63CA-CDAA-B55B-0A46-C06E0BFF959B}"/>
+              </a:ext>
+            </a:extLst>
+          </p:cNvPr>
+          <p:cNvSpPr/>
+          <p:nvPr/>
+        </p:nvSpPr>
+        <p:spPr>
+          <a:xfrm>
+            <a:off x="4379355" y="4663821"/>
+            <a:ext cx="573690" cy="211283"/>
+          </a:xfrm>
+          <a:prstGeom prst="rect">
+            <a:avLst/>
+          </a:prstGeom>
+          <a:noFill/>
+          <a:ln w="12700" cap="flat" cmpd="sng" algn="ctr">
+            <a:noFill/>
+            <a:prstDash val="solid"/>
+            <a:miter lim="800000"/>
+          </a:ln>
+          <a:effectLst/>
+        </p:spPr>
+        <p:txBody>
+          <a:bodyPr lIns="36000" tIns="36000" rIns="36000" bIns="36000" rtlCol="0" anchor="t"/>
+          <a:lstStyle/>
+          <a:p>
+            <a:pPr defTabSz="914400"/>
+            <a:r>
+              <a:rPr lang="de-DE" sz="800" kern="0">
+                <a:solidFill>
+                  <a:prstClr val="black"/>
+                </a:solidFill>
+                <a:latin typeface="Calibri" panose="020F0502020204030204"/>
+              </a:rPr>
+              <a:t>?</a:t>
+            </a:r>
+          </a:p>
+        </p:txBody>
+      </p:sp>
+      <p:sp>
+        <p:nvSpPr>
+          <p:cNvPr id="75" name="Rechteck 74">
+            <a:extLst>
+              <a:ext uri="{FF2B5EF4-FFF2-40B4-BE49-F238E27FC236}">
+                <a16:creationId xmlns:a16="http://schemas.microsoft.com/office/drawing/2014/main" id="{4637379A-8802-3B1A-9D98-C4146D84E565}"/>
+              </a:ext>
+            </a:extLst>
+          </p:cNvPr>
+          <p:cNvSpPr/>
+          <p:nvPr/>
+        </p:nvSpPr>
+        <p:spPr>
+          <a:xfrm>
+            <a:off x="4354488" y="5098772"/>
+            <a:ext cx="573690" cy="211283"/>
+          </a:xfrm>
+          <a:prstGeom prst="rect">
+            <a:avLst/>
+          </a:prstGeom>
+          <a:noFill/>
+          <a:ln w="12700" cap="flat" cmpd="sng" algn="ctr">
+            <a:noFill/>
+            <a:prstDash val="solid"/>
+            <a:miter lim="800000"/>
+          </a:ln>
+          <a:effectLst/>
+        </p:spPr>
+        <p:txBody>
+          <a:bodyPr lIns="36000" tIns="36000" rIns="36000" bIns="36000" rtlCol="0" anchor="t"/>
+          <a:lstStyle/>
+          <a:p>
+            <a:pPr defTabSz="914400"/>
+            <a:r>
+              <a:rPr lang="de-DE" sz="800" kern="0">
+                <a:solidFill>
+                  <a:prstClr val="black"/>
+                </a:solidFill>
+                <a:latin typeface="Calibri" panose="020F0502020204030204"/>
+              </a:rPr>
+              <a:t>?</a:t>
+            </a:r>
+          </a:p>
+        </p:txBody>
+      </p:sp>
+    </p:spTree>
+    <p:extLst>
+      <p:ext uri="{BB962C8B-B14F-4D97-AF65-F5344CB8AC3E}">
+        <p14:creationId xmlns:p14="http://schemas.microsoft.com/office/powerpoint/2010/main" val="949934280"/>
       </p:ext>
     </p:extLst>
   </p:cSld>

--- a/spec/Diagrams/InformationStructure/InformationStructure.pptx
+++ b/spec/Diagrams/InformationStructure/InformationStructure.pptx
@@ -5,11 +5,13 @@
     <p:sldMasterId id="2147483732" r:id="rId1"/>
   </p:sldMasterIdLst>
   <p:notesMasterIdLst>
-    <p:notesMasterId r:id="rId4"/>
+    <p:notesMasterId r:id="rId6"/>
   </p:notesMasterIdLst>
   <p:sldIdLst>
-    <p:sldId id="302" r:id="rId2"/>
-    <p:sldId id="303" r:id="rId3"/>
+    <p:sldId id="305" r:id="rId2"/>
+    <p:sldId id="302" r:id="rId3"/>
+    <p:sldId id="303" r:id="rId4"/>
+    <p:sldId id="304" r:id="rId5"/>
   </p:sldIdLst>
   <p:sldSz cx="23399750" cy="18000663"/>
   <p:notesSz cx="6858000" cy="9144000"/>
@@ -3340,8 +3342,8 @@
         </p:nvSpPr>
         <p:spPr>
           <a:xfrm>
-            <a:off x="1548387" y="128835"/>
-            <a:ext cx="15456877" cy="8679263"/>
+            <a:off x="5924550" y="134232"/>
+            <a:ext cx="11063135" cy="7457194"/>
           </a:xfrm>
           <a:prstGeom prst="rect">
             <a:avLst/>
@@ -3401,8 +3403,8 @@
         </p:nvSpPr>
         <p:spPr>
           <a:xfrm>
-            <a:off x="1794584" y="2341094"/>
-            <a:ext cx="14929326" cy="6219486"/>
+            <a:off x="6143624" y="2341094"/>
+            <a:ext cx="10580285" cy="5011539"/>
           </a:xfrm>
           <a:prstGeom prst="rect">
             <a:avLst/>
@@ -3462,8 +3464,8 @@
         </p:nvSpPr>
         <p:spPr>
           <a:xfrm>
-            <a:off x="3968228" y="3845387"/>
-            <a:ext cx="12482387" cy="4468144"/>
+            <a:off x="10725613" y="3845387"/>
+            <a:ext cx="5725002" cy="3283971"/>
           </a:xfrm>
           <a:prstGeom prst="rect">
             <a:avLst/>
@@ -3524,7 +3526,7 @@
         </p:nvSpPr>
         <p:spPr>
           <a:xfrm>
-            <a:off x="9580314" y="4114937"/>
+            <a:off x="11342439" y="4114937"/>
             <a:ext cx="537299" cy="445572"/>
           </a:xfrm>
           <a:prstGeom prst="roundRect">
@@ -3589,7 +3591,7 @@
         </p:nvCxnSpPr>
         <p:spPr>
           <a:xfrm>
-            <a:off x="9848964" y="4560509"/>
+            <a:off x="11611089" y="4560509"/>
             <a:ext cx="0" cy="837717"/>
           </a:xfrm>
           <a:prstGeom prst="straightConnector1">
@@ -3609,10 +3611,10 @@
       </p:cxnSp>
       <p:sp>
         <p:nvSpPr>
-          <p:cNvPr id="223" name="Abgerundetes Rechteck 89">
-            <a:extLst>
-              <a:ext uri="{FF2B5EF4-FFF2-40B4-BE49-F238E27FC236}">
-                <a16:creationId xmlns:a16="http://schemas.microsoft.com/office/drawing/2014/main" id="{044D5B40-A091-29AF-E39A-C4A69555BAD1}"/>
+          <p:cNvPr id="241" name="Rechteck 240">
+            <a:extLst>
+              <a:ext uri="{FF2B5EF4-FFF2-40B4-BE49-F238E27FC236}">
+                <a16:creationId xmlns:a16="http://schemas.microsoft.com/office/drawing/2014/main" id="{8AE67609-FF85-AA36-4EAC-A2C055DD14DD}"/>
               </a:ext>
             </a:extLst>
           </p:cNvPr>
@@ -3621,70 +3623,8 @@
         </p:nvSpPr>
         <p:spPr>
           <a:xfrm>
-            <a:off x="7150414" y="6646131"/>
-            <a:ext cx="1161453" cy="445572"/>
-          </a:xfrm>
-          <a:prstGeom prst="roundRect">
-            <a:avLst/>
-          </a:prstGeom>
-          <a:solidFill>
-            <a:srgbClr val="4472C4">
-              <a:lumMod val="60000"/>
-              <a:lumOff val="40000"/>
-            </a:srgbClr>
-          </a:solidFill>
-          <a:ln w="12700" cap="flat" cmpd="sng" algn="ctr">
-            <a:solidFill>
-              <a:srgbClr val="4472C4">
-                <a:lumMod val="75000"/>
-              </a:srgbClr>
-            </a:solidFill>
-            <a:prstDash val="solid"/>
-            <a:miter lim="800000"/>
-          </a:ln>
-          <a:effectLst>
-            <a:outerShdw blurRad="50800" dist="38100" dir="2700000" algn="tl" rotWithShape="0">
-              <a:prstClr val="black">
-                <a:alpha val="40000"/>
-              </a:prstClr>
-            </a:outerShdw>
-          </a:effectLst>
-        </p:spPr>
-        <p:txBody>
-          <a:bodyPr rtlCol="0" anchor="ctr"/>
-          <a:lstStyle/>
-          <a:p>
-            <a:pPr algn="ctr" defTabSz="914400">
-              <a:defRPr/>
-            </a:pPr>
-            <a:r>
-              <a:rPr lang="de-DE" sz="1050" kern="0">
-                <a:solidFill>
-                  <a:prstClr val="white"/>
-                </a:solidFill>
-                <a:latin typeface="Calibri" panose="020F0502020204030204"/>
-              </a:rPr>
-              <a:t>AirInterface [*]</a:t>
-            </a:r>
-          </a:p>
-        </p:txBody>
-      </p:sp>
-      <p:sp>
-        <p:nvSpPr>
-          <p:cNvPr id="232" name="Rechteck 231">
-            <a:extLst>
-              <a:ext uri="{FF2B5EF4-FFF2-40B4-BE49-F238E27FC236}">
-                <a16:creationId xmlns:a16="http://schemas.microsoft.com/office/drawing/2014/main" id="{D24AFCEE-3415-2633-C02F-42F690432881}"/>
-              </a:ext>
-            </a:extLst>
-          </p:cNvPr>
-          <p:cNvSpPr/>
-          <p:nvPr/>
-        </p:nvSpPr>
-        <p:spPr>
-          <a:xfrm>
-            <a:off x="4247720" y="6983494"/>
-            <a:ext cx="2329089" cy="1120035"/>
+            <a:off x="12847035" y="4132860"/>
+            <a:ext cx="2377663" cy="314831"/>
           </a:xfrm>
           <a:prstGeom prst="rect">
             <a:avLst/>
@@ -3713,91 +3653,7 @@
                 </a:solidFill>
                 <a:latin typeface="Calibri" panose="020F0502020204030204"/>
               </a:rPr>
-              <a:t>local-id = 0 / [local-id]</a:t>
-            </a:r>
-          </a:p>
-          <a:p>
-            <a:pPr defTabSz="914400"/>
-            <a:r>
-              <a:rPr lang="de-DE" sz="800" kern="0">
-                <a:solidFill>
-                  <a:prstClr val="black"/>
-                </a:solidFill>
-                <a:latin typeface="Calibri" panose="020F0502020204030204"/>
-              </a:rPr>
-              <a:t>upper-frequency = [planning] / [live]</a:t>
-            </a:r>
-          </a:p>
-          <a:p>
-            <a:pPr defTabSz="914400"/>
-            <a:r>
-              <a:rPr lang="de-DE" sz="800" kern="0">
-                <a:solidFill>
-                  <a:prstClr val="black"/>
-                </a:solidFill>
-                <a:latin typeface="Calibri" panose="020F0502020204030204"/>
-              </a:rPr>
-              <a:t>lower-frequency = [planning] / [live]</a:t>
-            </a:r>
-          </a:p>
-          <a:p>
-            <a:pPr defTabSz="914400"/>
-            <a:r>
-              <a:rPr lang="de-DE" sz="800" kern="0">
-                <a:solidFill>
-                  <a:prstClr val="black"/>
-                </a:solidFill>
-                <a:latin typeface="Calibri" panose="020F0502020204030204"/>
-              </a:rPr>
-              <a:t>band-position = [planning] / [live]</a:t>
-            </a:r>
-          </a:p>
-          <a:p>
-            <a:pPr defTabSz="914400"/>
-            <a:r>
-              <a:rPr lang="de-DE" sz="800" kern="0">
-                <a:solidFill>
-                  <a:prstClr val="black"/>
-                </a:solidFill>
-                <a:latin typeface="Calibri" panose="020F0502020204030204"/>
-              </a:rPr>
-              <a:t>bandwidth = [planning] / [live]</a:t>
-            </a:r>
-          </a:p>
-          <a:p>
-            <a:pPr defTabSz="914400"/>
-            <a:r>
-              <a:rPr lang="de-DE" sz="800" kern="0">
-                <a:solidFill>
-                  <a:prstClr val="black"/>
-                </a:solidFill>
-                <a:latin typeface="Calibri" panose="020F0502020204030204"/>
-              </a:rPr>
-              <a:t>minimum-modulation-scheme = [planning] / [live]</a:t>
-            </a:r>
-          </a:p>
-          <a:p>
-            <a:pPr defTabSz="914400"/>
-            <a:r>
-              <a:rPr lang="de-DE" sz="800" kern="0">
-                <a:solidFill>
-                  <a:prstClr val="black"/>
-                </a:solidFill>
-                <a:latin typeface="Calibri" panose="020F0502020204030204"/>
-              </a:rPr>
-              <a:t>maximum-modulation-scheme = [planning] / [live]</a:t>
-            </a:r>
-          </a:p>
-          <a:p>
-            <a:pPr defTabSz="914400"/>
-            <a:r>
-              <a:rPr lang="de-DE" sz="800" kern="0">
-                <a:solidFill>
-                  <a:prstClr val="black"/>
-                </a:solidFill>
-                <a:latin typeface="Calibri" panose="020F0502020204030204"/>
-              </a:rPr>
-              <a:t>clear-sky-modulation = [planning] / [live]</a:t>
+              <a:t>local-id=[mountNameA/B] / [mountName]</a:t>
             </a:r>
           </a:p>
           <a:p>
@@ -3818,37 +3674,28 @@
               <a:latin typeface="Calibri" panose="020F0502020204030204"/>
             </a:endParaRPr>
           </a:p>
-          <a:p>
-            <a:pPr defTabSz="914400"/>
-            <a:endParaRPr lang="de-DE" sz="800" kern="0" dirty="0">
-              <a:solidFill>
-                <a:prstClr val="black"/>
-              </a:solidFill>
-              <a:latin typeface="Calibri" panose="020F0502020204030204"/>
-            </a:endParaRPr>
-          </a:p>
         </p:txBody>
       </p:sp>
       <p:cxnSp>
         <p:nvCxnSpPr>
-          <p:cNvPr id="235" name="Gerade Verbindung mit Pfeil 234">
-            <a:extLst>
-              <a:ext uri="{FF2B5EF4-FFF2-40B4-BE49-F238E27FC236}">
-                <a16:creationId xmlns:a16="http://schemas.microsoft.com/office/drawing/2014/main" id="{4A5D1682-99D1-7876-EEFC-EA1180222379}"/>
+          <p:cNvPr id="242" name="Gerade Verbindung mit Pfeil 241">
+            <a:extLst>
+              <a:ext uri="{FF2B5EF4-FFF2-40B4-BE49-F238E27FC236}">
+                <a16:creationId xmlns:a16="http://schemas.microsoft.com/office/drawing/2014/main" id="{D02907C9-C5BE-29CD-04AE-14DC78D81D7F}"/>
               </a:ext>
             </a:extLst>
           </p:cNvPr>
           <p:cNvCxnSpPr>
             <a:cxnSpLocks/>
-            <a:stCxn id="223" idx="1"/>
-            <a:endCxn id="232" idx="3"/>
+            <a:stCxn id="216" idx="3"/>
+            <a:endCxn id="241" idx="1"/>
           </p:cNvCxnSpPr>
           <p:nvPr/>
         </p:nvCxnSpPr>
         <p:spPr>
-          <a:xfrm flipH="1">
-            <a:off x="6576809" y="6868917"/>
-            <a:ext cx="573605" cy="674595"/>
+          <a:xfrm flipV="1">
+            <a:off x="11879738" y="4290276"/>
+            <a:ext cx="967297" cy="47447"/>
           </a:xfrm>
           <a:prstGeom prst="straightConnector1">
             <a:avLst/>
@@ -3867,10 +3714,10 @@
       </p:cxnSp>
       <p:sp>
         <p:nvSpPr>
-          <p:cNvPr id="241" name="Rechteck 240">
-            <a:extLst>
-              <a:ext uri="{FF2B5EF4-FFF2-40B4-BE49-F238E27FC236}">
-                <a16:creationId xmlns:a16="http://schemas.microsoft.com/office/drawing/2014/main" id="{8AE67609-FF85-AA36-4EAC-A2C055DD14DD}"/>
+          <p:cNvPr id="86" name="Rechteck 85">
+            <a:extLst>
+              <a:ext uri="{FF2B5EF4-FFF2-40B4-BE49-F238E27FC236}">
+                <a16:creationId xmlns:a16="http://schemas.microsoft.com/office/drawing/2014/main" id="{4EF8BD69-F08C-B9E7-5DF2-848F27B7FE4E}"/>
               </a:ext>
             </a:extLst>
           </p:cNvPr>
@@ -3879,123 +3726,8 @@
         </p:nvSpPr>
         <p:spPr>
           <a:xfrm>
-            <a:off x="6623805" y="4114298"/>
-            <a:ext cx="2377663" cy="532766"/>
-          </a:xfrm>
-          <a:prstGeom prst="rect">
-            <a:avLst/>
-          </a:prstGeom>
-          <a:solidFill>
-            <a:sysClr val="window" lastClr="FFFFFF"/>
-          </a:solidFill>
-          <a:ln w="12700" cap="flat" cmpd="sng" algn="ctr">
-            <a:solidFill>
-              <a:srgbClr val="A5A5A5"/>
-            </a:solidFill>
-            <a:prstDash val="solid"/>
-            <a:miter lim="800000"/>
-          </a:ln>
-          <a:effectLst/>
-        </p:spPr>
-        <p:txBody>
-          <a:bodyPr lIns="36000" tIns="36000" rIns="36000" bIns="36000" rtlCol="0" anchor="t"/>
-          <a:lstStyle/>
-          <a:p>
-            <a:pPr defTabSz="914400"/>
-            <a:r>
-              <a:rPr lang="de-DE" sz="800" kern="0">
-                <a:solidFill>
-                  <a:prstClr val="black"/>
-                </a:solidFill>
-                <a:latin typeface="Calibri" panose="020F0502020204030204"/>
-              </a:rPr>
-              <a:t>local-id=[mountNameA/B]</a:t>
-            </a:r>
-          </a:p>
-          <a:p>
-            <a:pPr defTabSz="914400"/>
-            <a:r>
-              <a:rPr lang="de-DE" sz="800" kern="0">
-                <a:solidFill>
-                  <a:prstClr val="black"/>
-                </a:solidFill>
-                <a:latin typeface="Calibri" panose="020F0502020204030204"/>
-              </a:rPr>
-              <a:t>_template=[deviceTemplateName]</a:t>
-            </a:r>
-          </a:p>
-          <a:p>
-            <a:pPr defTabSz="914400"/>
-            <a:endParaRPr lang="de-DE" sz="800" kern="0">
-              <a:solidFill>
-                <a:prstClr val="black"/>
-              </a:solidFill>
-              <a:latin typeface="Calibri" panose="020F0502020204030204"/>
-            </a:endParaRPr>
-          </a:p>
-          <a:p>
-            <a:pPr defTabSz="914400"/>
-            <a:endParaRPr lang="de-DE" sz="800" kern="0">
-              <a:solidFill>
-                <a:prstClr val="black"/>
-              </a:solidFill>
-              <a:latin typeface="Calibri" panose="020F0502020204030204"/>
-            </a:endParaRPr>
-          </a:p>
-        </p:txBody>
-      </p:sp>
-      <p:cxnSp>
-        <p:nvCxnSpPr>
-          <p:cNvPr id="242" name="Gerade Verbindung mit Pfeil 241">
-            <a:extLst>
-              <a:ext uri="{FF2B5EF4-FFF2-40B4-BE49-F238E27FC236}">
-                <a16:creationId xmlns:a16="http://schemas.microsoft.com/office/drawing/2014/main" id="{D02907C9-C5BE-29CD-04AE-14DC78D81D7F}"/>
-              </a:ext>
-            </a:extLst>
-          </p:cNvPr>
-          <p:cNvCxnSpPr>
-            <a:cxnSpLocks/>
-            <a:stCxn id="216" idx="1"/>
-            <a:endCxn id="241" idx="3"/>
-          </p:cNvCxnSpPr>
-          <p:nvPr/>
-        </p:nvCxnSpPr>
-        <p:spPr>
-          <a:xfrm flipH="1">
-            <a:off x="9001468" y="4337723"/>
-            <a:ext cx="578846" cy="42958"/>
-          </a:xfrm>
-          <a:prstGeom prst="straightConnector1">
-            <a:avLst/>
-          </a:prstGeom>
-          <a:noFill/>
-          <a:ln w="6350" cap="flat" cmpd="sng" algn="ctr">
-            <a:solidFill>
-              <a:srgbClr val="5B9BD5"/>
-            </a:solidFill>
-            <a:prstDash val="solid"/>
-            <a:miter lim="800000"/>
-            <a:tailEnd type="triangle"/>
-          </a:ln>
-          <a:effectLst/>
-        </p:spPr>
-      </p:cxnSp>
-      <p:sp>
-        <p:nvSpPr>
-          <p:cNvPr id="86" name="Rechteck 85">
-            <a:extLst>
-              <a:ext uri="{FF2B5EF4-FFF2-40B4-BE49-F238E27FC236}">
-                <a16:creationId xmlns:a16="http://schemas.microsoft.com/office/drawing/2014/main" id="{4EF8BD69-F08C-B9E7-5DF2-848F27B7FE4E}"/>
-              </a:ext>
-            </a:extLst>
-          </p:cNvPr>
-          <p:cNvSpPr/>
-          <p:nvPr/>
-        </p:nvSpPr>
-        <p:spPr>
-          <a:xfrm>
-            <a:off x="2037390" y="3850254"/>
-            <a:ext cx="1930625" cy="4465071"/>
+            <a:off x="6352215" y="3850254"/>
+            <a:ext cx="4363197" cy="3283971"/>
           </a:xfrm>
           <a:prstGeom prst="rect">
             <a:avLst/>
@@ -4055,7 +3787,7 @@
         </p:nvSpPr>
         <p:spPr>
           <a:xfrm>
-            <a:off x="2196046" y="4120024"/>
+            <a:off x="9236356" y="4290276"/>
             <a:ext cx="537299" cy="445572"/>
           </a:xfrm>
           <a:prstGeom prst="roundRect">
@@ -4122,7 +3854,7 @@
         </p:nvSpPr>
         <p:spPr>
           <a:xfrm>
-            <a:off x="2117173" y="5374551"/>
+            <a:off x="6601216" y="4274533"/>
             <a:ext cx="1756328" cy="527420"/>
           </a:xfrm>
           <a:prstGeom prst="rect">
@@ -4152,7 +3884,7 @@
                 </a:solidFill>
                 <a:latin typeface="Calibri" panose="020F0502020204030204"/>
               </a:rPr>
-              <a:t>local-id=[LinkId] / [uuid]</a:t>
+              <a:t>local-id=[LinkId] / [local-id]</a:t>
             </a:r>
           </a:p>
           <a:p>
@@ -4164,7 +3896,7 @@
                 </a:solidFill>
                 <a:latin typeface="Calibri" panose="020F0502020204030204"/>
               </a:rPr>
-              <a:t>linktp*[{#n,_cc,_ltp,_lp}]</a:t>
+              <a:t>linktp[2] : [{local-id,_cc,_ltp}]</a:t>
             </a:r>
           </a:p>
           <a:p>
@@ -4176,7 +3908,7 @@
                 </a:solidFill>
                 <a:latin typeface="Calibri" panose="020F0502020204030204"/>
               </a:rPr>
-              <a:t>candidate-score = [1] / [candidateScore]</a:t>
+              <a:t>scores : [ { [LinkID],[candidateScore] } ]</a:t>
             </a:r>
           </a:p>
           <a:p>
@@ -4201,15 +3933,15 @@
           </p:cNvPr>
           <p:cNvCxnSpPr>
             <a:cxnSpLocks/>
-            <a:stCxn id="87" idx="2"/>
-            <a:endCxn id="93" idx="0"/>
+            <a:stCxn id="87" idx="1"/>
+            <a:endCxn id="93" idx="3"/>
           </p:cNvCxnSpPr>
           <p:nvPr/>
         </p:nvCxnSpPr>
         <p:spPr>
-          <a:xfrm>
-            <a:off x="2464696" y="4565596"/>
-            <a:ext cx="530641" cy="808955"/>
+          <a:xfrm flipH="1">
+            <a:off x="8357544" y="4513062"/>
+            <a:ext cx="878812" cy="25181"/>
           </a:xfrm>
           <a:prstGeom prst="straightConnector1">
             <a:avLst/>
@@ -4238,14 +3970,14 @@
           <p:cNvCxnSpPr>
             <a:cxnSpLocks/>
             <a:stCxn id="87" idx="2"/>
-            <a:endCxn id="223" idx="1"/>
+            <a:endCxn id="25" idx="1"/>
           </p:cNvCxnSpPr>
           <p:nvPr/>
         </p:nvCxnSpPr>
         <p:spPr>
           <a:xfrm>
-            <a:off x="2464696" y="4565596"/>
-            <a:ext cx="4685718" cy="2303321"/>
+            <a:off x="9505006" y="4735848"/>
+            <a:ext cx="1837433" cy="885164"/>
           </a:xfrm>
           <a:prstGeom prst="straightConnector1">
             <a:avLst/>
@@ -4276,7 +4008,7 @@
         </p:nvSpPr>
         <p:spPr>
           <a:xfrm>
-            <a:off x="9580315" y="2555173"/>
+            <a:off x="11342440" y="2555173"/>
             <a:ext cx="537299" cy="445572"/>
           </a:xfrm>
           <a:prstGeom prst="roundRect">
@@ -4329,50 +4061,12 @@
           </a:p>
         </p:txBody>
       </p:sp>
-      <p:cxnSp>
-        <p:nvCxnSpPr>
-          <p:cNvPr id="252" name="Verbinder: gewinkelt 251">
-            <a:extLst>
-              <a:ext uri="{FF2B5EF4-FFF2-40B4-BE49-F238E27FC236}">
-                <a16:creationId xmlns:a16="http://schemas.microsoft.com/office/drawing/2014/main" id="{7B4D9739-6606-A338-2C87-5405BC25C7D6}"/>
-              </a:ext>
-            </a:extLst>
-          </p:cNvPr>
-          <p:cNvCxnSpPr>
-            <a:cxnSpLocks/>
-            <a:stCxn id="216" idx="2"/>
-            <a:endCxn id="70" idx="0"/>
-          </p:cNvCxnSpPr>
-          <p:nvPr/>
-        </p:nvCxnSpPr>
-        <p:spPr>
-          <a:xfrm rot="16200000" flipH="1">
-            <a:off x="9998533" y="4410939"/>
-            <a:ext cx="846183" cy="1145321"/>
-          </a:xfrm>
-          <a:prstGeom prst="bentConnector3">
-            <a:avLst>
-              <a:gd name="adj1" fmla="val 50000"/>
-            </a:avLst>
-          </a:prstGeom>
-          <a:noFill/>
-          <a:ln w="6350" cap="flat" cmpd="sng" algn="ctr">
-            <a:solidFill>
-              <a:srgbClr val="5B9BD5"/>
-            </a:solidFill>
-            <a:prstDash val="solid"/>
-            <a:miter lim="800000"/>
-            <a:tailEnd type="triangle"/>
-          </a:ln>
-          <a:effectLst/>
-        </p:spPr>
-      </p:cxnSp>
-      <p:sp>
-        <p:nvSpPr>
-          <p:cNvPr id="293" name="Ellipse 292">
-            <a:extLst>
-              <a:ext uri="{FF2B5EF4-FFF2-40B4-BE49-F238E27FC236}">
-                <a16:creationId xmlns:a16="http://schemas.microsoft.com/office/drawing/2014/main" id="{A96271CD-4392-8057-D43D-25709C941E70}"/>
+      <p:sp>
+        <p:nvSpPr>
+          <p:cNvPr id="49" name="Rechteck 48">
+            <a:extLst>
+              <a:ext uri="{FF2B5EF4-FFF2-40B4-BE49-F238E27FC236}">
+                <a16:creationId xmlns:a16="http://schemas.microsoft.com/office/drawing/2014/main" id="{B9D40B9E-07E7-DA55-A483-1F59E59377DD}"/>
               </a:ext>
             </a:extLst>
           </p:cNvPr>
@@ -4381,54 +4075,7 @@
         </p:nvSpPr>
         <p:spPr>
           <a:xfrm>
-            <a:off x="7171533" y="6665426"/>
-            <a:ext cx="45719" cy="45719"/>
-          </a:xfrm>
-          <a:prstGeom prst="ellipse">
-            <a:avLst/>
-          </a:prstGeom>
-          <a:solidFill>
-            <a:srgbClr val="4472C4">
-              <a:lumMod val="60000"/>
-              <a:lumOff val="40000"/>
-            </a:srgbClr>
-          </a:solidFill>
-          <a:ln w="12700" cap="flat" cmpd="sng" algn="ctr">
-            <a:noFill/>
-            <a:prstDash val="solid"/>
-            <a:miter lim="800000"/>
-          </a:ln>
-          <a:effectLst/>
-        </p:spPr>
-        <p:txBody>
-          <a:bodyPr rtlCol="0" anchor="ctr"/>
-          <a:lstStyle/>
-          <a:p>
-            <a:pPr algn="ctr" defTabSz="914400"/>
-            <a:endParaRPr lang="de-DE" sz="1050" kern="0">
-              <a:solidFill>
-                <a:prstClr val="white"/>
-              </a:solidFill>
-              <a:latin typeface="Calibri" panose="020F0502020204030204"/>
-            </a:endParaRPr>
-          </a:p>
-        </p:txBody>
-      </p:sp>
-      <p:sp>
-        <p:nvSpPr>
-          <p:cNvPr id="49" name="Rechteck 48">
-            <a:extLst>
-              <a:ext uri="{FF2B5EF4-FFF2-40B4-BE49-F238E27FC236}">
-                <a16:creationId xmlns:a16="http://schemas.microsoft.com/office/drawing/2014/main" id="{B9D40B9E-07E7-DA55-A483-1F59E59377DD}"/>
-              </a:ext>
-            </a:extLst>
-          </p:cNvPr>
-          <p:cNvSpPr/>
-          <p:nvPr/>
-        </p:nvSpPr>
-        <p:spPr>
-          <a:xfrm>
-            <a:off x="11084910" y="2596282"/>
+            <a:off x="12847035" y="2596282"/>
             <a:ext cx="1685583" cy="336074"/>
           </a:xfrm>
           <a:prstGeom prst="rect">
@@ -4481,7 +4128,7 @@
         </p:nvCxnSpPr>
         <p:spPr>
           <a:xfrm flipV="1">
-            <a:off x="10117614" y="2764319"/>
+            <a:off x="11879739" y="2764319"/>
             <a:ext cx="967296" cy="13640"/>
           </a:xfrm>
           <a:prstGeom prst="straightConnector1">
@@ -4513,8 +4160,8 @@
         </p:nvSpPr>
         <p:spPr>
           <a:xfrm>
-            <a:off x="6623806" y="5230671"/>
-            <a:ext cx="2377664" cy="872700"/>
+            <a:off x="12847034" y="4621572"/>
+            <a:ext cx="2377664" cy="2092191"/>
           </a:xfrm>
           <a:prstGeom prst="rect">
             <a:avLst/>
@@ -4543,11 +4190,20 @@
                 </a:solidFill>
                 <a:latin typeface="Calibri" panose="020F0502020204030204"/>
               </a:rPr>
-              <a:t>local-id = [LinkId] / [airInterfaceUuid]</a:t>
+              <a:t>local-id = [local-id] / [airInterfaceUuid]</a:t>
             </a:r>
           </a:p>
           <a:p>
             <a:pPr defTabSz="914400"/>
+            <a:endParaRPr lang="de-DE" sz="800" kern="0">
+              <a:solidFill>
+                <a:prstClr val="black"/>
+              </a:solidFill>
+              <a:latin typeface="Calibri" panose="020F0502020204030204"/>
+            </a:endParaRPr>
+          </a:p>
+          <a:p>
+            <a:pPr defTabSz="914400"/>
             <a:r>
               <a:rPr lang="de-DE" sz="800" kern="0">
                 <a:solidFill>
@@ -4555,11 +4211,20 @@
                 </a:solidFill>
                 <a:latin typeface="Calibri" panose="020F0502020204030204"/>
               </a:rPr>
-              <a:t>external-label = [LinkId] / [externalLabel]</a:t>
+              <a:t>external-label = [calculatedLinkId] / [externalLabel]</a:t>
             </a:r>
           </a:p>
           <a:p>
             <a:pPr defTabSz="914400"/>
+            <a:endParaRPr lang="de-DE" sz="800" kern="0">
+              <a:solidFill>
+                <a:prstClr val="black"/>
+              </a:solidFill>
+              <a:latin typeface="Calibri" panose="020F0502020204030204"/>
+            </a:endParaRPr>
+          </a:p>
+          <a:p>
+            <a:pPr defTabSz="914400"/>
             <a:r>
               <a:rPr lang="de-DE" sz="800" kern="0">
                 <a:solidFill>
@@ -4567,7 +4232,7 @@
                 </a:solidFill>
                 <a:latin typeface="Calibri" panose="020F0502020204030204"/>
               </a:rPr>
-              <a:t>reliability-score = [ofInputData] / [ofConfiguredValue]</a:t>
+              <a:t>upper-frequency = [planning] / [live]</a:t>
             </a:r>
           </a:p>
           <a:p>
@@ -4579,7 +4244,7 @@
                 </a:solidFill>
                 <a:latin typeface="Calibri" panose="020F0502020204030204"/>
               </a:rPr>
-              <a:t>_equipment[*] = local-id</a:t>
+              <a:t>lower-frequency = [planning] / [live]</a:t>
             </a:r>
           </a:p>
           <a:p>
@@ -4591,8 +4256,113 @@
                 </a:solidFill>
                 <a:latin typeface="Calibri" panose="020F0502020204030204"/>
               </a:rPr>
-              <a:t>_connector = local-id</a:t>
-            </a:r>
+              <a:t>band-position = [planning] / [live]</a:t>
+            </a:r>
+          </a:p>
+          <a:p>
+            <a:pPr defTabSz="914400"/>
+            <a:r>
+              <a:rPr lang="de-DE" sz="800" kern="0">
+                <a:solidFill>
+                  <a:prstClr val="black"/>
+                </a:solidFill>
+                <a:latin typeface="Calibri" panose="020F0502020204030204"/>
+              </a:rPr>
+              <a:t>bandwidth = [planning] / [live]</a:t>
+            </a:r>
+          </a:p>
+          <a:p>
+            <a:pPr defTabSz="914400"/>
+            <a:r>
+              <a:rPr lang="de-DE" sz="800" kern="0">
+                <a:solidFill>
+                  <a:prstClr val="black"/>
+                </a:solidFill>
+                <a:latin typeface="Calibri" panose="020F0502020204030204"/>
+              </a:rPr>
+              <a:t>minimum-modulation-scheme = [planning] / [live]</a:t>
+            </a:r>
+          </a:p>
+          <a:p>
+            <a:pPr defTabSz="914400"/>
+            <a:r>
+              <a:rPr lang="de-DE" sz="800" kern="0">
+                <a:solidFill>
+                  <a:prstClr val="black"/>
+                </a:solidFill>
+                <a:latin typeface="Calibri" panose="020F0502020204030204"/>
+              </a:rPr>
+              <a:t>maximum-modulation-scheme = [planning] / [live]</a:t>
+            </a:r>
+          </a:p>
+          <a:p>
+            <a:pPr defTabSz="914400"/>
+            <a:r>
+              <a:rPr lang="de-DE" sz="800" kern="0">
+                <a:solidFill>
+                  <a:prstClr val="black"/>
+                </a:solidFill>
+                <a:latin typeface="Calibri" panose="020F0502020204030204"/>
+              </a:rPr>
+              <a:t>clear-sky-modulation = [planning] / [live]</a:t>
+            </a:r>
+          </a:p>
+          <a:p>
+            <a:pPr defTabSz="914400"/>
+            <a:r>
+              <a:rPr lang="de-DE" sz="800" kern="0">
+                <a:solidFill>
+                  <a:prstClr val="black"/>
+                </a:solidFill>
+                <a:latin typeface="Calibri" panose="020F0502020204030204"/>
+              </a:rPr>
+              <a:t>slotName = [cardSlot] / [???]</a:t>
+            </a:r>
+          </a:p>
+          <a:p>
+            <a:pPr defTabSz="914400"/>
+            <a:r>
+              <a:rPr lang="de-DE" sz="800" kern="0">
+                <a:solidFill>
+                  <a:prstClr val="black"/>
+                </a:solidFill>
+                <a:latin typeface="Calibri" panose="020F0502020204030204"/>
+              </a:rPr>
+              <a:t>modemName = [modemCard] / [???]</a:t>
+            </a:r>
+          </a:p>
+          <a:p>
+            <a:pPr defTabSz="914400"/>
+            <a:r>
+              <a:rPr lang="de-DE" sz="800" kern="0">
+                <a:solidFill>
+                  <a:prstClr val="black"/>
+                </a:solidFill>
+                <a:latin typeface="Calibri" panose="020F0502020204030204"/>
+              </a:rPr>
+              <a:t>connectorName = [accessPort] / [???]</a:t>
+            </a:r>
+          </a:p>
+          <a:p>
+            <a:pPr defTabSz="914400"/>
+            <a:r>
+              <a:rPr lang="de-DE" sz="800" kern="0">
+                <a:solidFill>
+                  <a:prstClr val="black"/>
+                </a:solidFill>
+                <a:latin typeface="Calibri" panose="020F0502020204030204"/>
+              </a:rPr>
+              <a:t>oduName = [oduProductCode] / [???]</a:t>
+            </a:r>
+          </a:p>
+          <a:p>
+            <a:pPr defTabSz="914400"/>
+            <a:endParaRPr lang="de-DE" sz="800" kern="0">
+              <a:solidFill>
+                <a:prstClr val="black"/>
+              </a:solidFill>
+              <a:latin typeface="Calibri" panose="020F0502020204030204"/>
+            </a:endParaRPr>
           </a:p>
         </p:txBody>
       </p:sp>
@@ -4610,7 +4380,7 @@
         </p:nvSpPr>
         <p:spPr>
           <a:xfrm>
-            <a:off x="9580314" y="5398226"/>
+            <a:off x="11342439" y="5398226"/>
             <a:ext cx="537299" cy="445572"/>
           </a:xfrm>
           <a:prstGeom prst="roundRect">
@@ -4657,12 +4427,48 @@
           </a:p>
         </p:txBody>
       </p:sp>
-      <p:sp>
-        <p:nvSpPr>
-          <p:cNvPr id="35" name="Abgerundetes Rechteck 3">
-            <a:extLst>
-              <a:ext uri="{FF2B5EF4-FFF2-40B4-BE49-F238E27FC236}">
-                <a16:creationId xmlns:a16="http://schemas.microsoft.com/office/drawing/2014/main" id="{F7D26EA4-96A3-0DFE-F516-71C0AAAE8061}"/>
+      <p:cxnSp>
+        <p:nvCxnSpPr>
+          <p:cNvPr id="54" name="Gerade Verbindung mit Pfeil 53">
+            <a:extLst>
+              <a:ext uri="{FF2B5EF4-FFF2-40B4-BE49-F238E27FC236}">
+                <a16:creationId xmlns:a16="http://schemas.microsoft.com/office/drawing/2014/main" id="{0D67C123-0516-88EF-34E3-FD36957D0983}"/>
+              </a:ext>
+            </a:extLst>
+          </p:cNvPr>
+          <p:cNvCxnSpPr>
+            <a:cxnSpLocks/>
+            <a:stCxn id="25" idx="3"/>
+            <a:endCxn id="14" idx="1"/>
+          </p:cNvCxnSpPr>
+          <p:nvPr/>
+        </p:nvCxnSpPr>
+        <p:spPr>
+          <a:xfrm>
+            <a:off x="11879738" y="5621012"/>
+            <a:ext cx="967296" cy="46656"/>
+          </a:xfrm>
+          <a:prstGeom prst="straightConnector1">
+            <a:avLst/>
+          </a:prstGeom>
+          <a:noFill/>
+          <a:ln w="6350" cap="flat" cmpd="sng" algn="ctr">
+            <a:solidFill>
+              <a:srgbClr val="5B9BD5"/>
+            </a:solidFill>
+            <a:prstDash val="solid"/>
+            <a:miter lim="800000"/>
+            <a:tailEnd type="triangle"/>
+          </a:ln>
+          <a:effectLst/>
+        </p:spPr>
+      </p:cxnSp>
+      <p:sp>
+        <p:nvSpPr>
+          <p:cNvPr id="175" name="Abgerundetes Rechteck 1">
+            <a:extLst>
+              <a:ext uri="{FF2B5EF4-FFF2-40B4-BE49-F238E27FC236}">
+                <a16:creationId xmlns:a16="http://schemas.microsoft.com/office/drawing/2014/main" id="{1248D903-9440-2321-354B-14170C2F2A21}"/>
               </a:ext>
             </a:extLst>
           </p:cNvPr>
@@ -4671,7 +4477,7 @@
         </p:nvSpPr>
         <p:spPr>
           <a:xfrm>
-            <a:off x="9580314" y="6646131"/>
+            <a:off x="11342439" y="316695"/>
             <a:ext cx="537299" cy="445572"/>
           </a:xfrm>
           <a:prstGeom prst="roundRect">
@@ -4713,31 +4519,37 @@
                 </a:solidFill>
                 <a:latin typeface="Calibri" panose="020F0502020204030204"/>
               </a:rPr>
-              <a:t>LP</a:t>
-            </a:r>
+              <a:t>DC</a:t>
+            </a:r>
+            <a:endParaRPr lang="de-DE" sz="1050" kern="0" dirty="0">
+              <a:solidFill>
+                <a:prstClr val="white"/>
+              </a:solidFill>
+              <a:latin typeface="Calibri" panose="020F0502020204030204"/>
+            </a:endParaRPr>
           </a:p>
         </p:txBody>
       </p:sp>
       <p:cxnSp>
         <p:nvCxnSpPr>
-          <p:cNvPr id="46" name="Gerade Verbindung mit Pfeil 45">
-            <a:extLst>
-              <a:ext uri="{FF2B5EF4-FFF2-40B4-BE49-F238E27FC236}">
-                <a16:creationId xmlns:a16="http://schemas.microsoft.com/office/drawing/2014/main" id="{8E9FC093-1E1D-AFB8-EDA1-74BB30C0EC74}"/>
+          <p:cNvPr id="176" name="Gerade Verbindung mit Pfeil 175">
+            <a:extLst>
+              <a:ext uri="{FF2B5EF4-FFF2-40B4-BE49-F238E27FC236}">
+                <a16:creationId xmlns:a16="http://schemas.microsoft.com/office/drawing/2014/main" id="{DD5C7406-3C7F-347B-3FAF-7F90934EFE1D}"/>
               </a:ext>
             </a:extLst>
           </p:cNvPr>
           <p:cNvCxnSpPr>
             <a:cxnSpLocks/>
-            <a:stCxn id="25" idx="2"/>
-            <a:endCxn id="35" idx="0"/>
+            <a:stCxn id="175" idx="2"/>
+            <a:endCxn id="117" idx="0"/>
           </p:cNvCxnSpPr>
           <p:nvPr/>
         </p:nvCxnSpPr>
         <p:spPr>
           <a:xfrm>
-            <a:off x="9848964" y="5843798"/>
-            <a:ext cx="0" cy="802333"/>
+            <a:off x="11611089" y="762267"/>
+            <a:ext cx="1" cy="1792906"/>
           </a:xfrm>
           <a:prstGeom prst="straightConnector1">
             <a:avLst/>
@@ -4754,84 +4566,12 @@
           <a:effectLst/>
         </p:spPr>
       </p:cxnSp>
-      <p:cxnSp>
-        <p:nvCxnSpPr>
-          <p:cNvPr id="47" name="Gerade Verbindung mit Pfeil 46">
-            <a:extLst>
-              <a:ext uri="{FF2B5EF4-FFF2-40B4-BE49-F238E27FC236}">
-                <a16:creationId xmlns:a16="http://schemas.microsoft.com/office/drawing/2014/main" id="{EDAA76C0-8B20-2581-751D-97C11B18D597}"/>
-              </a:ext>
-            </a:extLst>
-          </p:cNvPr>
-          <p:cNvCxnSpPr>
-            <a:cxnSpLocks/>
-            <a:stCxn id="223" idx="3"/>
-            <a:endCxn id="35" idx="1"/>
-          </p:cNvCxnSpPr>
-          <p:nvPr/>
-        </p:nvCxnSpPr>
-        <p:spPr>
-          <a:xfrm>
-            <a:off x="8311867" y="6868917"/>
-            <a:ext cx="1268447" cy="0"/>
-          </a:xfrm>
-          <a:prstGeom prst="straightConnector1">
-            <a:avLst/>
-          </a:prstGeom>
-          <a:noFill/>
-          <a:ln w="6350" cap="flat" cmpd="sng" algn="ctr">
-            <a:solidFill>
-              <a:srgbClr val="5B9BD5"/>
-            </a:solidFill>
-            <a:prstDash val="dash"/>
-            <a:miter lim="800000"/>
-            <a:tailEnd type="triangle"/>
-          </a:ln>
-          <a:effectLst/>
-        </p:spPr>
-      </p:cxnSp>
-      <p:cxnSp>
-        <p:nvCxnSpPr>
-          <p:cNvPr id="54" name="Gerade Verbindung mit Pfeil 53">
-            <a:extLst>
-              <a:ext uri="{FF2B5EF4-FFF2-40B4-BE49-F238E27FC236}">
-                <a16:creationId xmlns:a16="http://schemas.microsoft.com/office/drawing/2014/main" id="{0D67C123-0516-88EF-34E3-FD36957D0983}"/>
-              </a:ext>
-            </a:extLst>
-          </p:cNvPr>
-          <p:cNvCxnSpPr>
-            <a:cxnSpLocks/>
-            <a:stCxn id="25" idx="1"/>
-            <a:endCxn id="14" idx="3"/>
-          </p:cNvCxnSpPr>
-          <p:nvPr/>
-        </p:nvCxnSpPr>
-        <p:spPr>
-          <a:xfrm flipH="1">
-            <a:off x="9001470" y="5621012"/>
-            <a:ext cx="578844" cy="46009"/>
-          </a:xfrm>
-          <a:prstGeom prst="straightConnector1">
-            <a:avLst/>
-          </a:prstGeom>
-          <a:noFill/>
-          <a:ln w="6350" cap="flat" cmpd="sng" algn="ctr">
-            <a:solidFill>
-              <a:srgbClr val="5B9BD5"/>
-            </a:solidFill>
-            <a:prstDash val="solid"/>
-            <a:miter lim="800000"/>
-            <a:tailEnd type="triangle"/>
-          </a:ln>
-          <a:effectLst/>
-        </p:spPr>
-      </p:cxnSp>
-      <p:sp>
-        <p:nvSpPr>
-          <p:cNvPr id="175" name="Abgerundetes Rechteck 1">
-            <a:extLst>
-              <a:ext uri="{FF2B5EF4-FFF2-40B4-BE49-F238E27FC236}">
-                <a16:creationId xmlns:a16="http://schemas.microsoft.com/office/drawing/2014/main" id="{1248D903-9440-2321-354B-14170C2F2A21}"/>
+      <p:sp>
+        <p:nvSpPr>
+          <p:cNvPr id="191" name="Abgerundetes Rechteck 1">
+            <a:extLst>
+              <a:ext uri="{FF2B5EF4-FFF2-40B4-BE49-F238E27FC236}">
+                <a16:creationId xmlns:a16="http://schemas.microsoft.com/office/drawing/2014/main" id="{44E48014-242B-1327-6AB6-2553D28DAC32}"/>
               </a:ext>
             </a:extLst>
           </p:cNvPr>
@@ -4840,7 +4580,7 @@
         </p:nvSpPr>
         <p:spPr>
           <a:xfrm>
-            <a:off x="9580314" y="316695"/>
+            <a:off x="12491734" y="316954"/>
             <a:ext cx="537299" cy="445572"/>
           </a:xfrm>
           <a:prstGeom prst="roundRect">
@@ -4882,7 +4622,7 @@
                 </a:solidFill>
                 <a:latin typeface="Calibri" panose="020F0502020204030204"/>
               </a:rPr>
-              <a:t>DC</a:t>
+              <a:t>AP</a:t>
             </a:r>
             <a:endParaRPr lang="de-DE" sz="1050" kern="0" dirty="0">
               <a:solidFill>
@@ -4893,48 +4633,12 @@
           </a:p>
         </p:txBody>
       </p:sp>
-      <p:cxnSp>
-        <p:nvCxnSpPr>
-          <p:cNvPr id="176" name="Gerade Verbindung mit Pfeil 175">
-            <a:extLst>
-              <a:ext uri="{FF2B5EF4-FFF2-40B4-BE49-F238E27FC236}">
-                <a16:creationId xmlns:a16="http://schemas.microsoft.com/office/drawing/2014/main" id="{DD5C7406-3C7F-347B-3FAF-7F90934EFE1D}"/>
-              </a:ext>
-            </a:extLst>
-          </p:cNvPr>
-          <p:cNvCxnSpPr>
-            <a:cxnSpLocks/>
-            <a:stCxn id="175" idx="2"/>
-            <a:endCxn id="117" idx="0"/>
-          </p:cNvCxnSpPr>
-          <p:nvPr/>
-        </p:nvCxnSpPr>
-        <p:spPr>
-          <a:xfrm>
-            <a:off x="9848964" y="762267"/>
-            <a:ext cx="1" cy="1792906"/>
-          </a:xfrm>
-          <a:prstGeom prst="straightConnector1">
-            <a:avLst/>
-          </a:prstGeom>
-          <a:noFill/>
-          <a:ln w="6350" cap="flat" cmpd="sng" algn="ctr">
-            <a:solidFill>
-              <a:srgbClr val="5B9BD5"/>
-            </a:solidFill>
-            <a:prstDash val="solid"/>
-            <a:miter lim="800000"/>
-            <a:tailEnd type="triangle"/>
-          </a:ln>
-          <a:effectLst/>
-        </p:spPr>
-      </p:cxnSp>
-      <p:sp>
-        <p:nvSpPr>
-          <p:cNvPr id="191" name="Abgerundetes Rechteck 1">
-            <a:extLst>
-              <a:ext uri="{FF2B5EF4-FFF2-40B4-BE49-F238E27FC236}">
-                <a16:creationId xmlns:a16="http://schemas.microsoft.com/office/drawing/2014/main" id="{44E48014-242B-1327-6AB6-2553D28DAC32}"/>
+      <p:sp>
+        <p:nvSpPr>
+          <p:cNvPr id="192" name="Abgerundetes Rechteck 1">
+            <a:extLst>
+              <a:ext uri="{FF2B5EF4-FFF2-40B4-BE49-F238E27FC236}">
+                <a16:creationId xmlns:a16="http://schemas.microsoft.com/office/drawing/2014/main" id="{BF0C2F74-F3BA-292A-B365-41FC81CF7E1E}"/>
               </a:ext>
             </a:extLst>
           </p:cNvPr>
@@ -4943,7 +4647,7 @@
         </p:nvSpPr>
         <p:spPr>
           <a:xfrm>
-            <a:off x="10729609" y="316954"/>
+            <a:off x="12490301" y="1132869"/>
             <a:ext cx="537299" cy="445572"/>
           </a:xfrm>
           <a:prstGeom prst="roundRect">
@@ -4985,7 +4689,7 @@
                 </a:solidFill>
                 <a:latin typeface="Calibri" panose="020F0502020204030204"/>
               </a:rPr>
-              <a:t>AP</a:t>
+              <a:t>CA</a:t>
             </a:r>
             <a:endParaRPr lang="de-DE" sz="1050" kern="0" dirty="0">
               <a:solidFill>
@@ -4996,12 +4700,84 @@
           </a:p>
         </p:txBody>
       </p:sp>
-      <p:sp>
-        <p:nvSpPr>
-          <p:cNvPr id="192" name="Abgerundetes Rechteck 1">
-            <a:extLst>
-              <a:ext uri="{FF2B5EF4-FFF2-40B4-BE49-F238E27FC236}">
-                <a16:creationId xmlns:a16="http://schemas.microsoft.com/office/drawing/2014/main" id="{BF0C2F74-F3BA-292A-B365-41FC81CF7E1E}"/>
+      <p:cxnSp>
+        <p:nvCxnSpPr>
+          <p:cNvPr id="193" name="Gerade Verbindung mit Pfeil 192">
+            <a:extLst>
+              <a:ext uri="{FF2B5EF4-FFF2-40B4-BE49-F238E27FC236}">
+                <a16:creationId xmlns:a16="http://schemas.microsoft.com/office/drawing/2014/main" id="{57DF4D2C-9B0B-A33B-2C76-40E5450EAEF7}"/>
+              </a:ext>
+            </a:extLst>
+          </p:cNvPr>
+          <p:cNvCxnSpPr>
+            <a:cxnSpLocks/>
+            <a:stCxn id="175" idx="3"/>
+            <a:endCxn id="191" idx="1"/>
+          </p:cNvCxnSpPr>
+          <p:nvPr/>
+        </p:nvCxnSpPr>
+        <p:spPr>
+          <a:xfrm>
+            <a:off x="11879738" y="539481"/>
+            <a:ext cx="611996" cy="259"/>
+          </a:xfrm>
+          <a:prstGeom prst="straightConnector1">
+            <a:avLst/>
+          </a:prstGeom>
+          <a:noFill/>
+          <a:ln w="6350" cap="flat" cmpd="sng" algn="ctr">
+            <a:solidFill>
+              <a:srgbClr val="5B9BD5"/>
+            </a:solidFill>
+            <a:prstDash val="solid"/>
+            <a:miter lim="800000"/>
+            <a:tailEnd type="triangle"/>
+          </a:ln>
+          <a:effectLst/>
+        </p:spPr>
+      </p:cxnSp>
+      <p:cxnSp>
+        <p:nvCxnSpPr>
+          <p:cNvPr id="196" name="Gerade Verbindung mit Pfeil 195">
+            <a:extLst>
+              <a:ext uri="{FF2B5EF4-FFF2-40B4-BE49-F238E27FC236}">
+                <a16:creationId xmlns:a16="http://schemas.microsoft.com/office/drawing/2014/main" id="{65958A75-08CD-E777-02D1-45615CF0D213}"/>
+              </a:ext>
+            </a:extLst>
+          </p:cNvPr>
+          <p:cNvCxnSpPr>
+            <a:cxnSpLocks/>
+            <a:stCxn id="191" idx="2"/>
+            <a:endCxn id="192" idx="0"/>
+          </p:cNvCxnSpPr>
+          <p:nvPr/>
+        </p:nvCxnSpPr>
+        <p:spPr>
+          <a:xfrm flipH="1">
+            <a:off x="12758951" y="762526"/>
+            <a:ext cx="1433" cy="370343"/>
+          </a:xfrm>
+          <a:prstGeom prst="straightConnector1">
+            <a:avLst/>
+          </a:prstGeom>
+          <a:noFill/>
+          <a:ln w="6350" cap="flat" cmpd="sng" algn="ctr">
+            <a:solidFill>
+              <a:srgbClr val="5B9BD5"/>
+            </a:solidFill>
+            <a:prstDash val="solid"/>
+            <a:miter lim="800000"/>
+            <a:tailEnd type="triangle"/>
+          </a:ln>
+          <a:effectLst/>
+        </p:spPr>
+      </p:cxnSp>
+      <p:sp>
+        <p:nvSpPr>
+          <p:cNvPr id="165" name="Abgerundetes Rechteck 1">
+            <a:extLst>
+              <a:ext uri="{FF2B5EF4-FFF2-40B4-BE49-F238E27FC236}">
+                <a16:creationId xmlns:a16="http://schemas.microsoft.com/office/drawing/2014/main" id="{D682A02F-6CC5-4B5C-BEFE-2A698F693375}"/>
               </a:ext>
             </a:extLst>
           </p:cNvPr>
@@ -5010,7 +4786,7 @@
         </p:nvSpPr>
         <p:spPr>
           <a:xfrm>
-            <a:off x="10728176" y="1132869"/>
+            <a:off x="10188314" y="317362"/>
             <a:ext cx="537299" cy="445572"/>
           </a:xfrm>
           <a:prstGeom prst="roundRect">
@@ -5052,7 +4828,7 @@
                 </a:solidFill>
                 <a:latin typeface="Calibri" panose="020F0502020204030204"/>
               </a:rPr>
-              <a:t>CA</a:t>
+              <a:t>F</a:t>
             </a:r>
             <a:endParaRPr lang="de-DE" sz="1050" kern="0" dirty="0">
               <a:solidFill>
@@ -5063,120 +4839,12 @@
           </a:p>
         </p:txBody>
       </p:sp>
-      <p:cxnSp>
-        <p:nvCxnSpPr>
-          <p:cNvPr id="193" name="Gerade Verbindung mit Pfeil 192">
-            <a:extLst>
-              <a:ext uri="{FF2B5EF4-FFF2-40B4-BE49-F238E27FC236}">
-                <a16:creationId xmlns:a16="http://schemas.microsoft.com/office/drawing/2014/main" id="{57DF4D2C-9B0B-A33B-2C76-40E5450EAEF7}"/>
-              </a:ext>
-            </a:extLst>
-          </p:cNvPr>
-          <p:cNvCxnSpPr>
-            <a:cxnSpLocks/>
-            <a:stCxn id="175" idx="3"/>
-            <a:endCxn id="191" idx="1"/>
-          </p:cNvCxnSpPr>
-          <p:nvPr/>
-        </p:nvCxnSpPr>
-        <p:spPr>
-          <a:xfrm>
-            <a:off x="10117613" y="539481"/>
-            <a:ext cx="611996" cy="259"/>
-          </a:xfrm>
-          <a:prstGeom prst="straightConnector1">
-            <a:avLst/>
-          </a:prstGeom>
-          <a:noFill/>
-          <a:ln w="6350" cap="flat" cmpd="sng" algn="ctr">
-            <a:solidFill>
-              <a:srgbClr val="5B9BD5"/>
-            </a:solidFill>
-            <a:prstDash val="solid"/>
-            <a:miter lim="800000"/>
-            <a:tailEnd type="triangle"/>
-          </a:ln>
-          <a:effectLst/>
-        </p:spPr>
-      </p:cxnSp>
-      <p:cxnSp>
-        <p:nvCxnSpPr>
-          <p:cNvPr id="196" name="Gerade Verbindung mit Pfeil 195">
-            <a:extLst>
-              <a:ext uri="{FF2B5EF4-FFF2-40B4-BE49-F238E27FC236}">
-                <a16:creationId xmlns:a16="http://schemas.microsoft.com/office/drawing/2014/main" id="{65958A75-08CD-E777-02D1-45615CF0D213}"/>
-              </a:ext>
-            </a:extLst>
-          </p:cNvPr>
-          <p:cNvCxnSpPr>
-            <a:cxnSpLocks/>
-            <a:stCxn id="191" idx="2"/>
-            <a:endCxn id="192" idx="0"/>
-          </p:cNvCxnSpPr>
-          <p:nvPr/>
-        </p:nvCxnSpPr>
-        <p:spPr>
-          <a:xfrm flipH="1">
-            <a:off x="10996826" y="762526"/>
-            <a:ext cx="1433" cy="370343"/>
-          </a:xfrm>
-          <a:prstGeom prst="straightConnector1">
-            <a:avLst/>
-          </a:prstGeom>
-          <a:noFill/>
-          <a:ln w="6350" cap="flat" cmpd="sng" algn="ctr">
-            <a:solidFill>
-              <a:srgbClr val="5B9BD5"/>
-            </a:solidFill>
-            <a:prstDash val="solid"/>
-            <a:miter lim="800000"/>
-            <a:tailEnd type="triangle"/>
-          </a:ln>
-          <a:effectLst/>
-        </p:spPr>
-      </p:cxnSp>
-      <p:cxnSp>
-        <p:nvCxnSpPr>
-          <p:cNvPr id="68" name="Gerade Verbindung mit Pfeil 67">
-            <a:extLst>
-              <a:ext uri="{FF2B5EF4-FFF2-40B4-BE49-F238E27FC236}">
-                <a16:creationId xmlns:a16="http://schemas.microsoft.com/office/drawing/2014/main" id="{647168E7-4363-C03F-6673-78870C454FCE}"/>
-              </a:ext>
-            </a:extLst>
-          </p:cNvPr>
-          <p:cNvCxnSpPr>
-            <a:cxnSpLocks/>
-            <a:stCxn id="117" idx="1"/>
-            <a:endCxn id="74" idx="3"/>
-          </p:cNvCxnSpPr>
-          <p:nvPr/>
-        </p:nvCxnSpPr>
-        <p:spPr>
-          <a:xfrm flipH="1" flipV="1">
-            <a:off x="8963488" y="2777958"/>
-            <a:ext cx="616827" cy="1"/>
-          </a:xfrm>
-          <a:prstGeom prst="straightConnector1">
-            <a:avLst/>
-          </a:prstGeom>
-          <a:noFill/>
-          <a:ln w="6350" cap="flat" cmpd="sng" algn="ctr">
-            <a:solidFill>
-              <a:srgbClr val="5B9BD5"/>
-            </a:solidFill>
-            <a:prstDash val="solid"/>
-            <a:miter lim="800000"/>
-            <a:tailEnd type="triangle"/>
-          </a:ln>
-          <a:effectLst/>
-        </p:spPr>
-      </p:cxnSp>
-      <p:sp>
-        <p:nvSpPr>
-          <p:cNvPr id="74" name="Abgerundetes Rechteck 1">
-            <a:extLst>
-              <a:ext uri="{FF2B5EF4-FFF2-40B4-BE49-F238E27FC236}">
-                <a16:creationId xmlns:a16="http://schemas.microsoft.com/office/drawing/2014/main" id="{9053A4D7-3FEC-84E2-2729-0ED36463A92A}"/>
+      <p:sp>
+        <p:nvSpPr>
+          <p:cNvPr id="166" name="Rechteck 165">
+            <a:extLst>
+              <a:ext uri="{FF2B5EF4-FFF2-40B4-BE49-F238E27FC236}">
+                <a16:creationId xmlns:a16="http://schemas.microsoft.com/office/drawing/2014/main" id="{B0FB3F22-C086-61C6-4444-CA4D288A536F}"/>
               </a:ext>
             </a:extLst>
           </p:cNvPr>
@@ -5185,173 +4853,8 @@
         </p:nvSpPr>
         <p:spPr>
           <a:xfrm>
-            <a:off x="8426189" y="2555172"/>
-            <a:ext cx="537299" cy="445572"/>
-          </a:xfrm>
-          <a:prstGeom prst="roundRect">
-            <a:avLst/>
-          </a:prstGeom>
-          <a:solidFill>
-            <a:sysClr val="window" lastClr="FFFFFF">
-              <a:lumMod val="65000"/>
-            </a:sysClr>
-          </a:solidFill>
-          <a:ln w="12700" cap="flat" cmpd="sng" algn="ctr">
-            <a:solidFill>
-              <a:sysClr val="window" lastClr="FFFFFF">
-                <a:lumMod val="50000"/>
-              </a:sysClr>
-            </a:solidFill>
-            <a:prstDash val="solid"/>
-            <a:miter lim="800000"/>
-          </a:ln>
-          <a:effectLst>
-            <a:outerShdw blurRad="50800" dist="38100" dir="2700000" algn="tl" rotWithShape="0">
-              <a:prstClr val="black">
-                <a:alpha val="40000"/>
-              </a:prstClr>
-            </a:outerShdw>
-          </a:effectLst>
-        </p:spPr>
-        <p:txBody>
-          <a:bodyPr rtlCol="0" anchor="ctr"/>
-          <a:lstStyle/>
-          <a:p>
-            <a:pPr algn="ctr" defTabSz="914400">
-              <a:defRPr/>
-            </a:pPr>
-            <a:r>
-              <a:rPr lang="de-DE" sz="1050" kern="0">
-                <a:solidFill>
-                  <a:prstClr val="white"/>
-                </a:solidFill>
-                <a:latin typeface="Calibri" panose="020F0502020204030204"/>
-              </a:rPr>
-              <a:t>P</a:t>
-            </a:r>
-            <a:endParaRPr lang="de-DE" sz="1050" kern="0" dirty="0">
-              <a:solidFill>
-                <a:prstClr val="white"/>
-              </a:solidFill>
-              <a:latin typeface="Calibri" panose="020F0502020204030204"/>
-            </a:endParaRPr>
-          </a:p>
-        </p:txBody>
-      </p:sp>
-      <p:sp>
-        <p:nvSpPr>
-          <p:cNvPr id="89" name="Abgerundetes Rechteck 8">
-            <a:extLst>
-              <a:ext uri="{FF2B5EF4-FFF2-40B4-BE49-F238E27FC236}">
-                <a16:creationId xmlns:a16="http://schemas.microsoft.com/office/drawing/2014/main" id="{ED5D7051-F2C6-FF88-374A-B5C6936C7BD3}"/>
-              </a:ext>
-            </a:extLst>
-          </p:cNvPr>
-          <p:cNvSpPr/>
-          <p:nvPr/>
-        </p:nvSpPr>
-        <p:spPr>
-          <a:xfrm>
-            <a:off x="6531897" y="2561390"/>
-            <a:ext cx="1161453" cy="445572"/>
-          </a:xfrm>
-          <a:prstGeom prst="roundRect">
-            <a:avLst/>
-          </a:prstGeom>
-          <a:solidFill>
-            <a:srgbClr val="4472C4">
-              <a:lumMod val="60000"/>
-              <a:lumOff val="40000"/>
-            </a:srgbClr>
-          </a:solidFill>
-          <a:ln w="12700" cap="flat" cmpd="sng" algn="ctr">
-            <a:solidFill>
-              <a:srgbClr val="4472C4">
-                <a:lumMod val="75000"/>
-              </a:srgbClr>
-            </a:solidFill>
-            <a:prstDash val="solid"/>
-            <a:miter lim="800000"/>
-          </a:ln>
-          <a:effectLst>
-            <a:outerShdw blurRad="50800" dist="38100" dir="2700000" algn="tl" rotWithShape="0">
-              <a:prstClr val="black">
-                <a:alpha val="40000"/>
-              </a:prstClr>
-            </a:outerShdw>
-          </a:effectLst>
-        </p:spPr>
-        <p:txBody>
-          <a:bodyPr rtlCol="0" anchor="ctr"/>
-          <a:lstStyle/>
-          <a:p>
-            <a:pPr algn="ctr" defTabSz="914400">
-              <a:defRPr/>
-            </a:pPr>
-            <a:r>
-              <a:rPr lang="de-DE" sz="1050" kern="0">
-                <a:solidFill>
-                  <a:prstClr val="white"/>
-                </a:solidFill>
-                <a:latin typeface="Calibri" panose="020F0502020204030204"/>
-              </a:rPr>
-              <a:t>device [*]</a:t>
-            </a:r>
-          </a:p>
-        </p:txBody>
-      </p:sp>
-      <p:cxnSp>
-        <p:nvCxnSpPr>
-          <p:cNvPr id="92" name="Gerade Verbindung mit Pfeil 91">
-            <a:extLst>
-              <a:ext uri="{FF2B5EF4-FFF2-40B4-BE49-F238E27FC236}">
-                <a16:creationId xmlns:a16="http://schemas.microsoft.com/office/drawing/2014/main" id="{1307CFE3-61AA-DF1B-B67E-1A069FDF02F7}"/>
-              </a:ext>
-            </a:extLst>
-          </p:cNvPr>
-          <p:cNvCxnSpPr>
-            <a:cxnSpLocks/>
-            <a:stCxn id="89" idx="3"/>
-            <a:endCxn id="74" idx="1"/>
-          </p:cNvCxnSpPr>
-          <p:nvPr/>
-        </p:nvCxnSpPr>
-        <p:spPr>
-          <a:xfrm flipV="1">
-            <a:off x="7693350" y="2777958"/>
-            <a:ext cx="732839" cy="6218"/>
-          </a:xfrm>
-          <a:prstGeom prst="straightConnector1">
-            <a:avLst/>
-          </a:prstGeom>
-          <a:noFill/>
-          <a:ln w="6350" cap="flat" cmpd="sng" algn="ctr">
-            <a:solidFill>
-              <a:srgbClr val="5B9BD5"/>
-            </a:solidFill>
-            <a:prstDash val="dash"/>
-            <a:miter lim="800000"/>
-            <a:tailEnd type="triangle"/>
-          </a:ln>
-          <a:effectLst/>
-        </p:spPr>
-      </p:cxnSp>
-      <p:sp>
-        <p:nvSpPr>
-          <p:cNvPr id="107" name="Rechteck 106">
-            <a:extLst>
-              <a:ext uri="{FF2B5EF4-FFF2-40B4-BE49-F238E27FC236}">
-                <a16:creationId xmlns:a16="http://schemas.microsoft.com/office/drawing/2014/main" id="{7A3FD0BE-3B75-BB64-F778-19F01E8B6CF0}"/>
-              </a:ext>
-            </a:extLst>
-          </p:cNvPr>
-          <p:cNvSpPr/>
-          <p:nvPr/>
-        </p:nvSpPr>
-        <p:spPr>
-          <a:xfrm>
-            <a:off x="4247720" y="2505815"/>
-            <a:ext cx="1815783" cy="594652"/>
+            <a:off x="8754064" y="358769"/>
+            <a:ext cx="722507" cy="424727"/>
           </a:xfrm>
           <a:prstGeom prst="rect">
             <a:avLst/>
@@ -5380,31 +4883,55 @@
                 </a:solidFill>
                 <a:latin typeface="Calibri" panose="020F0502020204030204"/>
               </a:rPr>
-              <a:t>local-id=[deviceTemplateName]</a:t>
+              <a:t>functionName</a:t>
+            </a:r>
+          </a:p>
+          <a:p>
+            <a:pPr defTabSz="914400"/>
+            <a:r>
+              <a:rPr lang="de-DE" sz="800" kern="0">
+                <a:solidFill>
+                  <a:prstClr val="black"/>
+                </a:solidFill>
+                <a:latin typeface="Calibri" panose="020F0502020204030204"/>
+              </a:rPr>
+              <a:t>parameter</a:t>
+            </a:r>
+          </a:p>
+          <a:p>
+            <a:pPr defTabSz="914400"/>
+            <a:r>
+              <a:rPr lang="de-DE" sz="800" kern="0">
+                <a:solidFill>
+                  <a:prstClr val="black"/>
+                </a:solidFill>
+                <a:latin typeface="Calibri" panose="020F0502020204030204"/>
+              </a:rPr>
+              <a:t>…</a:t>
             </a:r>
           </a:p>
         </p:txBody>
       </p:sp>
       <p:cxnSp>
         <p:nvCxnSpPr>
-          <p:cNvPr id="110" name="Gerade Verbindung mit Pfeil 109">
-            <a:extLst>
-              <a:ext uri="{FF2B5EF4-FFF2-40B4-BE49-F238E27FC236}">
-                <a16:creationId xmlns:a16="http://schemas.microsoft.com/office/drawing/2014/main" id="{67FF7427-9093-4E22-3C85-E5B709264C91}"/>
+          <p:cNvPr id="167" name="Gerade Verbindung mit Pfeil 166">
+            <a:extLst>
+              <a:ext uri="{FF2B5EF4-FFF2-40B4-BE49-F238E27FC236}">
+                <a16:creationId xmlns:a16="http://schemas.microsoft.com/office/drawing/2014/main" id="{BE093BCA-A2CD-5CC7-4D8E-EB69807C6944}"/>
               </a:ext>
             </a:extLst>
           </p:cNvPr>
           <p:cNvCxnSpPr>
             <a:cxnSpLocks/>
-            <a:stCxn id="89" idx="1"/>
-            <a:endCxn id="107" idx="3"/>
+            <a:stCxn id="165" idx="1"/>
+            <a:endCxn id="166" idx="3"/>
           </p:cNvCxnSpPr>
           <p:nvPr/>
         </p:nvCxnSpPr>
         <p:spPr>
           <a:xfrm flipH="1">
-            <a:off x="6063503" y="2784176"/>
-            <a:ext cx="468394" cy="18965"/>
+            <a:off x="9476571" y="540148"/>
+            <a:ext cx="711743" cy="30985"/>
           </a:xfrm>
           <a:prstGeom prst="straightConnector1">
             <a:avLst/>
@@ -5421,79 +4948,48 @@
           <a:effectLst/>
         </p:spPr>
       </p:cxnSp>
-      <p:sp>
-        <p:nvSpPr>
-          <p:cNvPr id="165" name="Abgerundetes Rechteck 1">
-            <a:extLst>
-              <a:ext uri="{FF2B5EF4-FFF2-40B4-BE49-F238E27FC236}">
-                <a16:creationId xmlns:a16="http://schemas.microsoft.com/office/drawing/2014/main" id="{D682A02F-6CC5-4B5C-BEFE-2A698F693375}"/>
-              </a:ext>
-            </a:extLst>
-          </p:cNvPr>
-          <p:cNvSpPr/>
-          <p:nvPr/>
-        </p:nvSpPr>
-        <p:spPr>
-          <a:xfrm>
-            <a:off x="8426189" y="317362"/>
-            <a:ext cx="537299" cy="445572"/>
-          </a:xfrm>
-          <a:prstGeom prst="roundRect">
-            <a:avLst/>
-          </a:prstGeom>
-          <a:solidFill>
-            <a:sysClr val="window" lastClr="FFFFFF">
-              <a:lumMod val="65000"/>
-            </a:sysClr>
-          </a:solidFill>
-          <a:ln w="12700" cap="flat" cmpd="sng" algn="ctr">
+      <p:cxnSp>
+        <p:nvCxnSpPr>
+          <p:cNvPr id="178" name="Gerade Verbindung mit Pfeil 177">
+            <a:extLst>
+              <a:ext uri="{FF2B5EF4-FFF2-40B4-BE49-F238E27FC236}">
+                <a16:creationId xmlns:a16="http://schemas.microsoft.com/office/drawing/2014/main" id="{EA49DEE1-8C0E-E99B-642F-A7E20F8C0AC5}"/>
+              </a:ext>
+            </a:extLst>
+          </p:cNvPr>
+          <p:cNvCxnSpPr>
+            <a:cxnSpLocks/>
+            <a:stCxn id="175" idx="1"/>
+            <a:endCxn id="165" idx="3"/>
+          </p:cNvCxnSpPr>
+          <p:nvPr/>
+        </p:nvCxnSpPr>
+        <p:spPr>
+          <a:xfrm flipH="1">
+            <a:off x="10725613" y="539481"/>
+            <a:ext cx="616826" cy="667"/>
+          </a:xfrm>
+          <a:prstGeom prst="straightConnector1">
+            <a:avLst/>
+          </a:prstGeom>
+          <a:noFill/>
+          <a:ln w="6350" cap="flat" cmpd="sng" algn="ctr">
             <a:solidFill>
-              <a:sysClr val="window" lastClr="FFFFFF">
-                <a:lumMod val="50000"/>
-              </a:sysClr>
+              <a:srgbClr val="5B9BD5"/>
             </a:solidFill>
             <a:prstDash val="solid"/>
             <a:miter lim="800000"/>
-          </a:ln>
-          <a:effectLst>
-            <a:outerShdw blurRad="50800" dist="38100" dir="2700000" algn="tl" rotWithShape="0">
-              <a:prstClr val="black">
-                <a:alpha val="40000"/>
-              </a:prstClr>
-            </a:outerShdw>
-          </a:effectLst>
-        </p:spPr>
-        <p:txBody>
-          <a:bodyPr rtlCol="0" anchor="ctr"/>
-          <a:lstStyle/>
-          <a:p>
-            <a:pPr algn="ctr" defTabSz="914400">
-              <a:defRPr/>
-            </a:pPr>
-            <a:r>
-              <a:rPr lang="de-DE" sz="1050" kern="0">
-                <a:solidFill>
-                  <a:prstClr val="white"/>
-                </a:solidFill>
-                <a:latin typeface="Calibri" panose="020F0502020204030204"/>
-              </a:rPr>
-              <a:t>F</a:t>
-            </a:r>
-            <a:endParaRPr lang="de-DE" sz="1050" kern="0" dirty="0">
-              <a:solidFill>
-                <a:prstClr val="white"/>
-              </a:solidFill>
-              <a:latin typeface="Calibri" panose="020F0502020204030204"/>
-            </a:endParaRPr>
-          </a:p>
-        </p:txBody>
-      </p:sp>
-      <p:sp>
-        <p:nvSpPr>
-          <p:cNvPr id="166" name="Rechteck 165">
-            <a:extLst>
-              <a:ext uri="{FF2B5EF4-FFF2-40B4-BE49-F238E27FC236}">
-                <a16:creationId xmlns:a16="http://schemas.microsoft.com/office/drawing/2014/main" id="{B0FB3F22-C086-61C6-4444-CA4D288A536F}"/>
+            <a:tailEnd type="triangle"/>
+          </a:ln>
+          <a:effectLst/>
+        </p:spPr>
+      </p:cxnSp>
+      <p:sp>
+        <p:nvSpPr>
+          <p:cNvPr id="202" name="Rechteck 201">
+            <a:extLst>
+              <a:ext uri="{FF2B5EF4-FFF2-40B4-BE49-F238E27FC236}">
+                <a16:creationId xmlns:a16="http://schemas.microsoft.com/office/drawing/2014/main" id="{478CF1AE-F32E-8A5E-3FFF-725990776B82}"/>
               </a:ext>
             </a:extLst>
           </p:cNvPr>
@@ -5502,8 +4998,8 @@
         </p:nvSpPr>
         <p:spPr>
           <a:xfrm>
-            <a:off x="6991939" y="358769"/>
-            <a:ext cx="722507" cy="424727"/>
+            <a:off x="8884805" y="-921573"/>
+            <a:ext cx="2301547" cy="320758"/>
           </a:xfrm>
           <a:prstGeom prst="rect">
             <a:avLst/>
@@ -5532,113 +5028,26 @@
                 </a:solidFill>
                 <a:latin typeface="Calibri" panose="020F0502020204030204"/>
               </a:rPr>
-              <a:t>functionName</a:t>
+              <a:t>to be deleted, if no longer required for scrolling</a:t>
             </a:r>
           </a:p>
           <a:p>
             <a:pPr defTabSz="914400"/>
-            <a:r>
-              <a:rPr lang="de-DE" sz="800" kern="0">
-                <a:solidFill>
-                  <a:prstClr val="black"/>
-                </a:solidFill>
-                <a:latin typeface="Calibri" panose="020F0502020204030204"/>
-              </a:rPr>
-              <a:t>parameter</a:t>
-            </a:r>
-          </a:p>
-          <a:p>
-            <a:pPr defTabSz="914400"/>
-            <a:r>
-              <a:rPr lang="de-DE" sz="800" kern="0">
-                <a:solidFill>
-                  <a:prstClr val="black"/>
-                </a:solidFill>
-                <a:latin typeface="Calibri" panose="020F0502020204030204"/>
-              </a:rPr>
-              <a:t>…</a:t>
-            </a:r>
-          </a:p>
-        </p:txBody>
-      </p:sp>
-      <p:cxnSp>
-        <p:nvCxnSpPr>
-          <p:cNvPr id="167" name="Gerade Verbindung mit Pfeil 166">
-            <a:extLst>
-              <a:ext uri="{FF2B5EF4-FFF2-40B4-BE49-F238E27FC236}">
-                <a16:creationId xmlns:a16="http://schemas.microsoft.com/office/drawing/2014/main" id="{BE093BCA-A2CD-5CC7-4D8E-EB69807C6944}"/>
-              </a:ext>
-            </a:extLst>
-          </p:cNvPr>
-          <p:cNvCxnSpPr>
-            <a:cxnSpLocks/>
-            <a:stCxn id="165" idx="1"/>
-            <a:endCxn id="166" idx="3"/>
-          </p:cNvCxnSpPr>
-          <p:nvPr/>
-        </p:nvCxnSpPr>
-        <p:spPr>
-          <a:xfrm flipH="1">
-            <a:off x="7714446" y="540148"/>
-            <a:ext cx="711743" cy="30985"/>
-          </a:xfrm>
-          <a:prstGeom prst="straightConnector1">
-            <a:avLst/>
-          </a:prstGeom>
-          <a:noFill/>
-          <a:ln w="6350" cap="flat" cmpd="sng" algn="ctr">
-            <a:solidFill>
-              <a:srgbClr val="5B9BD5"/>
-            </a:solidFill>
-            <a:prstDash val="solid"/>
-            <a:miter lim="800000"/>
-            <a:tailEnd type="triangle"/>
-          </a:ln>
-          <a:effectLst/>
-        </p:spPr>
-      </p:cxnSp>
-      <p:cxnSp>
-        <p:nvCxnSpPr>
-          <p:cNvPr id="178" name="Gerade Verbindung mit Pfeil 177">
-            <a:extLst>
-              <a:ext uri="{FF2B5EF4-FFF2-40B4-BE49-F238E27FC236}">
-                <a16:creationId xmlns:a16="http://schemas.microsoft.com/office/drawing/2014/main" id="{EA49DEE1-8C0E-E99B-642F-A7E20F8C0AC5}"/>
-              </a:ext>
-            </a:extLst>
-          </p:cNvPr>
-          <p:cNvCxnSpPr>
-            <a:cxnSpLocks/>
-            <a:stCxn id="175" idx="1"/>
-            <a:endCxn id="165" idx="3"/>
-          </p:cNvCxnSpPr>
-          <p:nvPr/>
-        </p:nvCxnSpPr>
-        <p:spPr>
-          <a:xfrm flipH="1">
-            <a:off x="8963488" y="539481"/>
-            <a:ext cx="616826" cy="667"/>
-          </a:xfrm>
-          <a:prstGeom prst="straightConnector1">
-            <a:avLst/>
-          </a:prstGeom>
-          <a:noFill/>
-          <a:ln w="6350" cap="flat" cmpd="sng" algn="ctr">
-            <a:solidFill>
-              <a:srgbClr val="5B9BD5"/>
-            </a:solidFill>
-            <a:prstDash val="solid"/>
-            <a:miter lim="800000"/>
-            <a:tailEnd type="triangle"/>
-          </a:ln>
-          <a:effectLst/>
-        </p:spPr>
-      </p:cxnSp>
-      <p:sp>
-        <p:nvSpPr>
-          <p:cNvPr id="202" name="Rechteck 201">
-            <a:extLst>
-              <a:ext uri="{FF2B5EF4-FFF2-40B4-BE49-F238E27FC236}">
-                <a16:creationId xmlns:a16="http://schemas.microsoft.com/office/drawing/2014/main" id="{478CF1AE-F32E-8A5E-3FFF-725990776B82}"/>
+            <a:endParaRPr lang="de-DE" sz="800" kern="0">
+              <a:solidFill>
+                <a:prstClr val="black"/>
+              </a:solidFill>
+              <a:latin typeface="Calibri" panose="020F0502020204030204"/>
+            </a:endParaRPr>
+          </a:p>
+        </p:txBody>
+      </p:sp>
+      <p:sp>
+        <p:nvSpPr>
+          <p:cNvPr id="206" name="Rechteck 205">
+            <a:extLst>
+              <a:ext uri="{FF2B5EF4-FFF2-40B4-BE49-F238E27FC236}">
+                <a16:creationId xmlns:a16="http://schemas.microsoft.com/office/drawing/2014/main" id="{26EA71E1-6E4E-BAFE-EFA0-DD3B8CEAC57B}"/>
               </a:ext>
             </a:extLst>
           </p:cNvPr>
@@ -5647,8 +5056,8 @@
         </p:nvSpPr>
         <p:spPr>
           <a:xfrm>
-            <a:off x="8884805" y="-921573"/>
-            <a:ext cx="2301547" cy="320758"/>
+            <a:off x="13954958" y="750221"/>
+            <a:ext cx="1905036" cy="1056537"/>
           </a:xfrm>
           <a:prstGeom prst="rect">
             <a:avLst/>
@@ -5677,7 +5086,67 @@
                 </a:solidFill>
                 <a:latin typeface="Calibri" panose="020F0502020204030204"/>
               </a:rPr>
-              <a:t>to be deleted, if no longer required for scrolling</a:t>
+              <a:t>local-id=[LinkId]</a:t>
+            </a:r>
+          </a:p>
+          <a:p>
+            <a:pPr defTabSz="914400"/>
+            <a:r>
+              <a:rPr lang="de-DE" sz="800" kern="0">
+                <a:solidFill>
+                  <a:prstClr val="black"/>
+                </a:solidFill>
+                <a:latin typeface="Calibri" panose="020F0502020204030204"/>
+              </a:rPr>
+              <a:t>priority-band</a:t>
+            </a:r>
+          </a:p>
+          <a:p>
+            <a:pPr defTabSz="914400"/>
+            <a:r>
+              <a:rPr lang="de-DE" sz="800" kern="0">
+                <a:solidFill>
+                  <a:prstClr val="black"/>
+                </a:solidFill>
+                <a:latin typeface="Calibri" panose="020F0502020204030204"/>
+              </a:rPr>
+              <a:t>affected-cc/ltp</a:t>
+            </a:r>
+          </a:p>
+          <a:p>
+            <a:pPr defTabSz="914400"/>
+            <a:r>
+              <a:rPr lang="de-DE" sz="800" kern="0">
+                <a:solidFill>
+                  <a:prstClr val="black"/>
+                </a:solidFill>
+                <a:latin typeface="Calibri" panose="020F0502020204030204"/>
+              </a:rPr>
+              <a:t>error-code</a:t>
+            </a:r>
+          </a:p>
+          <a:p>
+            <a:pPr defTabSz="914400"/>
+            <a:r>
+              <a:rPr lang="de-DE" sz="800" kern="0">
+                <a:solidFill>
+                  <a:prstClr val="black"/>
+                </a:solidFill>
+                <a:latin typeface="Calibri" panose="020F0502020204030204"/>
+              </a:rPr>
+              <a:t>error-message</a:t>
+            </a:r>
+          </a:p>
+          <a:p>
+            <a:pPr defTabSz="914400"/>
+            <a:r>
+              <a:rPr lang="de-DE" sz="800" kern="0">
+                <a:solidFill>
+                  <a:prstClr val="black"/>
+                </a:solidFill>
+                <a:latin typeface="Calibri" panose="020F0502020204030204"/>
+              </a:rPr>
+              <a:t>…</a:t>
             </a:r>
           </a:p>
           <a:p>
@@ -5689,115 +5158,6 @@
               <a:latin typeface="Calibri" panose="020F0502020204030204"/>
             </a:endParaRPr>
           </a:p>
-        </p:txBody>
-      </p:sp>
-      <p:sp>
-        <p:nvSpPr>
-          <p:cNvPr id="206" name="Rechteck 205">
-            <a:extLst>
-              <a:ext uri="{FF2B5EF4-FFF2-40B4-BE49-F238E27FC236}">
-                <a16:creationId xmlns:a16="http://schemas.microsoft.com/office/drawing/2014/main" id="{26EA71E1-6E4E-BAFE-EFA0-DD3B8CEAC57B}"/>
-              </a:ext>
-            </a:extLst>
-          </p:cNvPr>
-          <p:cNvSpPr/>
-          <p:nvPr/>
-        </p:nvSpPr>
-        <p:spPr>
-          <a:xfrm>
-            <a:off x="12192833" y="750221"/>
-            <a:ext cx="1905036" cy="1056537"/>
-          </a:xfrm>
-          <a:prstGeom prst="rect">
-            <a:avLst/>
-          </a:prstGeom>
-          <a:solidFill>
-            <a:sysClr val="window" lastClr="FFFFFF"/>
-          </a:solidFill>
-          <a:ln w="12700" cap="flat" cmpd="sng" algn="ctr">
-            <a:solidFill>
-              <a:srgbClr val="A5A5A5"/>
-            </a:solidFill>
-            <a:prstDash val="solid"/>
-            <a:miter lim="800000"/>
-          </a:ln>
-          <a:effectLst/>
-        </p:spPr>
-        <p:txBody>
-          <a:bodyPr lIns="36000" tIns="36000" rIns="36000" bIns="36000" rtlCol="0" anchor="t"/>
-          <a:lstStyle/>
-          <a:p>
-            <a:pPr defTabSz="914400"/>
-            <a:r>
-              <a:rPr lang="de-DE" sz="800" kern="0">
-                <a:solidFill>
-                  <a:prstClr val="black"/>
-                </a:solidFill>
-                <a:latin typeface="Calibri" panose="020F0502020204030204"/>
-              </a:rPr>
-              <a:t>local-id=[LinkId]</a:t>
-            </a:r>
-          </a:p>
-          <a:p>
-            <a:pPr defTabSz="914400"/>
-            <a:r>
-              <a:rPr lang="de-DE" sz="800" kern="0">
-                <a:solidFill>
-                  <a:prstClr val="black"/>
-                </a:solidFill>
-                <a:latin typeface="Calibri" panose="020F0502020204030204"/>
-              </a:rPr>
-              <a:t>priority-band</a:t>
-            </a:r>
-          </a:p>
-          <a:p>
-            <a:pPr defTabSz="914400"/>
-            <a:r>
-              <a:rPr lang="de-DE" sz="800" kern="0">
-                <a:solidFill>
-                  <a:prstClr val="black"/>
-                </a:solidFill>
-                <a:latin typeface="Calibri" panose="020F0502020204030204"/>
-              </a:rPr>
-              <a:t>affected-cc/ltp/lp</a:t>
-            </a:r>
-          </a:p>
-          <a:p>
-            <a:pPr defTabSz="914400"/>
-            <a:r>
-              <a:rPr lang="de-DE" sz="800" kern="0">
-                <a:solidFill>
-                  <a:prstClr val="black"/>
-                </a:solidFill>
-                <a:latin typeface="Calibri" panose="020F0502020204030204"/>
-              </a:rPr>
-              <a:t>error-code</a:t>
-            </a:r>
-          </a:p>
-          <a:p>
-            <a:pPr defTabSz="914400"/>
-            <a:r>
-              <a:rPr lang="de-DE" sz="800" kern="0">
-                <a:solidFill>
-                  <a:prstClr val="black"/>
-                </a:solidFill>
-                <a:latin typeface="Calibri" panose="020F0502020204030204"/>
-              </a:rPr>
-              <a:t>error-message</a:t>
-            </a:r>
-          </a:p>
-          <a:p>
-            <a:pPr defTabSz="914400"/>
-            <a:r>
-              <a:rPr lang="de-DE" sz="800" kern="0">
-                <a:solidFill>
-                  <a:prstClr val="black"/>
-                </a:solidFill>
-                <a:latin typeface="Calibri" panose="020F0502020204030204"/>
-              </a:rPr>
-              <a:t>…</a:t>
-            </a:r>
-          </a:p>
           <a:p>
             <a:pPr defTabSz="914400"/>
             <a:endParaRPr lang="de-DE" sz="800" kern="0">
@@ -5807,15 +5167,6 @@
               <a:latin typeface="Calibri" panose="020F0502020204030204"/>
             </a:endParaRPr>
           </a:p>
-          <a:p>
-            <a:pPr defTabSz="914400"/>
-            <a:endParaRPr lang="de-DE" sz="800" kern="0">
-              <a:solidFill>
-                <a:prstClr val="black"/>
-              </a:solidFill>
-              <a:latin typeface="Calibri" panose="020F0502020204030204"/>
-            </a:endParaRPr>
-          </a:p>
         </p:txBody>
       </p:sp>
       <p:cxnSp>
@@ -5836,7 +5187,7 @@
         </p:nvCxnSpPr>
         <p:spPr>
           <a:xfrm flipV="1">
-            <a:off x="11265475" y="1278490"/>
+            <a:off x="13027600" y="1278490"/>
             <a:ext cx="927358" cy="77165"/>
           </a:xfrm>
           <a:prstGeom prst="straightConnector1">
@@ -5872,7 +5223,7 @@
         </p:nvCxnSpPr>
         <p:spPr>
           <a:xfrm flipH="1">
-            <a:off x="9848964" y="3000745"/>
+            <a:off x="11611089" y="3000745"/>
             <a:ext cx="1" cy="1114192"/>
           </a:xfrm>
           <a:prstGeom prst="straightConnector1">
@@ -5890,267 +5241,31 @@
           <a:effectLst/>
         </p:spPr>
       </p:cxnSp>
-      <p:sp>
-        <p:nvSpPr>
-          <p:cNvPr id="70" name="Abgerundetes Rechteck 1">
-            <a:extLst>
-              <a:ext uri="{FF2B5EF4-FFF2-40B4-BE49-F238E27FC236}">
-                <a16:creationId xmlns:a16="http://schemas.microsoft.com/office/drawing/2014/main" id="{C0BF25FF-18C7-A4CF-F5A4-4B97E69FD229}"/>
-              </a:ext>
-            </a:extLst>
-          </p:cNvPr>
-          <p:cNvSpPr/>
-          <p:nvPr/>
-        </p:nvSpPr>
-        <p:spPr>
-          <a:xfrm>
-            <a:off x="10725635" y="5406692"/>
-            <a:ext cx="537299" cy="445572"/>
-          </a:xfrm>
-          <a:prstGeom prst="roundRect">
-            <a:avLst/>
-          </a:prstGeom>
-          <a:solidFill>
-            <a:sysClr val="window" lastClr="FFFFFF">
-              <a:lumMod val="65000"/>
-            </a:sysClr>
-          </a:solidFill>
-          <a:ln w="12700" cap="flat" cmpd="sng" algn="ctr">
-            <a:solidFill>
-              <a:sysClr val="window" lastClr="FFFFFF">
-                <a:lumMod val="50000"/>
-              </a:sysClr>
-            </a:solidFill>
-            <a:prstDash val="solid"/>
-            <a:miter lim="800000"/>
-          </a:ln>
-          <a:effectLst>
-            <a:outerShdw blurRad="50800" dist="38100" dir="2700000" algn="tl" rotWithShape="0">
-              <a:prstClr val="black">
-                <a:alpha val="40000"/>
-              </a:prstClr>
-            </a:outerShdw>
-          </a:effectLst>
-        </p:spPr>
-        <p:txBody>
-          <a:bodyPr rtlCol="0" anchor="ctr"/>
-          <a:lstStyle/>
-          <a:p>
-            <a:pPr algn="ctr" defTabSz="914400">
-              <a:defRPr/>
-            </a:pPr>
-            <a:r>
-              <a:rPr lang="de-DE" sz="1050" kern="0">
-                <a:solidFill>
-                  <a:prstClr val="white"/>
-                </a:solidFill>
-                <a:latin typeface="Calibri" panose="020F0502020204030204"/>
-              </a:rPr>
-              <a:t>E</a:t>
-            </a:r>
-            <a:endParaRPr lang="de-DE" sz="1050" kern="0" dirty="0">
-              <a:solidFill>
-                <a:prstClr val="white"/>
-              </a:solidFill>
-              <a:latin typeface="Calibri" panose="020F0502020204030204"/>
-            </a:endParaRPr>
-          </a:p>
-        </p:txBody>
-      </p:sp>
-      <p:sp>
-        <p:nvSpPr>
-          <p:cNvPr id="83" name="Abgerundetes Rechteck 8">
-            <a:extLst>
-              <a:ext uri="{FF2B5EF4-FFF2-40B4-BE49-F238E27FC236}">
-                <a16:creationId xmlns:a16="http://schemas.microsoft.com/office/drawing/2014/main" id="{443F278C-B2D1-E3AD-7966-8D59EA4283D5}"/>
-              </a:ext>
-            </a:extLst>
-          </p:cNvPr>
-          <p:cNvSpPr/>
-          <p:nvPr/>
-        </p:nvSpPr>
-        <p:spPr>
-          <a:xfrm>
-            <a:off x="12531382" y="4216874"/>
-            <a:ext cx="1161453" cy="445572"/>
-          </a:xfrm>
-          <a:prstGeom prst="roundRect">
-            <a:avLst/>
-          </a:prstGeom>
-          <a:solidFill>
-            <a:srgbClr val="4472C4">
-              <a:lumMod val="60000"/>
-              <a:lumOff val="40000"/>
-            </a:srgbClr>
-          </a:solidFill>
-          <a:ln w="12700" cap="flat" cmpd="sng" algn="ctr">
-            <a:solidFill>
-              <a:srgbClr val="4472C4">
-                <a:lumMod val="75000"/>
-              </a:srgbClr>
-            </a:solidFill>
-            <a:prstDash val="solid"/>
-            <a:miter lim="800000"/>
-          </a:ln>
-          <a:effectLst>
-            <a:outerShdw blurRad="50800" dist="38100" dir="2700000" algn="tl" rotWithShape="0">
-              <a:prstClr val="black">
-                <a:alpha val="40000"/>
-              </a:prstClr>
-            </a:outerShdw>
-          </a:effectLst>
-        </p:spPr>
-        <p:txBody>
-          <a:bodyPr rtlCol="0" anchor="ctr"/>
-          <a:lstStyle/>
-          <a:p>
-            <a:pPr algn="ctr" defTabSz="914400">
-              <a:defRPr/>
-            </a:pPr>
-            <a:r>
-              <a:rPr lang="de-DE" sz="1050" kern="0">
-                <a:solidFill>
-                  <a:prstClr val="white"/>
-                </a:solidFill>
-                <a:latin typeface="Calibri" panose="020F0502020204030204"/>
-              </a:rPr>
-              <a:t>idu [1]</a:t>
-            </a:r>
-          </a:p>
-        </p:txBody>
-      </p:sp>
       <p:cxnSp>
         <p:nvCxnSpPr>
-          <p:cNvPr id="84" name="Gerade Verbindung mit Pfeil 83">
-            <a:extLst>
-              <a:ext uri="{FF2B5EF4-FFF2-40B4-BE49-F238E27FC236}">
-                <a16:creationId xmlns:a16="http://schemas.microsoft.com/office/drawing/2014/main" id="{184AEC20-9B90-B26C-86CE-82CE2A57CFDB}"/>
+          <p:cNvPr id="201" name="Verbinder: gewinkelt 200">
+            <a:extLst>
+              <a:ext uri="{FF2B5EF4-FFF2-40B4-BE49-F238E27FC236}">
+                <a16:creationId xmlns:a16="http://schemas.microsoft.com/office/drawing/2014/main" id="{F434A457-560C-5719-70F2-1BF2B3AF29BE}"/>
               </a:ext>
             </a:extLst>
           </p:cNvPr>
           <p:cNvCxnSpPr>
             <a:cxnSpLocks/>
-            <a:stCxn id="83" idx="1"/>
-            <a:endCxn id="70" idx="3"/>
+            <a:stCxn id="117" idx="2"/>
+            <a:endCxn id="87" idx="0"/>
           </p:cNvCxnSpPr>
           <p:nvPr/>
         </p:nvCxnSpPr>
         <p:spPr>
-          <a:xfrm flipH="1">
-            <a:off x="11262934" y="4439660"/>
-            <a:ext cx="1268448" cy="1189818"/>
-          </a:xfrm>
-          <a:prstGeom prst="straightConnector1">
-            <a:avLst/>
-          </a:prstGeom>
-          <a:noFill/>
-          <a:ln w="6350" cap="flat" cmpd="sng" algn="ctr">
-            <a:solidFill>
-              <a:srgbClr val="5B9BD5"/>
-            </a:solidFill>
-            <a:prstDash val="dash"/>
-            <a:miter lim="800000"/>
-            <a:tailEnd type="triangle"/>
-          </a:ln>
-          <a:effectLst/>
-        </p:spPr>
-      </p:cxnSp>
-      <p:sp>
-        <p:nvSpPr>
-          <p:cNvPr id="99" name="Rechteck 98">
-            <a:extLst>
-              <a:ext uri="{FF2B5EF4-FFF2-40B4-BE49-F238E27FC236}">
-                <a16:creationId xmlns:a16="http://schemas.microsoft.com/office/drawing/2014/main" id="{9C2D2E47-7358-8D95-CAE2-6D5DDED05672}"/>
-              </a:ext>
-            </a:extLst>
-          </p:cNvPr>
-          <p:cNvSpPr/>
-          <p:nvPr/>
-        </p:nvSpPr>
-        <p:spPr>
-          <a:xfrm>
-            <a:off x="14274800" y="4216338"/>
-            <a:ext cx="1991421" cy="504257"/>
-          </a:xfrm>
-          <a:prstGeom prst="rect">
-            <a:avLst/>
-          </a:prstGeom>
-          <a:solidFill>
-            <a:sysClr val="window" lastClr="FFFFFF"/>
-          </a:solidFill>
-          <a:ln w="12700" cap="flat" cmpd="sng" algn="ctr">
-            <a:solidFill>
-              <a:srgbClr val="A5A5A5"/>
-            </a:solidFill>
-            <a:prstDash val="solid"/>
-            <a:miter lim="800000"/>
-          </a:ln>
-          <a:effectLst/>
-        </p:spPr>
-        <p:txBody>
-          <a:bodyPr lIns="36000" tIns="36000" rIns="36000" bIns="36000" rtlCol="0" anchor="t"/>
-          <a:lstStyle/>
-          <a:p>
-            <a:pPr defTabSz="914400"/>
-            <a:r>
-              <a:rPr lang="de-DE" sz="800" kern="0">
-                <a:solidFill>
-                  <a:prstClr val="black"/>
-                </a:solidFill>
-                <a:latin typeface="Calibri" panose="020F0502020204030204"/>
-              </a:rPr>
-              <a:t>local-id = idu</a:t>
-            </a:r>
-          </a:p>
-          <a:p>
-            <a:pPr defTabSz="914400"/>
-            <a:r>
-              <a:rPr lang="de-DE" sz="800" strike="sngStrike" kern="0">
-                <a:solidFill>
-                  <a:prstClr val="black"/>
-                </a:solidFill>
-                <a:latin typeface="Calibri" panose="020F0502020204030204"/>
-              </a:rPr>
-              <a:t>category=idu</a:t>
-            </a:r>
-          </a:p>
-          <a:p>
-            <a:pPr defTabSz="914400"/>
-            <a:r>
-              <a:rPr lang="de-DE" sz="800" kern="0">
-                <a:solidFill>
-                  <a:prstClr val="black"/>
-                </a:solidFill>
-                <a:latin typeface="Calibri" panose="020F0502020204030204"/>
-              </a:rPr>
-              <a:t>(has Holder[*])</a:t>
-            </a:r>
-          </a:p>
-        </p:txBody>
-      </p:sp>
-      <p:cxnSp>
-        <p:nvCxnSpPr>
-          <p:cNvPr id="102" name="Gerade Verbindung mit Pfeil 101">
-            <a:extLst>
-              <a:ext uri="{FF2B5EF4-FFF2-40B4-BE49-F238E27FC236}">
-                <a16:creationId xmlns:a16="http://schemas.microsoft.com/office/drawing/2014/main" id="{8EEA6D8F-4AA5-ED12-D282-D54B57F26EEB}"/>
-              </a:ext>
-            </a:extLst>
-          </p:cNvPr>
-          <p:cNvCxnSpPr>
-            <a:cxnSpLocks/>
-            <a:stCxn id="83" idx="3"/>
-            <a:endCxn id="99" idx="1"/>
-          </p:cNvCxnSpPr>
-          <p:nvPr/>
-        </p:nvCxnSpPr>
-        <p:spPr>
-          <a:xfrm>
-            <a:off x="13692835" y="4439660"/>
-            <a:ext cx="581965" cy="28807"/>
-          </a:xfrm>
-          <a:prstGeom prst="straightConnector1">
-            <a:avLst/>
+          <a:xfrm rot="5400000">
+            <a:off x="9913283" y="2592468"/>
+            <a:ext cx="1289531" cy="2106084"/>
+          </a:xfrm>
+          <a:prstGeom prst="bentConnector3">
+            <a:avLst>
+              <a:gd name="adj1" fmla="val 50000"/>
+            </a:avLst>
           </a:prstGeom>
           <a:noFill/>
           <a:ln w="6350" cap="flat" cmpd="sng" algn="ctr">
@@ -6164,1013 +5279,10 @@
           <a:effectLst/>
         </p:spPr>
       </p:cxnSp>
-      <p:sp>
-        <p:nvSpPr>
-          <p:cNvPr id="116" name="Abgerundetes Rechteck 8">
-            <a:extLst>
-              <a:ext uri="{FF2B5EF4-FFF2-40B4-BE49-F238E27FC236}">
-                <a16:creationId xmlns:a16="http://schemas.microsoft.com/office/drawing/2014/main" id="{9257A587-AF25-575E-DF47-28FEE0FF18C4}"/>
-              </a:ext>
-            </a:extLst>
-          </p:cNvPr>
-          <p:cNvSpPr/>
-          <p:nvPr/>
-        </p:nvSpPr>
-        <p:spPr>
-          <a:xfrm>
-            <a:off x="12531382" y="5004597"/>
-            <a:ext cx="1161453" cy="445572"/>
-          </a:xfrm>
-          <a:prstGeom prst="roundRect">
-            <a:avLst/>
-          </a:prstGeom>
-          <a:solidFill>
-            <a:srgbClr val="4472C4">
-              <a:lumMod val="60000"/>
-              <a:lumOff val="40000"/>
-            </a:srgbClr>
-          </a:solidFill>
-          <a:ln w="12700" cap="flat" cmpd="sng" algn="ctr">
-            <a:solidFill>
-              <a:srgbClr val="4472C4">
-                <a:lumMod val="75000"/>
-              </a:srgbClr>
-            </a:solidFill>
-            <a:prstDash val="solid"/>
-            <a:miter lim="800000"/>
-          </a:ln>
-          <a:effectLst>
-            <a:outerShdw blurRad="50800" dist="38100" dir="2700000" algn="tl" rotWithShape="0">
-              <a:prstClr val="black">
-                <a:alpha val="40000"/>
-              </a:prstClr>
-            </a:outerShdw>
-          </a:effectLst>
-        </p:spPr>
-        <p:txBody>
-          <a:bodyPr rtlCol="0" anchor="ctr"/>
-          <a:lstStyle/>
-          <a:p>
-            <a:pPr algn="ctr" defTabSz="914400">
-              <a:defRPr/>
-            </a:pPr>
-            <a:r>
-              <a:rPr lang="de-DE" sz="1050" kern="0">
-                <a:solidFill>
-                  <a:prstClr val="white"/>
-                </a:solidFill>
-                <a:latin typeface="Calibri" panose="020F0502020204030204"/>
-              </a:rPr>
-              <a:t>modem [*]</a:t>
-            </a:r>
-          </a:p>
-        </p:txBody>
-      </p:sp>
-      <p:sp>
-        <p:nvSpPr>
-          <p:cNvPr id="118" name="Rechteck 117">
-            <a:extLst>
-              <a:ext uri="{FF2B5EF4-FFF2-40B4-BE49-F238E27FC236}">
-                <a16:creationId xmlns:a16="http://schemas.microsoft.com/office/drawing/2014/main" id="{9CD9D71B-FBE6-67F6-0E2D-6F94AF73DA04}"/>
-              </a:ext>
-            </a:extLst>
-          </p:cNvPr>
-          <p:cNvSpPr/>
-          <p:nvPr/>
-        </p:nvSpPr>
-        <p:spPr>
-          <a:xfrm>
-            <a:off x="14274800" y="4975554"/>
-            <a:ext cx="1991421" cy="718487"/>
-          </a:xfrm>
-          <a:prstGeom prst="rect">
-            <a:avLst/>
-          </a:prstGeom>
-          <a:solidFill>
-            <a:sysClr val="window" lastClr="FFFFFF"/>
-          </a:solidFill>
-          <a:ln w="12700" cap="flat" cmpd="sng" algn="ctr">
-            <a:solidFill>
-              <a:srgbClr val="A5A5A5"/>
-            </a:solidFill>
-            <a:prstDash val="solid"/>
-            <a:miter lim="800000"/>
-          </a:ln>
-          <a:effectLst/>
-        </p:spPr>
-        <p:txBody>
-          <a:bodyPr lIns="36000" tIns="36000" rIns="36000" bIns="36000" rtlCol="0" anchor="t"/>
-          <a:lstStyle/>
-          <a:p>
-            <a:pPr defTabSz="914400"/>
-            <a:r>
-              <a:rPr lang="de-DE" sz="800" kern="0">
-                <a:solidFill>
-                  <a:prstClr val="black"/>
-                </a:solidFill>
-                <a:latin typeface="Calibri" panose="020F0502020204030204"/>
-              </a:rPr>
-              <a:t>local-id = [local-id] / [modemUuid]</a:t>
-            </a:r>
-          </a:p>
-          <a:p>
-            <a:pPr defTabSz="914400"/>
-            <a:r>
-              <a:rPr lang="de-DE" sz="800" kern="0">
-                <a:solidFill>
-                  <a:prstClr val="black"/>
-                </a:solidFill>
-                <a:latin typeface="Calibri" panose="020F0502020204030204"/>
-              </a:rPr>
-              <a:t>category = modem</a:t>
-            </a:r>
-          </a:p>
-          <a:p>
-            <a:pPr defTabSz="914400"/>
-            <a:r>
-              <a:rPr lang="de-DE" sz="800" kern="0">
-                <a:solidFill>
-                  <a:prstClr val="black"/>
-                </a:solidFill>
-                <a:latin typeface="Calibri" panose="020F0502020204030204"/>
-              </a:rPr>
-              <a:t>modem-card = [modemCard] / [???]</a:t>
-            </a:r>
-          </a:p>
-          <a:p>
-            <a:pPr defTabSz="914400"/>
-            <a:r>
-              <a:rPr lang="de-DE" sz="800" kern="0">
-                <a:solidFill>
-                  <a:prstClr val="black"/>
-                </a:solidFill>
-                <a:latin typeface="Calibri" panose="020F0502020204030204"/>
-              </a:rPr>
-              <a:t>access-port = [accessPort] / [???]</a:t>
-            </a:r>
-          </a:p>
-        </p:txBody>
-      </p:sp>
-      <p:cxnSp>
-        <p:nvCxnSpPr>
-          <p:cNvPr id="123" name="Gerade Verbindung mit Pfeil 122">
-            <a:extLst>
-              <a:ext uri="{FF2B5EF4-FFF2-40B4-BE49-F238E27FC236}">
-                <a16:creationId xmlns:a16="http://schemas.microsoft.com/office/drawing/2014/main" id="{9B1ABDE3-BECF-16CE-E3CC-6FA836F4935B}"/>
-              </a:ext>
-            </a:extLst>
-          </p:cNvPr>
-          <p:cNvCxnSpPr>
-            <a:cxnSpLocks/>
-            <a:stCxn id="116" idx="1"/>
-            <a:endCxn id="70" idx="3"/>
-          </p:cNvCxnSpPr>
-          <p:nvPr/>
-        </p:nvCxnSpPr>
-        <p:spPr>
-          <a:xfrm flipH="1">
-            <a:off x="11262934" y="5227383"/>
-            <a:ext cx="1268448" cy="402095"/>
-          </a:xfrm>
-          <a:prstGeom prst="straightConnector1">
-            <a:avLst/>
-          </a:prstGeom>
-          <a:noFill/>
-          <a:ln w="6350" cap="flat" cmpd="sng" algn="ctr">
-            <a:solidFill>
-              <a:srgbClr val="5B9BD5"/>
-            </a:solidFill>
-            <a:prstDash val="dash"/>
-            <a:miter lim="800000"/>
-            <a:tailEnd type="triangle"/>
-          </a:ln>
-          <a:effectLst/>
-        </p:spPr>
-      </p:cxnSp>
-      <p:cxnSp>
-        <p:nvCxnSpPr>
-          <p:cNvPr id="135" name="Gerade Verbindung mit Pfeil 134">
-            <a:extLst>
-              <a:ext uri="{FF2B5EF4-FFF2-40B4-BE49-F238E27FC236}">
-                <a16:creationId xmlns:a16="http://schemas.microsoft.com/office/drawing/2014/main" id="{C77582F7-6E8A-C9D0-64AD-B8BC745BF518}"/>
-              </a:ext>
-            </a:extLst>
-          </p:cNvPr>
-          <p:cNvCxnSpPr>
-            <a:cxnSpLocks/>
-            <a:stCxn id="116" idx="3"/>
-            <a:endCxn id="118" idx="1"/>
-          </p:cNvCxnSpPr>
-          <p:nvPr/>
-        </p:nvCxnSpPr>
-        <p:spPr>
-          <a:xfrm>
-            <a:off x="13692835" y="5227383"/>
-            <a:ext cx="581965" cy="107415"/>
-          </a:xfrm>
-          <a:prstGeom prst="straightConnector1">
-            <a:avLst/>
-          </a:prstGeom>
-          <a:noFill/>
-          <a:ln w="6350" cap="flat" cmpd="sng" algn="ctr">
-            <a:solidFill>
-              <a:srgbClr val="5B9BD5"/>
-            </a:solidFill>
-            <a:prstDash val="solid"/>
-            <a:miter lim="800000"/>
-            <a:tailEnd type="triangle"/>
-          </a:ln>
-          <a:effectLst/>
-        </p:spPr>
-      </p:cxnSp>
-      <p:sp>
-        <p:nvSpPr>
-          <p:cNvPr id="142" name="Abgerundetes Rechteck 8">
-            <a:extLst>
-              <a:ext uri="{FF2B5EF4-FFF2-40B4-BE49-F238E27FC236}">
-                <a16:creationId xmlns:a16="http://schemas.microsoft.com/office/drawing/2014/main" id="{901B5190-CC68-3F36-0B15-51F88F37E2A1}"/>
-              </a:ext>
-            </a:extLst>
-          </p:cNvPr>
-          <p:cNvSpPr/>
-          <p:nvPr/>
-        </p:nvSpPr>
-        <p:spPr>
-          <a:xfrm>
-            <a:off x="12531382" y="5852264"/>
-            <a:ext cx="1161453" cy="445572"/>
-          </a:xfrm>
-          <a:prstGeom prst="roundRect">
-            <a:avLst/>
-          </a:prstGeom>
-          <a:solidFill>
-            <a:srgbClr val="4472C4">
-              <a:lumMod val="60000"/>
-              <a:lumOff val="40000"/>
-            </a:srgbClr>
-          </a:solidFill>
-          <a:ln w="12700" cap="flat" cmpd="sng" algn="ctr">
-            <a:solidFill>
-              <a:srgbClr val="4472C4">
-                <a:lumMod val="75000"/>
-              </a:srgbClr>
-            </a:solidFill>
-            <a:prstDash val="solid"/>
-            <a:miter lim="800000"/>
-          </a:ln>
-          <a:effectLst>
-            <a:outerShdw blurRad="50800" dist="38100" dir="2700000" algn="tl" rotWithShape="0">
-              <a:prstClr val="black">
-                <a:alpha val="40000"/>
-              </a:prstClr>
-            </a:outerShdw>
-          </a:effectLst>
-        </p:spPr>
-        <p:txBody>
-          <a:bodyPr rtlCol="0" anchor="ctr"/>
-          <a:lstStyle/>
-          <a:p>
-            <a:pPr algn="ctr" defTabSz="914400">
-              <a:defRPr/>
-            </a:pPr>
-            <a:r>
-              <a:rPr lang="de-DE" sz="1050" kern="0">
-                <a:solidFill>
-                  <a:prstClr val="white"/>
-                </a:solidFill>
-                <a:latin typeface="Calibri" panose="020F0502020204030204"/>
-              </a:rPr>
-              <a:t>odu [*]</a:t>
-            </a:r>
-          </a:p>
-        </p:txBody>
-      </p:sp>
-      <p:sp>
-        <p:nvSpPr>
-          <p:cNvPr id="143" name="Rechteck 142">
-            <a:extLst>
-              <a:ext uri="{FF2B5EF4-FFF2-40B4-BE49-F238E27FC236}">
-                <a16:creationId xmlns:a16="http://schemas.microsoft.com/office/drawing/2014/main" id="{0B02FDAE-BC7F-0067-F12A-DA7B5CF0CFD2}"/>
-              </a:ext>
-            </a:extLst>
-          </p:cNvPr>
-          <p:cNvSpPr/>
-          <p:nvPr/>
-        </p:nvSpPr>
-        <p:spPr>
-          <a:xfrm>
-            <a:off x="14274800" y="5914688"/>
-            <a:ext cx="1991421" cy="617361"/>
-          </a:xfrm>
-          <a:prstGeom prst="rect">
-            <a:avLst/>
-          </a:prstGeom>
-          <a:solidFill>
-            <a:sysClr val="window" lastClr="FFFFFF"/>
-          </a:solidFill>
-          <a:ln w="12700" cap="flat" cmpd="sng" algn="ctr">
-            <a:solidFill>
-              <a:srgbClr val="A5A5A5"/>
-            </a:solidFill>
-            <a:prstDash val="solid"/>
-            <a:miter lim="800000"/>
-          </a:ln>
-          <a:effectLst/>
-        </p:spPr>
-        <p:txBody>
-          <a:bodyPr lIns="36000" tIns="36000" rIns="36000" bIns="36000" rtlCol="0" anchor="t"/>
-          <a:lstStyle/>
-          <a:p>
-            <a:pPr defTabSz="914400"/>
-            <a:r>
-              <a:rPr lang="de-DE" sz="800" kern="0">
-                <a:solidFill>
-                  <a:prstClr val="black"/>
-                </a:solidFill>
-                <a:latin typeface="Calibri" panose="020F0502020204030204"/>
-              </a:rPr>
-              <a:t>local-id = [local-id] / [oduUuid]</a:t>
-            </a:r>
-          </a:p>
-          <a:p>
-            <a:pPr defTabSz="914400"/>
-            <a:r>
-              <a:rPr lang="de-DE" sz="800" kern="0">
-                <a:solidFill>
-                  <a:prstClr val="black"/>
-                </a:solidFill>
-                <a:latin typeface="Calibri" panose="020F0502020204030204"/>
-              </a:rPr>
-              <a:t>category=odu</a:t>
-            </a:r>
-          </a:p>
-          <a:p>
-            <a:pPr defTabSz="914400"/>
-            <a:r>
-              <a:rPr lang="de-DE" sz="800" kern="0">
-                <a:solidFill>
-                  <a:prstClr val="black"/>
-                </a:solidFill>
-                <a:latin typeface="Calibri" panose="020F0502020204030204"/>
-              </a:rPr>
-              <a:t>odu-product-code = [oduProductCode] / [???]</a:t>
-            </a:r>
-          </a:p>
-        </p:txBody>
-      </p:sp>
-      <p:cxnSp>
-        <p:nvCxnSpPr>
-          <p:cNvPr id="144" name="Gerade Verbindung mit Pfeil 143">
-            <a:extLst>
-              <a:ext uri="{FF2B5EF4-FFF2-40B4-BE49-F238E27FC236}">
-                <a16:creationId xmlns:a16="http://schemas.microsoft.com/office/drawing/2014/main" id="{C5BAD04C-CAAB-9142-1A9E-BE72A58D1E34}"/>
-              </a:ext>
-            </a:extLst>
-          </p:cNvPr>
-          <p:cNvCxnSpPr>
-            <a:cxnSpLocks/>
-            <a:stCxn id="142" idx="3"/>
-            <a:endCxn id="143" idx="1"/>
-          </p:cNvCxnSpPr>
-          <p:nvPr/>
-        </p:nvCxnSpPr>
-        <p:spPr>
-          <a:xfrm>
-            <a:off x="13692835" y="6075050"/>
-            <a:ext cx="581965" cy="148319"/>
-          </a:xfrm>
-          <a:prstGeom prst="straightConnector1">
-            <a:avLst/>
-          </a:prstGeom>
-          <a:noFill/>
-          <a:ln w="6350" cap="flat" cmpd="sng" algn="ctr">
-            <a:solidFill>
-              <a:srgbClr val="5B9BD5"/>
-            </a:solidFill>
-            <a:prstDash val="solid"/>
-            <a:miter lim="800000"/>
-            <a:tailEnd type="triangle"/>
-          </a:ln>
-          <a:effectLst/>
-        </p:spPr>
-      </p:cxnSp>
-      <p:cxnSp>
-        <p:nvCxnSpPr>
-          <p:cNvPr id="153" name="Gerade Verbindung mit Pfeil 152">
-            <a:extLst>
-              <a:ext uri="{FF2B5EF4-FFF2-40B4-BE49-F238E27FC236}">
-                <a16:creationId xmlns:a16="http://schemas.microsoft.com/office/drawing/2014/main" id="{51D09282-BE07-3240-2165-CB9551908D8C}"/>
-              </a:ext>
-            </a:extLst>
-          </p:cNvPr>
-          <p:cNvCxnSpPr>
-            <a:cxnSpLocks/>
-            <a:stCxn id="142" idx="1"/>
-            <a:endCxn id="70" idx="3"/>
-          </p:cNvCxnSpPr>
-          <p:nvPr/>
-        </p:nvCxnSpPr>
-        <p:spPr>
-          <a:xfrm flipH="1" flipV="1">
-            <a:off x="11262934" y="5629478"/>
-            <a:ext cx="1268448" cy="445572"/>
-          </a:xfrm>
-          <a:prstGeom prst="straightConnector1">
-            <a:avLst/>
-          </a:prstGeom>
-          <a:noFill/>
-          <a:ln w="6350" cap="flat" cmpd="sng" algn="ctr">
-            <a:solidFill>
-              <a:srgbClr val="5B9BD5"/>
-            </a:solidFill>
-            <a:prstDash val="dash"/>
-            <a:miter lim="800000"/>
-            <a:tailEnd type="triangle"/>
-          </a:ln>
-          <a:effectLst/>
-        </p:spPr>
-      </p:cxnSp>
-      <p:cxnSp>
-        <p:nvCxnSpPr>
-          <p:cNvPr id="201" name="Verbinder: gewinkelt 200">
-            <a:extLst>
-              <a:ext uri="{FF2B5EF4-FFF2-40B4-BE49-F238E27FC236}">
-                <a16:creationId xmlns:a16="http://schemas.microsoft.com/office/drawing/2014/main" id="{F434A457-560C-5719-70F2-1BF2B3AF29BE}"/>
-              </a:ext>
-            </a:extLst>
-          </p:cNvPr>
-          <p:cNvCxnSpPr>
-            <a:cxnSpLocks/>
-            <a:stCxn id="117" idx="2"/>
-            <a:endCxn id="87" idx="0"/>
-          </p:cNvCxnSpPr>
-          <p:nvPr/>
-        </p:nvCxnSpPr>
-        <p:spPr>
-          <a:xfrm rot="5400000">
-            <a:off x="5597192" y="-131750"/>
-            <a:ext cx="1119279" cy="7384269"/>
-          </a:xfrm>
-          <a:prstGeom prst="bentConnector3">
-            <a:avLst>
-              <a:gd name="adj1" fmla="val 50000"/>
-            </a:avLst>
-          </a:prstGeom>
-          <a:noFill/>
-          <a:ln w="6350" cap="flat" cmpd="sng" algn="ctr">
-            <a:solidFill>
-              <a:srgbClr val="5B9BD5"/>
-            </a:solidFill>
-            <a:prstDash val="solid"/>
-            <a:miter lim="800000"/>
-            <a:tailEnd type="triangle"/>
-          </a:ln>
-          <a:effectLst/>
-        </p:spPr>
-      </p:cxnSp>
-      <p:sp>
-        <p:nvSpPr>
-          <p:cNvPr id="227" name="Rechteck 226">
-            <a:extLst>
-              <a:ext uri="{FF2B5EF4-FFF2-40B4-BE49-F238E27FC236}">
-                <a16:creationId xmlns:a16="http://schemas.microsoft.com/office/drawing/2014/main" id="{60042F2A-086F-992C-ED74-613AD545715C}"/>
-              </a:ext>
-            </a:extLst>
-          </p:cNvPr>
-          <p:cNvSpPr/>
-          <p:nvPr/>
-        </p:nvSpPr>
-        <p:spPr>
-          <a:xfrm>
-            <a:off x="5673917" y="5313523"/>
-            <a:ext cx="965827" cy="274997"/>
-          </a:xfrm>
-          <a:prstGeom prst="rect">
-            <a:avLst/>
-          </a:prstGeom>
-          <a:solidFill>
-            <a:srgbClr val="FFFF00"/>
-          </a:solidFill>
-          <a:ln w="12700" cap="flat" cmpd="sng" algn="ctr">
-            <a:noFill/>
-            <a:prstDash val="solid"/>
-            <a:miter lim="800000"/>
-          </a:ln>
-          <a:effectLst/>
-        </p:spPr>
-        <p:txBody>
-          <a:bodyPr lIns="36000" tIns="36000" rIns="36000" bIns="36000" rtlCol="0" anchor="t"/>
-          <a:lstStyle/>
-          <a:p>
-            <a:pPr defTabSz="914400"/>
-            <a:r>
-              <a:rPr lang="de-DE" sz="800" kern="0">
-                <a:solidFill>
-                  <a:prstClr val="black"/>
-                </a:solidFill>
-                <a:latin typeface="Calibri" panose="020F0502020204030204"/>
-              </a:rPr>
-              <a:t>Potential proposal: </a:t>
-            </a:r>
-          </a:p>
-          <a:p>
-            <a:pPr defTabSz="914400"/>
-            <a:r>
-              <a:rPr lang="de-DE" sz="800" kern="0">
-                <a:solidFill>
-                  <a:prstClr val="black"/>
-                </a:solidFill>
-                <a:latin typeface="Calibri" panose="020F0502020204030204"/>
-              </a:rPr>
-              <a:t>2 reliability-scores</a:t>
-            </a:r>
-          </a:p>
-        </p:txBody>
-      </p:sp>
-      <p:sp>
-        <p:nvSpPr>
-          <p:cNvPr id="237" name="Abgerundetes Rechteck 1">
-            <a:extLst>
-              <a:ext uri="{FF2B5EF4-FFF2-40B4-BE49-F238E27FC236}">
-                <a16:creationId xmlns:a16="http://schemas.microsoft.com/office/drawing/2014/main" id="{204A75B0-A4CA-00F1-522F-FA58AA84F06C}"/>
-              </a:ext>
-            </a:extLst>
-          </p:cNvPr>
-          <p:cNvSpPr/>
-          <p:nvPr/>
-        </p:nvSpPr>
-        <p:spPr>
-          <a:xfrm>
-            <a:off x="10731009" y="7430424"/>
-            <a:ext cx="537299" cy="445572"/>
-          </a:xfrm>
-          <a:prstGeom prst="roundRect">
-            <a:avLst/>
-          </a:prstGeom>
-          <a:solidFill>
-            <a:sysClr val="window" lastClr="FFFFFF">
-              <a:lumMod val="65000"/>
-            </a:sysClr>
-          </a:solidFill>
-          <a:ln w="12700" cap="flat" cmpd="sng" algn="ctr">
-            <a:solidFill>
-              <a:sysClr val="window" lastClr="FFFFFF">
-                <a:lumMod val="50000"/>
-              </a:sysClr>
-            </a:solidFill>
-            <a:prstDash val="solid"/>
-            <a:miter lim="800000"/>
-          </a:ln>
-          <a:effectLst>
-            <a:outerShdw blurRad="50800" dist="38100" dir="2700000" algn="tl" rotWithShape="0">
-              <a:prstClr val="black">
-                <a:alpha val="40000"/>
-              </a:prstClr>
-            </a:outerShdw>
-          </a:effectLst>
-        </p:spPr>
-        <p:txBody>
-          <a:bodyPr rtlCol="0" anchor="ctr"/>
-          <a:lstStyle/>
-          <a:p>
-            <a:pPr algn="ctr" defTabSz="914400">
-              <a:defRPr/>
-            </a:pPr>
-            <a:r>
-              <a:rPr lang="de-DE" sz="1050" kern="0">
-                <a:solidFill>
-                  <a:prstClr val="white"/>
-                </a:solidFill>
-                <a:latin typeface="Calibri" panose="020F0502020204030204"/>
-              </a:rPr>
-              <a:t>C</a:t>
-            </a:r>
-            <a:endParaRPr lang="de-DE" sz="1050" kern="0" dirty="0">
-              <a:solidFill>
-                <a:prstClr val="white"/>
-              </a:solidFill>
-              <a:latin typeface="Calibri" panose="020F0502020204030204"/>
-            </a:endParaRPr>
-          </a:p>
-        </p:txBody>
-      </p:sp>
-      <p:cxnSp>
-        <p:nvCxnSpPr>
-          <p:cNvPr id="239" name="Gerade Verbindung mit Pfeil 238">
-            <a:extLst>
-              <a:ext uri="{FF2B5EF4-FFF2-40B4-BE49-F238E27FC236}">
-                <a16:creationId xmlns:a16="http://schemas.microsoft.com/office/drawing/2014/main" id="{72681938-662A-B349-E2A6-0503C5198615}"/>
-              </a:ext>
-            </a:extLst>
-          </p:cNvPr>
-          <p:cNvCxnSpPr>
-            <a:cxnSpLocks/>
-            <a:stCxn id="70" idx="2"/>
-            <a:endCxn id="237" idx="0"/>
-          </p:cNvCxnSpPr>
-          <p:nvPr/>
-        </p:nvCxnSpPr>
-        <p:spPr>
-          <a:xfrm>
-            <a:off x="10994285" y="5852264"/>
-            <a:ext cx="5374" cy="1578160"/>
-          </a:xfrm>
-          <a:prstGeom prst="straightConnector1">
-            <a:avLst/>
-          </a:prstGeom>
-          <a:noFill/>
-          <a:ln w="6350" cap="flat" cmpd="sng" algn="ctr">
-            <a:solidFill>
-              <a:srgbClr val="5B9BD5"/>
-            </a:solidFill>
-            <a:prstDash val="solid"/>
-            <a:miter lim="800000"/>
-            <a:tailEnd type="triangle"/>
-          </a:ln>
-          <a:effectLst/>
-        </p:spPr>
-      </p:cxnSp>
-      <p:sp>
-        <p:nvSpPr>
-          <p:cNvPr id="250" name="Rechteck 249">
-            <a:extLst>
-              <a:ext uri="{FF2B5EF4-FFF2-40B4-BE49-F238E27FC236}">
-                <a16:creationId xmlns:a16="http://schemas.microsoft.com/office/drawing/2014/main" id="{2648814B-D7C0-E5A7-C295-B408EF5A1A68}"/>
-              </a:ext>
-            </a:extLst>
-          </p:cNvPr>
-          <p:cNvSpPr/>
-          <p:nvPr/>
-        </p:nvSpPr>
-        <p:spPr>
-          <a:xfrm>
-            <a:off x="5705470" y="5738968"/>
-            <a:ext cx="965827" cy="274997"/>
-          </a:xfrm>
-          <a:prstGeom prst="rect">
-            <a:avLst/>
-          </a:prstGeom>
-          <a:solidFill>
-            <a:srgbClr val="FFFF00"/>
-          </a:solidFill>
-          <a:ln w="12700" cap="flat" cmpd="sng" algn="ctr">
-            <a:noFill/>
-            <a:prstDash val="solid"/>
-            <a:miter lim="800000"/>
-          </a:ln>
-          <a:effectLst/>
-        </p:spPr>
-        <p:txBody>
-          <a:bodyPr lIns="36000" tIns="36000" rIns="36000" bIns="36000" rtlCol="0" anchor="t"/>
-          <a:lstStyle/>
-          <a:p>
-            <a:pPr defTabSz="914400"/>
-            <a:r>
-              <a:rPr lang="de-DE" sz="800" kern="0">
-                <a:solidFill>
-                  <a:prstClr val="black"/>
-                </a:solidFill>
-                <a:latin typeface="Calibri" panose="020F0502020204030204"/>
-              </a:rPr>
-              <a:t>Can we avoid the [*] at equipment?</a:t>
-            </a:r>
-          </a:p>
-        </p:txBody>
-      </p:sp>
-      <p:sp>
-        <p:nvSpPr>
-          <p:cNvPr id="268" name="Rechteck 267">
-            <a:extLst>
-              <a:ext uri="{FF2B5EF4-FFF2-40B4-BE49-F238E27FC236}">
-                <a16:creationId xmlns:a16="http://schemas.microsoft.com/office/drawing/2014/main" id="{6E57A78B-A199-2407-1F9F-66A714E22ED9}"/>
-              </a:ext>
-            </a:extLst>
-          </p:cNvPr>
-          <p:cNvSpPr/>
-          <p:nvPr/>
-        </p:nvSpPr>
-        <p:spPr>
-          <a:xfrm>
-            <a:off x="5312905" y="4439660"/>
-            <a:ext cx="1476479" cy="274997"/>
-          </a:xfrm>
-          <a:prstGeom prst="rect">
-            <a:avLst/>
-          </a:prstGeom>
-          <a:solidFill>
-            <a:srgbClr val="FFFF00"/>
-          </a:solidFill>
-          <a:ln w="12700" cap="flat" cmpd="sng" algn="ctr">
-            <a:noFill/>
-            <a:prstDash val="solid"/>
-            <a:miter lim="800000"/>
-          </a:ln>
-          <a:effectLst/>
-        </p:spPr>
-        <p:txBody>
-          <a:bodyPr lIns="36000" tIns="36000" rIns="36000" bIns="36000" rtlCol="0" anchor="t"/>
-          <a:lstStyle/>
-          <a:p>
-            <a:pPr defTabSz="914400"/>
-            <a:r>
-              <a:rPr lang="de-DE" sz="800" kern="0">
-                <a:solidFill>
-                  <a:prstClr val="black"/>
-                </a:solidFill>
-                <a:latin typeface="Calibri" panose="020F0502020204030204"/>
-              </a:rPr>
-              <a:t>if not needed, </a:t>
-            </a:r>
-          </a:p>
-          <a:p>
-            <a:pPr defTabSz="914400"/>
-            <a:r>
-              <a:rPr lang="de-DE" sz="800" kern="0">
-                <a:solidFill>
-                  <a:prstClr val="black"/>
-                </a:solidFill>
-                <a:latin typeface="Calibri" panose="020F0502020204030204"/>
-              </a:rPr>
-              <a:t>_template and P can be deleted</a:t>
-            </a:r>
-          </a:p>
-        </p:txBody>
-      </p:sp>
-      <p:sp>
-        <p:nvSpPr>
-          <p:cNvPr id="269" name="Rechteck 268">
-            <a:extLst>
-              <a:ext uri="{FF2B5EF4-FFF2-40B4-BE49-F238E27FC236}">
-                <a16:creationId xmlns:a16="http://schemas.microsoft.com/office/drawing/2014/main" id="{EBA4C1DC-89DA-0390-E6D1-705D3E130530}"/>
-              </a:ext>
-            </a:extLst>
-          </p:cNvPr>
-          <p:cNvSpPr/>
-          <p:nvPr/>
-        </p:nvSpPr>
-        <p:spPr>
-          <a:xfrm>
-            <a:off x="5626898" y="2850297"/>
-            <a:ext cx="1476479" cy="274997"/>
-          </a:xfrm>
-          <a:prstGeom prst="rect">
-            <a:avLst/>
-          </a:prstGeom>
-          <a:solidFill>
-            <a:srgbClr val="FFFF00"/>
-          </a:solidFill>
-          <a:ln w="12700" cap="flat" cmpd="sng" algn="ctr">
-            <a:noFill/>
-            <a:prstDash val="solid"/>
-            <a:miter lim="800000"/>
-          </a:ln>
-          <a:effectLst/>
-        </p:spPr>
-        <p:txBody>
-          <a:bodyPr lIns="36000" tIns="36000" rIns="36000" bIns="36000" rtlCol="0" anchor="t"/>
-          <a:lstStyle/>
-          <a:p>
-            <a:pPr defTabSz="914400"/>
-            <a:r>
-              <a:rPr lang="de-DE" sz="800" kern="0">
-                <a:solidFill>
-                  <a:prstClr val="black"/>
-                </a:solidFill>
-                <a:latin typeface="Calibri" panose="020F0502020204030204"/>
-              </a:rPr>
-              <a:t>if not needed, </a:t>
-            </a:r>
-          </a:p>
-          <a:p>
-            <a:pPr defTabSz="914400"/>
-            <a:r>
-              <a:rPr lang="de-DE" sz="800" kern="0">
-                <a:solidFill>
-                  <a:prstClr val="black"/>
-                </a:solidFill>
-                <a:latin typeface="Calibri" panose="020F0502020204030204"/>
-              </a:rPr>
-              <a:t>_template and P can be deleted</a:t>
-            </a:r>
-          </a:p>
-        </p:txBody>
-      </p:sp>
-      <p:sp>
-        <p:nvSpPr>
-          <p:cNvPr id="271" name="Abgerundetes Rechteck 1">
-            <a:extLst>
-              <a:ext uri="{FF2B5EF4-FFF2-40B4-BE49-F238E27FC236}">
-                <a16:creationId xmlns:a16="http://schemas.microsoft.com/office/drawing/2014/main" id="{6F0585D7-D3B8-0B16-593B-3AA1C9E75BC2}"/>
-              </a:ext>
-            </a:extLst>
-          </p:cNvPr>
-          <p:cNvSpPr/>
-          <p:nvPr/>
-        </p:nvSpPr>
-        <p:spPr>
-          <a:xfrm>
-            <a:off x="11285777" y="6651770"/>
-            <a:ext cx="537299" cy="445572"/>
-          </a:xfrm>
-          <a:prstGeom prst="roundRect">
-            <a:avLst/>
-          </a:prstGeom>
-          <a:solidFill>
-            <a:sysClr val="window" lastClr="FFFFFF">
-              <a:lumMod val="65000"/>
-            </a:sysClr>
-          </a:solidFill>
-          <a:ln w="12700" cap="flat" cmpd="sng" algn="ctr">
-            <a:solidFill>
-              <a:sysClr val="window" lastClr="FFFFFF">
-                <a:lumMod val="50000"/>
-              </a:sysClr>
-            </a:solidFill>
-            <a:prstDash val="solid"/>
-            <a:miter lim="800000"/>
-          </a:ln>
-          <a:effectLst>
-            <a:outerShdw blurRad="50800" dist="38100" dir="2700000" algn="tl" rotWithShape="0">
-              <a:prstClr val="black">
-                <a:alpha val="40000"/>
-              </a:prstClr>
-            </a:outerShdw>
-          </a:effectLst>
-        </p:spPr>
-        <p:txBody>
-          <a:bodyPr rtlCol="0" anchor="ctr"/>
-          <a:lstStyle/>
-          <a:p>
-            <a:pPr algn="ctr" defTabSz="914400">
-              <a:defRPr/>
-            </a:pPr>
-            <a:r>
-              <a:rPr lang="de-DE" sz="1050" kern="0">
-                <a:solidFill>
-                  <a:prstClr val="white"/>
-                </a:solidFill>
-                <a:latin typeface="Calibri" panose="020F0502020204030204"/>
-              </a:rPr>
-              <a:t>H</a:t>
-            </a:r>
-            <a:endParaRPr lang="de-DE" sz="1050" kern="0" dirty="0">
-              <a:solidFill>
-                <a:prstClr val="white"/>
-              </a:solidFill>
-              <a:latin typeface="Calibri" panose="020F0502020204030204"/>
-            </a:endParaRPr>
-          </a:p>
-        </p:txBody>
-      </p:sp>
-      <p:cxnSp>
-        <p:nvCxnSpPr>
-          <p:cNvPr id="272" name="Gerade Verbindung mit Pfeil 271">
-            <a:extLst>
-              <a:ext uri="{FF2B5EF4-FFF2-40B4-BE49-F238E27FC236}">
-                <a16:creationId xmlns:a16="http://schemas.microsoft.com/office/drawing/2014/main" id="{3B2799C1-CB06-E289-B7D6-C789A2E5EC56}"/>
-              </a:ext>
-            </a:extLst>
-          </p:cNvPr>
-          <p:cNvCxnSpPr>
-            <a:cxnSpLocks/>
-            <a:stCxn id="70" idx="2"/>
-            <a:endCxn id="271" idx="0"/>
-          </p:cNvCxnSpPr>
-          <p:nvPr/>
-        </p:nvCxnSpPr>
-        <p:spPr>
-          <a:xfrm>
-            <a:off x="10994285" y="5852264"/>
-            <a:ext cx="560142" cy="799506"/>
-          </a:xfrm>
-          <a:prstGeom prst="straightConnector1">
-            <a:avLst/>
-          </a:prstGeom>
-          <a:noFill/>
-          <a:ln w="6350" cap="flat" cmpd="sng" algn="ctr">
-            <a:solidFill>
-              <a:srgbClr val="5B9BD5"/>
-            </a:solidFill>
-            <a:prstDash val="solid"/>
-            <a:miter lim="800000"/>
-            <a:tailEnd type="triangle"/>
-          </a:ln>
-          <a:effectLst/>
-        </p:spPr>
-      </p:cxnSp>
-      <p:sp>
-        <p:nvSpPr>
-          <p:cNvPr id="283" name="Rechteck 282">
-            <a:extLst>
-              <a:ext uri="{FF2B5EF4-FFF2-40B4-BE49-F238E27FC236}">
-                <a16:creationId xmlns:a16="http://schemas.microsoft.com/office/drawing/2014/main" id="{3BA19841-BCE3-097C-31B2-1AF04A162D8A}"/>
-              </a:ext>
-            </a:extLst>
-          </p:cNvPr>
-          <p:cNvSpPr/>
-          <p:nvPr/>
-        </p:nvSpPr>
-        <p:spPr>
-          <a:xfrm>
-            <a:off x="12541165" y="6641538"/>
-            <a:ext cx="1685583" cy="504257"/>
-          </a:xfrm>
-          <a:prstGeom prst="rect">
-            <a:avLst/>
-          </a:prstGeom>
-          <a:solidFill>
-            <a:sysClr val="window" lastClr="FFFFFF"/>
-          </a:solidFill>
-          <a:ln w="12700" cap="flat" cmpd="sng" algn="ctr">
-            <a:solidFill>
-              <a:srgbClr val="A5A5A5"/>
-            </a:solidFill>
-            <a:prstDash val="solid"/>
-            <a:miter lim="800000"/>
-          </a:ln>
-          <a:effectLst/>
-        </p:spPr>
-        <p:txBody>
-          <a:bodyPr lIns="36000" tIns="36000" rIns="36000" bIns="36000" rtlCol="0" anchor="t"/>
-          <a:lstStyle/>
-          <a:p>
-            <a:pPr defTabSz="914400"/>
-            <a:r>
-              <a:rPr lang="de-DE" sz="800" kern="0">
-                <a:solidFill>
-                  <a:prstClr val="black"/>
-                </a:solidFill>
-                <a:latin typeface="Calibri" panose="020F0502020204030204"/>
-              </a:rPr>
-              <a:t>local-id = [local-id] / [local-id]</a:t>
-            </a:r>
-          </a:p>
-          <a:p>
-            <a:pPr defTabSz="914400"/>
-            <a:r>
-              <a:rPr lang="de-DE" sz="800" kern="0">
-                <a:solidFill>
-                  <a:prstClr val="black"/>
-                </a:solidFill>
-                <a:latin typeface="Calibri" panose="020F0502020204030204"/>
-              </a:rPr>
-              <a:t>card-slot = [cardSlot] / [???]</a:t>
-            </a:r>
-          </a:p>
-          <a:p>
-            <a:pPr defTabSz="914400"/>
-            <a:r>
-              <a:rPr lang="de-DE" sz="800" kern="0">
-                <a:solidFill>
-                  <a:prstClr val="black"/>
-                </a:solidFill>
-                <a:latin typeface="Calibri" panose="020F0502020204030204"/>
-              </a:rPr>
-              <a:t>_modem = [local-id] / [modemUuid]</a:t>
-            </a:r>
-          </a:p>
-        </p:txBody>
-      </p:sp>
-      <p:cxnSp>
-        <p:nvCxnSpPr>
-          <p:cNvPr id="284" name="Gerade Verbindung mit Pfeil 283">
-            <a:extLst>
-              <a:ext uri="{FF2B5EF4-FFF2-40B4-BE49-F238E27FC236}">
-                <a16:creationId xmlns:a16="http://schemas.microsoft.com/office/drawing/2014/main" id="{A7C25ACE-4B97-6609-6D23-8E785CA3E4EE}"/>
-              </a:ext>
-            </a:extLst>
-          </p:cNvPr>
-          <p:cNvCxnSpPr>
-            <a:cxnSpLocks/>
-            <a:stCxn id="271" idx="3"/>
-            <a:endCxn id="283" idx="1"/>
-          </p:cNvCxnSpPr>
-          <p:nvPr/>
-        </p:nvCxnSpPr>
-        <p:spPr>
-          <a:xfrm>
-            <a:off x="11823076" y="6874556"/>
-            <a:ext cx="718089" cy="19111"/>
-          </a:xfrm>
-          <a:prstGeom prst="straightConnector1">
-            <a:avLst/>
-          </a:prstGeom>
-          <a:noFill/>
-          <a:ln w="6350" cap="flat" cmpd="sng" algn="ctr">
-            <a:solidFill>
-              <a:srgbClr val="5B9BD5"/>
-            </a:solidFill>
-            <a:prstDash val="solid"/>
-            <a:miter lim="800000"/>
-            <a:tailEnd type="triangle"/>
-          </a:ln>
-          <a:effectLst/>
-        </p:spPr>
-      </p:cxnSp>
     </p:spTree>
     <p:extLst>
       <p:ext uri="{BB962C8B-B14F-4D97-AF65-F5344CB8AC3E}">
-        <p14:creationId xmlns:p14="http://schemas.microsoft.com/office/powerpoint/2010/main" val="1618497423"/>
+        <p14:creationId xmlns:p14="http://schemas.microsoft.com/office/powerpoint/2010/main" val="2841036230"/>
       </p:ext>
     </p:extLst>
   </p:cSld>
@@ -7199,6 +5311,3329 @@
       </p:grpSpPr>
       <p:sp>
         <p:nvSpPr>
+          <p:cNvPr id="218" name="Rechteck 217">
+            <a:extLst>
+              <a:ext uri="{FF2B5EF4-FFF2-40B4-BE49-F238E27FC236}">
+                <a16:creationId xmlns:a16="http://schemas.microsoft.com/office/drawing/2014/main" id="{2C8F2BC9-51B6-D7C0-421E-11A9A43DA250}"/>
+              </a:ext>
+            </a:extLst>
+          </p:cNvPr>
+          <p:cNvSpPr/>
+          <p:nvPr/>
+        </p:nvSpPr>
+        <p:spPr>
+          <a:xfrm>
+            <a:off x="1548387" y="128835"/>
+            <a:ext cx="15456877" cy="8679263"/>
+          </a:xfrm>
+          <a:prstGeom prst="rect">
+            <a:avLst/>
+          </a:prstGeom>
+          <a:solidFill>
+            <a:schemeClr val="bg1">
+              <a:lumMod val="95000"/>
+            </a:schemeClr>
+          </a:solidFill>
+          <a:ln>
+            <a:noFill/>
+          </a:ln>
+        </p:spPr>
+        <p:style>
+          <a:lnRef idx="2">
+            <a:schemeClr val="accent1">
+              <a:shade val="15000"/>
+            </a:schemeClr>
+          </a:lnRef>
+          <a:fillRef idx="1">
+            <a:schemeClr val="accent1"/>
+          </a:fillRef>
+          <a:effectRef idx="0">
+            <a:schemeClr val="accent1"/>
+          </a:effectRef>
+          <a:fontRef idx="minor">
+            <a:schemeClr val="lt1"/>
+          </a:fontRef>
+        </p:style>
+        <p:txBody>
+          <a:bodyPr rtlCol="0" anchor="t"/>
+          <a:lstStyle/>
+          <a:p>
+            <a:pPr algn="r"/>
+            <a:r>
+              <a:rPr lang="de-DE" sz="1400">
+                <a:solidFill>
+                  <a:schemeClr val="tx1"/>
+                </a:solidFill>
+              </a:rPr>
+              <a:t>LILW-Domain</a:t>
+            </a:r>
+          </a:p>
+        </p:txBody>
+      </p:sp>
+      <p:sp>
+        <p:nvSpPr>
+          <p:cNvPr id="211" name="Rechteck 210">
+            <a:extLst>
+              <a:ext uri="{FF2B5EF4-FFF2-40B4-BE49-F238E27FC236}">
+                <a16:creationId xmlns:a16="http://schemas.microsoft.com/office/drawing/2014/main" id="{C1EFB502-BFB0-C3A7-D252-FF3C381A4DB7}"/>
+              </a:ext>
+            </a:extLst>
+          </p:cNvPr>
+          <p:cNvSpPr/>
+          <p:nvPr/>
+        </p:nvSpPr>
+        <p:spPr>
+          <a:xfrm>
+            <a:off x="1794584" y="2341094"/>
+            <a:ext cx="14929326" cy="6219486"/>
+          </a:xfrm>
+          <a:prstGeom prst="rect">
+            <a:avLst/>
+          </a:prstGeom>
+          <a:solidFill>
+            <a:schemeClr val="bg1">
+              <a:lumMod val="75000"/>
+            </a:schemeClr>
+          </a:solidFill>
+          <a:ln>
+            <a:noFill/>
+          </a:ln>
+        </p:spPr>
+        <p:style>
+          <a:lnRef idx="2">
+            <a:schemeClr val="accent1">
+              <a:shade val="15000"/>
+            </a:schemeClr>
+          </a:lnRef>
+          <a:fillRef idx="1">
+            <a:schemeClr val="accent1"/>
+          </a:fillRef>
+          <a:effectRef idx="0">
+            <a:schemeClr val="accent1"/>
+          </a:effectRef>
+          <a:fontRef idx="minor">
+            <a:schemeClr val="lt1"/>
+          </a:fontRef>
+        </p:style>
+        <p:txBody>
+          <a:bodyPr rtlCol="0" anchor="t"/>
+          <a:lstStyle/>
+          <a:p>
+            <a:pPr algn="r"/>
+            <a:r>
+              <a:rPr lang="de-DE" sz="1400">
+                <a:solidFill>
+                  <a:schemeClr val="tx1"/>
+                </a:solidFill>
+              </a:rPr>
+              <a:t>Network</a:t>
+            </a:r>
+          </a:p>
+        </p:txBody>
+      </p:sp>
+      <p:sp>
+        <p:nvSpPr>
+          <p:cNvPr id="210" name="Rechteck 209">
+            <a:extLst>
+              <a:ext uri="{FF2B5EF4-FFF2-40B4-BE49-F238E27FC236}">
+                <a16:creationId xmlns:a16="http://schemas.microsoft.com/office/drawing/2014/main" id="{3E682F4F-1921-DBCC-1F22-B788C655D5FB}"/>
+              </a:ext>
+            </a:extLst>
+          </p:cNvPr>
+          <p:cNvSpPr/>
+          <p:nvPr/>
+        </p:nvSpPr>
+        <p:spPr>
+          <a:xfrm>
+            <a:off x="3968228" y="3845387"/>
+            <a:ext cx="12482387" cy="4468144"/>
+          </a:xfrm>
+          <a:prstGeom prst="rect">
+            <a:avLst/>
+          </a:prstGeom>
+          <a:solidFill>
+            <a:schemeClr val="accent4">
+              <a:lumMod val="20000"/>
+              <a:lumOff val="80000"/>
+            </a:schemeClr>
+          </a:solidFill>
+          <a:ln>
+            <a:noFill/>
+          </a:ln>
+        </p:spPr>
+        <p:style>
+          <a:lnRef idx="2">
+            <a:schemeClr val="accent1">
+              <a:shade val="15000"/>
+            </a:schemeClr>
+          </a:lnRef>
+          <a:fillRef idx="1">
+            <a:schemeClr val="accent1"/>
+          </a:fillRef>
+          <a:effectRef idx="0">
+            <a:schemeClr val="accent1"/>
+          </a:effectRef>
+          <a:fontRef idx="minor">
+            <a:schemeClr val="lt1"/>
+          </a:fontRef>
+        </p:style>
+        <p:txBody>
+          <a:bodyPr rtlCol="0" anchor="t"/>
+          <a:lstStyle/>
+          <a:p>
+            <a:pPr algn="r"/>
+            <a:r>
+              <a:rPr lang="de-DE" sz="1400">
+                <a:solidFill>
+                  <a:schemeClr val="tx1"/>
+                </a:solidFill>
+              </a:rPr>
+              <a:t>Device</a:t>
+            </a:r>
+          </a:p>
+        </p:txBody>
+      </p:sp>
+      <p:sp>
+        <p:nvSpPr>
+          <p:cNvPr id="216" name="Abgerundetes Rechteck 1">
+            <a:extLst>
+              <a:ext uri="{FF2B5EF4-FFF2-40B4-BE49-F238E27FC236}">
+                <a16:creationId xmlns:a16="http://schemas.microsoft.com/office/drawing/2014/main" id="{E4A62BC8-924C-84E9-9ED3-A6A081AB7FE4}"/>
+              </a:ext>
+            </a:extLst>
+          </p:cNvPr>
+          <p:cNvSpPr/>
+          <p:nvPr/>
+        </p:nvSpPr>
+        <p:spPr>
+          <a:xfrm>
+            <a:off x="9580314" y="4114937"/>
+            <a:ext cx="537299" cy="445572"/>
+          </a:xfrm>
+          <a:prstGeom prst="roundRect">
+            <a:avLst/>
+          </a:prstGeom>
+          <a:solidFill>
+            <a:sysClr val="window" lastClr="FFFFFF">
+              <a:lumMod val="65000"/>
+            </a:sysClr>
+          </a:solidFill>
+          <a:ln w="12700" cap="flat" cmpd="sng" algn="ctr">
+            <a:solidFill>
+              <a:sysClr val="window" lastClr="FFFFFF">
+                <a:lumMod val="50000"/>
+              </a:sysClr>
+            </a:solidFill>
+            <a:prstDash val="solid"/>
+            <a:miter lim="800000"/>
+          </a:ln>
+          <a:effectLst>
+            <a:outerShdw blurRad="50800" dist="38100" dir="2700000" algn="tl" rotWithShape="0">
+              <a:prstClr val="black">
+                <a:alpha val="40000"/>
+              </a:prstClr>
+            </a:outerShdw>
+          </a:effectLst>
+        </p:spPr>
+        <p:txBody>
+          <a:bodyPr rtlCol="0" anchor="ctr"/>
+          <a:lstStyle/>
+          <a:p>
+            <a:pPr algn="ctr" defTabSz="914400">
+              <a:defRPr/>
+            </a:pPr>
+            <a:r>
+              <a:rPr lang="de-DE" sz="1050" kern="0" dirty="0">
+                <a:solidFill>
+                  <a:prstClr val="white"/>
+                </a:solidFill>
+                <a:latin typeface="Calibri" panose="020F0502020204030204"/>
+              </a:rPr>
+              <a:t>CC</a:t>
+            </a:r>
+          </a:p>
+        </p:txBody>
+      </p:sp>
+      <p:cxnSp>
+        <p:nvCxnSpPr>
+          <p:cNvPr id="219" name="Gerade Verbindung mit Pfeil 218">
+            <a:extLst>
+              <a:ext uri="{FF2B5EF4-FFF2-40B4-BE49-F238E27FC236}">
+                <a16:creationId xmlns:a16="http://schemas.microsoft.com/office/drawing/2014/main" id="{F3812ADC-C552-3888-AD96-B6C6C4A66D2D}"/>
+              </a:ext>
+            </a:extLst>
+          </p:cNvPr>
+          <p:cNvCxnSpPr>
+            <a:cxnSpLocks/>
+            <a:stCxn id="216" idx="2"/>
+            <a:endCxn id="25" idx="0"/>
+          </p:cNvCxnSpPr>
+          <p:nvPr/>
+        </p:nvCxnSpPr>
+        <p:spPr>
+          <a:xfrm>
+            <a:off x="9848964" y="4560509"/>
+            <a:ext cx="0" cy="837717"/>
+          </a:xfrm>
+          <a:prstGeom prst="straightConnector1">
+            <a:avLst/>
+          </a:prstGeom>
+          <a:noFill/>
+          <a:ln w="6350" cap="flat" cmpd="sng" algn="ctr">
+            <a:solidFill>
+              <a:srgbClr val="5B9BD5"/>
+            </a:solidFill>
+            <a:prstDash val="solid"/>
+            <a:miter lim="800000"/>
+            <a:tailEnd type="triangle"/>
+          </a:ln>
+          <a:effectLst/>
+        </p:spPr>
+      </p:cxnSp>
+      <p:sp>
+        <p:nvSpPr>
+          <p:cNvPr id="223" name="Abgerundetes Rechteck 89">
+            <a:extLst>
+              <a:ext uri="{FF2B5EF4-FFF2-40B4-BE49-F238E27FC236}">
+                <a16:creationId xmlns:a16="http://schemas.microsoft.com/office/drawing/2014/main" id="{044D5B40-A091-29AF-E39A-C4A69555BAD1}"/>
+              </a:ext>
+            </a:extLst>
+          </p:cNvPr>
+          <p:cNvSpPr/>
+          <p:nvPr/>
+        </p:nvSpPr>
+        <p:spPr>
+          <a:xfrm>
+            <a:off x="7150414" y="6646131"/>
+            <a:ext cx="1161453" cy="445572"/>
+          </a:xfrm>
+          <a:prstGeom prst="roundRect">
+            <a:avLst/>
+          </a:prstGeom>
+          <a:solidFill>
+            <a:srgbClr val="4472C4">
+              <a:lumMod val="60000"/>
+              <a:lumOff val="40000"/>
+            </a:srgbClr>
+          </a:solidFill>
+          <a:ln w="12700" cap="flat" cmpd="sng" algn="ctr">
+            <a:solidFill>
+              <a:srgbClr val="4472C4">
+                <a:lumMod val="75000"/>
+              </a:srgbClr>
+            </a:solidFill>
+            <a:prstDash val="solid"/>
+            <a:miter lim="800000"/>
+          </a:ln>
+          <a:effectLst>
+            <a:outerShdw blurRad="50800" dist="38100" dir="2700000" algn="tl" rotWithShape="0">
+              <a:prstClr val="black">
+                <a:alpha val="40000"/>
+              </a:prstClr>
+            </a:outerShdw>
+          </a:effectLst>
+        </p:spPr>
+        <p:txBody>
+          <a:bodyPr rtlCol="0" anchor="ctr"/>
+          <a:lstStyle/>
+          <a:p>
+            <a:pPr algn="ctr" defTabSz="914400">
+              <a:defRPr/>
+            </a:pPr>
+            <a:r>
+              <a:rPr lang="de-DE" sz="1050" kern="0">
+                <a:solidFill>
+                  <a:prstClr val="white"/>
+                </a:solidFill>
+                <a:latin typeface="Calibri" panose="020F0502020204030204"/>
+              </a:rPr>
+              <a:t>AirInterface [*]</a:t>
+            </a:r>
+          </a:p>
+        </p:txBody>
+      </p:sp>
+      <p:sp>
+        <p:nvSpPr>
+          <p:cNvPr id="232" name="Rechteck 231">
+            <a:extLst>
+              <a:ext uri="{FF2B5EF4-FFF2-40B4-BE49-F238E27FC236}">
+                <a16:creationId xmlns:a16="http://schemas.microsoft.com/office/drawing/2014/main" id="{D24AFCEE-3415-2633-C02F-42F690432881}"/>
+              </a:ext>
+            </a:extLst>
+          </p:cNvPr>
+          <p:cNvSpPr/>
+          <p:nvPr/>
+        </p:nvSpPr>
+        <p:spPr>
+          <a:xfrm>
+            <a:off x="4247720" y="6983494"/>
+            <a:ext cx="2329089" cy="1120035"/>
+          </a:xfrm>
+          <a:prstGeom prst="rect">
+            <a:avLst/>
+          </a:prstGeom>
+          <a:solidFill>
+            <a:sysClr val="window" lastClr="FFFFFF"/>
+          </a:solidFill>
+          <a:ln w="12700" cap="flat" cmpd="sng" algn="ctr">
+            <a:solidFill>
+              <a:srgbClr val="A5A5A5"/>
+            </a:solidFill>
+            <a:prstDash val="solid"/>
+            <a:miter lim="800000"/>
+          </a:ln>
+          <a:effectLst/>
+        </p:spPr>
+        <p:txBody>
+          <a:bodyPr lIns="36000" tIns="36000" rIns="36000" bIns="36000" rtlCol="0" anchor="t"/>
+          <a:lstStyle/>
+          <a:p>
+            <a:pPr defTabSz="914400"/>
+            <a:r>
+              <a:rPr lang="de-DE" sz="800" kern="0">
+                <a:solidFill>
+                  <a:prstClr val="black"/>
+                </a:solidFill>
+                <a:latin typeface="Calibri" panose="020F0502020204030204"/>
+              </a:rPr>
+              <a:t>local-id = 0 / [local-id]</a:t>
+            </a:r>
+          </a:p>
+          <a:p>
+            <a:pPr defTabSz="914400"/>
+            <a:r>
+              <a:rPr lang="de-DE" sz="800" kern="0">
+                <a:solidFill>
+                  <a:prstClr val="black"/>
+                </a:solidFill>
+                <a:latin typeface="Calibri" panose="020F0502020204030204"/>
+              </a:rPr>
+              <a:t>upper-frequency = [planning] / [live]</a:t>
+            </a:r>
+          </a:p>
+          <a:p>
+            <a:pPr defTabSz="914400"/>
+            <a:r>
+              <a:rPr lang="de-DE" sz="800" kern="0">
+                <a:solidFill>
+                  <a:prstClr val="black"/>
+                </a:solidFill>
+                <a:latin typeface="Calibri" panose="020F0502020204030204"/>
+              </a:rPr>
+              <a:t>lower-frequency = [planning] / [live]</a:t>
+            </a:r>
+          </a:p>
+          <a:p>
+            <a:pPr defTabSz="914400"/>
+            <a:r>
+              <a:rPr lang="de-DE" sz="800" kern="0">
+                <a:solidFill>
+                  <a:prstClr val="black"/>
+                </a:solidFill>
+                <a:latin typeface="Calibri" panose="020F0502020204030204"/>
+              </a:rPr>
+              <a:t>band-position = [planning] / [live]</a:t>
+            </a:r>
+          </a:p>
+          <a:p>
+            <a:pPr defTabSz="914400"/>
+            <a:r>
+              <a:rPr lang="de-DE" sz="800" kern="0">
+                <a:solidFill>
+                  <a:prstClr val="black"/>
+                </a:solidFill>
+                <a:latin typeface="Calibri" panose="020F0502020204030204"/>
+              </a:rPr>
+              <a:t>bandwidth = [planning] / [live]</a:t>
+            </a:r>
+          </a:p>
+          <a:p>
+            <a:pPr defTabSz="914400"/>
+            <a:r>
+              <a:rPr lang="de-DE" sz="800" kern="0">
+                <a:solidFill>
+                  <a:prstClr val="black"/>
+                </a:solidFill>
+                <a:latin typeface="Calibri" panose="020F0502020204030204"/>
+              </a:rPr>
+              <a:t>minimum-modulation-scheme = [planning] / [live]</a:t>
+            </a:r>
+          </a:p>
+          <a:p>
+            <a:pPr defTabSz="914400"/>
+            <a:r>
+              <a:rPr lang="de-DE" sz="800" kern="0">
+                <a:solidFill>
+                  <a:prstClr val="black"/>
+                </a:solidFill>
+                <a:latin typeface="Calibri" panose="020F0502020204030204"/>
+              </a:rPr>
+              <a:t>maximum-modulation-scheme = [planning] / [live]</a:t>
+            </a:r>
+          </a:p>
+          <a:p>
+            <a:pPr defTabSz="914400"/>
+            <a:r>
+              <a:rPr lang="de-DE" sz="800" kern="0">
+                <a:solidFill>
+                  <a:prstClr val="black"/>
+                </a:solidFill>
+                <a:latin typeface="Calibri" panose="020F0502020204030204"/>
+              </a:rPr>
+              <a:t>clear-sky-modulation = [planning] / [live]</a:t>
+            </a:r>
+          </a:p>
+          <a:p>
+            <a:pPr defTabSz="914400"/>
+            <a:endParaRPr lang="de-DE" sz="800" kern="0">
+              <a:solidFill>
+                <a:prstClr val="black"/>
+              </a:solidFill>
+              <a:latin typeface="Calibri" panose="020F0502020204030204"/>
+            </a:endParaRPr>
+          </a:p>
+          <a:p>
+            <a:pPr defTabSz="914400"/>
+            <a:endParaRPr lang="de-DE" sz="800" kern="0">
+              <a:solidFill>
+                <a:prstClr val="black"/>
+              </a:solidFill>
+              <a:latin typeface="Calibri" panose="020F0502020204030204"/>
+            </a:endParaRPr>
+          </a:p>
+          <a:p>
+            <a:pPr defTabSz="914400"/>
+            <a:endParaRPr lang="de-DE" sz="800" kern="0" dirty="0">
+              <a:solidFill>
+                <a:prstClr val="black"/>
+              </a:solidFill>
+              <a:latin typeface="Calibri" panose="020F0502020204030204"/>
+            </a:endParaRPr>
+          </a:p>
+        </p:txBody>
+      </p:sp>
+      <p:cxnSp>
+        <p:nvCxnSpPr>
+          <p:cNvPr id="235" name="Gerade Verbindung mit Pfeil 234">
+            <a:extLst>
+              <a:ext uri="{FF2B5EF4-FFF2-40B4-BE49-F238E27FC236}">
+                <a16:creationId xmlns:a16="http://schemas.microsoft.com/office/drawing/2014/main" id="{4A5D1682-99D1-7876-EEFC-EA1180222379}"/>
+              </a:ext>
+            </a:extLst>
+          </p:cNvPr>
+          <p:cNvCxnSpPr>
+            <a:cxnSpLocks/>
+            <a:stCxn id="223" idx="1"/>
+            <a:endCxn id="232" idx="3"/>
+          </p:cNvCxnSpPr>
+          <p:nvPr/>
+        </p:nvCxnSpPr>
+        <p:spPr>
+          <a:xfrm flipH="1">
+            <a:off x="6576809" y="6868917"/>
+            <a:ext cx="573605" cy="674595"/>
+          </a:xfrm>
+          <a:prstGeom prst="straightConnector1">
+            <a:avLst/>
+          </a:prstGeom>
+          <a:noFill/>
+          <a:ln w="6350" cap="flat" cmpd="sng" algn="ctr">
+            <a:solidFill>
+              <a:srgbClr val="5B9BD5"/>
+            </a:solidFill>
+            <a:prstDash val="solid"/>
+            <a:miter lim="800000"/>
+            <a:tailEnd type="triangle"/>
+          </a:ln>
+          <a:effectLst/>
+        </p:spPr>
+      </p:cxnSp>
+      <p:sp>
+        <p:nvSpPr>
+          <p:cNvPr id="241" name="Rechteck 240">
+            <a:extLst>
+              <a:ext uri="{FF2B5EF4-FFF2-40B4-BE49-F238E27FC236}">
+                <a16:creationId xmlns:a16="http://schemas.microsoft.com/office/drawing/2014/main" id="{8AE67609-FF85-AA36-4EAC-A2C055DD14DD}"/>
+              </a:ext>
+            </a:extLst>
+          </p:cNvPr>
+          <p:cNvSpPr/>
+          <p:nvPr/>
+        </p:nvSpPr>
+        <p:spPr>
+          <a:xfrm>
+            <a:off x="6623805" y="4114298"/>
+            <a:ext cx="2377663" cy="532766"/>
+          </a:xfrm>
+          <a:prstGeom prst="rect">
+            <a:avLst/>
+          </a:prstGeom>
+          <a:solidFill>
+            <a:sysClr val="window" lastClr="FFFFFF"/>
+          </a:solidFill>
+          <a:ln w="12700" cap="flat" cmpd="sng" algn="ctr">
+            <a:solidFill>
+              <a:srgbClr val="A5A5A5"/>
+            </a:solidFill>
+            <a:prstDash val="solid"/>
+            <a:miter lim="800000"/>
+          </a:ln>
+          <a:effectLst/>
+        </p:spPr>
+        <p:txBody>
+          <a:bodyPr lIns="36000" tIns="36000" rIns="36000" bIns="36000" rtlCol="0" anchor="t"/>
+          <a:lstStyle/>
+          <a:p>
+            <a:pPr defTabSz="914400"/>
+            <a:r>
+              <a:rPr lang="de-DE" sz="800" kern="0">
+                <a:solidFill>
+                  <a:prstClr val="black"/>
+                </a:solidFill>
+                <a:latin typeface="Calibri" panose="020F0502020204030204"/>
+              </a:rPr>
+              <a:t>local-id=[mountNameA/B] / [mountName]</a:t>
+            </a:r>
+          </a:p>
+          <a:p>
+            <a:pPr defTabSz="914400"/>
+            <a:endParaRPr lang="de-DE" sz="800" kern="0">
+              <a:solidFill>
+                <a:prstClr val="black"/>
+              </a:solidFill>
+              <a:latin typeface="Calibri" panose="020F0502020204030204"/>
+            </a:endParaRPr>
+          </a:p>
+          <a:p>
+            <a:pPr defTabSz="914400"/>
+            <a:endParaRPr lang="de-DE" sz="800" kern="0">
+              <a:solidFill>
+                <a:prstClr val="black"/>
+              </a:solidFill>
+              <a:latin typeface="Calibri" panose="020F0502020204030204"/>
+            </a:endParaRPr>
+          </a:p>
+        </p:txBody>
+      </p:sp>
+      <p:cxnSp>
+        <p:nvCxnSpPr>
+          <p:cNvPr id="242" name="Gerade Verbindung mit Pfeil 241">
+            <a:extLst>
+              <a:ext uri="{FF2B5EF4-FFF2-40B4-BE49-F238E27FC236}">
+                <a16:creationId xmlns:a16="http://schemas.microsoft.com/office/drawing/2014/main" id="{D02907C9-C5BE-29CD-04AE-14DC78D81D7F}"/>
+              </a:ext>
+            </a:extLst>
+          </p:cNvPr>
+          <p:cNvCxnSpPr>
+            <a:cxnSpLocks/>
+            <a:stCxn id="216" idx="1"/>
+            <a:endCxn id="241" idx="3"/>
+          </p:cNvCxnSpPr>
+          <p:nvPr/>
+        </p:nvCxnSpPr>
+        <p:spPr>
+          <a:xfrm flipH="1">
+            <a:off x="9001468" y="4337723"/>
+            <a:ext cx="578846" cy="42958"/>
+          </a:xfrm>
+          <a:prstGeom prst="straightConnector1">
+            <a:avLst/>
+          </a:prstGeom>
+          <a:noFill/>
+          <a:ln w="6350" cap="flat" cmpd="sng" algn="ctr">
+            <a:solidFill>
+              <a:srgbClr val="5B9BD5"/>
+            </a:solidFill>
+            <a:prstDash val="solid"/>
+            <a:miter lim="800000"/>
+            <a:tailEnd type="triangle"/>
+          </a:ln>
+          <a:effectLst/>
+        </p:spPr>
+      </p:cxnSp>
+      <p:sp>
+        <p:nvSpPr>
+          <p:cNvPr id="86" name="Rechteck 85">
+            <a:extLst>
+              <a:ext uri="{FF2B5EF4-FFF2-40B4-BE49-F238E27FC236}">
+                <a16:creationId xmlns:a16="http://schemas.microsoft.com/office/drawing/2014/main" id="{4EF8BD69-F08C-B9E7-5DF2-848F27B7FE4E}"/>
+              </a:ext>
+            </a:extLst>
+          </p:cNvPr>
+          <p:cNvSpPr/>
+          <p:nvPr/>
+        </p:nvSpPr>
+        <p:spPr>
+          <a:xfrm>
+            <a:off x="2037390" y="3850254"/>
+            <a:ext cx="1930625" cy="4465071"/>
+          </a:xfrm>
+          <a:prstGeom prst="rect">
+            <a:avLst/>
+          </a:prstGeom>
+          <a:solidFill>
+            <a:schemeClr val="accent5">
+              <a:alpha val="50196"/>
+            </a:schemeClr>
+          </a:solidFill>
+          <a:ln>
+            <a:noFill/>
+          </a:ln>
+        </p:spPr>
+        <p:style>
+          <a:lnRef idx="2">
+            <a:schemeClr val="accent1">
+              <a:shade val="15000"/>
+            </a:schemeClr>
+          </a:lnRef>
+          <a:fillRef idx="1">
+            <a:schemeClr val="accent1"/>
+          </a:fillRef>
+          <a:effectRef idx="0">
+            <a:schemeClr val="accent1"/>
+          </a:effectRef>
+          <a:fontRef idx="minor">
+            <a:schemeClr val="lt1"/>
+          </a:fontRef>
+        </p:style>
+        <p:txBody>
+          <a:bodyPr rtlCol="0" anchor="t"/>
+          <a:lstStyle/>
+          <a:p>
+            <a:pPr algn="r"/>
+            <a:r>
+              <a:rPr lang="de-DE" sz="1400">
+                <a:solidFill>
+                  <a:schemeClr val="tx1"/>
+                </a:solidFill>
+              </a:rPr>
+              <a:t>Link</a:t>
+            </a:r>
+          </a:p>
+        </p:txBody>
+      </p:sp>
+      <p:sp>
+        <p:nvSpPr>
+          <p:cNvPr id="87" name="Abgerundetes Rechteck 1">
+            <a:extLst>
+              <a:ext uri="{FF2B5EF4-FFF2-40B4-BE49-F238E27FC236}">
+                <a16:creationId xmlns:a16="http://schemas.microsoft.com/office/drawing/2014/main" id="{D6ADBF88-D669-757C-3A92-67D4C6EA3D42}"/>
+              </a:ext>
+            </a:extLst>
+          </p:cNvPr>
+          <p:cNvSpPr/>
+          <p:nvPr/>
+        </p:nvSpPr>
+        <p:spPr>
+          <a:xfrm>
+            <a:off x="2196046" y="4120024"/>
+            <a:ext cx="537299" cy="445572"/>
+          </a:xfrm>
+          <a:prstGeom prst="roundRect">
+            <a:avLst/>
+          </a:prstGeom>
+          <a:solidFill>
+            <a:sysClr val="window" lastClr="FFFFFF">
+              <a:lumMod val="65000"/>
+            </a:sysClr>
+          </a:solidFill>
+          <a:ln w="12700" cap="flat" cmpd="sng" algn="ctr">
+            <a:solidFill>
+              <a:sysClr val="window" lastClr="FFFFFF">
+                <a:lumMod val="50000"/>
+              </a:sysClr>
+            </a:solidFill>
+            <a:prstDash val="solid"/>
+            <a:miter lim="800000"/>
+          </a:ln>
+          <a:effectLst>
+            <a:outerShdw blurRad="50800" dist="38100" dir="2700000" algn="tl" rotWithShape="0">
+              <a:prstClr val="black">
+                <a:alpha val="40000"/>
+              </a:prstClr>
+            </a:outerShdw>
+          </a:effectLst>
+        </p:spPr>
+        <p:txBody>
+          <a:bodyPr rtlCol="0" anchor="ctr"/>
+          <a:lstStyle/>
+          <a:p>
+            <a:pPr algn="ctr" defTabSz="914400">
+              <a:defRPr/>
+            </a:pPr>
+            <a:r>
+              <a:rPr lang="de-DE" sz="1050" kern="0">
+                <a:solidFill>
+                  <a:prstClr val="white"/>
+                </a:solidFill>
+                <a:latin typeface="Calibri" panose="020F0502020204030204"/>
+              </a:rPr>
+              <a:t>L</a:t>
+            </a:r>
+            <a:endParaRPr lang="de-DE" sz="1050" kern="0" dirty="0">
+              <a:solidFill>
+                <a:prstClr val="white"/>
+              </a:solidFill>
+              <a:latin typeface="Calibri" panose="020F0502020204030204"/>
+            </a:endParaRPr>
+          </a:p>
+        </p:txBody>
+      </p:sp>
+      <p:sp>
+        <p:nvSpPr>
+          <p:cNvPr id="93" name="Rechteck 92">
+            <a:extLst>
+              <a:ext uri="{FF2B5EF4-FFF2-40B4-BE49-F238E27FC236}">
+                <a16:creationId xmlns:a16="http://schemas.microsoft.com/office/drawing/2014/main" id="{FCFF00EF-0576-E422-EDCD-26AB376B788C}"/>
+              </a:ext>
+            </a:extLst>
+          </p:cNvPr>
+          <p:cNvSpPr/>
+          <p:nvPr/>
+        </p:nvSpPr>
+        <p:spPr>
+          <a:xfrm>
+            <a:off x="2117173" y="5374551"/>
+            <a:ext cx="1756328" cy="527420"/>
+          </a:xfrm>
+          <a:prstGeom prst="rect">
+            <a:avLst/>
+          </a:prstGeom>
+          <a:solidFill>
+            <a:sysClr val="window" lastClr="FFFFFF"/>
+          </a:solidFill>
+          <a:ln w="12700" cap="flat" cmpd="sng" algn="ctr">
+            <a:solidFill>
+              <a:srgbClr val="A5A5A5"/>
+            </a:solidFill>
+            <a:prstDash val="solid"/>
+            <a:miter lim="800000"/>
+          </a:ln>
+          <a:effectLst/>
+        </p:spPr>
+        <p:txBody>
+          <a:bodyPr lIns="36000" tIns="36000" rIns="36000" bIns="36000" rtlCol="0" anchor="t"/>
+          <a:lstStyle/>
+          <a:p>
+            <a:pPr defTabSz="914400"/>
+            <a:r>
+              <a:rPr lang="de-DE" sz="800" kern="0">
+                <a:solidFill>
+                  <a:prstClr val="black"/>
+                </a:solidFill>
+                <a:latin typeface="Calibri" panose="020F0502020204030204"/>
+              </a:rPr>
+              <a:t>local-id=[LinkId] / [local-id]</a:t>
+            </a:r>
+          </a:p>
+          <a:p>
+            <a:pPr defTabSz="914400"/>
+            <a:r>
+              <a:rPr lang="de-DE" sz="800" kern="0">
+                <a:solidFill>
+                  <a:prstClr val="black"/>
+                </a:solidFill>
+                <a:latin typeface="Calibri" panose="020F0502020204030204"/>
+              </a:rPr>
+              <a:t>linktp[2] : [{local-id,_cc,_ltp,_lp}]</a:t>
+            </a:r>
+          </a:p>
+          <a:p>
+            <a:pPr defTabSz="914400"/>
+            <a:r>
+              <a:rPr lang="de-DE" sz="800" kern="0">
+                <a:solidFill>
+                  <a:prstClr val="black"/>
+                </a:solidFill>
+                <a:latin typeface="Calibri" panose="020F0502020204030204"/>
+              </a:rPr>
+              <a:t>scores : [ { [LinkID],[candidateScore] } ]</a:t>
+            </a:r>
+          </a:p>
+          <a:p>
+            <a:pPr defTabSz="914400"/>
+            <a:endParaRPr lang="de-DE" sz="800" kern="0">
+              <a:solidFill>
+                <a:prstClr val="black"/>
+              </a:solidFill>
+              <a:latin typeface="Calibri" panose="020F0502020204030204"/>
+            </a:endParaRPr>
+          </a:p>
+        </p:txBody>
+      </p:sp>
+      <p:cxnSp>
+        <p:nvCxnSpPr>
+          <p:cNvPr id="94" name="Gerade Verbindung mit Pfeil 93">
+            <a:extLst>
+              <a:ext uri="{FF2B5EF4-FFF2-40B4-BE49-F238E27FC236}">
+                <a16:creationId xmlns:a16="http://schemas.microsoft.com/office/drawing/2014/main" id="{6993B356-34A0-6EF5-B7C8-165FDE6B0E48}"/>
+              </a:ext>
+            </a:extLst>
+          </p:cNvPr>
+          <p:cNvCxnSpPr>
+            <a:cxnSpLocks/>
+            <a:stCxn id="87" idx="2"/>
+            <a:endCxn id="93" idx="0"/>
+          </p:cNvCxnSpPr>
+          <p:nvPr/>
+        </p:nvCxnSpPr>
+        <p:spPr>
+          <a:xfrm>
+            <a:off x="2464696" y="4565596"/>
+            <a:ext cx="530641" cy="808955"/>
+          </a:xfrm>
+          <a:prstGeom prst="straightConnector1">
+            <a:avLst/>
+          </a:prstGeom>
+          <a:noFill/>
+          <a:ln w="6350" cap="flat" cmpd="sng" algn="ctr">
+            <a:solidFill>
+              <a:srgbClr val="5B9BD5"/>
+            </a:solidFill>
+            <a:prstDash val="solid"/>
+            <a:miter lim="800000"/>
+            <a:tailEnd type="triangle"/>
+          </a:ln>
+          <a:effectLst/>
+        </p:spPr>
+      </p:cxnSp>
+      <p:cxnSp>
+        <p:nvCxnSpPr>
+          <p:cNvPr id="95" name="Gerade Verbindung mit Pfeil 94">
+            <a:extLst>
+              <a:ext uri="{FF2B5EF4-FFF2-40B4-BE49-F238E27FC236}">
+                <a16:creationId xmlns:a16="http://schemas.microsoft.com/office/drawing/2014/main" id="{82F36CDE-9238-8488-B7F4-4BEE05C8B522}"/>
+              </a:ext>
+            </a:extLst>
+          </p:cNvPr>
+          <p:cNvCxnSpPr>
+            <a:cxnSpLocks/>
+            <a:stCxn id="87" idx="2"/>
+            <a:endCxn id="223" idx="1"/>
+          </p:cNvCxnSpPr>
+          <p:nvPr/>
+        </p:nvCxnSpPr>
+        <p:spPr>
+          <a:xfrm>
+            <a:off x="2464696" y="4565596"/>
+            <a:ext cx="4685718" cy="2303321"/>
+          </a:xfrm>
+          <a:prstGeom prst="straightConnector1">
+            <a:avLst/>
+          </a:prstGeom>
+          <a:noFill/>
+          <a:ln w="6350" cap="flat" cmpd="sng" algn="ctr">
+            <a:solidFill>
+              <a:srgbClr val="5B9BD5"/>
+            </a:solidFill>
+            <a:prstDash val="sysDash"/>
+            <a:miter lim="800000"/>
+            <a:tailEnd type="arrow"/>
+          </a:ln>
+          <a:effectLst/>
+        </p:spPr>
+      </p:cxnSp>
+      <p:sp>
+        <p:nvSpPr>
+          <p:cNvPr id="117" name="Abgerundetes Rechteck 1">
+            <a:extLst>
+              <a:ext uri="{FF2B5EF4-FFF2-40B4-BE49-F238E27FC236}">
+                <a16:creationId xmlns:a16="http://schemas.microsoft.com/office/drawing/2014/main" id="{8FAD0FAB-F7D4-B1C2-7009-798052A9B1D9}"/>
+              </a:ext>
+            </a:extLst>
+          </p:cNvPr>
+          <p:cNvSpPr/>
+          <p:nvPr/>
+        </p:nvSpPr>
+        <p:spPr>
+          <a:xfrm>
+            <a:off x="9580315" y="2555173"/>
+            <a:ext cx="537299" cy="445572"/>
+          </a:xfrm>
+          <a:prstGeom prst="roundRect">
+            <a:avLst/>
+          </a:prstGeom>
+          <a:solidFill>
+            <a:sysClr val="window" lastClr="FFFFFF">
+              <a:lumMod val="65000"/>
+            </a:sysClr>
+          </a:solidFill>
+          <a:ln w="12700" cap="flat" cmpd="sng" algn="ctr">
+            <a:solidFill>
+              <a:sysClr val="window" lastClr="FFFFFF">
+                <a:lumMod val="50000"/>
+              </a:sysClr>
+            </a:solidFill>
+            <a:prstDash val="solid"/>
+            <a:miter lim="800000"/>
+          </a:ln>
+          <a:effectLst>
+            <a:outerShdw blurRad="50800" dist="38100" dir="2700000" algn="tl" rotWithShape="0">
+              <a:prstClr val="black">
+                <a:alpha val="40000"/>
+              </a:prstClr>
+            </a:outerShdw>
+          </a:effectLst>
+        </p:spPr>
+        <p:txBody>
+          <a:bodyPr rtlCol="0" anchor="ctr"/>
+          <a:lstStyle/>
+          <a:p>
+            <a:pPr algn="ctr" defTabSz="914400">
+              <a:defRPr/>
+            </a:pPr>
+            <a:r>
+              <a:rPr lang="de-DE" sz="1050" kern="0">
+                <a:solidFill>
+                  <a:prstClr val="white"/>
+                </a:solidFill>
+                <a:latin typeface="Calibri" panose="020F0502020204030204"/>
+              </a:rPr>
+              <a:t>NCD</a:t>
+            </a:r>
+            <a:endParaRPr lang="de-DE" sz="1050" kern="0" dirty="0">
+              <a:solidFill>
+                <a:prstClr val="white"/>
+              </a:solidFill>
+              <a:latin typeface="Calibri" panose="020F0502020204030204"/>
+            </a:endParaRPr>
+          </a:p>
+        </p:txBody>
+      </p:sp>
+      <p:cxnSp>
+        <p:nvCxnSpPr>
+          <p:cNvPr id="252" name="Verbinder: gewinkelt 251">
+            <a:extLst>
+              <a:ext uri="{FF2B5EF4-FFF2-40B4-BE49-F238E27FC236}">
+                <a16:creationId xmlns:a16="http://schemas.microsoft.com/office/drawing/2014/main" id="{7B4D9739-6606-A338-2C87-5405BC25C7D6}"/>
+              </a:ext>
+            </a:extLst>
+          </p:cNvPr>
+          <p:cNvCxnSpPr>
+            <a:cxnSpLocks/>
+            <a:stCxn id="216" idx="2"/>
+            <a:endCxn id="70" idx="0"/>
+          </p:cNvCxnSpPr>
+          <p:nvPr/>
+        </p:nvCxnSpPr>
+        <p:spPr>
+          <a:xfrm rot="16200000" flipH="1">
+            <a:off x="9998533" y="4410939"/>
+            <a:ext cx="846183" cy="1145321"/>
+          </a:xfrm>
+          <a:prstGeom prst="bentConnector3">
+            <a:avLst>
+              <a:gd name="adj1" fmla="val 50000"/>
+            </a:avLst>
+          </a:prstGeom>
+          <a:noFill/>
+          <a:ln w="6350" cap="flat" cmpd="sng" algn="ctr">
+            <a:solidFill>
+              <a:srgbClr val="5B9BD5"/>
+            </a:solidFill>
+            <a:prstDash val="solid"/>
+            <a:miter lim="800000"/>
+            <a:tailEnd type="triangle"/>
+          </a:ln>
+          <a:effectLst/>
+        </p:spPr>
+      </p:cxnSp>
+      <p:sp>
+        <p:nvSpPr>
+          <p:cNvPr id="293" name="Ellipse 292">
+            <a:extLst>
+              <a:ext uri="{FF2B5EF4-FFF2-40B4-BE49-F238E27FC236}">
+                <a16:creationId xmlns:a16="http://schemas.microsoft.com/office/drawing/2014/main" id="{A96271CD-4392-8057-D43D-25709C941E70}"/>
+              </a:ext>
+            </a:extLst>
+          </p:cNvPr>
+          <p:cNvSpPr/>
+          <p:nvPr/>
+        </p:nvSpPr>
+        <p:spPr>
+          <a:xfrm>
+            <a:off x="7171533" y="6665426"/>
+            <a:ext cx="45719" cy="45719"/>
+          </a:xfrm>
+          <a:prstGeom prst="ellipse">
+            <a:avLst/>
+          </a:prstGeom>
+          <a:solidFill>
+            <a:srgbClr val="4472C4">
+              <a:lumMod val="60000"/>
+              <a:lumOff val="40000"/>
+            </a:srgbClr>
+          </a:solidFill>
+          <a:ln w="12700" cap="flat" cmpd="sng" algn="ctr">
+            <a:noFill/>
+            <a:prstDash val="solid"/>
+            <a:miter lim="800000"/>
+          </a:ln>
+          <a:effectLst/>
+        </p:spPr>
+        <p:txBody>
+          <a:bodyPr rtlCol="0" anchor="ctr"/>
+          <a:lstStyle/>
+          <a:p>
+            <a:pPr algn="ctr" defTabSz="914400"/>
+            <a:endParaRPr lang="de-DE" sz="1050" kern="0">
+              <a:solidFill>
+                <a:prstClr val="white"/>
+              </a:solidFill>
+              <a:latin typeface="Calibri" panose="020F0502020204030204"/>
+            </a:endParaRPr>
+          </a:p>
+        </p:txBody>
+      </p:sp>
+      <p:sp>
+        <p:nvSpPr>
+          <p:cNvPr id="49" name="Rechteck 48">
+            <a:extLst>
+              <a:ext uri="{FF2B5EF4-FFF2-40B4-BE49-F238E27FC236}">
+                <a16:creationId xmlns:a16="http://schemas.microsoft.com/office/drawing/2014/main" id="{B9D40B9E-07E7-DA55-A483-1F59E59377DD}"/>
+              </a:ext>
+            </a:extLst>
+          </p:cNvPr>
+          <p:cNvSpPr/>
+          <p:nvPr/>
+        </p:nvSpPr>
+        <p:spPr>
+          <a:xfrm>
+            <a:off x="11084910" y="2596282"/>
+            <a:ext cx="1685583" cy="336074"/>
+          </a:xfrm>
+          <a:prstGeom prst="rect">
+            <a:avLst/>
+          </a:prstGeom>
+          <a:solidFill>
+            <a:sysClr val="window" lastClr="FFFFFF"/>
+          </a:solidFill>
+          <a:ln w="12700" cap="flat" cmpd="sng" algn="ctr">
+            <a:solidFill>
+              <a:srgbClr val="A5A5A5"/>
+            </a:solidFill>
+            <a:prstDash val="solid"/>
+            <a:miter lim="800000"/>
+          </a:ln>
+          <a:effectLst/>
+        </p:spPr>
+        <p:txBody>
+          <a:bodyPr lIns="36000" tIns="36000" rIns="36000" bIns="36000" rtlCol="0" anchor="t"/>
+          <a:lstStyle/>
+          <a:p>
+            <a:pPr defTabSz="914400"/>
+            <a:r>
+              <a:rPr lang="de-DE" sz="800" kern="0">
+                <a:solidFill>
+                  <a:prstClr val="black"/>
+                </a:solidFill>
+                <a:latin typeface="Calibri" panose="020F0502020204030204"/>
+              </a:rPr>
+              <a:t>local-id =running,operational, …</a:t>
+            </a:r>
+          </a:p>
+        </p:txBody>
+      </p:sp>
+      <p:cxnSp>
+        <p:nvCxnSpPr>
+          <p:cNvPr id="50" name="Gerade Verbindung mit Pfeil 49">
+            <a:extLst>
+              <a:ext uri="{FF2B5EF4-FFF2-40B4-BE49-F238E27FC236}">
+                <a16:creationId xmlns:a16="http://schemas.microsoft.com/office/drawing/2014/main" id="{BD64C054-7133-4A97-8504-E3EEC9F56FF0}"/>
+              </a:ext>
+            </a:extLst>
+          </p:cNvPr>
+          <p:cNvCxnSpPr>
+            <a:cxnSpLocks/>
+            <a:stCxn id="117" idx="3"/>
+            <a:endCxn id="49" idx="1"/>
+          </p:cNvCxnSpPr>
+          <p:nvPr/>
+        </p:nvCxnSpPr>
+        <p:spPr>
+          <a:xfrm flipV="1">
+            <a:off x="10117614" y="2764319"/>
+            <a:ext cx="967296" cy="13640"/>
+          </a:xfrm>
+          <a:prstGeom prst="straightConnector1">
+            <a:avLst/>
+          </a:prstGeom>
+          <a:noFill/>
+          <a:ln w="6350" cap="flat" cmpd="sng" algn="ctr">
+            <a:solidFill>
+              <a:srgbClr val="5B9BD5"/>
+            </a:solidFill>
+            <a:prstDash val="solid"/>
+            <a:miter lim="800000"/>
+            <a:tailEnd type="triangle"/>
+          </a:ln>
+          <a:effectLst/>
+        </p:spPr>
+      </p:cxnSp>
+      <p:sp>
+        <p:nvSpPr>
+          <p:cNvPr id="14" name="Rechteck 13">
+            <a:extLst>
+              <a:ext uri="{FF2B5EF4-FFF2-40B4-BE49-F238E27FC236}">
+                <a16:creationId xmlns:a16="http://schemas.microsoft.com/office/drawing/2014/main" id="{F9C320F7-1BE1-119D-E122-B62DD3204440}"/>
+              </a:ext>
+            </a:extLst>
+          </p:cNvPr>
+          <p:cNvSpPr/>
+          <p:nvPr/>
+        </p:nvSpPr>
+        <p:spPr>
+          <a:xfrm>
+            <a:off x="5471547" y="5230671"/>
+            <a:ext cx="3529924" cy="872700"/>
+          </a:xfrm>
+          <a:prstGeom prst="rect">
+            <a:avLst/>
+          </a:prstGeom>
+          <a:solidFill>
+            <a:sysClr val="window" lastClr="FFFFFF"/>
+          </a:solidFill>
+          <a:ln w="12700" cap="flat" cmpd="sng" algn="ctr">
+            <a:solidFill>
+              <a:srgbClr val="A5A5A5"/>
+            </a:solidFill>
+            <a:prstDash val="solid"/>
+            <a:miter lim="800000"/>
+          </a:ln>
+          <a:effectLst/>
+        </p:spPr>
+        <p:txBody>
+          <a:bodyPr lIns="36000" tIns="36000" rIns="36000" bIns="36000" rtlCol="0" anchor="t"/>
+          <a:lstStyle/>
+          <a:p>
+            <a:pPr defTabSz="914400"/>
+            <a:r>
+              <a:rPr lang="de-DE" sz="800" kern="0">
+                <a:solidFill>
+                  <a:prstClr val="black"/>
+                </a:solidFill>
+                <a:latin typeface="Calibri" panose="020F0502020204030204"/>
+              </a:rPr>
+              <a:t>local-id = [local-id] / [airInterfaceUuid]</a:t>
+            </a:r>
+          </a:p>
+          <a:p>
+            <a:pPr defTabSz="914400"/>
+            <a:r>
+              <a:rPr lang="de-DE" sz="800" kern="0">
+                <a:solidFill>
+                  <a:prstClr val="black"/>
+                </a:solidFill>
+                <a:latin typeface="Calibri" panose="020F0502020204030204"/>
+              </a:rPr>
+              <a:t>_equipment[*] = [modemLocalId, oduLocalId] / [modemUuid, oduUuid]</a:t>
+            </a:r>
+          </a:p>
+          <a:p>
+            <a:pPr defTabSz="914400"/>
+            <a:endParaRPr lang="de-DE" sz="800" kern="0">
+              <a:solidFill>
+                <a:prstClr val="black"/>
+              </a:solidFill>
+              <a:latin typeface="Calibri" panose="020F0502020204030204"/>
+            </a:endParaRPr>
+          </a:p>
+          <a:p>
+            <a:pPr defTabSz="914400"/>
+            <a:r>
+              <a:rPr lang="de-DE" sz="800" kern="0">
+                <a:solidFill>
+                  <a:prstClr val="black"/>
+                </a:solidFill>
+                <a:latin typeface="Calibri" panose="020F0502020204030204"/>
+              </a:rPr>
+              <a:t>external-label = [calculatedLinkId] / [externalLabel]</a:t>
+            </a:r>
+          </a:p>
+        </p:txBody>
+      </p:sp>
+      <p:sp>
+        <p:nvSpPr>
+          <p:cNvPr id="25" name="Abgerundetes Rechteck 2">
+            <a:extLst>
+              <a:ext uri="{FF2B5EF4-FFF2-40B4-BE49-F238E27FC236}">
+                <a16:creationId xmlns:a16="http://schemas.microsoft.com/office/drawing/2014/main" id="{2AF408CD-34DB-C428-E0BF-1217C1E02073}"/>
+              </a:ext>
+            </a:extLst>
+          </p:cNvPr>
+          <p:cNvSpPr/>
+          <p:nvPr/>
+        </p:nvSpPr>
+        <p:spPr>
+          <a:xfrm>
+            <a:off x="9580314" y="5398226"/>
+            <a:ext cx="537299" cy="445572"/>
+          </a:xfrm>
+          <a:prstGeom prst="roundRect">
+            <a:avLst/>
+          </a:prstGeom>
+          <a:solidFill>
+            <a:sysClr val="window" lastClr="FFFFFF">
+              <a:lumMod val="65000"/>
+            </a:sysClr>
+          </a:solidFill>
+          <a:ln w="12700" cap="flat" cmpd="sng" algn="ctr">
+            <a:solidFill>
+              <a:sysClr val="window" lastClr="FFFFFF">
+                <a:lumMod val="50000"/>
+              </a:sysClr>
+            </a:solidFill>
+            <a:prstDash val="solid"/>
+            <a:miter lim="800000"/>
+          </a:ln>
+          <a:effectLst>
+            <a:outerShdw blurRad="50800" dist="38100" dir="2700000" algn="tl" rotWithShape="0">
+              <a:prstClr val="black">
+                <a:alpha val="40000"/>
+              </a:prstClr>
+            </a:outerShdw>
+          </a:effectLst>
+        </p:spPr>
+        <p:txBody>
+          <a:bodyPr rtlCol="0" anchor="ctr"/>
+          <a:lstStyle/>
+          <a:p>
+            <a:pPr algn="ctr" defTabSz="914400">
+              <a:defRPr/>
+            </a:pPr>
+            <a:r>
+              <a:rPr lang="de-DE" sz="1050" kern="0">
+                <a:solidFill>
+                  <a:prstClr val="white"/>
+                </a:solidFill>
+                <a:latin typeface="Calibri" panose="020F0502020204030204"/>
+              </a:rPr>
+              <a:t>LTP</a:t>
+            </a:r>
+          </a:p>
+        </p:txBody>
+      </p:sp>
+      <p:sp>
+        <p:nvSpPr>
+          <p:cNvPr id="35" name="Abgerundetes Rechteck 3">
+            <a:extLst>
+              <a:ext uri="{FF2B5EF4-FFF2-40B4-BE49-F238E27FC236}">
+                <a16:creationId xmlns:a16="http://schemas.microsoft.com/office/drawing/2014/main" id="{F7D26EA4-96A3-0DFE-F516-71C0AAAE8061}"/>
+              </a:ext>
+            </a:extLst>
+          </p:cNvPr>
+          <p:cNvSpPr/>
+          <p:nvPr/>
+        </p:nvSpPr>
+        <p:spPr>
+          <a:xfrm>
+            <a:off x="9580314" y="6646131"/>
+            <a:ext cx="537299" cy="445572"/>
+          </a:xfrm>
+          <a:prstGeom prst="roundRect">
+            <a:avLst/>
+          </a:prstGeom>
+          <a:solidFill>
+            <a:sysClr val="window" lastClr="FFFFFF">
+              <a:lumMod val="65000"/>
+            </a:sysClr>
+          </a:solidFill>
+          <a:ln w="12700" cap="flat" cmpd="sng" algn="ctr">
+            <a:solidFill>
+              <a:sysClr val="window" lastClr="FFFFFF">
+                <a:lumMod val="50000"/>
+              </a:sysClr>
+            </a:solidFill>
+            <a:prstDash val="solid"/>
+            <a:miter lim="800000"/>
+          </a:ln>
+          <a:effectLst>
+            <a:outerShdw blurRad="50800" dist="38100" dir="2700000" algn="tl" rotWithShape="0">
+              <a:prstClr val="black">
+                <a:alpha val="40000"/>
+              </a:prstClr>
+            </a:outerShdw>
+          </a:effectLst>
+        </p:spPr>
+        <p:txBody>
+          <a:bodyPr rtlCol="0" anchor="ctr"/>
+          <a:lstStyle/>
+          <a:p>
+            <a:pPr algn="ctr" defTabSz="914400">
+              <a:defRPr/>
+            </a:pPr>
+            <a:r>
+              <a:rPr lang="de-DE" sz="1050" kern="0">
+                <a:solidFill>
+                  <a:prstClr val="white"/>
+                </a:solidFill>
+                <a:latin typeface="Calibri" panose="020F0502020204030204"/>
+              </a:rPr>
+              <a:t>LP</a:t>
+            </a:r>
+          </a:p>
+        </p:txBody>
+      </p:sp>
+      <p:cxnSp>
+        <p:nvCxnSpPr>
+          <p:cNvPr id="46" name="Gerade Verbindung mit Pfeil 45">
+            <a:extLst>
+              <a:ext uri="{FF2B5EF4-FFF2-40B4-BE49-F238E27FC236}">
+                <a16:creationId xmlns:a16="http://schemas.microsoft.com/office/drawing/2014/main" id="{8E9FC093-1E1D-AFB8-EDA1-74BB30C0EC74}"/>
+              </a:ext>
+            </a:extLst>
+          </p:cNvPr>
+          <p:cNvCxnSpPr>
+            <a:cxnSpLocks/>
+            <a:stCxn id="25" idx="2"/>
+            <a:endCxn id="35" idx="0"/>
+          </p:cNvCxnSpPr>
+          <p:nvPr/>
+        </p:nvCxnSpPr>
+        <p:spPr>
+          <a:xfrm>
+            <a:off x="9848964" y="5843798"/>
+            <a:ext cx="0" cy="802333"/>
+          </a:xfrm>
+          <a:prstGeom prst="straightConnector1">
+            <a:avLst/>
+          </a:prstGeom>
+          <a:noFill/>
+          <a:ln w="6350" cap="flat" cmpd="sng" algn="ctr">
+            <a:solidFill>
+              <a:srgbClr val="5B9BD5"/>
+            </a:solidFill>
+            <a:prstDash val="solid"/>
+            <a:miter lim="800000"/>
+            <a:tailEnd type="triangle"/>
+          </a:ln>
+          <a:effectLst/>
+        </p:spPr>
+      </p:cxnSp>
+      <p:cxnSp>
+        <p:nvCxnSpPr>
+          <p:cNvPr id="47" name="Gerade Verbindung mit Pfeil 46">
+            <a:extLst>
+              <a:ext uri="{FF2B5EF4-FFF2-40B4-BE49-F238E27FC236}">
+                <a16:creationId xmlns:a16="http://schemas.microsoft.com/office/drawing/2014/main" id="{EDAA76C0-8B20-2581-751D-97C11B18D597}"/>
+              </a:ext>
+            </a:extLst>
+          </p:cNvPr>
+          <p:cNvCxnSpPr>
+            <a:cxnSpLocks/>
+            <a:stCxn id="223" idx="3"/>
+            <a:endCxn id="35" idx="1"/>
+          </p:cNvCxnSpPr>
+          <p:nvPr/>
+        </p:nvCxnSpPr>
+        <p:spPr>
+          <a:xfrm>
+            <a:off x="8311867" y="6868917"/>
+            <a:ext cx="1268447" cy="0"/>
+          </a:xfrm>
+          <a:prstGeom prst="straightConnector1">
+            <a:avLst/>
+          </a:prstGeom>
+          <a:noFill/>
+          <a:ln w="6350" cap="flat" cmpd="sng" algn="ctr">
+            <a:solidFill>
+              <a:srgbClr val="5B9BD5"/>
+            </a:solidFill>
+            <a:prstDash val="dash"/>
+            <a:miter lim="800000"/>
+            <a:tailEnd type="triangle"/>
+          </a:ln>
+          <a:effectLst/>
+        </p:spPr>
+      </p:cxnSp>
+      <p:cxnSp>
+        <p:nvCxnSpPr>
+          <p:cNvPr id="54" name="Gerade Verbindung mit Pfeil 53">
+            <a:extLst>
+              <a:ext uri="{FF2B5EF4-FFF2-40B4-BE49-F238E27FC236}">
+                <a16:creationId xmlns:a16="http://schemas.microsoft.com/office/drawing/2014/main" id="{0D67C123-0516-88EF-34E3-FD36957D0983}"/>
+              </a:ext>
+            </a:extLst>
+          </p:cNvPr>
+          <p:cNvCxnSpPr>
+            <a:cxnSpLocks/>
+            <a:stCxn id="25" idx="1"/>
+            <a:endCxn id="14" idx="3"/>
+          </p:cNvCxnSpPr>
+          <p:nvPr/>
+        </p:nvCxnSpPr>
+        <p:spPr>
+          <a:xfrm flipH="1">
+            <a:off x="9001471" y="5621012"/>
+            <a:ext cx="578843" cy="46009"/>
+          </a:xfrm>
+          <a:prstGeom prst="straightConnector1">
+            <a:avLst/>
+          </a:prstGeom>
+          <a:noFill/>
+          <a:ln w="6350" cap="flat" cmpd="sng" algn="ctr">
+            <a:solidFill>
+              <a:srgbClr val="5B9BD5"/>
+            </a:solidFill>
+            <a:prstDash val="solid"/>
+            <a:miter lim="800000"/>
+            <a:tailEnd type="triangle"/>
+          </a:ln>
+          <a:effectLst/>
+        </p:spPr>
+      </p:cxnSp>
+      <p:sp>
+        <p:nvSpPr>
+          <p:cNvPr id="175" name="Abgerundetes Rechteck 1">
+            <a:extLst>
+              <a:ext uri="{FF2B5EF4-FFF2-40B4-BE49-F238E27FC236}">
+                <a16:creationId xmlns:a16="http://schemas.microsoft.com/office/drawing/2014/main" id="{1248D903-9440-2321-354B-14170C2F2A21}"/>
+              </a:ext>
+            </a:extLst>
+          </p:cNvPr>
+          <p:cNvSpPr/>
+          <p:nvPr/>
+        </p:nvSpPr>
+        <p:spPr>
+          <a:xfrm>
+            <a:off x="9580314" y="316695"/>
+            <a:ext cx="537299" cy="445572"/>
+          </a:xfrm>
+          <a:prstGeom prst="roundRect">
+            <a:avLst/>
+          </a:prstGeom>
+          <a:solidFill>
+            <a:sysClr val="window" lastClr="FFFFFF">
+              <a:lumMod val="65000"/>
+            </a:sysClr>
+          </a:solidFill>
+          <a:ln w="12700" cap="flat" cmpd="sng" algn="ctr">
+            <a:solidFill>
+              <a:sysClr val="window" lastClr="FFFFFF">
+                <a:lumMod val="50000"/>
+              </a:sysClr>
+            </a:solidFill>
+            <a:prstDash val="solid"/>
+            <a:miter lim="800000"/>
+          </a:ln>
+          <a:effectLst>
+            <a:outerShdw blurRad="50800" dist="38100" dir="2700000" algn="tl" rotWithShape="0">
+              <a:prstClr val="black">
+                <a:alpha val="40000"/>
+              </a:prstClr>
+            </a:outerShdw>
+          </a:effectLst>
+        </p:spPr>
+        <p:txBody>
+          <a:bodyPr rtlCol="0" anchor="ctr"/>
+          <a:lstStyle/>
+          <a:p>
+            <a:pPr algn="ctr" defTabSz="914400">
+              <a:defRPr/>
+            </a:pPr>
+            <a:r>
+              <a:rPr lang="de-DE" sz="1050" kern="0">
+                <a:solidFill>
+                  <a:prstClr val="white"/>
+                </a:solidFill>
+                <a:latin typeface="Calibri" panose="020F0502020204030204"/>
+              </a:rPr>
+              <a:t>DC</a:t>
+            </a:r>
+            <a:endParaRPr lang="de-DE" sz="1050" kern="0" dirty="0">
+              <a:solidFill>
+                <a:prstClr val="white"/>
+              </a:solidFill>
+              <a:latin typeface="Calibri" panose="020F0502020204030204"/>
+            </a:endParaRPr>
+          </a:p>
+        </p:txBody>
+      </p:sp>
+      <p:cxnSp>
+        <p:nvCxnSpPr>
+          <p:cNvPr id="176" name="Gerade Verbindung mit Pfeil 175">
+            <a:extLst>
+              <a:ext uri="{FF2B5EF4-FFF2-40B4-BE49-F238E27FC236}">
+                <a16:creationId xmlns:a16="http://schemas.microsoft.com/office/drawing/2014/main" id="{DD5C7406-3C7F-347B-3FAF-7F90934EFE1D}"/>
+              </a:ext>
+            </a:extLst>
+          </p:cNvPr>
+          <p:cNvCxnSpPr>
+            <a:cxnSpLocks/>
+            <a:stCxn id="175" idx="2"/>
+            <a:endCxn id="117" idx="0"/>
+          </p:cNvCxnSpPr>
+          <p:nvPr/>
+        </p:nvCxnSpPr>
+        <p:spPr>
+          <a:xfrm>
+            <a:off x="9848964" y="762267"/>
+            <a:ext cx="1" cy="1792906"/>
+          </a:xfrm>
+          <a:prstGeom prst="straightConnector1">
+            <a:avLst/>
+          </a:prstGeom>
+          <a:noFill/>
+          <a:ln w="6350" cap="flat" cmpd="sng" algn="ctr">
+            <a:solidFill>
+              <a:srgbClr val="5B9BD5"/>
+            </a:solidFill>
+            <a:prstDash val="solid"/>
+            <a:miter lim="800000"/>
+            <a:tailEnd type="triangle"/>
+          </a:ln>
+          <a:effectLst/>
+        </p:spPr>
+      </p:cxnSp>
+      <p:sp>
+        <p:nvSpPr>
+          <p:cNvPr id="191" name="Abgerundetes Rechteck 1">
+            <a:extLst>
+              <a:ext uri="{FF2B5EF4-FFF2-40B4-BE49-F238E27FC236}">
+                <a16:creationId xmlns:a16="http://schemas.microsoft.com/office/drawing/2014/main" id="{44E48014-242B-1327-6AB6-2553D28DAC32}"/>
+              </a:ext>
+            </a:extLst>
+          </p:cNvPr>
+          <p:cNvSpPr/>
+          <p:nvPr/>
+        </p:nvSpPr>
+        <p:spPr>
+          <a:xfrm>
+            <a:off x="10729609" y="316954"/>
+            <a:ext cx="537299" cy="445572"/>
+          </a:xfrm>
+          <a:prstGeom prst="roundRect">
+            <a:avLst/>
+          </a:prstGeom>
+          <a:solidFill>
+            <a:sysClr val="window" lastClr="FFFFFF">
+              <a:lumMod val="65000"/>
+            </a:sysClr>
+          </a:solidFill>
+          <a:ln w="12700" cap="flat" cmpd="sng" algn="ctr">
+            <a:solidFill>
+              <a:sysClr val="window" lastClr="FFFFFF">
+                <a:lumMod val="50000"/>
+              </a:sysClr>
+            </a:solidFill>
+            <a:prstDash val="solid"/>
+            <a:miter lim="800000"/>
+          </a:ln>
+          <a:effectLst>
+            <a:outerShdw blurRad="50800" dist="38100" dir="2700000" algn="tl" rotWithShape="0">
+              <a:prstClr val="black">
+                <a:alpha val="40000"/>
+              </a:prstClr>
+            </a:outerShdw>
+          </a:effectLst>
+        </p:spPr>
+        <p:txBody>
+          <a:bodyPr rtlCol="0" anchor="ctr"/>
+          <a:lstStyle/>
+          <a:p>
+            <a:pPr algn="ctr" defTabSz="914400">
+              <a:defRPr/>
+            </a:pPr>
+            <a:r>
+              <a:rPr lang="de-DE" sz="1050" kern="0">
+                <a:solidFill>
+                  <a:prstClr val="white"/>
+                </a:solidFill>
+                <a:latin typeface="Calibri" panose="020F0502020204030204"/>
+              </a:rPr>
+              <a:t>AP</a:t>
+            </a:r>
+            <a:endParaRPr lang="de-DE" sz="1050" kern="0" dirty="0">
+              <a:solidFill>
+                <a:prstClr val="white"/>
+              </a:solidFill>
+              <a:latin typeface="Calibri" panose="020F0502020204030204"/>
+            </a:endParaRPr>
+          </a:p>
+        </p:txBody>
+      </p:sp>
+      <p:sp>
+        <p:nvSpPr>
+          <p:cNvPr id="192" name="Abgerundetes Rechteck 1">
+            <a:extLst>
+              <a:ext uri="{FF2B5EF4-FFF2-40B4-BE49-F238E27FC236}">
+                <a16:creationId xmlns:a16="http://schemas.microsoft.com/office/drawing/2014/main" id="{BF0C2F74-F3BA-292A-B365-41FC81CF7E1E}"/>
+              </a:ext>
+            </a:extLst>
+          </p:cNvPr>
+          <p:cNvSpPr/>
+          <p:nvPr/>
+        </p:nvSpPr>
+        <p:spPr>
+          <a:xfrm>
+            <a:off x="10728176" y="1132869"/>
+            <a:ext cx="537299" cy="445572"/>
+          </a:xfrm>
+          <a:prstGeom prst="roundRect">
+            <a:avLst/>
+          </a:prstGeom>
+          <a:solidFill>
+            <a:sysClr val="window" lastClr="FFFFFF">
+              <a:lumMod val="65000"/>
+            </a:sysClr>
+          </a:solidFill>
+          <a:ln w="12700" cap="flat" cmpd="sng" algn="ctr">
+            <a:solidFill>
+              <a:sysClr val="window" lastClr="FFFFFF">
+                <a:lumMod val="50000"/>
+              </a:sysClr>
+            </a:solidFill>
+            <a:prstDash val="solid"/>
+            <a:miter lim="800000"/>
+          </a:ln>
+          <a:effectLst>
+            <a:outerShdw blurRad="50800" dist="38100" dir="2700000" algn="tl" rotWithShape="0">
+              <a:prstClr val="black">
+                <a:alpha val="40000"/>
+              </a:prstClr>
+            </a:outerShdw>
+          </a:effectLst>
+        </p:spPr>
+        <p:txBody>
+          <a:bodyPr rtlCol="0" anchor="ctr"/>
+          <a:lstStyle/>
+          <a:p>
+            <a:pPr algn="ctr" defTabSz="914400">
+              <a:defRPr/>
+            </a:pPr>
+            <a:r>
+              <a:rPr lang="de-DE" sz="1050" kern="0">
+                <a:solidFill>
+                  <a:prstClr val="white"/>
+                </a:solidFill>
+                <a:latin typeface="Calibri" panose="020F0502020204030204"/>
+              </a:rPr>
+              <a:t>CA</a:t>
+            </a:r>
+            <a:endParaRPr lang="de-DE" sz="1050" kern="0" dirty="0">
+              <a:solidFill>
+                <a:prstClr val="white"/>
+              </a:solidFill>
+              <a:latin typeface="Calibri" panose="020F0502020204030204"/>
+            </a:endParaRPr>
+          </a:p>
+        </p:txBody>
+      </p:sp>
+      <p:cxnSp>
+        <p:nvCxnSpPr>
+          <p:cNvPr id="193" name="Gerade Verbindung mit Pfeil 192">
+            <a:extLst>
+              <a:ext uri="{FF2B5EF4-FFF2-40B4-BE49-F238E27FC236}">
+                <a16:creationId xmlns:a16="http://schemas.microsoft.com/office/drawing/2014/main" id="{57DF4D2C-9B0B-A33B-2C76-40E5450EAEF7}"/>
+              </a:ext>
+            </a:extLst>
+          </p:cNvPr>
+          <p:cNvCxnSpPr>
+            <a:cxnSpLocks/>
+            <a:stCxn id="175" idx="3"/>
+            <a:endCxn id="191" idx="1"/>
+          </p:cNvCxnSpPr>
+          <p:nvPr/>
+        </p:nvCxnSpPr>
+        <p:spPr>
+          <a:xfrm>
+            <a:off x="10117613" y="539481"/>
+            <a:ext cx="611996" cy="259"/>
+          </a:xfrm>
+          <a:prstGeom prst="straightConnector1">
+            <a:avLst/>
+          </a:prstGeom>
+          <a:noFill/>
+          <a:ln w="6350" cap="flat" cmpd="sng" algn="ctr">
+            <a:solidFill>
+              <a:srgbClr val="5B9BD5"/>
+            </a:solidFill>
+            <a:prstDash val="solid"/>
+            <a:miter lim="800000"/>
+            <a:tailEnd type="triangle"/>
+          </a:ln>
+          <a:effectLst/>
+        </p:spPr>
+      </p:cxnSp>
+      <p:cxnSp>
+        <p:nvCxnSpPr>
+          <p:cNvPr id="196" name="Gerade Verbindung mit Pfeil 195">
+            <a:extLst>
+              <a:ext uri="{FF2B5EF4-FFF2-40B4-BE49-F238E27FC236}">
+                <a16:creationId xmlns:a16="http://schemas.microsoft.com/office/drawing/2014/main" id="{65958A75-08CD-E777-02D1-45615CF0D213}"/>
+              </a:ext>
+            </a:extLst>
+          </p:cNvPr>
+          <p:cNvCxnSpPr>
+            <a:cxnSpLocks/>
+            <a:stCxn id="191" idx="2"/>
+            <a:endCxn id="192" idx="0"/>
+          </p:cNvCxnSpPr>
+          <p:nvPr/>
+        </p:nvCxnSpPr>
+        <p:spPr>
+          <a:xfrm flipH="1">
+            <a:off x="10996826" y="762526"/>
+            <a:ext cx="1433" cy="370343"/>
+          </a:xfrm>
+          <a:prstGeom prst="straightConnector1">
+            <a:avLst/>
+          </a:prstGeom>
+          <a:noFill/>
+          <a:ln w="6350" cap="flat" cmpd="sng" algn="ctr">
+            <a:solidFill>
+              <a:srgbClr val="5B9BD5"/>
+            </a:solidFill>
+            <a:prstDash val="solid"/>
+            <a:miter lim="800000"/>
+            <a:tailEnd type="triangle"/>
+          </a:ln>
+          <a:effectLst/>
+        </p:spPr>
+      </p:cxnSp>
+      <p:sp>
+        <p:nvSpPr>
+          <p:cNvPr id="165" name="Abgerundetes Rechteck 1">
+            <a:extLst>
+              <a:ext uri="{FF2B5EF4-FFF2-40B4-BE49-F238E27FC236}">
+                <a16:creationId xmlns:a16="http://schemas.microsoft.com/office/drawing/2014/main" id="{D682A02F-6CC5-4B5C-BEFE-2A698F693375}"/>
+              </a:ext>
+            </a:extLst>
+          </p:cNvPr>
+          <p:cNvSpPr/>
+          <p:nvPr/>
+        </p:nvSpPr>
+        <p:spPr>
+          <a:xfrm>
+            <a:off x="8426189" y="317362"/>
+            <a:ext cx="537299" cy="445572"/>
+          </a:xfrm>
+          <a:prstGeom prst="roundRect">
+            <a:avLst/>
+          </a:prstGeom>
+          <a:solidFill>
+            <a:sysClr val="window" lastClr="FFFFFF">
+              <a:lumMod val="65000"/>
+            </a:sysClr>
+          </a:solidFill>
+          <a:ln w="12700" cap="flat" cmpd="sng" algn="ctr">
+            <a:solidFill>
+              <a:sysClr val="window" lastClr="FFFFFF">
+                <a:lumMod val="50000"/>
+              </a:sysClr>
+            </a:solidFill>
+            <a:prstDash val="solid"/>
+            <a:miter lim="800000"/>
+          </a:ln>
+          <a:effectLst>
+            <a:outerShdw blurRad="50800" dist="38100" dir="2700000" algn="tl" rotWithShape="0">
+              <a:prstClr val="black">
+                <a:alpha val="40000"/>
+              </a:prstClr>
+            </a:outerShdw>
+          </a:effectLst>
+        </p:spPr>
+        <p:txBody>
+          <a:bodyPr rtlCol="0" anchor="ctr"/>
+          <a:lstStyle/>
+          <a:p>
+            <a:pPr algn="ctr" defTabSz="914400">
+              <a:defRPr/>
+            </a:pPr>
+            <a:r>
+              <a:rPr lang="de-DE" sz="1050" kern="0">
+                <a:solidFill>
+                  <a:prstClr val="white"/>
+                </a:solidFill>
+                <a:latin typeface="Calibri" panose="020F0502020204030204"/>
+              </a:rPr>
+              <a:t>F</a:t>
+            </a:r>
+            <a:endParaRPr lang="de-DE" sz="1050" kern="0" dirty="0">
+              <a:solidFill>
+                <a:prstClr val="white"/>
+              </a:solidFill>
+              <a:latin typeface="Calibri" panose="020F0502020204030204"/>
+            </a:endParaRPr>
+          </a:p>
+        </p:txBody>
+      </p:sp>
+      <p:sp>
+        <p:nvSpPr>
+          <p:cNvPr id="166" name="Rechteck 165">
+            <a:extLst>
+              <a:ext uri="{FF2B5EF4-FFF2-40B4-BE49-F238E27FC236}">
+                <a16:creationId xmlns:a16="http://schemas.microsoft.com/office/drawing/2014/main" id="{B0FB3F22-C086-61C6-4444-CA4D288A536F}"/>
+              </a:ext>
+            </a:extLst>
+          </p:cNvPr>
+          <p:cNvSpPr/>
+          <p:nvPr/>
+        </p:nvSpPr>
+        <p:spPr>
+          <a:xfrm>
+            <a:off x="6991939" y="358769"/>
+            <a:ext cx="722507" cy="424727"/>
+          </a:xfrm>
+          <a:prstGeom prst="rect">
+            <a:avLst/>
+          </a:prstGeom>
+          <a:solidFill>
+            <a:sysClr val="window" lastClr="FFFFFF"/>
+          </a:solidFill>
+          <a:ln w="12700" cap="flat" cmpd="sng" algn="ctr">
+            <a:solidFill>
+              <a:srgbClr val="A5A5A5"/>
+            </a:solidFill>
+            <a:prstDash val="solid"/>
+            <a:miter lim="800000"/>
+          </a:ln>
+          <a:effectLst/>
+        </p:spPr>
+        <p:txBody>
+          <a:bodyPr lIns="36000" tIns="36000" rIns="36000" bIns="36000" rtlCol="0" anchor="t"/>
+          <a:lstStyle/>
+          <a:p>
+            <a:pPr defTabSz="914400"/>
+            <a:r>
+              <a:rPr lang="de-DE" sz="800" kern="0">
+                <a:solidFill>
+                  <a:prstClr val="black"/>
+                </a:solidFill>
+                <a:latin typeface="Calibri" panose="020F0502020204030204"/>
+              </a:rPr>
+              <a:t>functionName</a:t>
+            </a:r>
+          </a:p>
+          <a:p>
+            <a:pPr defTabSz="914400"/>
+            <a:r>
+              <a:rPr lang="de-DE" sz="800" kern="0">
+                <a:solidFill>
+                  <a:prstClr val="black"/>
+                </a:solidFill>
+                <a:latin typeface="Calibri" panose="020F0502020204030204"/>
+              </a:rPr>
+              <a:t>parameter</a:t>
+            </a:r>
+          </a:p>
+          <a:p>
+            <a:pPr defTabSz="914400"/>
+            <a:r>
+              <a:rPr lang="de-DE" sz="800" kern="0">
+                <a:solidFill>
+                  <a:prstClr val="black"/>
+                </a:solidFill>
+                <a:latin typeface="Calibri" panose="020F0502020204030204"/>
+              </a:rPr>
+              <a:t>…</a:t>
+            </a:r>
+          </a:p>
+        </p:txBody>
+      </p:sp>
+      <p:cxnSp>
+        <p:nvCxnSpPr>
+          <p:cNvPr id="167" name="Gerade Verbindung mit Pfeil 166">
+            <a:extLst>
+              <a:ext uri="{FF2B5EF4-FFF2-40B4-BE49-F238E27FC236}">
+                <a16:creationId xmlns:a16="http://schemas.microsoft.com/office/drawing/2014/main" id="{BE093BCA-A2CD-5CC7-4D8E-EB69807C6944}"/>
+              </a:ext>
+            </a:extLst>
+          </p:cNvPr>
+          <p:cNvCxnSpPr>
+            <a:cxnSpLocks/>
+            <a:stCxn id="165" idx="1"/>
+            <a:endCxn id="166" idx="3"/>
+          </p:cNvCxnSpPr>
+          <p:nvPr/>
+        </p:nvCxnSpPr>
+        <p:spPr>
+          <a:xfrm flipH="1">
+            <a:off x="7714446" y="540148"/>
+            <a:ext cx="711743" cy="30985"/>
+          </a:xfrm>
+          <a:prstGeom prst="straightConnector1">
+            <a:avLst/>
+          </a:prstGeom>
+          <a:noFill/>
+          <a:ln w="6350" cap="flat" cmpd="sng" algn="ctr">
+            <a:solidFill>
+              <a:srgbClr val="5B9BD5"/>
+            </a:solidFill>
+            <a:prstDash val="solid"/>
+            <a:miter lim="800000"/>
+            <a:tailEnd type="triangle"/>
+          </a:ln>
+          <a:effectLst/>
+        </p:spPr>
+      </p:cxnSp>
+      <p:cxnSp>
+        <p:nvCxnSpPr>
+          <p:cNvPr id="178" name="Gerade Verbindung mit Pfeil 177">
+            <a:extLst>
+              <a:ext uri="{FF2B5EF4-FFF2-40B4-BE49-F238E27FC236}">
+                <a16:creationId xmlns:a16="http://schemas.microsoft.com/office/drawing/2014/main" id="{EA49DEE1-8C0E-E99B-642F-A7E20F8C0AC5}"/>
+              </a:ext>
+            </a:extLst>
+          </p:cNvPr>
+          <p:cNvCxnSpPr>
+            <a:cxnSpLocks/>
+            <a:stCxn id="175" idx="1"/>
+            <a:endCxn id="165" idx="3"/>
+          </p:cNvCxnSpPr>
+          <p:nvPr/>
+        </p:nvCxnSpPr>
+        <p:spPr>
+          <a:xfrm flipH="1">
+            <a:off x="8963488" y="539481"/>
+            <a:ext cx="616826" cy="667"/>
+          </a:xfrm>
+          <a:prstGeom prst="straightConnector1">
+            <a:avLst/>
+          </a:prstGeom>
+          <a:noFill/>
+          <a:ln w="6350" cap="flat" cmpd="sng" algn="ctr">
+            <a:solidFill>
+              <a:srgbClr val="5B9BD5"/>
+            </a:solidFill>
+            <a:prstDash val="solid"/>
+            <a:miter lim="800000"/>
+            <a:tailEnd type="triangle"/>
+          </a:ln>
+          <a:effectLst/>
+        </p:spPr>
+      </p:cxnSp>
+      <p:sp>
+        <p:nvSpPr>
+          <p:cNvPr id="202" name="Rechteck 201">
+            <a:extLst>
+              <a:ext uri="{FF2B5EF4-FFF2-40B4-BE49-F238E27FC236}">
+                <a16:creationId xmlns:a16="http://schemas.microsoft.com/office/drawing/2014/main" id="{478CF1AE-F32E-8A5E-3FFF-725990776B82}"/>
+              </a:ext>
+            </a:extLst>
+          </p:cNvPr>
+          <p:cNvSpPr/>
+          <p:nvPr/>
+        </p:nvSpPr>
+        <p:spPr>
+          <a:xfrm>
+            <a:off x="8884805" y="-921573"/>
+            <a:ext cx="2301547" cy="320758"/>
+          </a:xfrm>
+          <a:prstGeom prst="rect">
+            <a:avLst/>
+          </a:prstGeom>
+          <a:solidFill>
+            <a:sysClr val="window" lastClr="FFFFFF"/>
+          </a:solidFill>
+          <a:ln w="12700" cap="flat" cmpd="sng" algn="ctr">
+            <a:solidFill>
+              <a:srgbClr val="A5A5A5"/>
+            </a:solidFill>
+            <a:prstDash val="solid"/>
+            <a:miter lim="800000"/>
+          </a:ln>
+          <a:effectLst/>
+        </p:spPr>
+        <p:txBody>
+          <a:bodyPr lIns="36000" tIns="36000" rIns="36000" bIns="36000" rtlCol="0" anchor="t"/>
+          <a:lstStyle/>
+          <a:p>
+            <a:pPr defTabSz="914400"/>
+            <a:r>
+              <a:rPr lang="de-DE" sz="800" kern="0">
+                <a:solidFill>
+                  <a:prstClr val="black"/>
+                </a:solidFill>
+                <a:latin typeface="Calibri" panose="020F0502020204030204"/>
+              </a:rPr>
+              <a:t>to be deleted, if no longer required for scrolling</a:t>
+            </a:r>
+          </a:p>
+          <a:p>
+            <a:pPr defTabSz="914400"/>
+            <a:endParaRPr lang="de-DE" sz="800" kern="0">
+              <a:solidFill>
+                <a:prstClr val="black"/>
+              </a:solidFill>
+              <a:latin typeface="Calibri" panose="020F0502020204030204"/>
+            </a:endParaRPr>
+          </a:p>
+        </p:txBody>
+      </p:sp>
+      <p:sp>
+        <p:nvSpPr>
+          <p:cNvPr id="206" name="Rechteck 205">
+            <a:extLst>
+              <a:ext uri="{FF2B5EF4-FFF2-40B4-BE49-F238E27FC236}">
+                <a16:creationId xmlns:a16="http://schemas.microsoft.com/office/drawing/2014/main" id="{26EA71E1-6E4E-BAFE-EFA0-DD3B8CEAC57B}"/>
+              </a:ext>
+            </a:extLst>
+          </p:cNvPr>
+          <p:cNvSpPr/>
+          <p:nvPr/>
+        </p:nvSpPr>
+        <p:spPr>
+          <a:xfrm>
+            <a:off x="12192833" y="750221"/>
+            <a:ext cx="1905036" cy="1056537"/>
+          </a:xfrm>
+          <a:prstGeom prst="rect">
+            <a:avLst/>
+          </a:prstGeom>
+          <a:solidFill>
+            <a:sysClr val="window" lastClr="FFFFFF"/>
+          </a:solidFill>
+          <a:ln w="12700" cap="flat" cmpd="sng" algn="ctr">
+            <a:solidFill>
+              <a:srgbClr val="A5A5A5"/>
+            </a:solidFill>
+            <a:prstDash val="solid"/>
+            <a:miter lim="800000"/>
+          </a:ln>
+          <a:effectLst/>
+        </p:spPr>
+        <p:txBody>
+          <a:bodyPr lIns="36000" tIns="36000" rIns="36000" bIns="36000" rtlCol="0" anchor="t"/>
+          <a:lstStyle/>
+          <a:p>
+            <a:pPr defTabSz="914400"/>
+            <a:r>
+              <a:rPr lang="de-DE" sz="800" kern="0">
+                <a:solidFill>
+                  <a:prstClr val="black"/>
+                </a:solidFill>
+                <a:latin typeface="Calibri" panose="020F0502020204030204"/>
+              </a:rPr>
+              <a:t>local-id=[LinkId]</a:t>
+            </a:r>
+          </a:p>
+          <a:p>
+            <a:pPr defTabSz="914400"/>
+            <a:r>
+              <a:rPr lang="de-DE" sz="800" kern="0">
+                <a:solidFill>
+                  <a:prstClr val="black"/>
+                </a:solidFill>
+                <a:latin typeface="Calibri" panose="020F0502020204030204"/>
+              </a:rPr>
+              <a:t>priority-band</a:t>
+            </a:r>
+          </a:p>
+          <a:p>
+            <a:pPr defTabSz="914400"/>
+            <a:r>
+              <a:rPr lang="de-DE" sz="800" kern="0">
+                <a:solidFill>
+                  <a:prstClr val="black"/>
+                </a:solidFill>
+                <a:latin typeface="Calibri" panose="020F0502020204030204"/>
+              </a:rPr>
+              <a:t>affected-cc/ltp/lp</a:t>
+            </a:r>
+          </a:p>
+          <a:p>
+            <a:pPr defTabSz="914400"/>
+            <a:r>
+              <a:rPr lang="de-DE" sz="800" kern="0">
+                <a:solidFill>
+                  <a:prstClr val="black"/>
+                </a:solidFill>
+                <a:latin typeface="Calibri" panose="020F0502020204030204"/>
+              </a:rPr>
+              <a:t>error-code</a:t>
+            </a:r>
+          </a:p>
+          <a:p>
+            <a:pPr defTabSz="914400"/>
+            <a:r>
+              <a:rPr lang="de-DE" sz="800" kern="0">
+                <a:solidFill>
+                  <a:prstClr val="black"/>
+                </a:solidFill>
+                <a:latin typeface="Calibri" panose="020F0502020204030204"/>
+              </a:rPr>
+              <a:t>error-message</a:t>
+            </a:r>
+          </a:p>
+          <a:p>
+            <a:pPr defTabSz="914400"/>
+            <a:r>
+              <a:rPr lang="de-DE" sz="800" kern="0">
+                <a:solidFill>
+                  <a:prstClr val="black"/>
+                </a:solidFill>
+                <a:latin typeface="Calibri" panose="020F0502020204030204"/>
+              </a:rPr>
+              <a:t>…</a:t>
+            </a:r>
+          </a:p>
+          <a:p>
+            <a:pPr defTabSz="914400"/>
+            <a:endParaRPr lang="de-DE" sz="800" kern="0">
+              <a:solidFill>
+                <a:prstClr val="black"/>
+              </a:solidFill>
+              <a:latin typeface="Calibri" panose="020F0502020204030204"/>
+            </a:endParaRPr>
+          </a:p>
+          <a:p>
+            <a:pPr defTabSz="914400"/>
+            <a:endParaRPr lang="de-DE" sz="800" kern="0">
+              <a:solidFill>
+                <a:prstClr val="black"/>
+              </a:solidFill>
+              <a:latin typeface="Calibri" panose="020F0502020204030204"/>
+            </a:endParaRPr>
+          </a:p>
+        </p:txBody>
+      </p:sp>
+      <p:cxnSp>
+        <p:nvCxnSpPr>
+          <p:cNvPr id="207" name="Gerade Verbindung mit Pfeil 206">
+            <a:extLst>
+              <a:ext uri="{FF2B5EF4-FFF2-40B4-BE49-F238E27FC236}">
+                <a16:creationId xmlns:a16="http://schemas.microsoft.com/office/drawing/2014/main" id="{42F3670C-06B4-695C-203E-C5D050ACA051}"/>
+              </a:ext>
+            </a:extLst>
+          </p:cNvPr>
+          <p:cNvCxnSpPr>
+            <a:cxnSpLocks/>
+            <a:stCxn id="192" idx="3"/>
+            <a:endCxn id="206" idx="1"/>
+          </p:cNvCxnSpPr>
+          <p:nvPr/>
+        </p:nvCxnSpPr>
+        <p:spPr>
+          <a:xfrm flipV="1">
+            <a:off x="11265475" y="1278490"/>
+            <a:ext cx="927358" cy="77165"/>
+          </a:xfrm>
+          <a:prstGeom prst="straightConnector1">
+            <a:avLst/>
+          </a:prstGeom>
+          <a:noFill/>
+          <a:ln w="6350" cap="flat" cmpd="sng" algn="ctr">
+            <a:solidFill>
+              <a:srgbClr val="5B9BD5"/>
+            </a:solidFill>
+            <a:prstDash val="solid"/>
+            <a:miter lim="800000"/>
+            <a:tailEnd type="triangle"/>
+          </a:ln>
+          <a:effectLst/>
+        </p:spPr>
+      </p:cxnSp>
+      <p:cxnSp>
+        <p:nvCxnSpPr>
+          <p:cNvPr id="60" name="Gerade Verbindung mit Pfeil 59">
+            <a:extLst>
+              <a:ext uri="{FF2B5EF4-FFF2-40B4-BE49-F238E27FC236}">
+                <a16:creationId xmlns:a16="http://schemas.microsoft.com/office/drawing/2014/main" id="{8D9C5C64-6EB4-4477-702C-4A3C3F24EDF8}"/>
+              </a:ext>
+            </a:extLst>
+          </p:cNvPr>
+          <p:cNvCxnSpPr>
+            <a:cxnSpLocks/>
+            <a:stCxn id="117" idx="2"/>
+            <a:endCxn id="216" idx="0"/>
+          </p:cNvCxnSpPr>
+          <p:nvPr/>
+        </p:nvCxnSpPr>
+        <p:spPr>
+          <a:xfrm flipH="1">
+            <a:off x="9848964" y="3000745"/>
+            <a:ext cx="1" cy="1114192"/>
+          </a:xfrm>
+          <a:prstGeom prst="straightConnector1">
+            <a:avLst/>
+          </a:prstGeom>
+          <a:noFill/>
+          <a:ln w="6350" cap="flat" cmpd="sng" algn="ctr">
+            <a:solidFill>
+              <a:srgbClr val="5B9BD5"/>
+            </a:solidFill>
+            <a:prstDash val="solid"/>
+            <a:miter lim="800000"/>
+            <a:tailEnd type="triangle"/>
+          </a:ln>
+          <a:effectLst/>
+        </p:spPr>
+      </p:cxnSp>
+      <p:sp>
+        <p:nvSpPr>
+          <p:cNvPr id="70" name="Abgerundetes Rechteck 1">
+            <a:extLst>
+              <a:ext uri="{FF2B5EF4-FFF2-40B4-BE49-F238E27FC236}">
+                <a16:creationId xmlns:a16="http://schemas.microsoft.com/office/drawing/2014/main" id="{C0BF25FF-18C7-A4CF-F5A4-4B97E69FD229}"/>
+              </a:ext>
+            </a:extLst>
+          </p:cNvPr>
+          <p:cNvSpPr/>
+          <p:nvPr/>
+        </p:nvSpPr>
+        <p:spPr>
+          <a:xfrm>
+            <a:off x="10725635" y="5406692"/>
+            <a:ext cx="537299" cy="445572"/>
+          </a:xfrm>
+          <a:prstGeom prst="roundRect">
+            <a:avLst/>
+          </a:prstGeom>
+          <a:solidFill>
+            <a:sysClr val="window" lastClr="FFFFFF">
+              <a:lumMod val="65000"/>
+            </a:sysClr>
+          </a:solidFill>
+          <a:ln w="12700" cap="flat" cmpd="sng" algn="ctr">
+            <a:solidFill>
+              <a:sysClr val="window" lastClr="FFFFFF">
+                <a:lumMod val="50000"/>
+              </a:sysClr>
+            </a:solidFill>
+            <a:prstDash val="solid"/>
+            <a:miter lim="800000"/>
+          </a:ln>
+          <a:effectLst>
+            <a:outerShdw blurRad="50800" dist="38100" dir="2700000" algn="tl" rotWithShape="0">
+              <a:prstClr val="black">
+                <a:alpha val="40000"/>
+              </a:prstClr>
+            </a:outerShdw>
+          </a:effectLst>
+        </p:spPr>
+        <p:txBody>
+          <a:bodyPr rtlCol="0" anchor="ctr"/>
+          <a:lstStyle/>
+          <a:p>
+            <a:pPr algn="ctr" defTabSz="914400">
+              <a:defRPr/>
+            </a:pPr>
+            <a:r>
+              <a:rPr lang="de-DE" sz="1050" kern="0">
+                <a:solidFill>
+                  <a:prstClr val="white"/>
+                </a:solidFill>
+                <a:latin typeface="Calibri" panose="020F0502020204030204"/>
+              </a:rPr>
+              <a:t>E</a:t>
+            </a:r>
+            <a:endParaRPr lang="de-DE" sz="1050" kern="0" dirty="0">
+              <a:solidFill>
+                <a:prstClr val="white"/>
+              </a:solidFill>
+              <a:latin typeface="Calibri" panose="020F0502020204030204"/>
+            </a:endParaRPr>
+          </a:p>
+        </p:txBody>
+      </p:sp>
+      <p:sp>
+        <p:nvSpPr>
+          <p:cNvPr id="83" name="Abgerundetes Rechteck 8">
+            <a:extLst>
+              <a:ext uri="{FF2B5EF4-FFF2-40B4-BE49-F238E27FC236}">
+                <a16:creationId xmlns:a16="http://schemas.microsoft.com/office/drawing/2014/main" id="{443F278C-B2D1-E3AD-7966-8D59EA4283D5}"/>
+              </a:ext>
+            </a:extLst>
+          </p:cNvPr>
+          <p:cNvSpPr/>
+          <p:nvPr/>
+        </p:nvSpPr>
+        <p:spPr>
+          <a:xfrm>
+            <a:off x="12531382" y="4216874"/>
+            <a:ext cx="1161453" cy="445572"/>
+          </a:xfrm>
+          <a:prstGeom prst="roundRect">
+            <a:avLst/>
+          </a:prstGeom>
+          <a:solidFill>
+            <a:srgbClr val="4472C4">
+              <a:lumMod val="60000"/>
+              <a:lumOff val="40000"/>
+            </a:srgbClr>
+          </a:solidFill>
+          <a:ln w="12700" cap="flat" cmpd="sng" algn="ctr">
+            <a:solidFill>
+              <a:srgbClr val="4472C4">
+                <a:lumMod val="75000"/>
+              </a:srgbClr>
+            </a:solidFill>
+            <a:prstDash val="solid"/>
+            <a:miter lim="800000"/>
+          </a:ln>
+          <a:effectLst>
+            <a:outerShdw blurRad="50800" dist="38100" dir="2700000" algn="tl" rotWithShape="0">
+              <a:prstClr val="black">
+                <a:alpha val="40000"/>
+              </a:prstClr>
+            </a:outerShdw>
+          </a:effectLst>
+        </p:spPr>
+        <p:txBody>
+          <a:bodyPr rtlCol="0" anchor="ctr"/>
+          <a:lstStyle/>
+          <a:p>
+            <a:pPr algn="ctr" defTabSz="914400">
+              <a:defRPr/>
+            </a:pPr>
+            <a:r>
+              <a:rPr lang="de-DE" sz="1050" kern="0">
+                <a:solidFill>
+                  <a:prstClr val="white"/>
+                </a:solidFill>
+                <a:latin typeface="Calibri" panose="020F0502020204030204"/>
+              </a:rPr>
+              <a:t>idu [1]</a:t>
+            </a:r>
+          </a:p>
+        </p:txBody>
+      </p:sp>
+      <p:cxnSp>
+        <p:nvCxnSpPr>
+          <p:cNvPr id="84" name="Gerade Verbindung mit Pfeil 83">
+            <a:extLst>
+              <a:ext uri="{FF2B5EF4-FFF2-40B4-BE49-F238E27FC236}">
+                <a16:creationId xmlns:a16="http://schemas.microsoft.com/office/drawing/2014/main" id="{184AEC20-9B90-B26C-86CE-82CE2A57CFDB}"/>
+              </a:ext>
+            </a:extLst>
+          </p:cNvPr>
+          <p:cNvCxnSpPr>
+            <a:cxnSpLocks/>
+            <a:stCxn id="83" idx="1"/>
+            <a:endCxn id="70" idx="3"/>
+          </p:cNvCxnSpPr>
+          <p:nvPr/>
+        </p:nvCxnSpPr>
+        <p:spPr>
+          <a:xfrm flipH="1">
+            <a:off x="11262934" y="4439660"/>
+            <a:ext cx="1268448" cy="1189818"/>
+          </a:xfrm>
+          <a:prstGeom prst="straightConnector1">
+            <a:avLst/>
+          </a:prstGeom>
+          <a:noFill/>
+          <a:ln w="6350" cap="flat" cmpd="sng" algn="ctr">
+            <a:solidFill>
+              <a:srgbClr val="5B9BD5"/>
+            </a:solidFill>
+            <a:prstDash val="dash"/>
+            <a:miter lim="800000"/>
+            <a:tailEnd type="triangle"/>
+          </a:ln>
+          <a:effectLst/>
+        </p:spPr>
+      </p:cxnSp>
+      <p:sp>
+        <p:nvSpPr>
+          <p:cNvPr id="99" name="Rechteck 98">
+            <a:extLst>
+              <a:ext uri="{FF2B5EF4-FFF2-40B4-BE49-F238E27FC236}">
+                <a16:creationId xmlns:a16="http://schemas.microsoft.com/office/drawing/2014/main" id="{9C2D2E47-7358-8D95-CAE2-6D5DDED05672}"/>
+              </a:ext>
+            </a:extLst>
+          </p:cNvPr>
+          <p:cNvSpPr/>
+          <p:nvPr/>
+        </p:nvSpPr>
+        <p:spPr>
+          <a:xfrm>
+            <a:off x="14274800" y="4216338"/>
+            <a:ext cx="1991421" cy="504257"/>
+          </a:xfrm>
+          <a:prstGeom prst="rect">
+            <a:avLst/>
+          </a:prstGeom>
+          <a:solidFill>
+            <a:sysClr val="window" lastClr="FFFFFF"/>
+          </a:solidFill>
+          <a:ln w="12700" cap="flat" cmpd="sng" algn="ctr">
+            <a:solidFill>
+              <a:srgbClr val="A5A5A5"/>
+            </a:solidFill>
+            <a:prstDash val="solid"/>
+            <a:miter lim="800000"/>
+          </a:ln>
+          <a:effectLst/>
+        </p:spPr>
+        <p:txBody>
+          <a:bodyPr lIns="36000" tIns="36000" rIns="36000" bIns="36000" rtlCol="0" anchor="t"/>
+          <a:lstStyle/>
+          <a:p>
+            <a:pPr defTabSz="914400"/>
+            <a:r>
+              <a:rPr lang="de-DE" sz="800" kern="0">
+                <a:solidFill>
+                  <a:prstClr val="black"/>
+                </a:solidFill>
+                <a:latin typeface="Calibri" panose="020F0502020204030204"/>
+              </a:rPr>
+              <a:t>local-id = idu / [iduUuid]</a:t>
+            </a:r>
+          </a:p>
+          <a:p>
+            <a:pPr defTabSz="914400"/>
+            <a:r>
+              <a:rPr lang="de-DE" sz="800" strike="sngStrike" kern="0">
+                <a:solidFill>
+                  <a:prstClr val="black"/>
+                </a:solidFill>
+                <a:latin typeface="Calibri" panose="020F0502020204030204"/>
+              </a:rPr>
+              <a:t>category=idu</a:t>
+            </a:r>
+          </a:p>
+          <a:p>
+            <a:pPr defTabSz="914400"/>
+            <a:r>
+              <a:rPr lang="de-DE" sz="800" kern="0">
+                <a:solidFill>
+                  <a:prstClr val="black"/>
+                </a:solidFill>
+                <a:latin typeface="Calibri" panose="020F0502020204030204"/>
+              </a:rPr>
+              <a:t>(has Holder[*])</a:t>
+            </a:r>
+          </a:p>
+        </p:txBody>
+      </p:sp>
+      <p:cxnSp>
+        <p:nvCxnSpPr>
+          <p:cNvPr id="102" name="Gerade Verbindung mit Pfeil 101">
+            <a:extLst>
+              <a:ext uri="{FF2B5EF4-FFF2-40B4-BE49-F238E27FC236}">
+                <a16:creationId xmlns:a16="http://schemas.microsoft.com/office/drawing/2014/main" id="{8EEA6D8F-4AA5-ED12-D282-D54B57F26EEB}"/>
+              </a:ext>
+            </a:extLst>
+          </p:cNvPr>
+          <p:cNvCxnSpPr>
+            <a:cxnSpLocks/>
+            <a:stCxn id="83" idx="3"/>
+            <a:endCxn id="99" idx="1"/>
+          </p:cNvCxnSpPr>
+          <p:nvPr/>
+        </p:nvCxnSpPr>
+        <p:spPr>
+          <a:xfrm>
+            <a:off x="13692835" y="4439660"/>
+            <a:ext cx="581965" cy="28807"/>
+          </a:xfrm>
+          <a:prstGeom prst="straightConnector1">
+            <a:avLst/>
+          </a:prstGeom>
+          <a:noFill/>
+          <a:ln w="6350" cap="flat" cmpd="sng" algn="ctr">
+            <a:solidFill>
+              <a:srgbClr val="5B9BD5"/>
+            </a:solidFill>
+            <a:prstDash val="solid"/>
+            <a:miter lim="800000"/>
+            <a:tailEnd type="triangle"/>
+          </a:ln>
+          <a:effectLst/>
+        </p:spPr>
+      </p:cxnSp>
+      <p:sp>
+        <p:nvSpPr>
+          <p:cNvPr id="116" name="Abgerundetes Rechteck 8">
+            <a:extLst>
+              <a:ext uri="{FF2B5EF4-FFF2-40B4-BE49-F238E27FC236}">
+                <a16:creationId xmlns:a16="http://schemas.microsoft.com/office/drawing/2014/main" id="{9257A587-AF25-575E-DF47-28FEE0FF18C4}"/>
+              </a:ext>
+            </a:extLst>
+          </p:cNvPr>
+          <p:cNvSpPr/>
+          <p:nvPr/>
+        </p:nvSpPr>
+        <p:spPr>
+          <a:xfrm>
+            <a:off x="12531382" y="5004597"/>
+            <a:ext cx="1161453" cy="445572"/>
+          </a:xfrm>
+          <a:prstGeom prst="roundRect">
+            <a:avLst/>
+          </a:prstGeom>
+          <a:solidFill>
+            <a:srgbClr val="4472C4">
+              <a:lumMod val="60000"/>
+              <a:lumOff val="40000"/>
+            </a:srgbClr>
+          </a:solidFill>
+          <a:ln w="12700" cap="flat" cmpd="sng" algn="ctr">
+            <a:solidFill>
+              <a:srgbClr val="4472C4">
+                <a:lumMod val="75000"/>
+              </a:srgbClr>
+            </a:solidFill>
+            <a:prstDash val="solid"/>
+            <a:miter lim="800000"/>
+          </a:ln>
+          <a:effectLst>
+            <a:outerShdw blurRad="50800" dist="38100" dir="2700000" algn="tl" rotWithShape="0">
+              <a:prstClr val="black">
+                <a:alpha val="40000"/>
+              </a:prstClr>
+            </a:outerShdw>
+          </a:effectLst>
+        </p:spPr>
+        <p:txBody>
+          <a:bodyPr rtlCol="0" anchor="ctr"/>
+          <a:lstStyle/>
+          <a:p>
+            <a:pPr algn="ctr" defTabSz="914400">
+              <a:defRPr/>
+            </a:pPr>
+            <a:r>
+              <a:rPr lang="de-DE" sz="1050" kern="0">
+                <a:solidFill>
+                  <a:prstClr val="white"/>
+                </a:solidFill>
+                <a:latin typeface="Calibri" panose="020F0502020204030204"/>
+              </a:rPr>
+              <a:t>modem [*]</a:t>
+            </a:r>
+          </a:p>
+        </p:txBody>
+      </p:sp>
+      <p:sp>
+        <p:nvSpPr>
+          <p:cNvPr id="118" name="Rechteck 117">
+            <a:extLst>
+              <a:ext uri="{FF2B5EF4-FFF2-40B4-BE49-F238E27FC236}">
+                <a16:creationId xmlns:a16="http://schemas.microsoft.com/office/drawing/2014/main" id="{9CD9D71B-FBE6-67F6-0E2D-6F94AF73DA04}"/>
+              </a:ext>
+            </a:extLst>
+          </p:cNvPr>
+          <p:cNvSpPr/>
+          <p:nvPr/>
+        </p:nvSpPr>
+        <p:spPr>
+          <a:xfrm>
+            <a:off x="14274800" y="4975554"/>
+            <a:ext cx="1991421" cy="718487"/>
+          </a:xfrm>
+          <a:prstGeom prst="rect">
+            <a:avLst/>
+          </a:prstGeom>
+          <a:solidFill>
+            <a:sysClr val="window" lastClr="FFFFFF"/>
+          </a:solidFill>
+          <a:ln w="12700" cap="flat" cmpd="sng" algn="ctr">
+            <a:solidFill>
+              <a:srgbClr val="A5A5A5"/>
+            </a:solidFill>
+            <a:prstDash val="solid"/>
+            <a:miter lim="800000"/>
+          </a:ln>
+          <a:effectLst/>
+        </p:spPr>
+        <p:txBody>
+          <a:bodyPr lIns="36000" tIns="36000" rIns="36000" bIns="36000" rtlCol="0" anchor="t"/>
+          <a:lstStyle/>
+          <a:p>
+            <a:pPr defTabSz="914400"/>
+            <a:r>
+              <a:rPr lang="de-DE" sz="800" kern="0">
+                <a:solidFill>
+                  <a:prstClr val="black"/>
+                </a:solidFill>
+                <a:latin typeface="Calibri" panose="020F0502020204030204"/>
+              </a:rPr>
+              <a:t>local-id = [local-id] / [modemUuid]</a:t>
+            </a:r>
+          </a:p>
+          <a:p>
+            <a:pPr defTabSz="914400"/>
+            <a:r>
+              <a:rPr lang="de-DE" sz="800" kern="0">
+                <a:solidFill>
+                  <a:prstClr val="black"/>
+                </a:solidFill>
+                <a:latin typeface="Calibri" panose="020F0502020204030204"/>
+              </a:rPr>
+              <a:t>category = modem</a:t>
+            </a:r>
+          </a:p>
+          <a:p>
+            <a:pPr defTabSz="914400"/>
+            <a:r>
+              <a:rPr lang="de-DE" sz="800" kern="0">
+                <a:solidFill>
+                  <a:prstClr val="black"/>
+                </a:solidFill>
+                <a:latin typeface="Calibri" panose="020F0502020204030204"/>
+              </a:rPr>
+              <a:t>equipmentName = [modemCard] / [???]</a:t>
+            </a:r>
+          </a:p>
+          <a:p>
+            <a:pPr defTabSz="914400"/>
+            <a:r>
+              <a:rPr lang="de-DE" sz="800" kern="0">
+                <a:solidFill>
+                  <a:prstClr val="black"/>
+                </a:solidFill>
+                <a:latin typeface="Calibri" panose="020F0502020204030204"/>
+              </a:rPr>
+              <a:t>(has Holder[*])</a:t>
+            </a:r>
+          </a:p>
+          <a:p>
+            <a:pPr defTabSz="914400"/>
+            <a:endParaRPr lang="de-DE" sz="800" kern="0">
+              <a:solidFill>
+                <a:prstClr val="black"/>
+              </a:solidFill>
+              <a:latin typeface="Calibri" panose="020F0502020204030204"/>
+            </a:endParaRPr>
+          </a:p>
+        </p:txBody>
+      </p:sp>
+      <p:cxnSp>
+        <p:nvCxnSpPr>
+          <p:cNvPr id="123" name="Gerade Verbindung mit Pfeil 122">
+            <a:extLst>
+              <a:ext uri="{FF2B5EF4-FFF2-40B4-BE49-F238E27FC236}">
+                <a16:creationId xmlns:a16="http://schemas.microsoft.com/office/drawing/2014/main" id="{9B1ABDE3-BECF-16CE-E3CC-6FA836F4935B}"/>
+              </a:ext>
+            </a:extLst>
+          </p:cNvPr>
+          <p:cNvCxnSpPr>
+            <a:cxnSpLocks/>
+            <a:stCxn id="116" idx="1"/>
+            <a:endCxn id="70" idx="3"/>
+          </p:cNvCxnSpPr>
+          <p:nvPr/>
+        </p:nvCxnSpPr>
+        <p:spPr>
+          <a:xfrm flipH="1">
+            <a:off x="11262934" y="5227383"/>
+            <a:ext cx="1268448" cy="402095"/>
+          </a:xfrm>
+          <a:prstGeom prst="straightConnector1">
+            <a:avLst/>
+          </a:prstGeom>
+          <a:noFill/>
+          <a:ln w="6350" cap="flat" cmpd="sng" algn="ctr">
+            <a:solidFill>
+              <a:srgbClr val="5B9BD5"/>
+            </a:solidFill>
+            <a:prstDash val="dash"/>
+            <a:miter lim="800000"/>
+            <a:tailEnd type="triangle"/>
+          </a:ln>
+          <a:effectLst/>
+        </p:spPr>
+      </p:cxnSp>
+      <p:cxnSp>
+        <p:nvCxnSpPr>
+          <p:cNvPr id="135" name="Gerade Verbindung mit Pfeil 134">
+            <a:extLst>
+              <a:ext uri="{FF2B5EF4-FFF2-40B4-BE49-F238E27FC236}">
+                <a16:creationId xmlns:a16="http://schemas.microsoft.com/office/drawing/2014/main" id="{C77582F7-6E8A-C9D0-64AD-B8BC745BF518}"/>
+              </a:ext>
+            </a:extLst>
+          </p:cNvPr>
+          <p:cNvCxnSpPr>
+            <a:cxnSpLocks/>
+            <a:stCxn id="116" idx="3"/>
+            <a:endCxn id="118" idx="1"/>
+          </p:cNvCxnSpPr>
+          <p:nvPr/>
+        </p:nvCxnSpPr>
+        <p:spPr>
+          <a:xfrm>
+            <a:off x="13692835" y="5227383"/>
+            <a:ext cx="581965" cy="107415"/>
+          </a:xfrm>
+          <a:prstGeom prst="straightConnector1">
+            <a:avLst/>
+          </a:prstGeom>
+          <a:noFill/>
+          <a:ln w="6350" cap="flat" cmpd="sng" algn="ctr">
+            <a:solidFill>
+              <a:srgbClr val="5B9BD5"/>
+            </a:solidFill>
+            <a:prstDash val="solid"/>
+            <a:miter lim="800000"/>
+            <a:tailEnd type="triangle"/>
+          </a:ln>
+          <a:effectLst/>
+        </p:spPr>
+      </p:cxnSp>
+      <p:sp>
+        <p:nvSpPr>
+          <p:cNvPr id="142" name="Abgerundetes Rechteck 8">
+            <a:extLst>
+              <a:ext uri="{FF2B5EF4-FFF2-40B4-BE49-F238E27FC236}">
+                <a16:creationId xmlns:a16="http://schemas.microsoft.com/office/drawing/2014/main" id="{901B5190-CC68-3F36-0B15-51F88F37E2A1}"/>
+              </a:ext>
+            </a:extLst>
+          </p:cNvPr>
+          <p:cNvSpPr/>
+          <p:nvPr/>
+        </p:nvSpPr>
+        <p:spPr>
+          <a:xfrm>
+            <a:off x="12531382" y="5852264"/>
+            <a:ext cx="1161453" cy="445572"/>
+          </a:xfrm>
+          <a:prstGeom prst="roundRect">
+            <a:avLst/>
+          </a:prstGeom>
+          <a:solidFill>
+            <a:srgbClr val="4472C4">
+              <a:lumMod val="60000"/>
+              <a:lumOff val="40000"/>
+            </a:srgbClr>
+          </a:solidFill>
+          <a:ln w="12700" cap="flat" cmpd="sng" algn="ctr">
+            <a:solidFill>
+              <a:srgbClr val="4472C4">
+                <a:lumMod val="75000"/>
+              </a:srgbClr>
+            </a:solidFill>
+            <a:prstDash val="solid"/>
+            <a:miter lim="800000"/>
+          </a:ln>
+          <a:effectLst>
+            <a:outerShdw blurRad="50800" dist="38100" dir="2700000" algn="tl" rotWithShape="0">
+              <a:prstClr val="black">
+                <a:alpha val="40000"/>
+              </a:prstClr>
+            </a:outerShdw>
+          </a:effectLst>
+        </p:spPr>
+        <p:txBody>
+          <a:bodyPr rtlCol="0" anchor="ctr"/>
+          <a:lstStyle/>
+          <a:p>
+            <a:pPr algn="ctr" defTabSz="914400">
+              <a:defRPr/>
+            </a:pPr>
+            <a:r>
+              <a:rPr lang="de-DE" sz="1050" kern="0">
+                <a:solidFill>
+                  <a:prstClr val="white"/>
+                </a:solidFill>
+                <a:latin typeface="Calibri" panose="020F0502020204030204"/>
+              </a:rPr>
+              <a:t>odu [*]</a:t>
+            </a:r>
+          </a:p>
+        </p:txBody>
+      </p:sp>
+      <p:sp>
+        <p:nvSpPr>
+          <p:cNvPr id="143" name="Rechteck 142">
+            <a:extLst>
+              <a:ext uri="{FF2B5EF4-FFF2-40B4-BE49-F238E27FC236}">
+                <a16:creationId xmlns:a16="http://schemas.microsoft.com/office/drawing/2014/main" id="{0B02FDAE-BC7F-0067-F12A-DA7B5CF0CFD2}"/>
+              </a:ext>
+            </a:extLst>
+          </p:cNvPr>
+          <p:cNvSpPr/>
+          <p:nvPr/>
+        </p:nvSpPr>
+        <p:spPr>
+          <a:xfrm>
+            <a:off x="14274800" y="5914688"/>
+            <a:ext cx="1991421" cy="617361"/>
+          </a:xfrm>
+          <a:prstGeom prst="rect">
+            <a:avLst/>
+          </a:prstGeom>
+          <a:solidFill>
+            <a:sysClr val="window" lastClr="FFFFFF"/>
+          </a:solidFill>
+          <a:ln w="12700" cap="flat" cmpd="sng" algn="ctr">
+            <a:solidFill>
+              <a:srgbClr val="A5A5A5"/>
+            </a:solidFill>
+            <a:prstDash val="solid"/>
+            <a:miter lim="800000"/>
+          </a:ln>
+          <a:effectLst/>
+        </p:spPr>
+        <p:txBody>
+          <a:bodyPr lIns="36000" tIns="36000" rIns="36000" bIns="36000" rtlCol="0" anchor="t"/>
+          <a:lstStyle/>
+          <a:p>
+            <a:pPr defTabSz="914400"/>
+            <a:r>
+              <a:rPr lang="de-DE" sz="800" kern="0">
+                <a:solidFill>
+                  <a:prstClr val="black"/>
+                </a:solidFill>
+                <a:latin typeface="Calibri" panose="020F0502020204030204"/>
+              </a:rPr>
+              <a:t>local-id = [local-id] / [oduUuid]</a:t>
+            </a:r>
+          </a:p>
+          <a:p>
+            <a:pPr defTabSz="914400"/>
+            <a:r>
+              <a:rPr lang="de-DE" sz="800" kern="0">
+                <a:solidFill>
+                  <a:prstClr val="black"/>
+                </a:solidFill>
+                <a:latin typeface="Calibri" panose="020F0502020204030204"/>
+              </a:rPr>
+              <a:t>category=odu</a:t>
+            </a:r>
+          </a:p>
+          <a:p>
+            <a:pPr defTabSz="914400"/>
+            <a:r>
+              <a:rPr lang="de-DE" sz="800" kern="0">
+                <a:solidFill>
+                  <a:prstClr val="black"/>
+                </a:solidFill>
+                <a:latin typeface="Calibri" panose="020F0502020204030204"/>
+              </a:rPr>
+              <a:t>equipmentName = [oduProductCode] / [???]</a:t>
+            </a:r>
+          </a:p>
+        </p:txBody>
+      </p:sp>
+      <p:cxnSp>
+        <p:nvCxnSpPr>
+          <p:cNvPr id="144" name="Gerade Verbindung mit Pfeil 143">
+            <a:extLst>
+              <a:ext uri="{FF2B5EF4-FFF2-40B4-BE49-F238E27FC236}">
+                <a16:creationId xmlns:a16="http://schemas.microsoft.com/office/drawing/2014/main" id="{C5BAD04C-CAAB-9142-1A9E-BE72A58D1E34}"/>
+              </a:ext>
+            </a:extLst>
+          </p:cNvPr>
+          <p:cNvCxnSpPr>
+            <a:cxnSpLocks/>
+            <a:stCxn id="142" idx="3"/>
+            <a:endCxn id="143" idx="1"/>
+          </p:cNvCxnSpPr>
+          <p:nvPr/>
+        </p:nvCxnSpPr>
+        <p:spPr>
+          <a:xfrm>
+            <a:off x="13692835" y="6075050"/>
+            <a:ext cx="581965" cy="148319"/>
+          </a:xfrm>
+          <a:prstGeom prst="straightConnector1">
+            <a:avLst/>
+          </a:prstGeom>
+          <a:noFill/>
+          <a:ln w="6350" cap="flat" cmpd="sng" algn="ctr">
+            <a:solidFill>
+              <a:srgbClr val="5B9BD5"/>
+            </a:solidFill>
+            <a:prstDash val="solid"/>
+            <a:miter lim="800000"/>
+            <a:tailEnd type="triangle"/>
+          </a:ln>
+          <a:effectLst/>
+        </p:spPr>
+      </p:cxnSp>
+      <p:cxnSp>
+        <p:nvCxnSpPr>
+          <p:cNvPr id="153" name="Gerade Verbindung mit Pfeil 152">
+            <a:extLst>
+              <a:ext uri="{FF2B5EF4-FFF2-40B4-BE49-F238E27FC236}">
+                <a16:creationId xmlns:a16="http://schemas.microsoft.com/office/drawing/2014/main" id="{51D09282-BE07-3240-2165-CB9551908D8C}"/>
+              </a:ext>
+            </a:extLst>
+          </p:cNvPr>
+          <p:cNvCxnSpPr>
+            <a:cxnSpLocks/>
+            <a:stCxn id="142" idx="1"/>
+            <a:endCxn id="70" idx="3"/>
+          </p:cNvCxnSpPr>
+          <p:nvPr/>
+        </p:nvCxnSpPr>
+        <p:spPr>
+          <a:xfrm flipH="1" flipV="1">
+            <a:off x="11262934" y="5629478"/>
+            <a:ext cx="1268448" cy="445572"/>
+          </a:xfrm>
+          <a:prstGeom prst="straightConnector1">
+            <a:avLst/>
+          </a:prstGeom>
+          <a:noFill/>
+          <a:ln w="6350" cap="flat" cmpd="sng" algn="ctr">
+            <a:solidFill>
+              <a:srgbClr val="5B9BD5"/>
+            </a:solidFill>
+            <a:prstDash val="dash"/>
+            <a:miter lim="800000"/>
+            <a:tailEnd type="triangle"/>
+          </a:ln>
+          <a:effectLst/>
+        </p:spPr>
+      </p:cxnSp>
+      <p:cxnSp>
+        <p:nvCxnSpPr>
+          <p:cNvPr id="201" name="Verbinder: gewinkelt 200">
+            <a:extLst>
+              <a:ext uri="{FF2B5EF4-FFF2-40B4-BE49-F238E27FC236}">
+                <a16:creationId xmlns:a16="http://schemas.microsoft.com/office/drawing/2014/main" id="{F434A457-560C-5719-70F2-1BF2B3AF29BE}"/>
+              </a:ext>
+            </a:extLst>
+          </p:cNvPr>
+          <p:cNvCxnSpPr>
+            <a:cxnSpLocks/>
+            <a:stCxn id="117" idx="2"/>
+            <a:endCxn id="87" idx="0"/>
+          </p:cNvCxnSpPr>
+          <p:nvPr/>
+        </p:nvCxnSpPr>
+        <p:spPr>
+          <a:xfrm rot="5400000">
+            <a:off x="5597192" y="-131750"/>
+            <a:ext cx="1119279" cy="7384269"/>
+          </a:xfrm>
+          <a:prstGeom prst="bentConnector3">
+            <a:avLst>
+              <a:gd name="adj1" fmla="val 50000"/>
+            </a:avLst>
+          </a:prstGeom>
+          <a:noFill/>
+          <a:ln w="6350" cap="flat" cmpd="sng" algn="ctr">
+            <a:solidFill>
+              <a:srgbClr val="5B9BD5"/>
+            </a:solidFill>
+            <a:prstDash val="solid"/>
+            <a:miter lim="800000"/>
+            <a:tailEnd type="triangle"/>
+          </a:ln>
+          <a:effectLst/>
+        </p:spPr>
+      </p:cxnSp>
+      <p:sp>
+        <p:nvSpPr>
+          <p:cNvPr id="271" name="Abgerundetes Rechteck 1">
+            <a:extLst>
+              <a:ext uri="{FF2B5EF4-FFF2-40B4-BE49-F238E27FC236}">
+                <a16:creationId xmlns:a16="http://schemas.microsoft.com/office/drawing/2014/main" id="{6F0585D7-D3B8-0B16-593B-3AA1C9E75BC2}"/>
+              </a:ext>
+            </a:extLst>
+          </p:cNvPr>
+          <p:cNvSpPr/>
+          <p:nvPr/>
+        </p:nvSpPr>
+        <p:spPr>
+          <a:xfrm>
+            <a:off x="11285777" y="6651770"/>
+            <a:ext cx="537299" cy="445572"/>
+          </a:xfrm>
+          <a:prstGeom prst="roundRect">
+            <a:avLst/>
+          </a:prstGeom>
+          <a:solidFill>
+            <a:sysClr val="window" lastClr="FFFFFF">
+              <a:lumMod val="65000"/>
+            </a:sysClr>
+          </a:solidFill>
+          <a:ln w="12700" cap="flat" cmpd="sng" algn="ctr">
+            <a:solidFill>
+              <a:sysClr val="window" lastClr="FFFFFF">
+                <a:lumMod val="50000"/>
+              </a:sysClr>
+            </a:solidFill>
+            <a:prstDash val="solid"/>
+            <a:miter lim="800000"/>
+          </a:ln>
+          <a:effectLst>
+            <a:outerShdw blurRad="50800" dist="38100" dir="2700000" algn="tl" rotWithShape="0">
+              <a:prstClr val="black">
+                <a:alpha val="40000"/>
+              </a:prstClr>
+            </a:outerShdw>
+          </a:effectLst>
+        </p:spPr>
+        <p:txBody>
+          <a:bodyPr rtlCol="0" anchor="ctr"/>
+          <a:lstStyle/>
+          <a:p>
+            <a:pPr algn="ctr" defTabSz="914400">
+              <a:defRPr/>
+            </a:pPr>
+            <a:r>
+              <a:rPr lang="de-DE" sz="1050" kern="0">
+                <a:solidFill>
+                  <a:prstClr val="white"/>
+                </a:solidFill>
+                <a:latin typeface="Calibri" panose="020F0502020204030204"/>
+              </a:rPr>
+              <a:t>H</a:t>
+            </a:r>
+            <a:endParaRPr lang="de-DE" sz="1050" kern="0" dirty="0">
+              <a:solidFill>
+                <a:prstClr val="white"/>
+              </a:solidFill>
+              <a:latin typeface="Calibri" panose="020F0502020204030204"/>
+            </a:endParaRPr>
+          </a:p>
+        </p:txBody>
+      </p:sp>
+      <p:cxnSp>
+        <p:nvCxnSpPr>
+          <p:cNvPr id="272" name="Gerade Verbindung mit Pfeil 271">
+            <a:extLst>
+              <a:ext uri="{FF2B5EF4-FFF2-40B4-BE49-F238E27FC236}">
+                <a16:creationId xmlns:a16="http://schemas.microsoft.com/office/drawing/2014/main" id="{3B2799C1-CB06-E289-B7D6-C789A2E5EC56}"/>
+              </a:ext>
+            </a:extLst>
+          </p:cNvPr>
+          <p:cNvCxnSpPr>
+            <a:cxnSpLocks/>
+            <a:stCxn id="70" idx="2"/>
+            <a:endCxn id="271" idx="0"/>
+          </p:cNvCxnSpPr>
+          <p:nvPr/>
+        </p:nvCxnSpPr>
+        <p:spPr>
+          <a:xfrm>
+            <a:off x="10994285" y="5852264"/>
+            <a:ext cx="560142" cy="799506"/>
+          </a:xfrm>
+          <a:prstGeom prst="straightConnector1">
+            <a:avLst/>
+          </a:prstGeom>
+          <a:noFill/>
+          <a:ln w="6350" cap="flat" cmpd="sng" algn="ctr">
+            <a:solidFill>
+              <a:srgbClr val="5B9BD5"/>
+            </a:solidFill>
+            <a:prstDash val="solid"/>
+            <a:miter lim="800000"/>
+            <a:tailEnd type="triangle"/>
+          </a:ln>
+          <a:effectLst/>
+        </p:spPr>
+      </p:cxnSp>
+      <p:sp>
+        <p:nvSpPr>
+          <p:cNvPr id="283" name="Rechteck 282">
+            <a:extLst>
+              <a:ext uri="{FF2B5EF4-FFF2-40B4-BE49-F238E27FC236}">
+                <a16:creationId xmlns:a16="http://schemas.microsoft.com/office/drawing/2014/main" id="{3BA19841-BCE3-097C-31B2-1AF04A162D8A}"/>
+              </a:ext>
+            </a:extLst>
+          </p:cNvPr>
+          <p:cNvSpPr/>
+          <p:nvPr/>
+        </p:nvSpPr>
+        <p:spPr>
+          <a:xfrm>
+            <a:off x="12541165" y="6641538"/>
+            <a:ext cx="1822535" cy="1020890"/>
+          </a:xfrm>
+          <a:prstGeom prst="rect">
+            <a:avLst/>
+          </a:prstGeom>
+          <a:solidFill>
+            <a:sysClr val="window" lastClr="FFFFFF"/>
+          </a:solidFill>
+          <a:ln w="12700" cap="flat" cmpd="sng" algn="ctr">
+            <a:solidFill>
+              <a:srgbClr val="A5A5A5"/>
+            </a:solidFill>
+            <a:prstDash val="solid"/>
+            <a:miter lim="800000"/>
+          </a:ln>
+          <a:effectLst/>
+        </p:spPr>
+        <p:txBody>
+          <a:bodyPr lIns="36000" tIns="36000" rIns="36000" bIns="36000" rtlCol="0" anchor="t"/>
+          <a:lstStyle/>
+          <a:p>
+            <a:pPr defTabSz="914400"/>
+            <a:r>
+              <a:rPr lang="de-DE" sz="800" kern="0">
+                <a:solidFill>
+                  <a:prstClr val="black"/>
+                </a:solidFill>
+                <a:latin typeface="Calibri" panose="020F0502020204030204"/>
+              </a:rPr>
+              <a:t>local-id = [local-id] / [holderLocalId]</a:t>
+            </a:r>
+          </a:p>
+          <a:p>
+            <a:pPr defTabSz="914400"/>
+            <a:r>
+              <a:rPr lang="de-DE" sz="800" kern="0">
+                <a:solidFill>
+                  <a:prstClr val="black"/>
+                </a:solidFill>
+                <a:latin typeface="Calibri" panose="020F0502020204030204"/>
+              </a:rPr>
+              <a:t>holderName = </a:t>
+            </a:r>
+          </a:p>
+          <a:p>
+            <a:pPr defTabSz="914400"/>
+            <a:r>
+              <a:rPr lang="de-DE" sz="800" kern="0">
+                <a:solidFill>
+                  <a:prstClr val="black"/>
+                </a:solidFill>
+                <a:latin typeface="Calibri" panose="020F0502020204030204"/>
+              </a:rPr>
+              <a:t>    for modem: [cardSlot] / [???]</a:t>
+            </a:r>
+          </a:p>
+          <a:p>
+            <a:pPr defTabSz="914400"/>
+            <a:r>
+              <a:rPr lang="de-DE" sz="800" kern="0">
+                <a:solidFill>
+                  <a:prstClr val="black"/>
+                </a:solidFill>
+                <a:latin typeface="Calibri" panose="020F0502020204030204"/>
+              </a:rPr>
+              <a:t>    for odu: [accessPort] / [???]</a:t>
+            </a:r>
+          </a:p>
+          <a:p>
+            <a:pPr defTabSz="914400"/>
+            <a:r>
+              <a:rPr lang="de-DE" sz="800" kern="0">
+                <a:solidFill>
+                  <a:prstClr val="black"/>
+                </a:solidFill>
+                <a:latin typeface="Calibri" panose="020F0502020204030204"/>
+              </a:rPr>
+              <a:t>_fru =</a:t>
+            </a:r>
+          </a:p>
+          <a:p>
+            <a:pPr defTabSz="914400"/>
+            <a:r>
+              <a:rPr lang="de-DE" sz="800" kern="0">
+                <a:solidFill>
+                  <a:prstClr val="black"/>
+                </a:solidFill>
+                <a:latin typeface="Calibri" panose="020F0502020204030204"/>
+              </a:rPr>
+              <a:t>    for modem: [local-id] / [modemUuid]</a:t>
+            </a:r>
+          </a:p>
+          <a:p>
+            <a:pPr defTabSz="914400"/>
+            <a:r>
+              <a:rPr lang="de-DE" sz="800" kern="0">
+                <a:solidFill>
+                  <a:prstClr val="black"/>
+                </a:solidFill>
+                <a:latin typeface="Calibri" panose="020F0502020204030204"/>
+              </a:rPr>
+              <a:t>    for odu: [local-id] / [oduUuid]</a:t>
+            </a:r>
+          </a:p>
+        </p:txBody>
+      </p:sp>
+      <p:cxnSp>
+        <p:nvCxnSpPr>
+          <p:cNvPr id="284" name="Gerade Verbindung mit Pfeil 283">
+            <a:extLst>
+              <a:ext uri="{FF2B5EF4-FFF2-40B4-BE49-F238E27FC236}">
+                <a16:creationId xmlns:a16="http://schemas.microsoft.com/office/drawing/2014/main" id="{A7C25ACE-4B97-6609-6D23-8E785CA3E4EE}"/>
+              </a:ext>
+            </a:extLst>
+          </p:cNvPr>
+          <p:cNvCxnSpPr>
+            <a:cxnSpLocks/>
+            <a:stCxn id="271" idx="3"/>
+            <a:endCxn id="283" idx="1"/>
+          </p:cNvCxnSpPr>
+          <p:nvPr/>
+        </p:nvCxnSpPr>
+        <p:spPr>
+          <a:xfrm>
+            <a:off x="11823076" y="6874556"/>
+            <a:ext cx="718089" cy="277427"/>
+          </a:xfrm>
+          <a:prstGeom prst="straightConnector1">
+            <a:avLst/>
+          </a:prstGeom>
+          <a:noFill/>
+          <a:ln w="6350" cap="flat" cmpd="sng" algn="ctr">
+            <a:solidFill>
+              <a:srgbClr val="5B9BD5"/>
+            </a:solidFill>
+            <a:prstDash val="solid"/>
+            <a:miter lim="800000"/>
+            <a:tailEnd type="triangle"/>
+          </a:ln>
+          <a:effectLst/>
+        </p:spPr>
+      </p:cxnSp>
+      <p:sp>
+        <p:nvSpPr>
+          <p:cNvPr id="2" name="Textfeld 1">
+            <a:extLst>
+              <a:ext uri="{FF2B5EF4-FFF2-40B4-BE49-F238E27FC236}">
+                <a16:creationId xmlns:a16="http://schemas.microsoft.com/office/drawing/2014/main" id="{A78E0D56-0571-802A-E37D-76471F5BFF10}"/>
+              </a:ext>
+            </a:extLst>
+          </p:cNvPr>
+          <p:cNvSpPr txBox="1"/>
+          <p:nvPr/>
+        </p:nvSpPr>
+        <p:spPr>
+          <a:xfrm>
+            <a:off x="4807555" y="9183686"/>
+            <a:ext cx="9403600" cy="369332"/>
+          </a:xfrm>
+          <a:prstGeom prst="rect">
+            <a:avLst/>
+          </a:prstGeom>
+          <a:noFill/>
+        </p:spPr>
+        <p:txBody>
+          <a:bodyPr wrap="none" rtlCol="0">
+            <a:spAutoFit/>
+          </a:bodyPr>
+          <a:lstStyle/>
+          <a:p>
+            <a:r>
+              <a:rPr lang="de-DE"/>
+              <a:t>/domain-controller/function=cyclic-reading/parameter=sliding-window-size/parameter-value</a:t>
+            </a:r>
+          </a:p>
+        </p:txBody>
+      </p:sp>
+    </p:spTree>
+    <p:extLst>
+      <p:ext uri="{BB962C8B-B14F-4D97-AF65-F5344CB8AC3E}">
+        <p14:creationId xmlns:p14="http://schemas.microsoft.com/office/powerpoint/2010/main" val="1618497423"/>
+      </p:ext>
+    </p:extLst>
+  </p:cSld>
+  <p:clrMapOvr>
+    <a:masterClrMapping/>
+  </p:clrMapOvr>
+</p:sld>
+</file>
+
+<file path=ppt/slides/slide3.xml><?xml version="1.0" encoding="utf-8"?>
+<p:sld xmlns:a="http://schemas.openxmlformats.org/drawingml/2006/main" xmlns:r="http://schemas.openxmlformats.org/officeDocument/2006/relationships" xmlns:p="http://schemas.openxmlformats.org/presentationml/2006/main">
+  <p:cSld>
+    <p:spTree>
+      <p:nvGrpSpPr>
+        <p:cNvPr id="1" name=""/>
+        <p:cNvGrpSpPr/>
+        <p:nvPr/>
+      </p:nvGrpSpPr>
+      <p:grpSpPr>
+        <a:xfrm>
+          <a:off x="0" y="0"/>
+          <a:ext cx="0" cy="0"/>
+          <a:chOff x="0" y="0"/>
+          <a:chExt cx="0" cy="0"/>
+        </a:xfrm>
+      </p:grpSpPr>
+      <p:sp>
+        <p:nvSpPr>
           <p:cNvPr id="2" name="Textfeld 1">
             <a:extLst>
               <a:ext uri="{FF2B5EF4-FFF2-40B4-BE49-F238E27FC236}">
@@ -8541,6 +9976,13 @@
           <a:prstGeom prst="line">
             <a:avLst/>
           </a:prstGeom>
+          <a:ln>
+            <a:solidFill>
+              <a:schemeClr val="bg1">
+                <a:lumMod val="65000"/>
+              </a:schemeClr>
+            </a:solidFill>
+          </a:ln>
         </p:spPr>
         <p:style>
           <a:lnRef idx="2">
@@ -8559,46 +10001,6 @@
       </p:cxnSp>
       <p:cxnSp>
         <p:nvCxnSpPr>
-          <p:cNvPr id="51" name="Gerader Verbinder 50">
-            <a:extLst>
-              <a:ext uri="{FF2B5EF4-FFF2-40B4-BE49-F238E27FC236}">
-                <a16:creationId xmlns:a16="http://schemas.microsoft.com/office/drawing/2014/main" id="{DC4F5D91-905B-8A82-30F0-6F28ACEED8AB}"/>
-              </a:ext>
-            </a:extLst>
-          </p:cNvPr>
-          <p:cNvCxnSpPr>
-            <a:cxnSpLocks/>
-            <a:stCxn id="42" idx="3"/>
-            <a:endCxn id="47" idx="1"/>
-          </p:cNvCxnSpPr>
-          <p:nvPr/>
-        </p:nvCxnSpPr>
-        <p:spPr>
-          <a:xfrm>
-            <a:off x="3527832" y="5278854"/>
-            <a:ext cx="1734147" cy="0"/>
-          </a:xfrm>
-          <a:prstGeom prst="line">
-            <a:avLst/>
-          </a:prstGeom>
-        </p:spPr>
-        <p:style>
-          <a:lnRef idx="2">
-            <a:schemeClr val="accent6"/>
-          </a:lnRef>
-          <a:fillRef idx="0">
-            <a:schemeClr val="accent6"/>
-          </a:fillRef>
-          <a:effectRef idx="1">
-            <a:schemeClr val="accent6"/>
-          </a:effectRef>
-          <a:fontRef idx="minor">
-            <a:schemeClr val="tx1"/>
-          </a:fontRef>
-        </p:style>
-      </p:cxnSp>
-      <p:cxnSp>
-        <p:nvCxnSpPr>
           <p:cNvPr id="54" name="Gerader Verbinder 53">
             <a:extLst>
               <a:ext uri="{FF2B5EF4-FFF2-40B4-BE49-F238E27FC236}">
@@ -8621,6 +10023,13 @@
           <a:prstGeom prst="line">
             <a:avLst/>
           </a:prstGeom>
+          <a:ln>
+            <a:solidFill>
+              <a:schemeClr val="bg1">
+                <a:lumMod val="65000"/>
+              </a:schemeClr>
+            </a:solidFill>
+          </a:ln>
         </p:spPr>
         <p:style>
           <a:lnRef idx="2">
@@ -8661,6 +10070,13 @@
           <a:prstGeom prst="line">
             <a:avLst/>
           </a:prstGeom>
+          <a:ln>
+            <a:solidFill>
+              <a:schemeClr val="bg1">
+                <a:lumMod val="65000"/>
+              </a:schemeClr>
+            </a:solidFill>
+          </a:ln>
         </p:spPr>
         <p:style>
           <a:lnRef idx="2">
@@ -8679,37 +10095,745 @@
       </p:cxnSp>
       <p:cxnSp>
         <p:nvCxnSpPr>
-          <p:cNvPr id="60" name="Gerader Verbinder 59">
-            <a:extLst>
-              <a:ext uri="{FF2B5EF4-FFF2-40B4-BE49-F238E27FC236}">
-                <a16:creationId xmlns:a16="http://schemas.microsoft.com/office/drawing/2014/main" id="{A033104E-4A3B-522F-2238-2C63530AEB74}"/>
+          <p:cNvPr id="71" name="Gerader Verbinder 70">
+            <a:extLst>
+              <a:ext uri="{FF2B5EF4-FFF2-40B4-BE49-F238E27FC236}">
+                <a16:creationId xmlns:a16="http://schemas.microsoft.com/office/drawing/2014/main" id="{73E7F552-6247-942F-149B-B2F4BE1088D8}"/>
               </a:ext>
             </a:extLst>
           </p:cNvPr>
           <p:cNvCxnSpPr>
             <a:cxnSpLocks/>
             <a:stCxn id="42" idx="3"/>
+            <a:endCxn id="47" idx="1"/>
           </p:cNvCxnSpPr>
           <p:nvPr/>
         </p:nvCxnSpPr>
         <p:spPr>
-          <a:xfrm flipV="1">
-            <a:off x="3527832" y="4628721"/>
-            <a:ext cx="1734147" cy="650133"/>
+          <a:xfrm>
+            <a:off x="3527832" y="5278854"/>
+            <a:ext cx="1734147" cy="0"/>
           </a:xfrm>
           <a:prstGeom prst="line">
             <a:avLst/>
           </a:prstGeom>
+          <a:ln>
+            <a:solidFill>
+              <a:schemeClr val="bg1">
+                <a:lumMod val="65000"/>
+              </a:schemeClr>
+            </a:solidFill>
+          </a:ln>
         </p:spPr>
         <p:style>
           <a:lnRef idx="2">
-            <a:schemeClr val="accent6"/>
+            <a:schemeClr val="accent5"/>
           </a:lnRef>
           <a:fillRef idx="0">
-            <a:schemeClr val="accent6"/>
+            <a:schemeClr val="accent5"/>
           </a:fillRef>
           <a:effectRef idx="1">
-            <a:schemeClr val="accent6"/>
+            <a:schemeClr val="accent5"/>
+          </a:effectRef>
+          <a:fontRef idx="minor">
+            <a:schemeClr val="tx1"/>
+          </a:fontRef>
+        </p:style>
+      </p:cxnSp>
+      <p:sp>
+        <p:nvSpPr>
+          <p:cNvPr id="12" name="Rechteck 11">
+            <a:extLst>
+              <a:ext uri="{FF2B5EF4-FFF2-40B4-BE49-F238E27FC236}">
+                <a16:creationId xmlns:a16="http://schemas.microsoft.com/office/drawing/2014/main" id="{EBBC8A5E-680D-6018-21A9-4F821556F1FD}"/>
+              </a:ext>
+            </a:extLst>
+          </p:cNvPr>
+          <p:cNvSpPr/>
+          <p:nvPr/>
+        </p:nvSpPr>
+        <p:spPr>
+          <a:xfrm>
+            <a:off x="1052609" y="1335124"/>
+            <a:ext cx="754886" cy="211283"/>
+          </a:xfrm>
+          <a:prstGeom prst="rect">
+            <a:avLst/>
+          </a:prstGeom>
+          <a:noFill/>
+          <a:ln w="12700" cap="flat" cmpd="sng" algn="ctr">
+            <a:noFill/>
+            <a:prstDash val="solid"/>
+            <a:miter lim="800000"/>
+          </a:ln>
+          <a:effectLst/>
+        </p:spPr>
+        <p:txBody>
+          <a:bodyPr lIns="36000" tIns="36000" rIns="36000" bIns="36000" rtlCol="0" anchor="t"/>
+          <a:lstStyle/>
+          <a:p>
+            <a:pPr defTabSz="914400"/>
+            <a:r>
+              <a:rPr lang="de-DE" sz="800" kern="0">
+                <a:solidFill>
+                  <a:prstClr val="black"/>
+                </a:solidFill>
+                <a:latin typeface="Calibri" panose="020F0502020204030204"/>
+              </a:rPr>
+              <a:t>mountNameA</a:t>
+            </a:r>
+          </a:p>
+        </p:txBody>
+      </p:sp>
+      <p:sp>
+        <p:nvSpPr>
+          <p:cNvPr id="13" name="Rechteck 12">
+            <a:extLst>
+              <a:ext uri="{FF2B5EF4-FFF2-40B4-BE49-F238E27FC236}">
+                <a16:creationId xmlns:a16="http://schemas.microsoft.com/office/drawing/2014/main" id="{BAB2F384-4743-8D1A-8F02-A7F96FB30275}"/>
+              </a:ext>
+            </a:extLst>
+          </p:cNvPr>
+          <p:cNvSpPr/>
+          <p:nvPr/>
+        </p:nvSpPr>
+        <p:spPr>
+          <a:xfrm>
+            <a:off x="7215284" y="1335124"/>
+            <a:ext cx="754886" cy="211283"/>
+          </a:xfrm>
+          <a:prstGeom prst="rect">
+            <a:avLst/>
+          </a:prstGeom>
+          <a:noFill/>
+          <a:ln w="12700" cap="flat" cmpd="sng" algn="ctr">
+            <a:noFill/>
+            <a:prstDash val="solid"/>
+            <a:miter lim="800000"/>
+          </a:ln>
+          <a:effectLst/>
+        </p:spPr>
+        <p:txBody>
+          <a:bodyPr lIns="36000" tIns="36000" rIns="36000" bIns="36000" rtlCol="0" anchor="t"/>
+          <a:lstStyle/>
+          <a:p>
+            <a:pPr defTabSz="914400"/>
+            <a:r>
+              <a:rPr lang="de-DE" sz="800" kern="0">
+                <a:solidFill>
+                  <a:prstClr val="black"/>
+                </a:solidFill>
+                <a:latin typeface="Calibri" panose="020F0502020204030204"/>
+              </a:rPr>
+              <a:t>mountNameB</a:t>
+            </a:r>
+          </a:p>
+        </p:txBody>
+      </p:sp>
+      <p:sp>
+        <p:nvSpPr>
+          <p:cNvPr id="15" name="Rechteck 14">
+            <a:extLst>
+              <a:ext uri="{FF2B5EF4-FFF2-40B4-BE49-F238E27FC236}">
+                <a16:creationId xmlns:a16="http://schemas.microsoft.com/office/drawing/2014/main" id="{773E044C-4309-EC67-A8E3-93A9E21CC8D6}"/>
+              </a:ext>
+            </a:extLst>
+          </p:cNvPr>
+          <p:cNvSpPr/>
+          <p:nvPr/>
+        </p:nvSpPr>
+        <p:spPr>
+          <a:xfrm>
+            <a:off x="1052609" y="4077976"/>
+            <a:ext cx="754886" cy="211283"/>
+          </a:xfrm>
+          <a:prstGeom prst="rect">
+            <a:avLst/>
+          </a:prstGeom>
+          <a:noFill/>
+          <a:ln w="12700" cap="flat" cmpd="sng" algn="ctr">
+            <a:noFill/>
+            <a:prstDash val="solid"/>
+            <a:miter lim="800000"/>
+          </a:ln>
+          <a:effectLst/>
+        </p:spPr>
+        <p:txBody>
+          <a:bodyPr lIns="36000" tIns="36000" rIns="36000" bIns="36000" rtlCol="0" anchor="t"/>
+          <a:lstStyle/>
+          <a:p>
+            <a:pPr defTabSz="914400"/>
+            <a:r>
+              <a:rPr lang="de-DE" sz="800" kern="0">
+                <a:solidFill>
+                  <a:prstClr val="black"/>
+                </a:solidFill>
+                <a:latin typeface="Calibri" panose="020F0502020204030204"/>
+              </a:rPr>
+              <a:t>mountNameA</a:t>
+            </a:r>
+          </a:p>
+        </p:txBody>
+      </p:sp>
+      <p:sp>
+        <p:nvSpPr>
+          <p:cNvPr id="16" name="Rechteck 15">
+            <a:extLst>
+              <a:ext uri="{FF2B5EF4-FFF2-40B4-BE49-F238E27FC236}">
+                <a16:creationId xmlns:a16="http://schemas.microsoft.com/office/drawing/2014/main" id="{A9017734-63F9-617D-E29C-F637AE3BFD1E}"/>
+              </a:ext>
+            </a:extLst>
+          </p:cNvPr>
+          <p:cNvSpPr/>
+          <p:nvPr/>
+        </p:nvSpPr>
+        <p:spPr>
+          <a:xfrm>
+            <a:off x="7215284" y="4077976"/>
+            <a:ext cx="754886" cy="211283"/>
+          </a:xfrm>
+          <a:prstGeom prst="rect">
+            <a:avLst/>
+          </a:prstGeom>
+          <a:noFill/>
+          <a:ln w="12700" cap="flat" cmpd="sng" algn="ctr">
+            <a:noFill/>
+            <a:prstDash val="solid"/>
+            <a:miter lim="800000"/>
+          </a:ln>
+          <a:effectLst/>
+        </p:spPr>
+        <p:txBody>
+          <a:bodyPr lIns="36000" tIns="36000" rIns="36000" bIns="36000" rtlCol="0" anchor="t"/>
+          <a:lstStyle/>
+          <a:p>
+            <a:pPr defTabSz="914400"/>
+            <a:r>
+              <a:rPr lang="de-DE" sz="800" kern="0">
+                <a:solidFill>
+                  <a:prstClr val="black"/>
+                </a:solidFill>
+                <a:latin typeface="Calibri" panose="020F0502020204030204"/>
+              </a:rPr>
+              <a:t>mountNameB</a:t>
+            </a:r>
+          </a:p>
+        </p:txBody>
+      </p:sp>
+      <p:sp>
+        <p:nvSpPr>
+          <p:cNvPr id="18" name="Rechteck 17">
+            <a:extLst>
+              <a:ext uri="{FF2B5EF4-FFF2-40B4-BE49-F238E27FC236}">
+                <a16:creationId xmlns:a16="http://schemas.microsoft.com/office/drawing/2014/main" id="{AB5611B1-A6BD-2448-27DE-FF75F7260D8B}"/>
+              </a:ext>
+            </a:extLst>
+          </p:cNvPr>
+          <p:cNvSpPr/>
+          <p:nvPr/>
+        </p:nvSpPr>
+        <p:spPr>
+          <a:xfrm>
+            <a:off x="4107561" y="4195847"/>
+            <a:ext cx="762098" cy="296713"/>
+          </a:xfrm>
+          <a:prstGeom prst="rect">
+            <a:avLst/>
+          </a:prstGeom>
+          <a:noFill/>
+          <a:ln w="12700" cap="flat" cmpd="sng" algn="ctr">
+            <a:noFill/>
+            <a:prstDash val="solid"/>
+            <a:miter lim="800000"/>
+          </a:ln>
+          <a:effectLst/>
+        </p:spPr>
+        <p:txBody>
+          <a:bodyPr lIns="36000" tIns="36000" rIns="36000" bIns="36000" rtlCol="0" anchor="t"/>
+          <a:lstStyle/>
+          <a:p>
+            <a:pPr defTabSz="914400"/>
+            <a:r>
+              <a:rPr lang="de-DE" sz="800" kern="0">
+                <a:solidFill>
+                  <a:prstClr val="black"/>
+                </a:solidFill>
+                <a:latin typeface="Calibri" panose="020F0502020204030204"/>
+              </a:rPr>
+              <a:t>305550001 : m%</a:t>
+            </a:r>
+          </a:p>
+          <a:p>
+            <a:pPr defTabSz="914400"/>
+            <a:r>
+              <a:rPr lang="de-DE" sz="800" kern="0">
+                <a:solidFill>
+                  <a:prstClr val="black"/>
+                </a:solidFill>
+                <a:latin typeface="Calibri" panose="020F0502020204030204"/>
+              </a:rPr>
+              <a:t>305550002 : n%</a:t>
+            </a:r>
+          </a:p>
+        </p:txBody>
+      </p:sp>
+      <p:sp>
+        <p:nvSpPr>
+          <p:cNvPr id="26" name="Rechteck 25">
+            <a:extLst>
+              <a:ext uri="{FF2B5EF4-FFF2-40B4-BE49-F238E27FC236}">
+                <a16:creationId xmlns:a16="http://schemas.microsoft.com/office/drawing/2014/main" id="{7C475962-0079-6073-6616-88078277CD9E}"/>
+              </a:ext>
+            </a:extLst>
+          </p:cNvPr>
+          <p:cNvSpPr/>
+          <p:nvPr/>
+        </p:nvSpPr>
+        <p:spPr>
+          <a:xfrm>
+            <a:off x="3346460" y="4692330"/>
+            <a:ext cx="762098" cy="296713"/>
+          </a:xfrm>
+          <a:prstGeom prst="rect">
+            <a:avLst/>
+          </a:prstGeom>
+          <a:noFill/>
+          <a:ln w="12700" cap="flat" cmpd="sng" algn="ctr">
+            <a:noFill/>
+            <a:prstDash val="solid"/>
+            <a:miter lim="800000"/>
+          </a:ln>
+          <a:effectLst/>
+        </p:spPr>
+        <p:txBody>
+          <a:bodyPr lIns="36000" tIns="36000" rIns="36000" bIns="36000" rtlCol="0" anchor="t"/>
+          <a:lstStyle/>
+          <a:p>
+            <a:pPr defTabSz="914400"/>
+            <a:r>
+              <a:rPr lang="de-DE" sz="800" kern="0">
+                <a:solidFill>
+                  <a:prstClr val="black"/>
+                </a:solidFill>
+                <a:latin typeface="Calibri" panose="020F0502020204030204"/>
+              </a:rPr>
+              <a:t>305550001 : p%</a:t>
+            </a:r>
+          </a:p>
+          <a:p>
+            <a:pPr defTabSz="914400"/>
+            <a:r>
+              <a:rPr lang="de-DE" sz="800" kern="0">
+                <a:solidFill>
+                  <a:prstClr val="black"/>
+                </a:solidFill>
+                <a:latin typeface="Calibri" panose="020F0502020204030204"/>
+              </a:rPr>
+              <a:t>305550002 : q%</a:t>
+            </a:r>
+          </a:p>
+        </p:txBody>
+      </p:sp>
+      <p:sp>
+        <p:nvSpPr>
+          <p:cNvPr id="27" name="Rechteck 26">
+            <a:extLst>
+              <a:ext uri="{FF2B5EF4-FFF2-40B4-BE49-F238E27FC236}">
+                <a16:creationId xmlns:a16="http://schemas.microsoft.com/office/drawing/2014/main" id="{41DBCEB1-22B6-372B-92BA-67110E6A9E7D}"/>
+              </a:ext>
+            </a:extLst>
+          </p:cNvPr>
+          <p:cNvSpPr/>
+          <p:nvPr/>
+        </p:nvSpPr>
+        <p:spPr>
+          <a:xfrm>
+            <a:off x="4732736" y="4751329"/>
+            <a:ext cx="762098" cy="296713"/>
+          </a:xfrm>
+          <a:prstGeom prst="rect">
+            <a:avLst/>
+          </a:prstGeom>
+          <a:noFill/>
+          <a:ln w="12700" cap="flat" cmpd="sng" algn="ctr">
+            <a:noFill/>
+            <a:prstDash val="solid"/>
+            <a:miter lim="800000"/>
+          </a:ln>
+          <a:effectLst/>
+        </p:spPr>
+        <p:txBody>
+          <a:bodyPr lIns="36000" tIns="36000" rIns="36000" bIns="36000" rtlCol="0" anchor="t"/>
+          <a:lstStyle/>
+          <a:p>
+            <a:pPr defTabSz="914400"/>
+            <a:r>
+              <a:rPr lang="de-DE" sz="800" kern="0">
+                <a:solidFill>
+                  <a:prstClr val="black"/>
+                </a:solidFill>
+                <a:latin typeface="Calibri" panose="020F0502020204030204"/>
+              </a:rPr>
+              <a:t>305550001 : r%</a:t>
+            </a:r>
+          </a:p>
+          <a:p>
+            <a:pPr defTabSz="914400"/>
+            <a:r>
+              <a:rPr lang="de-DE" sz="800" kern="0">
+                <a:solidFill>
+                  <a:prstClr val="black"/>
+                </a:solidFill>
+                <a:latin typeface="Calibri" panose="020F0502020204030204"/>
+              </a:rPr>
+              <a:t>305550002 : s%</a:t>
+            </a:r>
+          </a:p>
+        </p:txBody>
+      </p:sp>
+      <p:sp>
+        <p:nvSpPr>
+          <p:cNvPr id="28" name="Rechteck 27">
+            <a:extLst>
+              <a:ext uri="{FF2B5EF4-FFF2-40B4-BE49-F238E27FC236}">
+                <a16:creationId xmlns:a16="http://schemas.microsoft.com/office/drawing/2014/main" id="{848F61F2-FF4C-E555-C811-AAEC7F2687D8}"/>
+              </a:ext>
+            </a:extLst>
+          </p:cNvPr>
+          <p:cNvSpPr/>
+          <p:nvPr/>
+        </p:nvSpPr>
+        <p:spPr>
+          <a:xfrm>
+            <a:off x="4089078" y="5297169"/>
+            <a:ext cx="762098" cy="296713"/>
+          </a:xfrm>
+          <a:prstGeom prst="rect">
+            <a:avLst/>
+          </a:prstGeom>
+          <a:noFill/>
+          <a:ln w="12700" cap="flat" cmpd="sng" algn="ctr">
+            <a:noFill/>
+            <a:prstDash val="solid"/>
+            <a:miter lim="800000"/>
+          </a:ln>
+          <a:effectLst/>
+        </p:spPr>
+        <p:txBody>
+          <a:bodyPr lIns="36000" tIns="36000" rIns="36000" bIns="36000" rtlCol="0" anchor="t"/>
+          <a:lstStyle/>
+          <a:p>
+            <a:pPr defTabSz="914400"/>
+            <a:r>
+              <a:rPr lang="de-DE" sz="800" kern="0">
+                <a:solidFill>
+                  <a:prstClr val="black"/>
+                </a:solidFill>
+                <a:latin typeface="Calibri" panose="020F0502020204030204"/>
+              </a:rPr>
+              <a:t>305550001 : x%</a:t>
+            </a:r>
+          </a:p>
+          <a:p>
+            <a:pPr defTabSz="914400"/>
+            <a:r>
+              <a:rPr lang="de-DE" sz="800" kern="0">
+                <a:solidFill>
+                  <a:prstClr val="black"/>
+                </a:solidFill>
+                <a:latin typeface="Calibri" panose="020F0502020204030204"/>
+              </a:rPr>
+              <a:t>305550002 : y%</a:t>
+            </a:r>
+          </a:p>
+        </p:txBody>
+      </p:sp>
+    </p:spTree>
+    <p:extLst>
+      <p:ext uri="{BB962C8B-B14F-4D97-AF65-F5344CB8AC3E}">
+        <p14:creationId xmlns:p14="http://schemas.microsoft.com/office/powerpoint/2010/main" val="949934280"/>
+      </p:ext>
+    </p:extLst>
+  </p:cSld>
+  <p:clrMapOvr>
+    <a:masterClrMapping/>
+  </p:clrMapOvr>
+</p:sld>
+</file>
+
+<file path=ppt/slides/slide4.xml><?xml version="1.0" encoding="utf-8"?>
+<p:sld xmlns:a="http://schemas.openxmlformats.org/drawingml/2006/main" xmlns:r="http://schemas.openxmlformats.org/officeDocument/2006/relationships" xmlns:p="http://schemas.openxmlformats.org/presentationml/2006/main">
+  <p:cSld>
+    <p:spTree>
+      <p:nvGrpSpPr>
+        <p:cNvPr id="1" name=""/>
+        <p:cNvGrpSpPr/>
+        <p:nvPr/>
+      </p:nvGrpSpPr>
+      <p:grpSpPr>
+        <a:xfrm>
+          <a:off x="0" y="0"/>
+          <a:ext cx="0" cy="0"/>
+          <a:chOff x="0" y="0"/>
+          <a:chExt cx="0" cy="0"/>
+        </a:xfrm>
+      </p:grpSpPr>
+      <p:sp>
+        <p:nvSpPr>
+          <p:cNvPr id="2" name="Textfeld 1">
+            <a:extLst>
+              <a:ext uri="{FF2B5EF4-FFF2-40B4-BE49-F238E27FC236}">
+                <a16:creationId xmlns:a16="http://schemas.microsoft.com/office/drawing/2014/main" id="{0E700AE2-BF4D-E992-3BF2-7603373737C0}"/>
+              </a:ext>
+            </a:extLst>
+          </p:cNvPr>
+          <p:cNvSpPr txBox="1"/>
+          <p:nvPr/>
+        </p:nvSpPr>
+        <p:spPr>
+          <a:xfrm>
+            <a:off x="3717235" y="3716683"/>
+            <a:ext cx="1361976" cy="369332"/>
+          </a:xfrm>
+          <a:prstGeom prst="rect">
+            <a:avLst/>
+          </a:prstGeom>
+          <a:noFill/>
+        </p:spPr>
+        <p:txBody>
+          <a:bodyPr wrap="none" rtlCol="0">
+            <a:spAutoFit/>
+          </a:bodyPr>
+          <a:lstStyle/>
+          <a:p>
+            <a:r>
+              <a:rPr lang="de-DE"/>
+              <a:t>Operational</a:t>
+            </a:r>
+          </a:p>
+        </p:txBody>
+      </p:sp>
+      <p:sp>
+        <p:nvSpPr>
+          <p:cNvPr id="3" name="Abgerundetes Rechteck 1">
+            <a:extLst>
+              <a:ext uri="{FF2B5EF4-FFF2-40B4-BE49-F238E27FC236}">
+                <a16:creationId xmlns:a16="http://schemas.microsoft.com/office/drawing/2014/main" id="{1BF7B0C7-C035-EDC4-A5A5-38FA662A50CB}"/>
+              </a:ext>
+            </a:extLst>
+          </p:cNvPr>
+          <p:cNvSpPr/>
+          <p:nvPr/>
+        </p:nvSpPr>
+        <p:spPr>
+          <a:xfrm>
+            <a:off x="3948209" y="4452315"/>
+            <a:ext cx="537299" cy="445572"/>
+          </a:xfrm>
+          <a:prstGeom prst="roundRect">
+            <a:avLst/>
+          </a:prstGeom>
+          <a:solidFill>
+            <a:sysClr val="window" lastClr="FFFFFF">
+              <a:lumMod val="65000"/>
+            </a:sysClr>
+          </a:solidFill>
+          <a:ln w="12700" cap="flat" cmpd="sng" algn="ctr">
+            <a:solidFill>
+              <a:sysClr val="window" lastClr="FFFFFF">
+                <a:lumMod val="50000"/>
+              </a:sysClr>
+            </a:solidFill>
+            <a:prstDash val="solid"/>
+            <a:miter lim="800000"/>
+          </a:ln>
+          <a:effectLst>
+            <a:outerShdw blurRad="50800" dist="38100" dir="2700000" algn="tl" rotWithShape="0">
+              <a:prstClr val="black">
+                <a:alpha val="40000"/>
+              </a:prstClr>
+            </a:outerShdw>
+          </a:effectLst>
+        </p:spPr>
+        <p:txBody>
+          <a:bodyPr rtlCol="0" anchor="ctr"/>
+          <a:lstStyle/>
+          <a:p>
+            <a:pPr algn="ctr" defTabSz="914400">
+              <a:defRPr/>
+            </a:pPr>
+            <a:r>
+              <a:rPr lang="de-DE" sz="1050" kern="0" dirty="0">
+                <a:solidFill>
+                  <a:prstClr val="white"/>
+                </a:solidFill>
+                <a:latin typeface="Calibri" panose="020F0502020204030204"/>
+              </a:rPr>
+              <a:t>CC</a:t>
+            </a:r>
+          </a:p>
+        </p:txBody>
+      </p:sp>
+      <p:sp>
+        <p:nvSpPr>
+          <p:cNvPr id="4" name="Abgerundetes Rechteck 89">
+            <a:extLst>
+              <a:ext uri="{FF2B5EF4-FFF2-40B4-BE49-F238E27FC236}">
+                <a16:creationId xmlns:a16="http://schemas.microsoft.com/office/drawing/2014/main" id="{F5D59B44-CB14-67F0-20C5-ACCAF184B883}"/>
+              </a:ext>
+            </a:extLst>
+          </p:cNvPr>
+          <p:cNvSpPr/>
+          <p:nvPr/>
+        </p:nvSpPr>
+        <p:spPr>
+          <a:xfrm>
+            <a:off x="5261979" y="4452315"/>
+            <a:ext cx="1161453" cy="445572"/>
+          </a:xfrm>
+          <a:prstGeom prst="roundRect">
+            <a:avLst/>
+          </a:prstGeom>
+          <a:solidFill>
+            <a:srgbClr val="4472C4">
+              <a:lumMod val="60000"/>
+              <a:lumOff val="40000"/>
+            </a:srgbClr>
+          </a:solidFill>
+          <a:ln w="12700" cap="flat" cmpd="sng" algn="ctr">
+            <a:solidFill>
+              <a:srgbClr val="4472C4">
+                <a:lumMod val="75000"/>
+              </a:srgbClr>
+            </a:solidFill>
+            <a:prstDash val="solid"/>
+            <a:miter lim="800000"/>
+          </a:ln>
+          <a:effectLst>
+            <a:outerShdw blurRad="50800" dist="38100" dir="2700000" algn="tl" rotWithShape="0">
+              <a:prstClr val="black">
+                <a:alpha val="40000"/>
+              </a:prstClr>
+            </a:outerShdw>
+          </a:effectLst>
+        </p:spPr>
+        <p:txBody>
+          <a:bodyPr rtlCol="0" anchor="ctr"/>
+          <a:lstStyle/>
+          <a:p>
+            <a:pPr algn="ctr" defTabSz="914400">
+              <a:defRPr/>
+            </a:pPr>
+            <a:r>
+              <a:rPr lang="de-DE" sz="1050" kern="0">
+                <a:solidFill>
+                  <a:prstClr val="white"/>
+                </a:solidFill>
+                <a:latin typeface="Calibri" panose="020F0502020204030204"/>
+              </a:rPr>
+              <a:t>AirInterface #1</a:t>
+            </a:r>
+          </a:p>
+        </p:txBody>
+      </p:sp>
+      <p:sp>
+        <p:nvSpPr>
+          <p:cNvPr id="5" name="Abgerundetes Rechteck 89">
+            <a:extLst>
+              <a:ext uri="{FF2B5EF4-FFF2-40B4-BE49-F238E27FC236}">
+                <a16:creationId xmlns:a16="http://schemas.microsoft.com/office/drawing/2014/main" id="{8F5F84FA-D2F7-C600-8619-56AF7ACD6C71}"/>
+              </a:ext>
+            </a:extLst>
+          </p:cNvPr>
+          <p:cNvSpPr/>
+          <p:nvPr/>
+        </p:nvSpPr>
+        <p:spPr>
+          <a:xfrm>
+            <a:off x="5261979" y="5220941"/>
+            <a:ext cx="1161453" cy="445572"/>
+          </a:xfrm>
+          <a:prstGeom prst="roundRect">
+            <a:avLst/>
+          </a:prstGeom>
+          <a:solidFill>
+            <a:srgbClr val="4472C4">
+              <a:lumMod val="60000"/>
+              <a:lumOff val="40000"/>
+            </a:srgbClr>
+          </a:solidFill>
+          <a:ln w="12700" cap="flat" cmpd="sng" algn="ctr">
+            <a:solidFill>
+              <a:srgbClr val="4472C4">
+                <a:lumMod val="75000"/>
+              </a:srgbClr>
+            </a:solidFill>
+            <a:prstDash val="solid"/>
+            <a:miter lim="800000"/>
+          </a:ln>
+          <a:effectLst>
+            <a:outerShdw blurRad="50800" dist="38100" dir="2700000" algn="tl" rotWithShape="0">
+              <a:prstClr val="black">
+                <a:alpha val="40000"/>
+              </a:prstClr>
+            </a:outerShdw>
+          </a:effectLst>
+        </p:spPr>
+        <p:txBody>
+          <a:bodyPr rtlCol="0" anchor="ctr"/>
+          <a:lstStyle/>
+          <a:p>
+            <a:pPr algn="ctr" defTabSz="914400">
+              <a:defRPr/>
+            </a:pPr>
+            <a:r>
+              <a:rPr lang="de-DE" sz="1050" kern="0">
+                <a:solidFill>
+                  <a:prstClr val="white"/>
+                </a:solidFill>
+                <a:latin typeface="Calibri" panose="020F0502020204030204"/>
+              </a:rPr>
+              <a:t>AirInterface #2</a:t>
+            </a:r>
+          </a:p>
+        </p:txBody>
+      </p:sp>
+      <p:cxnSp>
+        <p:nvCxnSpPr>
+          <p:cNvPr id="6" name="Gerader Verbinder 5">
+            <a:extLst>
+              <a:ext uri="{FF2B5EF4-FFF2-40B4-BE49-F238E27FC236}">
+                <a16:creationId xmlns:a16="http://schemas.microsoft.com/office/drawing/2014/main" id="{59CC3A51-9675-E814-FB2A-C82701D4519C}"/>
+              </a:ext>
+            </a:extLst>
+          </p:cNvPr>
+          <p:cNvCxnSpPr>
+            <a:stCxn id="3" idx="3"/>
+            <a:endCxn id="4" idx="1"/>
+          </p:cNvCxnSpPr>
+          <p:nvPr/>
+        </p:nvCxnSpPr>
+        <p:spPr>
+          <a:xfrm>
+            <a:off x="4485508" y="4675101"/>
+            <a:ext cx="776471" cy="0"/>
+          </a:xfrm>
+          <a:prstGeom prst="line">
+            <a:avLst/>
+          </a:prstGeom>
+          <a:ln>
+            <a:prstDash val="dash"/>
+          </a:ln>
+        </p:spPr>
+        <p:style>
+          <a:lnRef idx="2">
+            <a:schemeClr val="accent1"/>
+          </a:lnRef>
+          <a:fillRef idx="0">
+            <a:schemeClr val="accent1"/>
+          </a:fillRef>
+          <a:effectRef idx="1">
+            <a:schemeClr val="accent1"/>
           </a:effectRef>
           <a:fontRef idx="minor">
             <a:schemeClr val="tx1"/>
@@ -8718,37 +10842,269 @@
       </p:cxnSp>
       <p:cxnSp>
         <p:nvCxnSpPr>
-          <p:cNvPr id="62" name="Gerader Verbinder 61">
-            <a:extLst>
-              <a:ext uri="{FF2B5EF4-FFF2-40B4-BE49-F238E27FC236}">
-                <a16:creationId xmlns:a16="http://schemas.microsoft.com/office/drawing/2014/main" id="{BF032092-E26D-1B90-BD2E-72B3E4C7AD94}"/>
+          <p:cNvPr id="7" name="Gerader Verbinder 6">
+            <a:extLst>
+              <a:ext uri="{FF2B5EF4-FFF2-40B4-BE49-F238E27FC236}">
+                <a16:creationId xmlns:a16="http://schemas.microsoft.com/office/drawing/2014/main" id="{6EB90D8E-03EF-CF39-8569-44C6FEF86572}"/>
               </a:ext>
             </a:extLst>
           </p:cNvPr>
           <p:cNvCxnSpPr>
             <a:cxnSpLocks/>
-            <a:stCxn id="41" idx="3"/>
+            <a:stCxn id="3" idx="3"/>
+            <a:endCxn id="5" idx="1"/>
           </p:cNvCxnSpPr>
           <p:nvPr/>
         </p:nvCxnSpPr>
         <p:spPr>
           <a:xfrm>
-            <a:off x="3527832" y="4510228"/>
-            <a:ext cx="1734147" cy="639421"/>
+            <a:off x="4485508" y="4675101"/>
+            <a:ext cx="776471" cy="768626"/>
           </a:xfrm>
           <a:prstGeom prst="line">
             <a:avLst/>
           </a:prstGeom>
+          <a:ln>
+            <a:prstDash val="dash"/>
+          </a:ln>
         </p:spPr>
         <p:style>
           <a:lnRef idx="2">
-            <a:schemeClr val="accent6"/>
+            <a:schemeClr val="accent1"/>
           </a:lnRef>
           <a:fillRef idx="0">
-            <a:schemeClr val="accent6"/>
+            <a:schemeClr val="accent1"/>
           </a:fillRef>
           <a:effectRef idx="1">
-            <a:schemeClr val="accent6"/>
+            <a:schemeClr val="accent1"/>
+          </a:effectRef>
+          <a:fontRef idx="minor">
+            <a:schemeClr val="tx1"/>
+          </a:fontRef>
+        </p:style>
+      </p:cxnSp>
+      <p:sp>
+        <p:nvSpPr>
+          <p:cNvPr id="8" name="Abgerundetes Rechteck 1">
+            <a:extLst>
+              <a:ext uri="{FF2B5EF4-FFF2-40B4-BE49-F238E27FC236}">
+                <a16:creationId xmlns:a16="http://schemas.microsoft.com/office/drawing/2014/main" id="{10DBFF78-674F-9679-222C-88FBF2D51258}"/>
+              </a:ext>
+            </a:extLst>
+          </p:cNvPr>
+          <p:cNvSpPr/>
+          <p:nvPr/>
+        </p:nvSpPr>
+        <p:spPr>
+          <a:xfrm>
+            <a:off x="10110884" y="4452315"/>
+            <a:ext cx="537299" cy="445572"/>
+          </a:xfrm>
+          <a:prstGeom prst="roundRect">
+            <a:avLst/>
+          </a:prstGeom>
+          <a:solidFill>
+            <a:sysClr val="window" lastClr="FFFFFF">
+              <a:lumMod val="65000"/>
+            </a:sysClr>
+          </a:solidFill>
+          <a:ln w="12700" cap="flat" cmpd="sng" algn="ctr">
+            <a:solidFill>
+              <a:sysClr val="window" lastClr="FFFFFF">
+                <a:lumMod val="50000"/>
+              </a:sysClr>
+            </a:solidFill>
+            <a:prstDash val="solid"/>
+            <a:miter lim="800000"/>
+          </a:ln>
+          <a:effectLst>
+            <a:outerShdw blurRad="50800" dist="38100" dir="2700000" algn="tl" rotWithShape="0">
+              <a:prstClr val="black">
+                <a:alpha val="40000"/>
+              </a:prstClr>
+            </a:outerShdw>
+          </a:effectLst>
+        </p:spPr>
+        <p:txBody>
+          <a:bodyPr rtlCol="0" anchor="ctr"/>
+          <a:lstStyle/>
+          <a:p>
+            <a:pPr algn="ctr" defTabSz="914400">
+              <a:defRPr/>
+            </a:pPr>
+            <a:r>
+              <a:rPr lang="de-DE" sz="1050" kern="0" dirty="0">
+                <a:solidFill>
+                  <a:prstClr val="white"/>
+                </a:solidFill>
+                <a:latin typeface="Calibri" panose="020F0502020204030204"/>
+              </a:rPr>
+              <a:t>CC</a:t>
+            </a:r>
+          </a:p>
+        </p:txBody>
+      </p:sp>
+      <p:sp>
+        <p:nvSpPr>
+          <p:cNvPr id="9" name="Abgerundetes Rechteck 89">
+            <a:extLst>
+              <a:ext uri="{FF2B5EF4-FFF2-40B4-BE49-F238E27FC236}">
+                <a16:creationId xmlns:a16="http://schemas.microsoft.com/office/drawing/2014/main" id="{A80590A6-8ADD-F0C4-D73B-CE545C61CE04}"/>
+              </a:ext>
+            </a:extLst>
+          </p:cNvPr>
+          <p:cNvSpPr/>
+          <p:nvPr/>
+        </p:nvSpPr>
+        <p:spPr>
+          <a:xfrm>
+            <a:off x="8157579" y="4452315"/>
+            <a:ext cx="1161453" cy="445572"/>
+          </a:xfrm>
+          <a:prstGeom prst="roundRect">
+            <a:avLst/>
+          </a:prstGeom>
+          <a:solidFill>
+            <a:srgbClr val="4472C4">
+              <a:lumMod val="60000"/>
+              <a:lumOff val="40000"/>
+            </a:srgbClr>
+          </a:solidFill>
+          <a:ln w="12700" cap="flat" cmpd="sng" algn="ctr">
+            <a:solidFill>
+              <a:srgbClr val="4472C4">
+                <a:lumMod val="75000"/>
+              </a:srgbClr>
+            </a:solidFill>
+            <a:prstDash val="solid"/>
+            <a:miter lim="800000"/>
+          </a:ln>
+          <a:effectLst>
+            <a:outerShdw blurRad="50800" dist="38100" dir="2700000" algn="tl" rotWithShape="0">
+              <a:prstClr val="black">
+                <a:alpha val="40000"/>
+              </a:prstClr>
+            </a:outerShdw>
+          </a:effectLst>
+        </p:spPr>
+        <p:txBody>
+          <a:bodyPr rtlCol="0" anchor="ctr"/>
+          <a:lstStyle/>
+          <a:p>
+            <a:pPr algn="ctr" defTabSz="914400">
+              <a:defRPr/>
+            </a:pPr>
+            <a:r>
+              <a:rPr lang="de-DE" sz="1050" kern="0">
+                <a:solidFill>
+                  <a:prstClr val="white"/>
+                </a:solidFill>
+                <a:latin typeface="Calibri" panose="020F0502020204030204"/>
+              </a:rPr>
+              <a:t>AirInterface #1</a:t>
+            </a:r>
+          </a:p>
+        </p:txBody>
+      </p:sp>
+      <p:sp>
+        <p:nvSpPr>
+          <p:cNvPr id="10" name="Abgerundetes Rechteck 89">
+            <a:extLst>
+              <a:ext uri="{FF2B5EF4-FFF2-40B4-BE49-F238E27FC236}">
+                <a16:creationId xmlns:a16="http://schemas.microsoft.com/office/drawing/2014/main" id="{12A1E1B1-7854-A227-CF08-1CEA651B6E23}"/>
+              </a:ext>
+            </a:extLst>
+          </p:cNvPr>
+          <p:cNvSpPr/>
+          <p:nvPr/>
+        </p:nvSpPr>
+        <p:spPr>
+          <a:xfrm>
+            <a:off x="8157579" y="5220941"/>
+            <a:ext cx="1161453" cy="445572"/>
+          </a:xfrm>
+          <a:prstGeom prst="roundRect">
+            <a:avLst/>
+          </a:prstGeom>
+          <a:solidFill>
+            <a:srgbClr val="4472C4">
+              <a:lumMod val="60000"/>
+              <a:lumOff val="40000"/>
+            </a:srgbClr>
+          </a:solidFill>
+          <a:ln w="12700" cap="flat" cmpd="sng" algn="ctr">
+            <a:solidFill>
+              <a:srgbClr val="4472C4">
+                <a:lumMod val="75000"/>
+              </a:srgbClr>
+            </a:solidFill>
+            <a:prstDash val="solid"/>
+            <a:miter lim="800000"/>
+          </a:ln>
+          <a:effectLst>
+            <a:outerShdw blurRad="50800" dist="38100" dir="2700000" algn="tl" rotWithShape="0">
+              <a:prstClr val="black">
+                <a:alpha val="40000"/>
+              </a:prstClr>
+            </a:outerShdw>
+          </a:effectLst>
+        </p:spPr>
+        <p:txBody>
+          <a:bodyPr rtlCol="0" anchor="ctr"/>
+          <a:lstStyle/>
+          <a:p>
+            <a:pPr algn="ctr" defTabSz="914400">
+              <a:defRPr/>
+            </a:pPr>
+            <a:r>
+              <a:rPr lang="de-DE" sz="1050" kern="0">
+                <a:solidFill>
+                  <a:prstClr val="white"/>
+                </a:solidFill>
+                <a:latin typeface="Calibri" panose="020F0502020204030204"/>
+              </a:rPr>
+              <a:t>AirInterface #2</a:t>
+            </a:r>
+          </a:p>
+        </p:txBody>
+      </p:sp>
+      <p:cxnSp>
+        <p:nvCxnSpPr>
+          <p:cNvPr id="11" name="Gerader Verbinder 10">
+            <a:extLst>
+              <a:ext uri="{FF2B5EF4-FFF2-40B4-BE49-F238E27FC236}">
+                <a16:creationId xmlns:a16="http://schemas.microsoft.com/office/drawing/2014/main" id="{E58A9D4C-86C6-52F7-D75B-9F450E6787F1}"/>
+              </a:ext>
+            </a:extLst>
+          </p:cNvPr>
+          <p:cNvCxnSpPr>
+            <a:cxnSpLocks/>
+            <a:stCxn id="8" idx="1"/>
+            <a:endCxn id="9" idx="3"/>
+          </p:cNvCxnSpPr>
+          <p:nvPr/>
+        </p:nvCxnSpPr>
+        <p:spPr>
+          <a:xfrm flipH="1">
+            <a:off x="9319032" y="4675101"/>
+            <a:ext cx="791852" cy="0"/>
+          </a:xfrm>
+          <a:prstGeom prst="line">
+            <a:avLst/>
+          </a:prstGeom>
+          <a:ln>
+            <a:prstDash val="dash"/>
+          </a:ln>
+        </p:spPr>
+        <p:style>
+          <a:lnRef idx="2">
+            <a:schemeClr val="accent1"/>
+          </a:lnRef>
+          <a:fillRef idx="0">
+            <a:schemeClr val="accent1"/>
+          </a:fillRef>
+          <a:effectRef idx="1">
+            <a:schemeClr val="accent1"/>
           </a:effectRef>
           <a:fontRef idx="minor">
             <a:schemeClr val="tx1"/>
@@ -8757,20 +11113,407 @@
       </p:cxnSp>
       <p:cxnSp>
         <p:nvCxnSpPr>
-          <p:cNvPr id="71" name="Gerader Verbinder 70">
-            <a:extLst>
-              <a:ext uri="{FF2B5EF4-FFF2-40B4-BE49-F238E27FC236}">
-                <a16:creationId xmlns:a16="http://schemas.microsoft.com/office/drawing/2014/main" id="{73E7F552-6247-942F-149B-B2F4BE1088D8}"/>
-              </a:ext>
-            </a:extLst>
-          </p:cNvPr>
-          <p:cNvCxnSpPr/>
+          <p:cNvPr id="12" name="Gerader Verbinder 11">
+            <a:extLst>
+              <a:ext uri="{FF2B5EF4-FFF2-40B4-BE49-F238E27FC236}">
+                <a16:creationId xmlns:a16="http://schemas.microsoft.com/office/drawing/2014/main" id="{E3089569-9240-B13D-C5B1-61DA92B0171A}"/>
+              </a:ext>
+            </a:extLst>
+          </p:cNvPr>
+          <p:cNvCxnSpPr>
+            <a:cxnSpLocks/>
+            <a:stCxn id="8" idx="1"/>
+            <a:endCxn id="10" idx="3"/>
+          </p:cNvCxnSpPr>
           <p:nvPr/>
         </p:nvCxnSpPr>
         <p:spPr>
-          <a:xfrm>
-            <a:off x="3527832" y="5386528"/>
+          <a:xfrm flipH="1">
+            <a:off x="9319032" y="4675101"/>
+            <a:ext cx="791852" cy="768626"/>
+          </a:xfrm>
+          <a:prstGeom prst="line">
+            <a:avLst/>
+          </a:prstGeom>
+          <a:ln>
+            <a:prstDash val="dash"/>
+          </a:ln>
+        </p:spPr>
+        <p:style>
+          <a:lnRef idx="2">
+            <a:schemeClr val="accent1"/>
+          </a:lnRef>
+          <a:fillRef idx="0">
+            <a:schemeClr val="accent1"/>
+          </a:fillRef>
+          <a:effectRef idx="1">
+            <a:schemeClr val="accent1"/>
+          </a:effectRef>
+          <a:fontRef idx="minor">
+            <a:schemeClr val="tx1"/>
+          </a:fontRef>
+        </p:style>
+      </p:cxnSp>
+      <p:cxnSp>
+        <p:nvCxnSpPr>
+          <p:cNvPr id="13" name="Gerader Verbinder 12">
+            <a:extLst>
+              <a:ext uri="{FF2B5EF4-FFF2-40B4-BE49-F238E27FC236}">
+                <a16:creationId xmlns:a16="http://schemas.microsoft.com/office/drawing/2014/main" id="{43A2826E-51F7-94E4-218B-E387069259FF}"/>
+              </a:ext>
+            </a:extLst>
+          </p:cNvPr>
+          <p:cNvCxnSpPr>
+            <a:stCxn id="4" idx="3"/>
+            <a:endCxn id="9" idx="1"/>
+          </p:cNvCxnSpPr>
+          <p:nvPr/>
+        </p:nvCxnSpPr>
+        <p:spPr>
+          <a:xfrm>
+            <a:off x="6423432" y="4675101"/>
             <a:ext cx="1734147" cy="0"/>
+          </a:xfrm>
+          <a:prstGeom prst="line">
+            <a:avLst/>
+          </a:prstGeom>
+        </p:spPr>
+        <p:style>
+          <a:lnRef idx="2">
+            <a:schemeClr val="accent5"/>
+          </a:lnRef>
+          <a:fillRef idx="0">
+            <a:schemeClr val="accent5"/>
+          </a:fillRef>
+          <a:effectRef idx="1">
+            <a:schemeClr val="accent5"/>
+          </a:effectRef>
+          <a:fontRef idx="minor">
+            <a:schemeClr val="tx1"/>
+          </a:fontRef>
+        </p:style>
+      </p:cxnSp>
+      <p:sp>
+        <p:nvSpPr>
+          <p:cNvPr id="15" name="Rechteck 14">
+            <a:extLst>
+              <a:ext uri="{FF2B5EF4-FFF2-40B4-BE49-F238E27FC236}">
+                <a16:creationId xmlns:a16="http://schemas.microsoft.com/office/drawing/2014/main" id="{EB23EC17-9D76-4863-FAAF-400083AC7C16}"/>
+              </a:ext>
+            </a:extLst>
+          </p:cNvPr>
+          <p:cNvSpPr/>
+          <p:nvPr/>
+        </p:nvSpPr>
+        <p:spPr>
+          <a:xfrm>
+            <a:off x="2638581" y="6743305"/>
+            <a:ext cx="573690" cy="211283"/>
+          </a:xfrm>
+          <a:prstGeom prst="rect">
+            <a:avLst/>
+          </a:prstGeom>
+          <a:noFill/>
+          <a:ln w="12700" cap="flat" cmpd="sng" algn="ctr">
+            <a:noFill/>
+            <a:prstDash val="solid"/>
+            <a:miter lim="800000"/>
+          </a:ln>
+          <a:effectLst/>
+        </p:spPr>
+        <p:txBody>
+          <a:bodyPr lIns="36000" tIns="36000" rIns="36000" bIns="36000" rtlCol="0" anchor="t"/>
+          <a:lstStyle/>
+          <a:p>
+            <a:pPr defTabSz="914400"/>
+            <a:r>
+              <a:rPr lang="de-DE" sz="800" kern="0">
+                <a:solidFill>
+                  <a:prstClr val="black"/>
+                </a:solidFill>
+                <a:latin typeface="Calibri" panose="020F0502020204030204"/>
+              </a:rPr>
+              <a:t>305550001</a:t>
+            </a:r>
+          </a:p>
+        </p:txBody>
+      </p:sp>
+      <p:sp>
+        <p:nvSpPr>
+          <p:cNvPr id="19" name="Abgerundetes Rechteck 89">
+            <a:extLst>
+              <a:ext uri="{FF2B5EF4-FFF2-40B4-BE49-F238E27FC236}">
+                <a16:creationId xmlns:a16="http://schemas.microsoft.com/office/drawing/2014/main" id="{E319F251-EE97-9A9F-3825-840A34468CCE}"/>
+              </a:ext>
+            </a:extLst>
+          </p:cNvPr>
+          <p:cNvSpPr/>
+          <p:nvPr/>
+        </p:nvSpPr>
+        <p:spPr>
+          <a:xfrm>
+            <a:off x="11403071" y="6090615"/>
+            <a:ext cx="1161453" cy="445572"/>
+          </a:xfrm>
+          <a:prstGeom prst="roundRect">
+            <a:avLst/>
+          </a:prstGeom>
+          <a:solidFill>
+            <a:srgbClr val="4472C4">
+              <a:lumMod val="60000"/>
+              <a:lumOff val="40000"/>
+            </a:srgbClr>
+          </a:solidFill>
+          <a:ln w="12700" cap="flat" cmpd="sng" algn="ctr">
+            <a:solidFill>
+              <a:srgbClr val="4472C4">
+                <a:lumMod val="75000"/>
+              </a:srgbClr>
+            </a:solidFill>
+            <a:prstDash val="solid"/>
+            <a:miter lim="800000"/>
+          </a:ln>
+          <a:effectLst>
+            <a:outerShdw blurRad="50800" dist="38100" dir="2700000" algn="tl" rotWithShape="0">
+              <a:prstClr val="black">
+                <a:alpha val="40000"/>
+              </a:prstClr>
+            </a:outerShdw>
+          </a:effectLst>
+        </p:spPr>
+        <p:txBody>
+          <a:bodyPr rtlCol="0" anchor="ctr"/>
+          <a:lstStyle/>
+          <a:p>
+            <a:pPr algn="ctr" defTabSz="914400">
+              <a:defRPr/>
+            </a:pPr>
+            <a:r>
+              <a:rPr lang="de-DE" sz="1050" kern="0">
+                <a:solidFill>
+                  <a:prstClr val="white"/>
+                </a:solidFill>
+                <a:latin typeface="Calibri" panose="020F0502020204030204"/>
+              </a:rPr>
+              <a:t>AirInterface #3</a:t>
+            </a:r>
+          </a:p>
+        </p:txBody>
+      </p:sp>
+      <p:sp>
+        <p:nvSpPr>
+          <p:cNvPr id="20" name="Abgerundetes Rechteck 89">
+            <a:extLst>
+              <a:ext uri="{FF2B5EF4-FFF2-40B4-BE49-F238E27FC236}">
+                <a16:creationId xmlns:a16="http://schemas.microsoft.com/office/drawing/2014/main" id="{43597F37-F129-7CE9-5051-1461529E3BCB}"/>
+              </a:ext>
+            </a:extLst>
+          </p:cNvPr>
+          <p:cNvSpPr/>
+          <p:nvPr/>
+        </p:nvSpPr>
+        <p:spPr>
+          <a:xfrm>
+            <a:off x="11403070" y="6859241"/>
+            <a:ext cx="1161453" cy="445572"/>
+          </a:xfrm>
+          <a:prstGeom prst="roundRect">
+            <a:avLst/>
+          </a:prstGeom>
+          <a:solidFill>
+            <a:srgbClr val="4472C4">
+              <a:lumMod val="60000"/>
+              <a:lumOff val="40000"/>
+            </a:srgbClr>
+          </a:solidFill>
+          <a:ln w="12700" cap="flat" cmpd="sng" algn="ctr">
+            <a:solidFill>
+              <a:srgbClr val="4472C4">
+                <a:lumMod val="75000"/>
+              </a:srgbClr>
+            </a:solidFill>
+            <a:prstDash val="solid"/>
+            <a:miter lim="800000"/>
+          </a:ln>
+          <a:effectLst>
+            <a:outerShdw blurRad="50800" dist="38100" dir="2700000" algn="tl" rotWithShape="0">
+              <a:prstClr val="black">
+                <a:alpha val="40000"/>
+              </a:prstClr>
+            </a:outerShdw>
+          </a:effectLst>
+        </p:spPr>
+        <p:txBody>
+          <a:bodyPr rtlCol="0" anchor="ctr"/>
+          <a:lstStyle/>
+          <a:p>
+            <a:pPr algn="ctr" defTabSz="914400">
+              <a:defRPr/>
+            </a:pPr>
+            <a:r>
+              <a:rPr lang="de-DE" sz="1050" kern="0">
+                <a:solidFill>
+                  <a:prstClr val="white"/>
+                </a:solidFill>
+                <a:latin typeface="Calibri" panose="020F0502020204030204"/>
+              </a:rPr>
+              <a:t>AirInterface #4</a:t>
+            </a:r>
+          </a:p>
+        </p:txBody>
+      </p:sp>
+      <p:cxnSp>
+        <p:nvCxnSpPr>
+          <p:cNvPr id="25" name="Gerader Verbinder 24">
+            <a:extLst>
+              <a:ext uri="{FF2B5EF4-FFF2-40B4-BE49-F238E27FC236}">
+                <a16:creationId xmlns:a16="http://schemas.microsoft.com/office/drawing/2014/main" id="{16CD36AC-0708-C511-D60E-4B2394EF59F6}"/>
+              </a:ext>
+            </a:extLst>
+          </p:cNvPr>
+          <p:cNvCxnSpPr>
+            <a:cxnSpLocks/>
+            <a:stCxn id="8" idx="3"/>
+            <a:endCxn id="20" idx="1"/>
+          </p:cNvCxnSpPr>
+          <p:nvPr/>
+        </p:nvCxnSpPr>
+        <p:spPr>
+          <a:xfrm>
+            <a:off x="10648183" y="4675101"/>
+            <a:ext cx="754887" cy="2406926"/>
+          </a:xfrm>
+          <a:prstGeom prst="line">
+            <a:avLst/>
+          </a:prstGeom>
+          <a:ln>
+            <a:prstDash val="dash"/>
+          </a:ln>
+        </p:spPr>
+        <p:style>
+          <a:lnRef idx="2">
+            <a:schemeClr val="accent1"/>
+          </a:lnRef>
+          <a:fillRef idx="0">
+            <a:schemeClr val="accent1"/>
+          </a:fillRef>
+          <a:effectRef idx="1">
+            <a:schemeClr val="accent1"/>
+          </a:effectRef>
+          <a:fontRef idx="minor">
+            <a:schemeClr val="tx1"/>
+          </a:fontRef>
+        </p:style>
+      </p:cxnSp>
+      <p:cxnSp>
+        <p:nvCxnSpPr>
+          <p:cNvPr id="26" name="Gerader Verbinder 25">
+            <a:extLst>
+              <a:ext uri="{FF2B5EF4-FFF2-40B4-BE49-F238E27FC236}">
+                <a16:creationId xmlns:a16="http://schemas.microsoft.com/office/drawing/2014/main" id="{B102564F-4134-7B6A-85EE-7F68C97BBEC4}"/>
+              </a:ext>
+            </a:extLst>
+          </p:cNvPr>
+          <p:cNvCxnSpPr>
+            <a:cxnSpLocks/>
+            <a:stCxn id="8" idx="3"/>
+            <a:endCxn id="19" idx="1"/>
+          </p:cNvCxnSpPr>
+          <p:nvPr/>
+        </p:nvCxnSpPr>
+        <p:spPr>
+          <a:xfrm>
+            <a:off x="10648183" y="4675101"/>
+            <a:ext cx="754888" cy="1638300"/>
+          </a:xfrm>
+          <a:prstGeom prst="line">
+            <a:avLst/>
+          </a:prstGeom>
+          <a:ln>
+            <a:prstDash val="dash"/>
+          </a:ln>
+        </p:spPr>
+        <p:style>
+          <a:lnRef idx="2">
+            <a:schemeClr val="accent1"/>
+          </a:lnRef>
+          <a:fillRef idx="0">
+            <a:schemeClr val="accent1"/>
+          </a:fillRef>
+          <a:effectRef idx="1">
+            <a:schemeClr val="accent1"/>
+          </a:effectRef>
+          <a:fontRef idx="minor">
+            <a:schemeClr val="tx1"/>
+          </a:fontRef>
+        </p:style>
+      </p:cxnSp>
+      <p:sp>
+        <p:nvSpPr>
+          <p:cNvPr id="32" name="Pfeil: nach rechts 31">
+            <a:extLst>
+              <a:ext uri="{FF2B5EF4-FFF2-40B4-BE49-F238E27FC236}">
+                <a16:creationId xmlns:a16="http://schemas.microsoft.com/office/drawing/2014/main" id="{878027C9-7DEF-A0D4-3C78-E16E6DA6A021}"/>
+              </a:ext>
+            </a:extLst>
+          </p:cNvPr>
+          <p:cNvSpPr/>
+          <p:nvPr/>
+        </p:nvSpPr>
+        <p:spPr>
+          <a:xfrm>
+            <a:off x="13220700" y="6591300"/>
+            <a:ext cx="693420" cy="267941"/>
+          </a:xfrm>
+          <a:prstGeom prst="rightArrow">
+            <a:avLst/>
+          </a:prstGeom>
+        </p:spPr>
+        <p:style>
+          <a:lnRef idx="2">
+            <a:schemeClr val="accent1">
+              <a:shade val="15000"/>
+            </a:schemeClr>
+          </a:lnRef>
+          <a:fillRef idx="1">
+            <a:schemeClr val="accent1"/>
+          </a:fillRef>
+          <a:effectRef idx="0">
+            <a:schemeClr val="accent1"/>
+          </a:effectRef>
+          <a:fontRef idx="minor">
+            <a:schemeClr val="lt1"/>
+          </a:fontRef>
+        </p:style>
+        <p:txBody>
+          <a:bodyPr rtlCol="0" anchor="ctr"/>
+          <a:lstStyle/>
+          <a:p>
+            <a:pPr algn="ctr"/>
+            <a:endParaRPr lang="de-DE"/>
+          </a:p>
+        </p:txBody>
+      </p:sp>
+      <p:cxnSp>
+        <p:nvCxnSpPr>
+          <p:cNvPr id="33" name="Gerader Verbinder 32">
+            <a:extLst>
+              <a:ext uri="{FF2B5EF4-FFF2-40B4-BE49-F238E27FC236}">
+                <a16:creationId xmlns:a16="http://schemas.microsoft.com/office/drawing/2014/main" id="{343E39D7-8EAF-109B-5433-837A658812F4}"/>
+              </a:ext>
+            </a:extLst>
+          </p:cNvPr>
+          <p:cNvCxnSpPr>
+            <a:cxnSpLocks/>
+            <a:stCxn id="4" idx="3"/>
+            <a:endCxn id="10" idx="1"/>
+          </p:cNvCxnSpPr>
+          <p:nvPr/>
+        </p:nvCxnSpPr>
+        <p:spPr>
+          <a:xfrm>
+            <a:off x="6423432" y="4675101"/>
+            <a:ext cx="1734147" cy="768626"/>
           </a:xfrm>
           <a:prstGeom prst="line">
             <a:avLst/>
@@ -8793,22 +11536,24 @@
       </p:cxnSp>
       <p:cxnSp>
         <p:nvCxnSpPr>
-          <p:cNvPr id="72" name="Gerader Verbinder 71">
-            <a:extLst>
-              <a:ext uri="{FF2B5EF4-FFF2-40B4-BE49-F238E27FC236}">
-                <a16:creationId xmlns:a16="http://schemas.microsoft.com/office/drawing/2014/main" id="{C9A4C412-BCBB-33AC-984B-B1834B53C4BF}"/>
+          <p:cNvPr id="36" name="Gerader Verbinder 35">
+            <a:extLst>
+              <a:ext uri="{FF2B5EF4-FFF2-40B4-BE49-F238E27FC236}">
+                <a16:creationId xmlns:a16="http://schemas.microsoft.com/office/drawing/2014/main" id="{89C83D6A-5F17-5896-6819-63820A809944}"/>
               </a:ext>
             </a:extLst>
           </p:cNvPr>
           <p:cNvCxnSpPr>
             <a:cxnSpLocks/>
+            <a:stCxn id="4" idx="3"/>
+            <a:endCxn id="19" idx="3"/>
           </p:cNvCxnSpPr>
           <p:nvPr/>
         </p:nvCxnSpPr>
         <p:spPr>
           <a:xfrm>
-            <a:off x="3527832" y="4420050"/>
-            <a:ext cx="1734147" cy="0"/>
+            <a:off x="6423432" y="4675101"/>
+            <a:ext cx="6141092" cy="1638300"/>
           </a:xfrm>
           <a:prstGeom prst="line">
             <a:avLst/>
@@ -8816,25 +11561,246 @@
         </p:spPr>
         <p:style>
           <a:lnRef idx="2">
-            <a:schemeClr val="accent6"/>
+            <a:schemeClr val="accent5"/>
           </a:lnRef>
           <a:fillRef idx="0">
-            <a:schemeClr val="accent6"/>
+            <a:schemeClr val="accent5"/>
           </a:fillRef>
           <a:effectRef idx="1">
-            <a:schemeClr val="accent6"/>
+            <a:schemeClr val="accent5"/>
           </a:effectRef>
           <a:fontRef idx="minor">
             <a:schemeClr val="tx1"/>
           </a:fontRef>
         </p:style>
       </p:cxnSp>
-      <p:sp>
-        <p:nvSpPr>
-          <p:cNvPr id="73" name="Rechteck 72">
-            <a:extLst>
-              <a:ext uri="{FF2B5EF4-FFF2-40B4-BE49-F238E27FC236}">
-                <a16:creationId xmlns:a16="http://schemas.microsoft.com/office/drawing/2014/main" id="{FC89CEB9-D499-084D-0F30-40B9451B7F13}"/>
+      <p:cxnSp>
+        <p:nvCxnSpPr>
+          <p:cNvPr id="40" name="Gerader Verbinder 39">
+            <a:extLst>
+              <a:ext uri="{FF2B5EF4-FFF2-40B4-BE49-F238E27FC236}">
+                <a16:creationId xmlns:a16="http://schemas.microsoft.com/office/drawing/2014/main" id="{1F2ACD0A-3ED8-2289-8598-F198BE02EC6C}"/>
+              </a:ext>
+            </a:extLst>
+          </p:cNvPr>
+          <p:cNvCxnSpPr>
+            <a:cxnSpLocks/>
+            <a:stCxn id="4" idx="3"/>
+            <a:endCxn id="20" idx="3"/>
+          </p:cNvCxnSpPr>
+          <p:nvPr/>
+        </p:nvCxnSpPr>
+        <p:spPr>
+          <a:xfrm>
+            <a:off x="6423432" y="4675101"/>
+            <a:ext cx="6141091" cy="2406926"/>
+          </a:xfrm>
+          <a:prstGeom prst="line">
+            <a:avLst/>
+          </a:prstGeom>
+        </p:spPr>
+        <p:style>
+          <a:lnRef idx="2">
+            <a:schemeClr val="accent5"/>
+          </a:lnRef>
+          <a:fillRef idx="0">
+            <a:schemeClr val="accent5"/>
+          </a:fillRef>
+          <a:effectRef idx="1">
+            <a:schemeClr val="accent5"/>
+          </a:effectRef>
+          <a:fontRef idx="minor">
+            <a:schemeClr val="tx1"/>
+          </a:fontRef>
+        </p:style>
+      </p:cxnSp>
+      <p:sp>
+        <p:nvSpPr>
+          <p:cNvPr id="44" name="Textfeld 43">
+            <a:extLst>
+              <a:ext uri="{FF2B5EF4-FFF2-40B4-BE49-F238E27FC236}">
+                <a16:creationId xmlns:a16="http://schemas.microsoft.com/office/drawing/2014/main" id="{6BA6001F-9DBE-AB9A-A433-635195831C64}"/>
+              </a:ext>
+            </a:extLst>
+          </p:cNvPr>
+          <p:cNvSpPr txBox="1"/>
+          <p:nvPr/>
+        </p:nvSpPr>
+        <p:spPr>
+          <a:xfrm>
+            <a:off x="8522541" y="4098651"/>
+            <a:ext cx="431528" cy="369332"/>
+          </a:xfrm>
+          <a:prstGeom prst="rect">
+            <a:avLst/>
+          </a:prstGeom>
+          <a:noFill/>
+        </p:spPr>
+        <p:txBody>
+          <a:bodyPr wrap="none" rtlCol="0">
+            <a:spAutoFit/>
+          </a:bodyPr>
+          <a:lstStyle/>
+          <a:p>
+            <a:r>
+              <a:rPr lang="de-DE"/>
+              <a:t>38</a:t>
+            </a:r>
+          </a:p>
+        </p:txBody>
+      </p:sp>
+      <p:sp>
+        <p:nvSpPr>
+          <p:cNvPr id="45" name="Textfeld 44">
+            <a:extLst>
+              <a:ext uri="{FF2B5EF4-FFF2-40B4-BE49-F238E27FC236}">
+                <a16:creationId xmlns:a16="http://schemas.microsoft.com/office/drawing/2014/main" id="{DD0BFAC1-E896-C7F5-BD64-3AA661457506}"/>
+              </a:ext>
+            </a:extLst>
+          </p:cNvPr>
+          <p:cNvSpPr txBox="1"/>
+          <p:nvPr/>
+        </p:nvSpPr>
+        <p:spPr>
+          <a:xfrm>
+            <a:off x="5626941" y="4129261"/>
+            <a:ext cx="431528" cy="369332"/>
+          </a:xfrm>
+          <a:prstGeom prst="rect">
+            <a:avLst/>
+          </a:prstGeom>
+          <a:noFill/>
+        </p:spPr>
+        <p:txBody>
+          <a:bodyPr wrap="none" rtlCol="0">
+            <a:spAutoFit/>
+          </a:bodyPr>
+          <a:lstStyle/>
+          <a:p>
+            <a:r>
+              <a:rPr lang="de-DE"/>
+              <a:t>38</a:t>
+            </a:r>
+          </a:p>
+        </p:txBody>
+      </p:sp>
+      <p:sp>
+        <p:nvSpPr>
+          <p:cNvPr id="46" name="Textfeld 45">
+            <a:extLst>
+              <a:ext uri="{FF2B5EF4-FFF2-40B4-BE49-F238E27FC236}">
+                <a16:creationId xmlns:a16="http://schemas.microsoft.com/office/drawing/2014/main" id="{A7BB45FC-95BD-0D31-838A-A4ACF981606C}"/>
+              </a:ext>
+            </a:extLst>
+          </p:cNvPr>
+          <p:cNvSpPr txBox="1"/>
+          <p:nvPr/>
+        </p:nvSpPr>
+        <p:spPr>
+          <a:xfrm>
+            <a:off x="11780917" y="5721282"/>
+            <a:ext cx="431528" cy="369332"/>
+          </a:xfrm>
+          <a:prstGeom prst="rect">
+            <a:avLst/>
+          </a:prstGeom>
+          <a:noFill/>
+        </p:spPr>
+        <p:txBody>
+          <a:bodyPr wrap="none" rtlCol="0">
+            <a:spAutoFit/>
+          </a:bodyPr>
+          <a:lstStyle/>
+          <a:p>
+            <a:r>
+              <a:rPr lang="de-DE"/>
+              <a:t>15</a:t>
+            </a:r>
+          </a:p>
+        </p:txBody>
+      </p:sp>
+      <p:sp>
+        <p:nvSpPr>
+          <p:cNvPr id="47" name="Textfeld 46">
+            <a:extLst>
+              <a:ext uri="{FF2B5EF4-FFF2-40B4-BE49-F238E27FC236}">
+                <a16:creationId xmlns:a16="http://schemas.microsoft.com/office/drawing/2014/main" id="{D56A1BDC-E444-75BD-0D0C-967F1E9D4B0F}"/>
+              </a:ext>
+            </a:extLst>
+          </p:cNvPr>
+          <p:cNvSpPr txBox="1"/>
+          <p:nvPr/>
+        </p:nvSpPr>
+        <p:spPr>
+          <a:xfrm>
+            <a:off x="11780917" y="6558639"/>
+            <a:ext cx="431528" cy="369332"/>
+          </a:xfrm>
+          <a:prstGeom prst="rect">
+            <a:avLst/>
+          </a:prstGeom>
+          <a:noFill/>
+        </p:spPr>
+        <p:txBody>
+          <a:bodyPr wrap="none" rtlCol="0">
+            <a:spAutoFit/>
+          </a:bodyPr>
+          <a:lstStyle/>
+          <a:p>
+            <a:r>
+              <a:rPr lang="de-DE"/>
+              <a:t>15</a:t>
+            </a:r>
+          </a:p>
+        </p:txBody>
+      </p:sp>
+      <p:cxnSp>
+        <p:nvCxnSpPr>
+          <p:cNvPr id="49" name="Gerade Verbindung mit Pfeil 48">
+            <a:extLst>
+              <a:ext uri="{FF2B5EF4-FFF2-40B4-BE49-F238E27FC236}">
+                <a16:creationId xmlns:a16="http://schemas.microsoft.com/office/drawing/2014/main" id="{686B2775-8C3C-EFBC-2515-6BFE9AE70BB2}"/>
+              </a:ext>
+            </a:extLst>
+          </p:cNvPr>
+          <p:cNvCxnSpPr>
+            <a:cxnSpLocks/>
+          </p:cNvCxnSpPr>
+          <p:nvPr/>
+        </p:nvCxnSpPr>
+        <p:spPr>
+          <a:xfrm flipV="1">
+            <a:off x="9963644" y="5752716"/>
+            <a:ext cx="300496" cy="1175255"/>
+          </a:xfrm>
+          <a:prstGeom prst="straightConnector1">
+            <a:avLst/>
+          </a:prstGeom>
+          <a:ln>
+            <a:tailEnd type="triangle"/>
+          </a:ln>
+        </p:spPr>
+        <p:style>
+          <a:lnRef idx="2">
+            <a:schemeClr val="accent1"/>
+          </a:lnRef>
+          <a:fillRef idx="0">
+            <a:schemeClr val="accent1"/>
+          </a:fillRef>
+          <a:effectRef idx="1">
+            <a:schemeClr val="accent1"/>
+          </a:effectRef>
+          <a:fontRef idx="minor">
+            <a:schemeClr val="tx1"/>
+          </a:fontRef>
+        </p:style>
+      </p:cxnSp>
+      <p:sp>
+        <p:nvSpPr>
+          <p:cNvPr id="53" name="Rechteck 52">
+            <a:extLst>
+              <a:ext uri="{FF2B5EF4-FFF2-40B4-BE49-F238E27FC236}">
+                <a16:creationId xmlns:a16="http://schemas.microsoft.com/office/drawing/2014/main" id="{40069D9A-0E12-C740-139A-BB957AEA6F18}"/>
               </a:ext>
             </a:extLst>
           </p:cNvPr>
@@ -8843,8 +11809,8 @@
         </p:nvSpPr>
         <p:spPr>
           <a:xfrm>
-            <a:off x="4379355" y="4199486"/>
-            <a:ext cx="573690" cy="211283"/>
+            <a:off x="6100910" y="6592157"/>
+            <a:ext cx="1300608" cy="310868"/>
           </a:xfrm>
           <a:prstGeom prst="rect">
             <a:avLst/>
@@ -8869,17 +11835,115 @@
                 </a:solidFill>
                 <a:latin typeface="Calibri" panose="020F0502020204030204"/>
               </a:rPr>
-              <a:t>?</a:t>
-            </a:r>
-          </a:p>
-        </p:txBody>
-      </p:sp>
-      <p:sp>
-        <p:nvSpPr>
-          <p:cNvPr id="74" name="Rechteck 73">
-            <a:extLst>
-              <a:ext uri="{FF2B5EF4-FFF2-40B4-BE49-F238E27FC236}">
-                <a16:creationId xmlns:a16="http://schemas.microsoft.com/office/drawing/2014/main" id="{60BA63CA-CDAA-B55B-0A46-C06E0BFF959B}"/>
+              <a:t>305550001 : 90%</a:t>
+            </a:r>
+          </a:p>
+          <a:p>
+            <a:pPr defTabSz="914400"/>
+            <a:r>
+              <a:rPr lang="de-DE" sz="800" kern="0">
+                <a:solidFill>
+                  <a:prstClr val="black"/>
+                </a:solidFill>
+                <a:latin typeface="Calibri" panose="020F0502020204030204"/>
+              </a:rPr>
+              <a:t>305550002 : 85%</a:t>
+            </a:r>
+          </a:p>
+          <a:p>
+            <a:pPr defTabSz="914400"/>
+            <a:endParaRPr lang="de-DE" sz="800" kern="0">
+              <a:solidFill>
+                <a:prstClr val="black"/>
+              </a:solidFill>
+              <a:latin typeface="Calibri" panose="020F0502020204030204"/>
+            </a:endParaRPr>
+          </a:p>
+        </p:txBody>
+      </p:sp>
+      <p:cxnSp>
+        <p:nvCxnSpPr>
+          <p:cNvPr id="54" name="Gerade Verbindung mit Pfeil 53">
+            <a:extLst>
+              <a:ext uri="{FF2B5EF4-FFF2-40B4-BE49-F238E27FC236}">
+                <a16:creationId xmlns:a16="http://schemas.microsoft.com/office/drawing/2014/main" id="{89C5F958-79E0-729F-B3A5-FC795D0ED8C6}"/>
+              </a:ext>
+            </a:extLst>
+          </p:cNvPr>
+          <p:cNvCxnSpPr>
+            <a:cxnSpLocks/>
+          </p:cNvCxnSpPr>
+          <p:nvPr/>
+        </p:nvCxnSpPr>
+        <p:spPr>
+          <a:xfrm flipV="1">
+            <a:off x="6531064" y="4700953"/>
+            <a:ext cx="660180" cy="1879018"/>
+          </a:xfrm>
+          <a:prstGeom prst="straightConnector1">
+            <a:avLst/>
+          </a:prstGeom>
+          <a:ln>
+            <a:tailEnd type="triangle"/>
+          </a:ln>
+        </p:spPr>
+        <p:style>
+          <a:lnRef idx="2">
+            <a:schemeClr val="accent1"/>
+          </a:lnRef>
+          <a:fillRef idx="0">
+            <a:schemeClr val="accent1"/>
+          </a:fillRef>
+          <a:effectRef idx="1">
+            <a:schemeClr val="accent1"/>
+          </a:effectRef>
+          <a:fontRef idx="minor">
+            <a:schemeClr val="tx1"/>
+          </a:fontRef>
+        </p:style>
+      </p:cxnSp>
+      <p:cxnSp>
+        <p:nvCxnSpPr>
+          <p:cNvPr id="56" name="Gerader Verbinder 55">
+            <a:extLst>
+              <a:ext uri="{FF2B5EF4-FFF2-40B4-BE49-F238E27FC236}">
+                <a16:creationId xmlns:a16="http://schemas.microsoft.com/office/drawing/2014/main" id="{B7F75F8E-EDD4-4824-1EB4-D414F77DAE06}"/>
+              </a:ext>
+            </a:extLst>
+          </p:cNvPr>
+          <p:cNvCxnSpPr/>
+          <p:nvPr/>
+        </p:nvCxnSpPr>
+        <p:spPr>
+          <a:xfrm>
+            <a:off x="6423432" y="5441389"/>
+            <a:ext cx="1734147" cy="0"/>
+          </a:xfrm>
+          <a:prstGeom prst="line">
+            <a:avLst/>
+          </a:prstGeom>
+        </p:spPr>
+        <p:style>
+          <a:lnRef idx="2">
+            <a:schemeClr val="accent5"/>
+          </a:lnRef>
+          <a:fillRef idx="0">
+            <a:schemeClr val="accent5"/>
+          </a:fillRef>
+          <a:effectRef idx="1">
+            <a:schemeClr val="accent5"/>
+          </a:effectRef>
+          <a:fontRef idx="minor">
+            <a:schemeClr val="tx1"/>
+          </a:fontRef>
+        </p:style>
+      </p:cxnSp>
+      <p:sp>
+        <p:nvSpPr>
+          <p:cNvPr id="57" name="Rechteck 56">
+            <a:extLst>
+              <a:ext uri="{FF2B5EF4-FFF2-40B4-BE49-F238E27FC236}">
+                <a16:creationId xmlns:a16="http://schemas.microsoft.com/office/drawing/2014/main" id="{258C3A5D-42B1-B135-6B40-050577A86937}"/>
               </a:ext>
             </a:extLst>
           </p:cNvPr>
@@ -8888,8 +11952,8 @@
         </p:nvSpPr>
         <p:spPr>
           <a:xfrm>
-            <a:off x="4379355" y="4663821"/>
-            <a:ext cx="573690" cy="211283"/>
+            <a:off x="7241033" y="6822329"/>
+            <a:ext cx="1300608" cy="416716"/>
           </a:xfrm>
           <a:prstGeom prst="rect">
             <a:avLst/>
@@ -8914,17 +11978,79 @@
                 </a:solidFill>
                 <a:latin typeface="Calibri" panose="020F0502020204030204"/>
               </a:rPr>
-              <a:t>?</a:t>
-            </a:r>
-          </a:p>
-        </p:txBody>
-      </p:sp>
-      <p:sp>
-        <p:nvSpPr>
-          <p:cNvPr id="75" name="Rechteck 74">
-            <a:extLst>
-              <a:ext uri="{FF2B5EF4-FFF2-40B4-BE49-F238E27FC236}">
-                <a16:creationId xmlns:a16="http://schemas.microsoft.com/office/drawing/2014/main" id="{4637379A-8802-3B1A-9D98-C4146D84E565}"/>
+              <a:t>305550001 : 85%</a:t>
+            </a:r>
+          </a:p>
+          <a:p>
+            <a:pPr defTabSz="914400"/>
+            <a:r>
+              <a:rPr lang="de-DE" sz="800" kern="0">
+                <a:solidFill>
+                  <a:prstClr val="black"/>
+                </a:solidFill>
+                <a:latin typeface="Calibri" panose="020F0502020204030204"/>
+              </a:rPr>
+              <a:t>305550002 : 90%</a:t>
+            </a:r>
+          </a:p>
+          <a:p>
+            <a:pPr defTabSz="914400"/>
+            <a:endParaRPr lang="de-DE" sz="800" kern="0">
+              <a:solidFill>
+                <a:prstClr val="black"/>
+              </a:solidFill>
+              <a:latin typeface="Calibri" panose="020F0502020204030204"/>
+            </a:endParaRPr>
+          </a:p>
+        </p:txBody>
+      </p:sp>
+      <p:cxnSp>
+        <p:nvCxnSpPr>
+          <p:cNvPr id="58" name="Gerade Verbindung mit Pfeil 57">
+            <a:extLst>
+              <a:ext uri="{FF2B5EF4-FFF2-40B4-BE49-F238E27FC236}">
+                <a16:creationId xmlns:a16="http://schemas.microsoft.com/office/drawing/2014/main" id="{E18155CB-B7E3-3EE0-A7A7-DD39601256DE}"/>
+              </a:ext>
+            </a:extLst>
+          </p:cNvPr>
+          <p:cNvCxnSpPr>
+            <a:cxnSpLocks/>
+          </p:cNvCxnSpPr>
+          <p:nvPr/>
+        </p:nvCxnSpPr>
+        <p:spPr>
+          <a:xfrm flipV="1">
+            <a:off x="7692517" y="5462935"/>
+            <a:ext cx="183266" cy="1212185"/>
+          </a:xfrm>
+          <a:prstGeom prst="straightConnector1">
+            <a:avLst/>
+          </a:prstGeom>
+          <a:ln>
+            <a:tailEnd type="triangle"/>
+          </a:ln>
+        </p:spPr>
+        <p:style>
+          <a:lnRef idx="2">
+            <a:schemeClr val="accent1"/>
+          </a:lnRef>
+          <a:fillRef idx="0">
+            <a:schemeClr val="accent1"/>
+          </a:fillRef>
+          <a:effectRef idx="1">
+            <a:schemeClr val="accent1"/>
+          </a:effectRef>
+          <a:fontRef idx="minor">
+            <a:schemeClr val="tx1"/>
+          </a:fontRef>
+        </p:style>
+      </p:cxnSp>
+      <p:sp>
+        <p:nvSpPr>
+          <p:cNvPr id="61" name="Rechteck 60">
+            <a:extLst>
+              <a:ext uri="{FF2B5EF4-FFF2-40B4-BE49-F238E27FC236}">
+                <a16:creationId xmlns:a16="http://schemas.microsoft.com/office/drawing/2014/main" id="{A163372A-BB2B-3713-CE60-B7D4C29BDCA9}"/>
               </a:ext>
             </a:extLst>
           </p:cNvPr>
@@ -8933,8 +12059,8 @@
         </p:nvSpPr>
         <p:spPr>
           <a:xfrm>
-            <a:off x="4354488" y="5098772"/>
-            <a:ext cx="573690" cy="211283"/>
+            <a:off x="3884266" y="4169274"/>
+            <a:ext cx="754886" cy="211283"/>
           </a:xfrm>
           <a:prstGeom prst="rect">
             <a:avLst/>
@@ -8959,7 +12085,175 @@
                 </a:solidFill>
                 <a:latin typeface="Calibri" panose="020F0502020204030204"/>
               </a:rPr>
-              <a:t>?</a:t>
+              <a:t>mountNameA</a:t>
+            </a:r>
+          </a:p>
+        </p:txBody>
+      </p:sp>
+      <p:sp>
+        <p:nvSpPr>
+          <p:cNvPr id="62" name="Rechteck 61">
+            <a:extLst>
+              <a:ext uri="{FF2B5EF4-FFF2-40B4-BE49-F238E27FC236}">
+                <a16:creationId xmlns:a16="http://schemas.microsoft.com/office/drawing/2014/main" id="{11D85F74-10C7-3845-1CA5-22C58EACE11A}"/>
+              </a:ext>
+            </a:extLst>
+          </p:cNvPr>
+          <p:cNvSpPr/>
+          <p:nvPr/>
+        </p:nvSpPr>
+        <p:spPr>
+          <a:xfrm>
+            <a:off x="9417153" y="7038022"/>
+            <a:ext cx="846987" cy="352994"/>
+          </a:xfrm>
+          <a:prstGeom prst="rect">
+            <a:avLst/>
+          </a:prstGeom>
+          <a:noFill/>
+          <a:ln w="12700" cap="flat" cmpd="sng" algn="ctr">
+            <a:noFill/>
+            <a:prstDash val="solid"/>
+            <a:miter lim="800000"/>
+          </a:ln>
+          <a:effectLst/>
+        </p:spPr>
+        <p:txBody>
+          <a:bodyPr lIns="36000" tIns="36000" rIns="36000" bIns="36000" rtlCol="0" anchor="t"/>
+          <a:lstStyle/>
+          <a:p>
+            <a:pPr defTabSz="914400"/>
+            <a:r>
+              <a:rPr lang="de-DE" sz="800" kern="0">
+                <a:solidFill>
+                  <a:prstClr val="black"/>
+                </a:solidFill>
+                <a:latin typeface="Calibri" panose="020F0502020204030204"/>
+              </a:rPr>
+              <a:t>305550001 : 0%</a:t>
+            </a:r>
+          </a:p>
+          <a:p>
+            <a:pPr defTabSz="914400"/>
+            <a:r>
+              <a:rPr lang="de-DE" sz="800" kern="0">
+                <a:solidFill>
+                  <a:prstClr val="black"/>
+                </a:solidFill>
+                <a:latin typeface="Calibri" panose="020F0502020204030204"/>
+              </a:rPr>
+              <a:t>305550002 : 0%</a:t>
+            </a:r>
+          </a:p>
+          <a:p>
+            <a:pPr defTabSz="914400"/>
+            <a:endParaRPr lang="de-DE" sz="800" kern="0">
+              <a:solidFill>
+                <a:prstClr val="black"/>
+              </a:solidFill>
+              <a:latin typeface="Calibri" panose="020F0502020204030204"/>
+            </a:endParaRPr>
+          </a:p>
+        </p:txBody>
+      </p:sp>
+      <p:sp>
+        <p:nvSpPr>
+          <p:cNvPr id="64" name="Rechteck 63">
+            <a:extLst>
+              <a:ext uri="{FF2B5EF4-FFF2-40B4-BE49-F238E27FC236}">
+                <a16:creationId xmlns:a16="http://schemas.microsoft.com/office/drawing/2014/main" id="{06672D64-F74A-AFA0-ED7D-AFD543B1FA60}"/>
+              </a:ext>
+            </a:extLst>
+          </p:cNvPr>
+          <p:cNvSpPr/>
+          <p:nvPr/>
+        </p:nvSpPr>
+        <p:spPr>
+          <a:xfrm>
+            <a:off x="7003660" y="3690066"/>
+            <a:ext cx="799220" cy="395947"/>
+          </a:xfrm>
+          <a:prstGeom prst="rect">
+            <a:avLst/>
+          </a:prstGeom>
+          <a:noFill/>
+          <a:ln w="12700" cap="flat" cmpd="sng" algn="ctr">
+            <a:noFill/>
+            <a:prstDash val="solid"/>
+            <a:miter lim="800000"/>
+          </a:ln>
+          <a:effectLst/>
+        </p:spPr>
+        <p:txBody>
+          <a:bodyPr lIns="36000" tIns="36000" rIns="36000" bIns="36000" rtlCol="0" anchor="t"/>
+          <a:lstStyle/>
+          <a:p>
+            <a:pPr defTabSz="914400"/>
+            <a:r>
+              <a:rPr lang="de-DE" sz="800" kern="0">
+                <a:solidFill>
+                  <a:prstClr val="black"/>
+                </a:solidFill>
+                <a:latin typeface="Calibri" panose="020F0502020204030204"/>
+              </a:rPr>
+              <a:t>305550001</a:t>
+            </a:r>
+          </a:p>
+          <a:p>
+            <a:pPr defTabSz="914400"/>
+            <a:r>
+              <a:rPr lang="de-DE" sz="800" kern="0">
+                <a:solidFill>
+                  <a:prstClr val="black"/>
+                </a:solidFill>
+                <a:latin typeface="Calibri" panose="020F0502020204030204"/>
+              </a:rPr>
+              <a:t>305550002</a:t>
+            </a:r>
+          </a:p>
+        </p:txBody>
+      </p:sp>
+      <p:sp>
+        <p:nvSpPr>
+          <p:cNvPr id="66" name="Rechteck 65">
+            <a:extLst>
+              <a:ext uri="{FF2B5EF4-FFF2-40B4-BE49-F238E27FC236}">
+                <a16:creationId xmlns:a16="http://schemas.microsoft.com/office/drawing/2014/main" id="{8B2A5B61-DCA9-4729-7AFD-7407AF97F628}"/>
+              </a:ext>
+            </a:extLst>
+          </p:cNvPr>
+          <p:cNvSpPr/>
+          <p:nvPr/>
+        </p:nvSpPr>
+        <p:spPr>
+          <a:xfrm>
+            <a:off x="10110884" y="4241031"/>
+            <a:ext cx="754886" cy="211283"/>
+          </a:xfrm>
+          <a:prstGeom prst="rect">
+            <a:avLst/>
+          </a:prstGeom>
+          <a:noFill/>
+          <a:ln w="12700" cap="flat" cmpd="sng" algn="ctr">
+            <a:noFill/>
+            <a:prstDash val="solid"/>
+            <a:miter lim="800000"/>
+          </a:ln>
+          <a:effectLst/>
+        </p:spPr>
+        <p:txBody>
+          <a:bodyPr lIns="36000" tIns="36000" rIns="36000" bIns="36000" rtlCol="0" anchor="t"/>
+          <a:lstStyle/>
+          <a:p>
+            <a:pPr defTabSz="914400"/>
+            <a:r>
+              <a:rPr lang="de-DE" sz="800" kern="0">
+                <a:solidFill>
+                  <a:prstClr val="black"/>
+                </a:solidFill>
+                <a:latin typeface="Calibri" panose="020F0502020204030204"/>
+              </a:rPr>
+              <a:t>mountNameB</a:t>
             </a:r>
           </a:p>
         </p:txBody>
@@ -8967,7 +12261,7 @@
     </p:spTree>
     <p:extLst>
       <p:ext uri="{BB962C8B-B14F-4D97-AF65-F5344CB8AC3E}">
-        <p14:creationId xmlns:p14="http://schemas.microsoft.com/office/powerpoint/2010/main" val="949934280"/>
+        <p14:creationId xmlns:p14="http://schemas.microsoft.com/office/powerpoint/2010/main" val="1839067590"/>
       </p:ext>
     </p:extLst>
   </p:cSld>

--- a/spec/Diagrams/InformationStructure/InformationStructure.pptx
+++ b/spec/Diagrams/InformationStructure/InformationStructure.pptx
@@ -5,13 +5,14 @@
     <p:sldMasterId id="2147483732" r:id="rId1"/>
   </p:sldMasterIdLst>
   <p:notesMasterIdLst>
-    <p:notesMasterId r:id="rId6"/>
+    <p:notesMasterId r:id="rId7"/>
   </p:notesMasterIdLst>
   <p:sldIdLst>
     <p:sldId id="305" r:id="rId2"/>
     <p:sldId id="302" r:id="rId3"/>
     <p:sldId id="303" r:id="rId4"/>
     <p:sldId id="304" r:id="rId5"/>
+    <p:sldId id="306" r:id="rId6"/>
   </p:sldIdLst>
   <p:sldSz cx="23399750" cy="18000663"/>
   <p:notesSz cx="6858000" cy="9144000"/>
@@ -200,7 +201,7 @@
           <a:p>
             <a:fld id="{37CCF725-7468-4D3D-9E24-A16745BBBA77}" type="datetimeFigureOut">
               <a:rPr lang="de-DE" smtClean="0"/>
-              <a:t>30.04.2025</a:t>
+              <a:t>02.05.2025</a:t>
             </a:fld>
             <a:endParaRPr lang="de-DE"/>
           </a:p>
@@ -598,7 +599,7 @@
           <a:p>
             <a:fld id="{9A2764DB-E7DF-4EA7-A1AF-05A77C280FCA}" type="datetimeFigureOut">
               <a:rPr lang="de-DE" smtClean="0"/>
-              <a:t>30.04.2025</a:t>
+              <a:t>02.05.2025</a:t>
             </a:fld>
             <a:endParaRPr lang="de-DE"/>
           </a:p>
@@ -768,7 +769,7 @@
           <a:p>
             <a:fld id="{9A2764DB-E7DF-4EA7-A1AF-05A77C280FCA}" type="datetimeFigureOut">
               <a:rPr lang="de-DE" smtClean="0"/>
-              <a:t>30.04.2025</a:t>
+              <a:t>02.05.2025</a:t>
             </a:fld>
             <a:endParaRPr lang="de-DE"/>
           </a:p>
@@ -948,7 +949,7 @@
           <a:p>
             <a:fld id="{9A2764DB-E7DF-4EA7-A1AF-05A77C280FCA}" type="datetimeFigureOut">
               <a:rPr lang="de-DE" smtClean="0"/>
-              <a:t>30.04.2025</a:t>
+              <a:t>02.05.2025</a:t>
             </a:fld>
             <a:endParaRPr lang="de-DE"/>
           </a:p>
@@ -1118,7 +1119,7 @@
           <a:p>
             <a:fld id="{9A2764DB-E7DF-4EA7-A1AF-05A77C280FCA}" type="datetimeFigureOut">
               <a:rPr lang="de-DE" smtClean="0"/>
-              <a:t>30.04.2025</a:t>
+              <a:t>02.05.2025</a:t>
             </a:fld>
             <a:endParaRPr lang="de-DE"/>
           </a:p>
@@ -1364,7 +1365,7 @@
           <a:p>
             <a:fld id="{9A2764DB-E7DF-4EA7-A1AF-05A77C280FCA}" type="datetimeFigureOut">
               <a:rPr lang="de-DE" smtClean="0"/>
-              <a:t>30.04.2025</a:t>
+              <a:t>02.05.2025</a:t>
             </a:fld>
             <a:endParaRPr lang="de-DE"/>
           </a:p>
@@ -1596,7 +1597,7 @@
           <a:p>
             <a:fld id="{9A2764DB-E7DF-4EA7-A1AF-05A77C280FCA}" type="datetimeFigureOut">
               <a:rPr lang="de-DE" smtClean="0"/>
-              <a:t>30.04.2025</a:t>
+              <a:t>02.05.2025</a:t>
             </a:fld>
             <a:endParaRPr lang="de-DE"/>
           </a:p>
@@ -1963,7 +1964,7 @@
           <a:p>
             <a:fld id="{9A2764DB-E7DF-4EA7-A1AF-05A77C280FCA}" type="datetimeFigureOut">
               <a:rPr lang="de-DE" smtClean="0"/>
-              <a:t>30.04.2025</a:t>
+              <a:t>02.05.2025</a:t>
             </a:fld>
             <a:endParaRPr lang="de-DE"/>
           </a:p>
@@ -2081,7 +2082,7 @@
           <a:p>
             <a:fld id="{9A2764DB-E7DF-4EA7-A1AF-05A77C280FCA}" type="datetimeFigureOut">
               <a:rPr lang="de-DE" smtClean="0"/>
-              <a:t>30.04.2025</a:t>
+              <a:t>02.05.2025</a:t>
             </a:fld>
             <a:endParaRPr lang="de-DE"/>
           </a:p>
@@ -2176,7 +2177,7 @@
           <a:p>
             <a:fld id="{9A2764DB-E7DF-4EA7-A1AF-05A77C280FCA}" type="datetimeFigureOut">
               <a:rPr lang="de-DE" smtClean="0"/>
-              <a:t>30.04.2025</a:t>
+              <a:t>02.05.2025</a:t>
             </a:fld>
             <a:endParaRPr lang="de-DE"/>
           </a:p>
@@ -2453,7 +2454,7 @@
           <a:p>
             <a:fld id="{9A2764DB-E7DF-4EA7-A1AF-05A77C280FCA}" type="datetimeFigureOut">
               <a:rPr lang="de-DE" smtClean="0"/>
-              <a:t>30.04.2025</a:t>
+              <a:t>02.05.2025</a:t>
             </a:fld>
             <a:endParaRPr lang="de-DE"/>
           </a:p>
@@ -2710,7 +2711,7 @@
           <a:p>
             <a:fld id="{9A2764DB-E7DF-4EA7-A1AF-05A77C280FCA}" type="datetimeFigureOut">
               <a:rPr lang="de-DE" smtClean="0"/>
-              <a:t>30.04.2025</a:t>
+              <a:t>02.05.2025</a:t>
             </a:fld>
             <a:endParaRPr lang="de-DE"/>
           </a:p>
@@ -2923,7 +2924,7 @@
           <a:p>
             <a:fld id="{9A2764DB-E7DF-4EA7-A1AF-05A77C280FCA}" type="datetimeFigureOut">
               <a:rPr lang="de-DE" smtClean="0"/>
-              <a:t>30.04.2025</a:t>
+              <a:t>02.05.2025</a:t>
             </a:fld>
             <a:endParaRPr lang="de-DE"/>
           </a:p>
@@ -3342,7 +3343,7 @@
         </p:nvSpPr>
         <p:spPr>
           <a:xfrm>
-            <a:off x="5924550" y="134232"/>
+            <a:off x="1131324" y="960141"/>
             <a:ext cx="11063135" cy="7457194"/>
           </a:xfrm>
           <a:prstGeom prst="rect">
@@ -3403,7 +3404,7 @@
         </p:nvSpPr>
         <p:spPr>
           <a:xfrm>
-            <a:off x="6143624" y="2341094"/>
+            <a:off x="1350398" y="3167003"/>
             <a:ext cx="10580285" cy="5011539"/>
           </a:xfrm>
           <a:prstGeom prst="rect">
@@ -3464,7 +3465,7 @@
         </p:nvSpPr>
         <p:spPr>
           <a:xfrm>
-            <a:off x="10725613" y="3845387"/>
+            <a:off x="5932387" y="4671296"/>
             <a:ext cx="5725002" cy="3283971"/>
           </a:xfrm>
           <a:prstGeom prst="rect">
@@ -3526,7 +3527,7 @@
         </p:nvSpPr>
         <p:spPr>
           <a:xfrm>
-            <a:off x="11342439" y="4114937"/>
+            <a:off x="6549213" y="4940846"/>
             <a:ext cx="537299" cy="445572"/>
           </a:xfrm>
           <a:prstGeom prst="roundRect">
@@ -3591,7 +3592,7 @@
         </p:nvCxnSpPr>
         <p:spPr>
           <a:xfrm>
-            <a:off x="11611089" y="4560509"/>
+            <a:off x="6817863" y="5386418"/>
             <a:ext cx="0" cy="837717"/>
           </a:xfrm>
           <a:prstGeom prst="straightConnector1">
@@ -3623,7 +3624,7 @@
         </p:nvSpPr>
         <p:spPr>
           <a:xfrm>
-            <a:off x="12847035" y="4132860"/>
+            <a:off x="8053809" y="4958769"/>
             <a:ext cx="2377663" cy="314831"/>
           </a:xfrm>
           <a:prstGeom prst="rect">
@@ -3694,7 +3695,7 @@
         </p:nvCxnSpPr>
         <p:spPr>
           <a:xfrm flipV="1">
-            <a:off x="11879738" y="4290276"/>
+            <a:off x="7086512" y="5116185"/>
             <a:ext cx="967297" cy="47447"/>
           </a:xfrm>
           <a:prstGeom prst="straightConnector1">
@@ -3726,7 +3727,7 @@
         </p:nvSpPr>
         <p:spPr>
           <a:xfrm>
-            <a:off x="6352215" y="3850254"/>
+            <a:off x="1558989" y="4676163"/>
             <a:ext cx="4363197" cy="3283971"/>
           </a:xfrm>
           <a:prstGeom prst="rect">
@@ -3787,7 +3788,7 @@
         </p:nvSpPr>
         <p:spPr>
           <a:xfrm>
-            <a:off x="9236356" y="4290276"/>
+            <a:off x="4443130" y="5116185"/>
             <a:ext cx="537299" cy="445572"/>
           </a:xfrm>
           <a:prstGeom prst="roundRect">
@@ -3854,7 +3855,7 @@
         </p:nvSpPr>
         <p:spPr>
           <a:xfrm>
-            <a:off x="6601216" y="4274533"/>
+            <a:off x="1807990" y="5100442"/>
             <a:ext cx="1756328" cy="527420"/>
           </a:xfrm>
           <a:prstGeom prst="rect">
@@ -3940,7 +3941,7 @@
         </p:nvCxnSpPr>
         <p:spPr>
           <a:xfrm flipH="1">
-            <a:off x="8357544" y="4513062"/>
+            <a:off x="3564318" y="5338971"/>
             <a:ext cx="878812" cy="25181"/>
           </a:xfrm>
           <a:prstGeom prst="straightConnector1">
@@ -3976,7 +3977,7 @@
         </p:nvCxnSpPr>
         <p:spPr>
           <a:xfrm>
-            <a:off x="9505006" y="4735848"/>
+            <a:off x="4711780" y="5561757"/>
             <a:ext cx="1837433" cy="885164"/>
           </a:xfrm>
           <a:prstGeom prst="straightConnector1">
@@ -4008,7 +4009,7 @@
         </p:nvSpPr>
         <p:spPr>
           <a:xfrm>
-            <a:off x="11342440" y="2555173"/>
+            <a:off x="6549214" y="3381082"/>
             <a:ext cx="537299" cy="445572"/>
           </a:xfrm>
           <a:prstGeom prst="roundRect">
@@ -4075,7 +4076,7 @@
         </p:nvSpPr>
         <p:spPr>
           <a:xfrm>
-            <a:off x="12847035" y="2596282"/>
+            <a:off x="8053809" y="3422191"/>
             <a:ext cx="1685583" cy="336074"/>
           </a:xfrm>
           <a:prstGeom prst="rect">
@@ -4128,7 +4129,7 @@
         </p:nvCxnSpPr>
         <p:spPr>
           <a:xfrm flipV="1">
-            <a:off x="11879739" y="2764319"/>
+            <a:off x="7086513" y="3590228"/>
             <a:ext cx="967296" cy="13640"/>
           </a:xfrm>
           <a:prstGeom prst="straightConnector1">
@@ -4160,7 +4161,7 @@
         </p:nvSpPr>
         <p:spPr>
           <a:xfrm>
-            <a:off x="12847034" y="4621572"/>
+            <a:off x="8053808" y="5447481"/>
             <a:ext cx="2377664" cy="2092191"/>
           </a:xfrm>
           <a:prstGeom prst="rect">
@@ -4380,7 +4381,7 @@
         </p:nvSpPr>
         <p:spPr>
           <a:xfrm>
-            <a:off x="11342439" y="5398226"/>
+            <a:off x="6549213" y="6224135"/>
             <a:ext cx="537299" cy="445572"/>
           </a:xfrm>
           <a:prstGeom prst="roundRect">
@@ -4445,7 +4446,7 @@
         </p:nvCxnSpPr>
         <p:spPr>
           <a:xfrm>
-            <a:off x="11879738" y="5621012"/>
+            <a:off x="7086512" y="6446921"/>
             <a:ext cx="967296" cy="46656"/>
           </a:xfrm>
           <a:prstGeom prst="straightConnector1">
@@ -4477,7 +4478,7 @@
         </p:nvSpPr>
         <p:spPr>
           <a:xfrm>
-            <a:off x="11342439" y="316695"/>
+            <a:off x="6549213" y="1142604"/>
             <a:ext cx="537299" cy="445572"/>
           </a:xfrm>
           <a:prstGeom prst="roundRect">
@@ -4548,7 +4549,7 @@
         </p:nvCxnSpPr>
         <p:spPr>
           <a:xfrm>
-            <a:off x="11611089" y="762267"/>
+            <a:off x="6817863" y="1588176"/>
             <a:ext cx="1" cy="1792906"/>
           </a:xfrm>
           <a:prstGeom prst="straightConnector1">
@@ -4580,7 +4581,7 @@
         </p:nvSpPr>
         <p:spPr>
           <a:xfrm>
-            <a:off x="12491734" y="316954"/>
+            <a:off x="7698508" y="1142863"/>
             <a:ext cx="537299" cy="445572"/>
           </a:xfrm>
           <a:prstGeom prst="roundRect">
@@ -4647,7 +4648,7 @@
         </p:nvSpPr>
         <p:spPr>
           <a:xfrm>
-            <a:off x="12490301" y="1132869"/>
+            <a:off x="7697075" y="1958778"/>
             <a:ext cx="537299" cy="445572"/>
           </a:xfrm>
           <a:prstGeom prst="roundRect">
@@ -4718,7 +4719,7 @@
         </p:nvCxnSpPr>
         <p:spPr>
           <a:xfrm>
-            <a:off x="11879738" y="539481"/>
+            <a:off x="7086512" y="1365390"/>
             <a:ext cx="611996" cy="259"/>
           </a:xfrm>
           <a:prstGeom prst="straightConnector1">
@@ -4754,7 +4755,7 @@
         </p:nvCxnSpPr>
         <p:spPr>
           <a:xfrm flipH="1">
-            <a:off x="12758951" y="762526"/>
+            <a:off x="7965725" y="1588435"/>
             <a:ext cx="1433" cy="370343"/>
           </a:xfrm>
           <a:prstGeom prst="straightConnector1">
@@ -4786,7 +4787,7 @@
         </p:nvSpPr>
         <p:spPr>
           <a:xfrm>
-            <a:off x="10188314" y="317362"/>
+            <a:off x="5395088" y="1143271"/>
             <a:ext cx="537299" cy="445572"/>
           </a:xfrm>
           <a:prstGeom prst="roundRect">
@@ -4853,7 +4854,7 @@
         </p:nvSpPr>
         <p:spPr>
           <a:xfrm>
-            <a:off x="8754064" y="358769"/>
+            <a:off x="3960838" y="1184678"/>
             <a:ext cx="722507" cy="424727"/>
           </a:xfrm>
           <a:prstGeom prst="rect">
@@ -4930,7 +4931,7 @@
         </p:nvCxnSpPr>
         <p:spPr>
           <a:xfrm flipH="1">
-            <a:off x="9476571" y="540148"/>
+            <a:off x="4683345" y="1366057"/>
             <a:ext cx="711743" cy="30985"/>
           </a:xfrm>
           <a:prstGeom prst="straightConnector1">
@@ -4966,7 +4967,7 @@
         </p:nvCxnSpPr>
         <p:spPr>
           <a:xfrm flipH="1">
-            <a:off x="10725613" y="539481"/>
+            <a:off x="5932387" y="1365390"/>
             <a:ext cx="616826" cy="667"/>
           </a:xfrm>
           <a:prstGeom prst="straightConnector1">
@@ -5056,7 +5057,7 @@
         </p:nvSpPr>
         <p:spPr>
           <a:xfrm>
-            <a:off x="13954958" y="750221"/>
+            <a:off x="9161732" y="1576130"/>
             <a:ext cx="1905036" cy="1056537"/>
           </a:xfrm>
           <a:prstGeom prst="rect">
@@ -5086,7 +5087,7 @@
                 </a:solidFill>
                 <a:latin typeface="Calibri" panose="020F0502020204030204"/>
               </a:rPr>
-              <a:t>local-id=[LinkId]</a:t>
+              <a:t>_affected-link=[LinkId]</a:t>
             </a:r>
           </a:p>
           <a:p>
@@ -5187,7 +5188,7 @@
         </p:nvCxnSpPr>
         <p:spPr>
           <a:xfrm flipV="1">
-            <a:off x="13027600" y="1278490"/>
+            <a:off x="8234374" y="2104399"/>
             <a:ext cx="927358" cy="77165"/>
           </a:xfrm>
           <a:prstGeom prst="straightConnector1">
@@ -5223,7 +5224,7 @@
         </p:nvCxnSpPr>
         <p:spPr>
           <a:xfrm flipH="1">
-            <a:off x="11611089" y="3000745"/>
+            <a:off x="6817863" y="3826654"/>
             <a:ext cx="1" cy="1114192"/>
           </a:xfrm>
           <a:prstGeom prst="straightConnector1">
@@ -5259,7 +5260,7 @@
         </p:nvCxnSpPr>
         <p:spPr>
           <a:xfrm rot="5400000">
-            <a:off x="9913283" y="2592468"/>
+            <a:off x="5120057" y="3418377"/>
             <a:ext cx="1289531" cy="2106084"/>
           </a:xfrm>
           <a:prstGeom prst="bentConnector3">
@@ -5275,6 +5276,143 @@
             <a:prstDash val="solid"/>
             <a:miter lim="800000"/>
             <a:tailEnd type="triangle"/>
+          </a:ln>
+          <a:effectLst/>
+        </p:spPr>
+      </p:cxnSp>
+      <p:sp>
+        <p:nvSpPr>
+          <p:cNvPr id="5" name="Abgerundetes Rechteck 1">
+            <a:extLst>
+              <a:ext uri="{FF2B5EF4-FFF2-40B4-BE49-F238E27FC236}">
+                <a16:creationId xmlns:a16="http://schemas.microsoft.com/office/drawing/2014/main" id="{16CB4612-BCB1-A6DF-59CB-794258BA362B}"/>
+              </a:ext>
+            </a:extLst>
+          </p:cNvPr>
+          <p:cNvSpPr/>
+          <p:nvPr/>
+        </p:nvSpPr>
+        <p:spPr>
+          <a:xfrm>
+            <a:off x="4064944" y="3737872"/>
+            <a:ext cx="537299" cy="445572"/>
+          </a:xfrm>
+          <a:prstGeom prst="roundRect">
+            <a:avLst/>
+          </a:prstGeom>
+          <a:solidFill>
+            <a:sysClr val="window" lastClr="FFFFFF">
+              <a:lumMod val="65000"/>
+            </a:sysClr>
+          </a:solidFill>
+          <a:ln w="12700" cap="flat" cmpd="sng" algn="ctr">
+            <a:solidFill>
+              <a:sysClr val="window" lastClr="FFFFFF">
+                <a:lumMod val="50000"/>
+              </a:sysClr>
+            </a:solidFill>
+            <a:prstDash val="solid"/>
+            <a:miter lim="800000"/>
+          </a:ln>
+          <a:effectLst>
+            <a:outerShdw blurRad="50800" dist="38100" dir="2700000" algn="tl" rotWithShape="0">
+              <a:prstClr val="black">
+                <a:alpha val="40000"/>
+              </a:prstClr>
+            </a:outerShdw>
+          </a:effectLst>
+        </p:spPr>
+        <p:txBody>
+          <a:bodyPr rtlCol="0" anchor="ctr"/>
+          <a:lstStyle/>
+          <a:p>
+            <a:pPr algn="ctr" defTabSz="914400">
+              <a:defRPr/>
+            </a:pPr>
+            <a:r>
+              <a:rPr lang="de-DE" sz="1050" kern="0">
+                <a:solidFill>
+                  <a:prstClr val="white"/>
+                </a:solidFill>
+                <a:latin typeface="Calibri" panose="020F0502020204030204"/>
+              </a:rPr>
+              <a:t>FC</a:t>
+            </a:r>
+            <a:endParaRPr lang="de-DE" sz="1050" kern="0" dirty="0">
+              <a:solidFill>
+                <a:prstClr val="white"/>
+              </a:solidFill>
+              <a:latin typeface="Calibri" panose="020F0502020204030204"/>
+            </a:endParaRPr>
+          </a:p>
+        </p:txBody>
+      </p:sp>
+      <p:cxnSp>
+        <p:nvCxnSpPr>
+          <p:cNvPr id="15" name="Gerade Verbindung mit Pfeil 14">
+            <a:extLst>
+              <a:ext uri="{FF2B5EF4-FFF2-40B4-BE49-F238E27FC236}">
+                <a16:creationId xmlns:a16="http://schemas.microsoft.com/office/drawing/2014/main" id="{EBEA8A2B-B8AA-E95F-B632-8E402E9B8AD7}"/>
+              </a:ext>
+            </a:extLst>
+          </p:cNvPr>
+          <p:cNvCxnSpPr>
+            <a:stCxn id="5" idx="3"/>
+            <a:endCxn id="216" idx="0"/>
+          </p:cNvCxnSpPr>
+          <p:nvPr/>
+        </p:nvCxnSpPr>
+        <p:spPr>
+          <a:xfrm>
+            <a:off x="4602243" y="3960658"/>
+            <a:ext cx="2215620" cy="980188"/>
+          </a:xfrm>
+          <a:prstGeom prst="straightConnector1">
+            <a:avLst/>
+          </a:prstGeom>
+          <a:noFill/>
+          <a:ln w="6350" cap="flat" cmpd="sng" algn="ctr">
+            <a:solidFill>
+              <a:srgbClr val="5B9BD5"/>
+            </a:solidFill>
+            <a:prstDash val="sysDash"/>
+            <a:miter lim="800000"/>
+            <a:tailEnd type="arrow"/>
+          </a:ln>
+          <a:effectLst/>
+        </p:spPr>
+      </p:cxnSp>
+      <p:cxnSp>
+        <p:nvCxnSpPr>
+          <p:cNvPr id="16" name="Gerade Verbindung mit Pfeil 15">
+            <a:extLst>
+              <a:ext uri="{FF2B5EF4-FFF2-40B4-BE49-F238E27FC236}">
+                <a16:creationId xmlns:a16="http://schemas.microsoft.com/office/drawing/2014/main" id="{0A85ACDB-25C3-D368-D668-4EAE1E2902B0}"/>
+              </a:ext>
+            </a:extLst>
+          </p:cNvPr>
+          <p:cNvCxnSpPr>
+            <a:cxnSpLocks/>
+            <a:stCxn id="5" idx="2"/>
+          </p:cNvCxnSpPr>
+          <p:nvPr/>
+        </p:nvCxnSpPr>
+        <p:spPr>
+          <a:xfrm>
+            <a:off x="4333594" y="4183444"/>
+            <a:ext cx="268649" cy="980188"/>
+          </a:xfrm>
+          <a:prstGeom prst="straightConnector1">
+            <a:avLst/>
+          </a:prstGeom>
+          <a:noFill/>
+          <a:ln w="6350" cap="flat" cmpd="sng" algn="ctr">
+            <a:solidFill>
+              <a:srgbClr val="5B9BD5"/>
+            </a:solidFill>
+            <a:prstDash val="sysDash"/>
+            <a:miter lim="800000"/>
+            <a:tailEnd type="arrow"/>
           </a:ln>
           <a:effectLst/>
         </p:spPr>
@@ -12262,6 +12400,722 @@
     <p:extLst>
       <p:ext uri="{BB962C8B-B14F-4D97-AF65-F5344CB8AC3E}">
         <p14:creationId xmlns:p14="http://schemas.microsoft.com/office/powerpoint/2010/main" val="1839067590"/>
+      </p:ext>
+    </p:extLst>
+  </p:cSld>
+  <p:clrMapOvr>
+    <a:masterClrMapping/>
+  </p:clrMapOvr>
+</p:sld>
+</file>
+
+<file path=ppt/slides/slide5.xml><?xml version="1.0" encoding="utf-8"?>
+<p:sld xmlns:a="http://schemas.openxmlformats.org/drawingml/2006/main" xmlns:r="http://schemas.openxmlformats.org/officeDocument/2006/relationships" xmlns:p="http://schemas.openxmlformats.org/presentationml/2006/main">
+  <p:cSld>
+    <p:spTree>
+      <p:nvGrpSpPr>
+        <p:cNvPr id="1" name=""/>
+        <p:cNvGrpSpPr/>
+        <p:nvPr/>
+      </p:nvGrpSpPr>
+      <p:grpSpPr>
+        <a:xfrm>
+          <a:off x="0" y="0"/>
+          <a:ext cx="0" cy="0"/>
+          <a:chOff x="0" y="0"/>
+          <a:chExt cx="0" cy="0"/>
+        </a:xfrm>
+      </p:grpSpPr>
+      <p:sp>
+        <p:nvSpPr>
+          <p:cNvPr id="2" name="Pfeil: nach rechts 1">
+            <a:extLst>
+              <a:ext uri="{FF2B5EF4-FFF2-40B4-BE49-F238E27FC236}">
+                <a16:creationId xmlns:a16="http://schemas.microsoft.com/office/drawing/2014/main" id="{4C4CC439-6463-F6FA-39DB-A8ECC280B654}"/>
+              </a:ext>
+            </a:extLst>
+          </p:cNvPr>
+          <p:cNvSpPr/>
+          <p:nvPr/>
+        </p:nvSpPr>
+        <p:spPr>
+          <a:xfrm>
+            <a:off x="1684020" y="784860"/>
+            <a:ext cx="1714500" cy="289560"/>
+          </a:xfrm>
+          <a:prstGeom prst="rightArrow">
+            <a:avLst/>
+          </a:prstGeom>
+        </p:spPr>
+        <p:style>
+          <a:lnRef idx="2">
+            <a:schemeClr val="accent1">
+              <a:shade val="15000"/>
+            </a:schemeClr>
+          </a:lnRef>
+          <a:fillRef idx="1">
+            <a:schemeClr val="accent1"/>
+          </a:fillRef>
+          <a:effectRef idx="0">
+            <a:schemeClr val="accent1"/>
+          </a:effectRef>
+          <a:fontRef idx="minor">
+            <a:schemeClr val="lt1"/>
+          </a:fontRef>
+        </p:style>
+        <p:txBody>
+          <a:bodyPr rtlCol="0" anchor="ctr"/>
+          <a:lstStyle/>
+          <a:p>
+            <a:pPr algn="ctr"/>
+            <a:endParaRPr lang="de-DE" sz="1100"/>
+          </a:p>
+        </p:txBody>
+      </p:sp>
+      <p:sp>
+        <p:nvSpPr>
+          <p:cNvPr id="4" name="Textfeld 3">
+            <a:extLst>
+              <a:ext uri="{FF2B5EF4-FFF2-40B4-BE49-F238E27FC236}">
+                <a16:creationId xmlns:a16="http://schemas.microsoft.com/office/drawing/2014/main" id="{C9C12F62-62FE-AA99-2D4E-6881D23EE35E}"/>
+              </a:ext>
+            </a:extLst>
+          </p:cNvPr>
+          <p:cNvSpPr txBox="1"/>
+          <p:nvPr/>
+        </p:nvSpPr>
+        <p:spPr>
+          <a:xfrm>
+            <a:off x="7505700" y="268300"/>
+            <a:ext cx="2110740" cy="273152"/>
+          </a:xfrm>
+          <a:prstGeom prst="rect">
+            <a:avLst/>
+          </a:prstGeom>
+          <a:noFill/>
+        </p:spPr>
+        <p:txBody>
+          <a:bodyPr wrap="square">
+            <a:spAutoFit/>
+          </a:bodyPr>
+          <a:lstStyle/>
+          <a:p>
+            <a:pPr>
+              <a:lnSpc>
+                <a:spcPts val="1425"/>
+              </a:lnSpc>
+            </a:pPr>
+            <a:r>
+              <a:rPr lang="de-DE" sz="1100" b="1">
+                <a:solidFill>
+                  <a:srgbClr val="800000"/>
+                </a:solidFill>
+                <a:effectLst/>
+                <a:latin typeface="Consolas" panose="020B0609020204030204" pitchFamily="49" charset="0"/>
+              </a:rPr>
+              <a:t>Interpretation</a:t>
+            </a:r>
+            <a:endParaRPr lang="de-DE" sz="1100" b="0">
+              <a:solidFill>
+                <a:srgbClr val="000000"/>
+              </a:solidFill>
+              <a:effectLst/>
+              <a:latin typeface="Consolas" panose="020B0609020204030204" pitchFamily="49" charset="0"/>
+            </a:endParaRPr>
+          </a:p>
+        </p:txBody>
+      </p:sp>
+      <p:sp>
+        <p:nvSpPr>
+          <p:cNvPr id="8" name="Textfeld 7">
+            <a:extLst>
+              <a:ext uri="{FF2B5EF4-FFF2-40B4-BE49-F238E27FC236}">
+                <a16:creationId xmlns:a16="http://schemas.microsoft.com/office/drawing/2014/main" id="{07572A14-6FE2-CF4D-7E35-C8906EE5E48C}"/>
+              </a:ext>
+            </a:extLst>
+          </p:cNvPr>
+          <p:cNvSpPr txBox="1"/>
+          <p:nvPr/>
+        </p:nvSpPr>
+        <p:spPr>
+          <a:xfrm>
+            <a:off x="3398520" y="828980"/>
+            <a:ext cx="4491990" cy="273152"/>
+          </a:xfrm>
+          <a:prstGeom prst="rect">
+            <a:avLst/>
+          </a:prstGeom>
+          <a:noFill/>
+        </p:spPr>
+        <p:txBody>
+          <a:bodyPr wrap="square">
+            <a:spAutoFit/>
+          </a:bodyPr>
+          <a:lstStyle/>
+          <a:p>
+            <a:pPr>
+              <a:lnSpc>
+                <a:spcPts val="1425"/>
+              </a:lnSpc>
+            </a:pPr>
+            <a:r>
+              <a:rPr lang="de-DE" sz="1100" b="0">
+                <a:solidFill>
+                  <a:srgbClr val="000000"/>
+                </a:solidFill>
+                <a:effectLst/>
+                <a:latin typeface="Consolas" panose="020B0609020204030204" pitchFamily="49" charset="0"/>
+              </a:rPr>
+              <a:t>/v1/remove-planned-microwave-link</a:t>
+            </a:r>
+          </a:p>
+        </p:txBody>
+      </p:sp>
+      <p:sp>
+        <p:nvSpPr>
+          <p:cNvPr id="9" name="Textfeld 8">
+            <a:extLst>
+              <a:ext uri="{FF2B5EF4-FFF2-40B4-BE49-F238E27FC236}">
+                <a16:creationId xmlns:a16="http://schemas.microsoft.com/office/drawing/2014/main" id="{18959C0D-EC49-453D-3DDB-DAC90831F584}"/>
+              </a:ext>
+            </a:extLst>
+          </p:cNvPr>
+          <p:cNvSpPr txBox="1"/>
+          <p:nvPr/>
+        </p:nvSpPr>
+        <p:spPr>
+          <a:xfrm>
+            <a:off x="8450580" y="705088"/>
+            <a:ext cx="2327881" cy="261610"/>
+          </a:xfrm>
+          <a:prstGeom prst="rect">
+            <a:avLst/>
+          </a:prstGeom>
+          <a:noFill/>
+        </p:spPr>
+        <p:txBody>
+          <a:bodyPr wrap="none" rtlCol="0">
+            <a:spAutoFit/>
+          </a:bodyPr>
+          <a:lstStyle/>
+          <a:p>
+            <a:r>
+              <a:rPr lang="de-DE" sz="1100"/>
+              <a:t>Deletes Link object from Candidate</a:t>
+            </a:r>
+          </a:p>
+        </p:txBody>
+      </p:sp>
+      <p:sp>
+        <p:nvSpPr>
+          <p:cNvPr id="11" name="Textfeld 10">
+            <a:extLst>
+              <a:ext uri="{FF2B5EF4-FFF2-40B4-BE49-F238E27FC236}">
+                <a16:creationId xmlns:a16="http://schemas.microsoft.com/office/drawing/2014/main" id="{64F8D2DE-D903-9367-7B09-F26182553439}"/>
+              </a:ext>
+            </a:extLst>
+          </p:cNvPr>
+          <p:cNvSpPr txBox="1"/>
+          <p:nvPr/>
+        </p:nvSpPr>
+        <p:spPr>
+          <a:xfrm>
+            <a:off x="7505700" y="1074420"/>
+            <a:ext cx="2714625" cy="273152"/>
+          </a:xfrm>
+          <a:prstGeom prst="rect">
+            <a:avLst/>
+          </a:prstGeom>
+          <a:noFill/>
+        </p:spPr>
+        <p:txBody>
+          <a:bodyPr wrap="square">
+            <a:spAutoFit/>
+          </a:bodyPr>
+          <a:lstStyle/>
+          <a:p>
+            <a:pPr>
+              <a:lnSpc>
+                <a:spcPts val="1425"/>
+              </a:lnSpc>
+            </a:pPr>
+            <a:r>
+              <a:rPr lang="de-DE" sz="1100" b="1">
+                <a:solidFill>
+                  <a:srgbClr val="800000"/>
+                </a:solidFill>
+                <a:effectLst/>
+                <a:latin typeface="Consolas" panose="020B0609020204030204" pitchFamily="49" charset="0"/>
+              </a:rPr>
+              <a:t>Validation</a:t>
+            </a:r>
+            <a:endParaRPr lang="de-DE" sz="1100" b="0">
+              <a:solidFill>
+                <a:srgbClr val="000000"/>
+              </a:solidFill>
+              <a:effectLst/>
+              <a:latin typeface="Consolas" panose="020B0609020204030204" pitchFamily="49" charset="0"/>
+            </a:endParaRPr>
+          </a:p>
+        </p:txBody>
+      </p:sp>
+      <p:sp>
+        <p:nvSpPr>
+          <p:cNvPr id="12" name="Textfeld 11">
+            <a:extLst>
+              <a:ext uri="{FF2B5EF4-FFF2-40B4-BE49-F238E27FC236}">
+                <a16:creationId xmlns:a16="http://schemas.microsoft.com/office/drawing/2014/main" id="{28C3902C-0F8D-C63F-B9B4-002B46D94C39}"/>
+              </a:ext>
+            </a:extLst>
+          </p:cNvPr>
+          <p:cNvSpPr txBox="1"/>
+          <p:nvPr/>
+        </p:nvSpPr>
+        <p:spPr>
+          <a:xfrm>
+            <a:off x="8561070" y="1594180"/>
+            <a:ext cx="1664238" cy="261610"/>
+          </a:xfrm>
+          <a:prstGeom prst="rect">
+            <a:avLst/>
+          </a:prstGeom>
+          <a:noFill/>
+        </p:spPr>
+        <p:txBody>
+          <a:bodyPr wrap="none" rtlCol="0">
+            <a:spAutoFit/>
+          </a:bodyPr>
+          <a:lstStyle/>
+          <a:p>
+            <a:r>
+              <a:rPr lang="de-DE" sz="1100"/>
+              <a:t>Maybe no validation test</a:t>
+            </a:r>
+          </a:p>
+        </p:txBody>
+      </p:sp>
+      <p:sp>
+        <p:nvSpPr>
+          <p:cNvPr id="13" name="Textfeld 12">
+            <a:extLst>
+              <a:ext uri="{FF2B5EF4-FFF2-40B4-BE49-F238E27FC236}">
+                <a16:creationId xmlns:a16="http://schemas.microsoft.com/office/drawing/2014/main" id="{B4BFC648-8762-C533-635C-0055599EF5AE}"/>
+              </a:ext>
+            </a:extLst>
+          </p:cNvPr>
+          <p:cNvSpPr txBox="1"/>
+          <p:nvPr/>
+        </p:nvSpPr>
+        <p:spPr>
+          <a:xfrm>
+            <a:off x="8561070" y="2171604"/>
+            <a:ext cx="3600666" cy="261610"/>
+          </a:xfrm>
+          <a:prstGeom prst="rect">
+            <a:avLst/>
+          </a:prstGeom>
+          <a:noFill/>
+        </p:spPr>
+        <p:txBody>
+          <a:bodyPr wrap="none" rtlCol="0">
+            <a:spAutoFit/>
+          </a:bodyPr>
+          <a:lstStyle/>
+          <a:p>
+            <a:r>
+              <a:rPr lang="de-DE" sz="1100"/>
+              <a:t>Copying into Running (Deletes Link object from Running)</a:t>
+            </a:r>
+          </a:p>
+        </p:txBody>
+      </p:sp>
+      <p:cxnSp>
+        <p:nvCxnSpPr>
+          <p:cNvPr id="15" name="Gerader Verbinder 14">
+            <a:extLst>
+              <a:ext uri="{FF2B5EF4-FFF2-40B4-BE49-F238E27FC236}">
+                <a16:creationId xmlns:a16="http://schemas.microsoft.com/office/drawing/2014/main" id="{ADBED7AA-469C-7ADB-0EB2-2CCE7A579F1C}"/>
+              </a:ext>
+            </a:extLst>
+          </p:cNvPr>
+          <p:cNvCxnSpPr/>
+          <p:nvPr/>
+        </p:nvCxnSpPr>
+        <p:spPr>
+          <a:xfrm flipH="1">
+            <a:off x="4328160" y="2689860"/>
+            <a:ext cx="7105587" cy="0"/>
+          </a:xfrm>
+          <a:prstGeom prst="line">
+            <a:avLst/>
+          </a:prstGeom>
+        </p:spPr>
+        <p:style>
+          <a:lnRef idx="2">
+            <a:schemeClr val="accent1"/>
+          </a:lnRef>
+          <a:fillRef idx="0">
+            <a:schemeClr val="accent1"/>
+          </a:fillRef>
+          <a:effectRef idx="1">
+            <a:schemeClr val="accent1"/>
+          </a:effectRef>
+          <a:fontRef idx="minor">
+            <a:schemeClr val="tx1"/>
+          </a:fontRef>
+        </p:style>
+      </p:cxnSp>
+      <p:sp>
+        <p:nvSpPr>
+          <p:cNvPr id="16" name="Textfeld 15">
+            <a:extLst>
+              <a:ext uri="{FF2B5EF4-FFF2-40B4-BE49-F238E27FC236}">
+                <a16:creationId xmlns:a16="http://schemas.microsoft.com/office/drawing/2014/main" id="{6FAED6F7-00F3-6D6B-CEE6-F561E3CF98BD}"/>
+              </a:ext>
+            </a:extLst>
+          </p:cNvPr>
+          <p:cNvSpPr txBox="1"/>
+          <p:nvPr/>
+        </p:nvSpPr>
+        <p:spPr>
+          <a:xfrm>
+            <a:off x="7396969" y="2617040"/>
+            <a:ext cx="898003" cy="215444"/>
+          </a:xfrm>
+          <a:prstGeom prst="rect">
+            <a:avLst/>
+          </a:prstGeom>
+          <a:noFill/>
+        </p:spPr>
+        <p:txBody>
+          <a:bodyPr wrap="none" rtlCol="0">
+            <a:spAutoFit/>
+          </a:bodyPr>
+          <a:lstStyle/>
+          <a:p>
+            <a:r>
+              <a:rPr lang="de-DE" sz="800"/>
+              <a:t>somewhen later</a:t>
+            </a:r>
+          </a:p>
+        </p:txBody>
+      </p:sp>
+      <p:sp>
+        <p:nvSpPr>
+          <p:cNvPr id="18" name="Textfeld 17">
+            <a:extLst>
+              <a:ext uri="{FF2B5EF4-FFF2-40B4-BE49-F238E27FC236}">
+                <a16:creationId xmlns:a16="http://schemas.microsoft.com/office/drawing/2014/main" id="{6AE4A20A-5B88-6849-2B78-06E1B3234EAF}"/>
+              </a:ext>
+            </a:extLst>
+          </p:cNvPr>
+          <p:cNvSpPr txBox="1"/>
+          <p:nvPr/>
+        </p:nvSpPr>
+        <p:spPr>
+          <a:xfrm>
+            <a:off x="8561070" y="3363704"/>
+            <a:ext cx="3667125" cy="273152"/>
+          </a:xfrm>
+          <a:prstGeom prst="rect">
+            <a:avLst/>
+          </a:prstGeom>
+          <a:noFill/>
+        </p:spPr>
+        <p:txBody>
+          <a:bodyPr wrap="square">
+            <a:spAutoFit/>
+          </a:bodyPr>
+          <a:lstStyle/>
+          <a:p>
+            <a:pPr>
+              <a:lnSpc>
+                <a:spcPts val="1425"/>
+              </a:lnSpc>
+            </a:pPr>
+            <a:r>
+              <a:rPr lang="en-US" sz="1100" b="0">
+                <a:solidFill>
+                  <a:srgbClr val="000000"/>
+                </a:solidFill>
+                <a:effectLst/>
+                <a:latin typeface="Consolas" panose="020B0609020204030204" pitchFamily="49" charset="0"/>
+              </a:rPr>
+              <a:t>Read device data from MWDI</a:t>
+            </a:r>
+          </a:p>
+        </p:txBody>
+      </p:sp>
+      <p:sp>
+        <p:nvSpPr>
+          <p:cNvPr id="20" name="Textfeld 19">
+            <a:extLst>
+              <a:ext uri="{FF2B5EF4-FFF2-40B4-BE49-F238E27FC236}">
+                <a16:creationId xmlns:a16="http://schemas.microsoft.com/office/drawing/2014/main" id="{BB8B16F5-8550-484E-5A90-17C3A2A2247B}"/>
+              </a:ext>
+            </a:extLst>
+          </p:cNvPr>
+          <p:cNvSpPr txBox="1"/>
+          <p:nvPr/>
+        </p:nvSpPr>
+        <p:spPr>
+          <a:xfrm>
+            <a:off x="8561070" y="3822698"/>
+            <a:ext cx="8012430" cy="1520031"/>
+          </a:xfrm>
+          <a:prstGeom prst="rect">
+            <a:avLst/>
+          </a:prstGeom>
+          <a:noFill/>
+        </p:spPr>
+        <p:txBody>
+          <a:bodyPr wrap="square">
+            <a:spAutoFit/>
+          </a:bodyPr>
+          <a:lstStyle/>
+          <a:p>
+            <a:pPr>
+              <a:lnSpc>
+                <a:spcPts val="1425"/>
+              </a:lnSpc>
+            </a:pPr>
+            <a:r>
+              <a:rPr lang="en-US" sz="1100" b="0">
+                <a:solidFill>
+                  <a:srgbClr val="000000"/>
+                </a:solidFill>
+                <a:effectLst/>
+                <a:latin typeface="Consolas" panose="020B0609020204030204" pitchFamily="49" charset="0"/>
+              </a:rPr>
+              <a:t>Create Link objects in OperationalDS</a:t>
+            </a:r>
+          </a:p>
+          <a:p>
+            <a:pPr>
+              <a:lnSpc>
+                <a:spcPts val="1425"/>
+              </a:lnSpc>
+            </a:pPr>
+            <a:r>
+              <a:rPr lang="en-US" sz="1100">
+                <a:solidFill>
+                  <a:srgbClr val="000000"/>
+                </a:solidFill>
+                <a:latin typeface="Consolas" panose="020B0609020204030204" pitchFamily="49" charset="0"/>
+              </a:rPr>
+              <a:t>(idempotent function. </a:t>
+            </a:r>
+          </a:p>
+          <a:p>
+            <a:pPr>
+              <a:lnSpc>
+                <a:spcPts val="1425"/>
+              </a:lnSpc>
+            </a:pPr>
+            <a:r>
+              <a:rPr lang="en-US" sz="1100">
+                <a:solidFill>
+                  <a:srgbClr val="000000"/>
+                </a:solidFill>
+                <a:latin typeface="Consolas" panose="020B0609020204030204" pitchFamily="49" charset="0"/>
+              </a:rPr>
+              <a:t>means:</a:t>
+            </a:r>
+          </a:p>
+          <a:p>
+            <a:pPr marL="171450" indent="-171450">
+              <a:lnSpc>
+                <a:spcPts val="1425"/>
+              </a:lnSpc>
+              <a:buFontTx/>
+              <a:buChar char="-"/>
+            </a:pPr>
+            <a:r>
+              <a:rPr lang="en-US" sz="1100">
+                <a:solidFill>
+                  <a:srgbClr val="000000"/>
+                </a:solidFill>
+                <a:latin typeface="Consolas" panose="020B0609020204030204" pitchFamily="49" charset="0"/>
+              </a:rPr>
+              <a:t>it calculates all potential connections =&gt; all Link objects</a:t>
+            </a:r>
+          </a:p>
+          <a:p>
+            <a:pPr marL="171450" indent="-171450">
+              <a:lnSpc>
+                <a:spcPts val="1425"/>
+              </a:lnSpc>
+              <a:buFontTx/>
+              <a:buChar char="-"/>
+            </a:pPr>
+            <a:r>
+              <a:rPr lang="en-US" sz="1100">
+                <a:solidFill>
+                  <a:srgbClr val="000000"/>
+                </a:solidFill>
+                <a:latin typeface="Consolas" panose="020B0609020204030204" pitchFamily="49" charset="0"/>
+              </a:rPr>
+              <a:t>if some Link object already exists between two AirInterfaces in OperationalDS, it does not touch it</a:t>
+            </a:r>
+          </a:p>
+          <a:p>
+            <a:pPr marL="171450" indent="-171450">
+              <a:lnSpc>
+                <a:spcPts val="1425"/>
+              </a:lnSpc>
+              <a:buFontTx/>
+              <a:buChar char="-"/>
+            </a:pPr>
+            <a:r>
+              <a:rPr lang="en-US" sz="1100">
+                <a:solidFill>
+                  <a:srgbClr val="000000"/>
+                </a:solidFill>
+                <a:latin typeface="Consolas" panose="020B0609020204030204" pitchFamily="49" charset="0"/>
+              </a:rPr>
+              <a:t>if some Link object doesn’t exist, it creates it</a:t>
+            </a:r>
+          </a:p>
+          <a:p>
+            <a:pPr>
+              <a:lnSpc>
+                <a:spcPts val="1425"/>
+              </a:lnSpc>
+            </a:pPr>
+            <a:endParaRPr lang="en-US" sz="1100" b="0">
+              <a:solidFill>
+                <a:srgbClr val="000000"/>
+              </a:solidFill>
+              <a:effectLst/>
+              <a:latin typeface="Consolas" panose="020B0609020204030204" pitchFamily="49" charset="0"/>
+            </a:endParaRPr>
+          </a:p>
+          <a:p>
+            <a:pPr>
+              <a:lnSpc>
+                <a:spcPts val="1425"/>
+              </a:lnSpc>
+            </a:pPr>
+            <a:r>
+              <a:rPr lang="en-US" sz="1100" b="0">
+                <a:solidFill>
+                  <a:srgbClr val="000000"/>
+                </a:solidFill>
+                <a:effectLst/>
+                <a:latin typeface="Consolas" panose="020B0609020204030204" pitchFamily="49" charset="0"/>
+              </a:rPr>
+              <a:t>=&gt; results in Link objects between all AirInterface LTPs that are existing on the device</a:t>
+            </a:r>
+          </a:p>
+        </p:txBody>
+      </p:sp>
+      <p:sp>
+        <p:nvSpPr>
+          <p:cNvPr id="22" name="Textfeld 21">
+            <a:extLst>
+              <a:ext uri="{FF2B5EF4-FFF2-40B4-BE49-F238E27FC236}">
+                <a16:creationId xmlns:a16="http://schemas.microsoft.com/office/drawing/2014/main" id="{594E9D90-1B16-9893-648E-AF6BEB9DC72C}"/>
+              </a:ext>
+            </a:extLst>
+          </p:cNvPr>
+          <p:cNvSpPr txBox="1"/>
+          <p:nvPr/>
+        </p:nvSpPr>
+        <p:spPr>
+          <a:xfrm>
+            <a:off x="7625715" y="2982078"/>
+            <a:ext cx="1624965" cy="286360"/>
+          </a:xfrm>
+          <a:prstGeom prst="rect">
+            <a:avLst/>
+          </a:prstGeom>
+          <a:noFill/>
+        </p:spPr>
+        <p:txBody>
+          <a:bodyPr wrap="square">
+            <a:spAutoFit/>
+          </a:bodyPr>
+          <a:lstStyle>
+            <a:defPPr>
+              <a:defRPr lang="en-US"/>
+            </a:defPPr>
+            <a:lvl1pPr>
+              <a:lnSpc>
+                <a:spcPts val="1425"/>
+              </a:lnSpc>
+              <a:defRPr sz="1100" b="1">
+                <a:solidFill>
+                  <a:srgbClr val="800000"/>
+                </a:solidFill>
+                <a:effectLst/>
+                <a:latin typeface="Consolas" panose="020B0609020204030204" pitchFamily="49" charset="0"/>
+              </a:defRPr>
+            </a:lvl1pPr>
+          </a:lstStyle>
+          <a:p>
+            <a:r>
+              <a:rPr lang="de-DE"/>
+              <a:t>Measurement</a:t>
+            </a:r>
+          </a:p>
+        </p:txBody>
+      </p:sp>
+      <p:sp>
+        <p:nvSpPr>
+          <p:cNvPr id="23" name="Denkblase: wolkenförmig 22">
+            <a:extLst>
+              <a:ext uri="{FF2B5EF4-FFF2-40B4-BE49-F238E27FC236}">
+                <a16:creationId xmlns:a16="http://schemas.microsoft.com/office/drawing/2014/main" id="{E3EF954D-C565-4070-B2AE-33B1481B495C}"/>
+              </a:ext>
+            </a:extLst>
+          </p:cNvPr>
+          <p:cNvSpPr/>
+          <p:nvPr/>
+        </p:nvSpPr>
+        <p:spPr>
+          <a:xfrm>
+            <a:off x="13677900" y="2997313"/>
+            <a:ext cx="2659380" cy="573726"/>
+          </a:xfrm>
+          <a:prstGeom prst="cloudCallout">
+            <a:avLst>
+              <a:gd name="adj1" fmla="val -26908"/>
+              <a:gd name="adj2" fmla="val 76379"/>
+            </a:avLst>
+          </a:prstGeom>
+        </p:spPr>
+        <p:style>
+          <a:lnRef idx="2">
+            <a:schemeClr val="accent2">
+              <a:shade val="15000"/>
+            </a:schemeClr>
+          </a:lnRef>
+          <a:fillRef idx="1">
+            <a:schemeClr val="accent2"/>
+          </a:fillRef>
+          <a:effectRef idx="0">
+            <a:schemeClr val="accent2"/>
+          </a:effectRef>
+          <a:fontRef idx="minor">
+            <a:schemeClr val="lt1"/>
+          </a:fontRef>
+        </p:style>
+        <p:txBody>
+          <a:bodyPr rtlCol="0" anchor="ctr"/>
+          <a:lstStyle/>
+          <a:p>
+            <a:pPr algn="ctr"/>
+            <a:r>
+              <a:rPr lang="de-DE" sz="800"/>
+              <a:t>Which pairs of CCs have  to be considdered while creating the Link objects?</a:t>
+            </a:r>
+          </a:p>
+        </p:txBody>
+      </p:sp>
+    </p:spTree>
+    <p:extLst>
+      <p:ext uri="{BB962C8B-B14F-4D97-AF65-F5344CB8AC3E}">
+        <p14:creationId xmlns:p14="http://schemas.microsoft.com/office/powerpoint/2010/main" val="1937595810"/>
       </p:ext>
     </p:extLst>
   </p:cSld>

--- a/spec/Diagrams/InformationStructure/InformationStructure.pptx
+++ b/spec/Diagrams/InformationStructure/InformationStructure.pptx
@@ -5,7 +5,7 @@
     <p:sldMasterId id="2147483732" r:id="rId1"/>
   </p:sldMasterIdLst>
   <p:notesMasterIdLst>
-    <p:notesMasterId r:id="rId7"/>
+    <p:notesMasterId r:id="rId9"/>
   </p:notesMasterIdLst>
   <p:sldIdLst>
     <p:sldId id="305" r:id="rId2"/>
@@ -13,6 +13,8 @@
     <p:sldId id="303" r:id="rId4"/>
     <p:sldId id="304" r:id="rId5"/>
     <p:sldId id="306" r:id="rId6"/>
+    <p:sldId id="307" r:id="rId7"/>
+    <p:sldId id="308" r:id="rId8"/>
   </p:sldIdLst>
   <p:sldSz cx="23399750" cy="18000663"/>
   <p:notesSz cx="6858000" cy="9144000"/>
@@ -201,7 +203,7 @@
           <a:p>
             <a:fld id="{37CCF725-7468-4D3D-9E24-A16745BBBA77}" type="datetimeFigureOut">
               <a:rPr lang="de-DE" smtClean="0"/>
-              <a:t>02.05.2025</a:t>
+              <a:t>06.05.2025</a:t>
             </a:fld>
             <a:endParaRPr lang="de-DE"/>
           </a:p>
@@ -599,7 +601,7 @@
           <a:p>
             <a:fld id="{9A2764DB-E7DF-4EA7-A1AF-05A77C280FCA}" type="datetimeFigureOut">
               <a:rPr lang="de-DE" smtClean="0"/>
-              <a:t>02.05.2025</a:t>
+              <a:t>06.05.2025</a:t>
             </a:fld>
             <a:endParaRPr lang="de-DE"/>
           </a:p>
@@ -769,7 +771,7 @@
           <a:p>
             <a:fld id="{9A2764DB-E7DF-4EA7-A1AF-05A77C280FCA}" type="datetimeFigureOut">
               <a:rPr lang="de-DE" smtClean="0"/>
-              <a:t>02.05.2025</a:t>
+              <a:t>06.05.2025</a:t>
             </a:fld>
             <a:endParaRPr lang="de-DE"/>
           </a:p>
@@ -949,7 +951,7 @@
           <a:p>
             <a:fld id="{9A2764DB-E7DF-4EA7-A1AF-05A77C280FCA}" type="datetimeFigureOut">
               <a:rPr lang="de-DE" smtClean="0"/>
-              <a:t>02.05.2025</a:t>
+              <a:t>06.05.2025</a:t>
             </a:fld>
             <a:endParaRPr lang="de-DE"/>
           </a:p>
@@ -1119,7 +1121,7 @@
           <a:p>
             <a:fld id="{9A2764DB-E7DF-4EA7-A1AF-05A77C280FCA}" type="datetimeFigureOut">
               <a:rPr lang="de-DE" smtClean="0"/>
-              <a:t>02.05.2025</a:t>
+              <a:t>06.05.2025</a:t>
             </a:fld>
             <a:endParaRPr lang="de-DE"/>
           </a:p>
@@ -1365,7 +1367,7 @@
           <a:p>
             <a:fld id="{9A2764DB-E7DF-4EA7-A1AF-05A77C280FCA}" type="datetimeFigureOut">
               <a:rPr lang="de-DE" smtClean="0"/>
-              <a:t>02.05.2025</a:t>
+              <a:t>06.05.2025</a:t>
             </a:fld>
             <a:endParaRPr lang="de-DE"/>
           </a:p>
@@ -1597,7 +1599,7 @@
           <a:p>
             <a:fld id="{9A2764DB-E7DF-4EA7-A1AF-05A77C280FCA}" type="datetimeFigureOut">
               <a:rPr lang="de-DE" smtClean="0"/>
-              <a:t>02.05.2025</a:t>
+              <a:t>06.05.2025</a:t>
             </a:fld>
             <a:endParaRPr lang="de-DE"/>
           </a:p>
@@ -1964,7 +1966,7 @@
           <a:p>
             <a:fld id="{9A2764DB-E7DF-4EA7-A1AF-05A77C280FCA}" type="datetimeFigureOut">
               <a:rPr lang="de-DE" smtClean="0"/>
-              <a:t>02.05.2025</a:t>
+              <a:t>06.05.2025</a:t>
             </a:fld>
             <a:endParaRPr lang="de-DE"/>
           </a:p>
@@ -2082,7 +2084,7 @@
           <a:p>
             <a:fld id="{9A2764DB-E7DF-4EA7-A1AF-05A77C280FCA}" type="datetimeFigureOut">
               <a:rPr lang="de-DE" smtClean="0"/>
-              <a:t>02.05.2025</a:t>
+              <a:t>06.05.2025</a:t>
             </a:fld>
             <a:endParaRPr lang="de-DE"/>
           </a:p>
@@ -2177,7 +2179,7 @@
           <a:p>
             <a:fld id="{9A2764DB-E7DF-4EA7-A1AF-05A77C280FCA}" type="datetimeFigureOut">
               <a:rPr lang="de-DE" smtClean="0"/>
-              <a:t>02.05.2025</a:t>
+              <a:t>06.05.2025</a:t>
             </a:fld>
             <a:endParaRPr lang="de-DE"/>
           </a:p>
@@ -2454,7 +2456,7 @@
           <a:p>
             <a:fld id="{9A2764DB-E7DF-4EA7-A1AF-05A77C280FCA}" type="datetimeFigureOut">
               <a:rPr lang="de-DE" smtClean="0"/>
-              <a:t>02.05.2025</a:t>
+              <a:t>06.05.2025</a:t>
             </a:fld>
             <a:endParaRPr lang="de-DE"/>
           </a:p>
@@ -2711,7 +2713,7 @@
           <a:p>
             <a:fld id="{9A2764DB-E7DF-4EA7-A1AF-05A77C280FCA}" type="datetimeFigureOut">
               <a:rPr lang="de-DE" smtClean="0"/>
-              <a:t>02.05.2025</a:t>
+              <a:t>06.05.2025</a:t>
             </a:fld>
             <a:endParaRPr lang="de-DE"/>
           </a:p>
@@ -2924,7 +2926,7 @@
           <a:p>
             <a:fld id="{9A2764DB-E7DF-4EA7-A1AF-05A77C280FCA}" type="datetimeFigureOut">
               <a:rPr lang="de-DE" smtClean="0"/>
-              <a:t>02.05.2025</a:t>
+              <a:t>06.05.2025</a:t>
             </a:fld>
             <a:endParaRPr lang="de-DE"/>
           </a:p>
@@ -3735,6 +3737,8 @@
           </a:prstGeom>
           <a:solidFill>
             <a:schemeClr val="accent5">
+              <a:lumMod val="40000"/>
+              <a:lumOff val="60000"/>
               <a:alpha val="50196"/>
             </a:schemeClr>
           </a:solidFill>
@@ -5294,7 +5298,7 @@
         </p:nvSpPr>
         <p:spPr>
           <a:xfrm>
-            <a:off x="4064944" y="3737872"/>
+            <a:off x="4240962" y="3393430"/>
             <a:ext cx="537299" cy="445572"/>
           </a:xfrm>
           <a:prstGeom prst="roundRect">
@@ -5357,15 +5361,15 @@
             </a:extLst>
           </p:cNvPr>
           <p:cNvCxnSpPr>
-            <a:stCxn id="5" idx="3"/>
-            <a:endCxn id="216" idx="0"/>
+            <a:cxnSpLocks/>
+            <a:stCxn id="5" idx="2"/>
           </p:cNvCxnSpPr>
           <p:nvPr/>
         </p:nvCxnSpPr>
         <p:spPr>
           <a:xfrm>
-            <a:off x="4602243" y="3960658"/>
-            <a:ext cx="2215620" cy="980188"/>
+            <a:off x="4509612" y="3839002"/>
+            <a:ext cx="2039601" cy="1099573"/>
           </a:xfrm>
           <a:prstGeom prst="straightConnector1">
             <a:avLst/>
@@ -5399,8 +5403,8 @@
         </p:nvCxnSpPr>
         <p:spPr>
           <a:xfrm>
-            <a:off x="4333594" y="4183444"/>
-            <a:ext cx="268649" cy="980188"/>
+            <a:off x="4509612" y="3839002"/>
+            <a:ext cx="22003" cy="1277183"/>
           </a:xfrm>
           <a:prstGeom prst="straightConnector1">
             <a:avLst/>
@@ -5413,6 +5417,248 @@
             <a:prstDash val="sysDash"/>
             <a:miter lim="800000"/>
             <a:tailEnd type="arrow"/>
+          </a:ln>
+          <a:effectLst/>
+        </p:spPr>
+      </p:cxnSp>
+      <p:sp>
+        <p:nvSpPr>
+          <p:cNvPr id="4" name="Abgerundetes Rechteck 1">
+            <a:extLst>
+              <a:ext uri="{FF2B5EF4-FFF2-40B4-BE49-F238E27FC236}">
+                <a16:creationId xmlns:a16="http://schemas.microsoft.com/office/drawing/2014/main" id="{FD078F50-0532-EDBF-94E6-465386D1350B}"/>
+              </a:ext>
+            </a:extLst>
+          </p:cNvPr>
+          <p:cNvSpPr/>
+          <p:nvPr/>
+        </p:nvSpPr>
+        <p:spPr>
+          <a:xfrm>
+            <a:off x="4003724" y="2102124"/>
+            <a:ext cx="1177873" cy="445572"/>
+          </a:xfrm>
+          <a:prstGeom prst="roundRect">
+            <a:avLst/>
+          </a:prstGeom>
+          <a:solidFill>
+            <a:sysClr val="window" lastClr="FFFFFF">
+              <a:lumMod val="65000"/>
+            </a:sysClr>
+          </a:solidFill>
+          <a:ln w="12700" cap="flat" cmpd="sng" algn="ctr">
+            <a:solidFill>
+              <a:sysClr val="window" lastClr="FFFFFF">
+                <a:lumMod val="50000"/>
+              </a:sysClr>
+            </a:solidFill>
+            <a:prstDash val="solid"/>
+            <a:miter lim="800000"/>
+          </a:ln>
+          <a:effectLst>
+            <a:outerShdw blurRad="50800" dist="38100" dir="2700000" algn="tl" rotWithShape="0">
+              <a:prstClr val="black">
+                <a:alpha val="40000"/>
+              </a:prstClr>
+            </a:outerShdw>
+          </a:effectLst>
+        </p:spPr>
+        <p:txBody>
+          <a:bodyPr rtlCol="0" anchor="ctr"/>
+          <a:lstStyle/>
+          <a:p>
+            <a:pPr algn="ctr" defTabSz="914400">
+              <a:defRPr/>
+            </a:pPr>
+            <a:r>
+              <a:rPr lang="de-DE" sz="1050" kern="0">
+                <a:solidFill>
+                  <a:prstClr val="white"/>
+                </a:solidFill>
+                <a:latin typeface="Calibri" panose="020F0502020204030204"/>
+              </a:rPr>
+              <a:t>ValidationScript</a:t>
+            </a:r>
+            <a:endParaRPr lang="de-DE" sz="1050" kern="0" dirty="0">
+              <a:solidFill>
+                <a:prstClr val="white"/>
+              </a:solidFill>
+              <a:latin typeface="Calibri" panose="020F0502020204030204"/>
+            </a:endParaRPr>
+          </a:p>
+        </p:txBody>
+      </p:sp>
+      <p:cxnSp>
+        <p:nvCxnSpPr>
+          <p:cNvPr id="8" name="Gerade Verbindung mit Pfeil 7">
+            <a:extLst>
+              <a:ext uri="{FF2B5EF4-FFF2-40B4-BE49-F238E27FC236}">
+                <a16:creationId xmlns:a16="http://schemas.microsoft.com/office/drawing/2014/main" id="{F40598C1-263D-3BDC-02CC-9332026EA8D5}"/>
+              </a:ext>
+            </a:extLst>
+          </p:cNvPr>
+          <p:cNvCxnSpPr>
+            <a:cxnSpLocks/>
+            <a:stCxn id="175" idx="2"/>
+            <a:endCxn id="4" idx="3"/>
+          </p:cNvCxnSpPr>
+          <p:nvPr/>
+        </p:nvCxnSpPr>
+        <p:spPr>
+          <a:xfrm flipH="1">
+            <a:off x="5181597" y="1588176"/>
+            <a:ext cx="1636266" cy="736734"/>
+          </a:xfrm>
+          <a:prstGeom prst="straightConnector1">
+            <a:avLst/>
+          </a:prstGeom>
+          <a:noFill/>
+          <a:ln w="6350" cap="flat" cmpd="sng" algn="ctr">
+            <a:solidFill>
+              <a:srgbClr val="5B9BD5"/>
+            </a:solidFill>
+            <a:prstDash val="solid"/>
+            <a:miter lim="800000"/>
+            <a:tailEnd type="triangle"/>
+          </a:ln>
+          <a:effectLst/>
+        </p:spPr>
+      </p:cxnSp>
+      <p:sp>
+        <p:nvSpPr>
+          <p:cNvPr id="18" name="Abgerundetes Rechteck 1">
+            <a:extLst>
+              <a:ext uri="{FF2B5EF4-FFF2-40B4-BE49-F238E27FC236}">
+                <a16:creationId xmlns:a16="http://schemas.microsoft.com/office/drawing/2014/main" id="{66CAC4BE-3492-9277-79D1-97F590E214BB}"/>
+              </a:ext>
+            </a:extLst>
+          </p:cNvPr>
+          <p:cNvSpPr/>
+          <p:nvPr/>
+        </p:nvSpPr>
+        <p:spPr>
+          <a:xfrm>
+            <a:off x="5395088" y="3381081"/>
+            <a:ext cx="537299" cy="445572"/>
+          </a:xfrm>
+          <a:prstGeom prst="roundRect">
+            <a:avLst/>
+          </a:prstGeom>
+          <a:solidFill>
+            <a:sysClr val="window" lastClr="FFFFFF">
+              <a:lumMod val="65000"/>
+            </a:sysClr>
+          </a:solidFill>
+          <a:ln w="12700" cap="flat" cmpd="sng" algn="ctr">
+            <a:solidFill>
+              <a:sysClr val="window" lastClr="FFFFFF">
+                <a:lumMod val="50000"/>
+              </a:sysClr>
+            </a:solidFill>
+            <a:prstDash val="solid"/>
+            <a:miter lim="800000"/>
+          </a:ln>
+          <a:effectLst>
+            <a:outerShdw blurRad="50800" dist="38100" dir="2700000" algn="tl" rotWithShape="0">
+              <a:prstClr val="black">
+                <a:alpha val="40000"/>
+              </a:prstClr>
+            </a:outerShdw>
+          </a:effectLst>
+        </p:spPr>
+        <p:txBody>
+          <a:bodyPr rtlCol="0" anchor="ctr"/>
+          <a:lstStyle/>
+          <a:p>
+            <a:pPr algn="ctr" defTabSz="914400">
+              <a:defRPr/>
+            </a:pPr>
+            <a:r>
+              <a:rPr lang="de-DE" sz="1050" kern="0">
+                <a:solidFill>
+                  <a:prstClr val="white"/>
+                </a:solidFill>
+                <a:latin typeface="Calibri" panose="020F0502020204030204"/>
+              </a:rPr>
+              <a:t>FD</a:t>
+            </a:r>
+            <a:endParaRPr lang="de-DE" sz="1050" kern="0" dirty="0">
+              <a:solidFill>
+                <a:prstClr val="white"/>
+              </a:solidFill>
+              <a:latin typeface="Calibri" panose="020F0502020204030204"/>
+            </a:endParaRPr>
+          </a:p>
+        </p:txBody>
+      </p:sp>
+      <p:cxnSp>
+        <p:nvCxnSpPr>
+          <p:cNvPr id="27" name="Gerade Verbindung mit Pfeil 26">
+            <a:extLst>
+              <a:ext uri="{FF2B5EF4-FFF2-40B4-BE49-F238E27FC236}">
+                <a16:creationId xmlns:a16="http://schemas.microsoft.com/office/drawing/2014/main" id="{3AB0FA3B-99FD-5A90-8964-83B831ABD74C}"/>
+              </a:ext>
+            </a:extLst>
+          </p:cNvPr>
+          <p:cNvCxnSpPr>
+            <a:cxnSpLocks/>
+            <a:stCxn id="117" idx="1"/>
+            <a:endCxn id="18" idx="3"/>
+          </p:cNvCxnSpPr>
+          <p:nvPr/>
+        </p:nvCxnSpPr>
+        <p:spPr>
+          <a:xfrm flipH="1" flipV="1">
+            <a:off x="5932387" y="3603867"/>
+            <a:ext cx="616827" cy="1"/>
+          </a:xfrm>
+          <a:prstGeom prst="straightConnector1">
+            <a:avLst/>
+          </a:prstGeom>
+          <a:noFill/>
+          <a:ln w="6350" cap="flat" cmpd="sng" algn="ctr">
+            <a:solidFill>
+              <a:srgbClr val="5B9BD5"/>
+            </a:solidFill>
+            <a:prstDash val="solid"/>
+            <a:miter lim="800000"/>
+            <a:tailEnd type="triangle"/>
+          </a:ln>
+          <a:effectLst/>
+        </p:spPr>
+      </p:cxnSp>
+      <p:cxnSp>
+        <p:nvCxnSpPr>
+          <p:cNvPr id="30" name="Gerade Verbindung mit Pfeil 29">
+            <a:extLst>
+              <a:ext uri="{FF2B5EF4-FFF2-40B4-BE49-F238E27FC236}">
+                <a16:creationId xmlns:a16="http://schemas.microsoft.com/office/drawing/2014/main" id="{08CA14AA-7DE6-383F-B39C-4D440EF60EBB}"/>
+              </a:ext>
+            </a:extLst>
+          </p:cNvPr>
+          <p:cNvCxnSpPr>
+            <a:cxnSpLocks/>
+            <a:stCxn id="18" idx="1"/>
+            <a:endCxn id="5" idx="3"/>
+          </p:cNvCxnSpPr>
+          <p:nvPr/>
+        </p:nvCxnSpPr>
+        <p:spPr>
+          <a:xfrm flipH="1">
+            <a:off x="4778261" y="3603867"/>
+            <a:ext cx="616827" cy="12349"/>
+          </a:xfrm>
+          <a:prstGeom prst="straightConnector1">
+            <a:avLst/>
+          </a:prstGeom>
+          <a:noFill/>
+          <a:ln w="6350" cap="flat" cmpd="sng" algn="ctr">
+            <a:solidFill>
+              <a:srgbClr val="5B9BD5"/>
+            </a:solidFill>
+            <a:prstDash val="solid"/>
+            <a:miter lim="800000"/>
+            <a:tailEnd type="triangle"/>
           </a:ln>
           <a:effectLst/>
         </p:spPr>
@@ -13116,6 +13362,1137 @@
     <p:extLst>
       <p:ext uri="{BB962C8B-B14F-4D97-AF65-F5344CB8AC3E}">
         <p14:creationId xmlns:p14="http://schemas.microsoft.com/office/powerpoint/2010/main" val="1937595810"/>
+      </p:ext>
+    </p:extLst>
+  </p:cSld>
+  <p:clrMapOvr>
+    <a:masterClrMapping/>
+  </p:clrMapOvr>
+</p:sld>
+</file>
+
+<file path=ppt/slides/slide6.xml><?xml version="1.0" encoding="utf-8"?>
+<p:sld xmlns:a="http://schemas.openxmlformats.org/drawingml/2006/main" xmlns:r="http://schemas.openxmlformats.org/officeDocument/2006/relationships" xmlns:p="http://schemas.openxmlformats.org/presentationml/2006/main">
+  <p:cSld>
+    <p:spTree>
+      <p:nvGrpSpPr>
+        <p:cNvPr id="1" name=""/>
+        <p:cNvGrpSpPr/>
+        <p:nvPr/>
+      </p:nvGrpSpPr>
+      <p:grpSpPr>
+        <a:xfrm>
+          <a:off x="0" y="0"/>
+          <a:ext cx="0" cy="0"/>
+          <a:chOff x="0" y="0"/>
+          <a:chExt cx="0" cy="0"/>
+        </a:xfrm>
+      </p:grpSpPr>
+      <p:sp>
+        <p:nvSpPr>
+          <p:cNvPr id="2" name="Rechteck 1">
+            <a:extLst>
+              <a:ext uri="{FF2B5EF4-FFF2-40B4-BE49-F238E27FC236}">
+                <a16:creationId xmlns:a16="http://schemas.microsoft.com/office/drawing/2014/main" id="{6EF2D432-777C-323E-DB8C-C2FBEDAB8FE1}"/>
+              </a:ext>
+            </a:extLst>
+          </p:cNvPr>
+          <p:cNvSpPr/>
+          <p:nvPr/>
+        </p:nvSpPr>
+        <p:spPr>
+          <a:xfrm>
+            <a:off x="8740140" y="1211580"/>
+            <a:ext cx="2209800" cy="861060"/>
+          </a:xfrm>
+          <a:prstGeom prst="rect">
+            <a:avLst/>
+          </a:prstGeom>
+        </p:spPr>
+        <p:style>
+          <a:lnRef idx="2">
+            <a:schemeClr val="accent1">
+              <a:shade val="15000"/>
+            </a:schemeClr>
+          </a:lnRef>
+          <a:fillRef idx="1">
+            <a:schemeClr val="accent1"/>
+          </a:fillRef>
+          <a:effectRef idx="0">
+            <a:schemeClr val="accent1"/>
+          </a:effectRef>
+          <a:fontRef idx="minor">
+            <a:schemeClr val="lt1"/>
+          </a:fontRef>
+        </p:style>
+        <p:txBody>
+          <a:bodyPr rtlCol="0" anchor="ctr"/>
+          <a:lstStyle/>
+          <a:p>
+            <a:pPr algn="ctr"/>
+            <a:r>
+              <a:rPr lang="de-DE"/>
+              <a:t>#2</a:t>
+            </a:r>
+          </a:p>
+        </p:txBody>
+      </p:sp>
+      <p:sp>
+        <p:nvSpPr>
+          <p:cNvPr id="3" name="Rechteck 2">
+            <a:extLst>
+              <a:ext uri="{FF2B5EF4-FFF2-40B4-BE49-F238E27FC236}">
+                <a16:creationId xmlns:a16="http://schemas.microsoft.com/office/drawing/2014/main" id="{5F01F890-E7B6-9F07-1788-F94FF4AEFCD7}"/>
+              </a:ext>
+            </a:extLst>
+          </p:cNvPr>
+          <p:cNvSpPr/>
+          <p:nvPr/>
+        </p:nvSpPr>
+        <p:spPr>
+          <a:xfrm>
+            <a:off x="10172700" y="2545080"/>
+            <a:ext cx="830580" cy="464820"/>
+          </a:xfrm>
+          <a:prstGeom prst="rect">
+            <a:avLst/>
+          </a:prstGeom>
+        </p:spPr>
+        <p:style>
+          <a:lnRef idx="2">
+            <a:schemeClr val="accent1">
+              <a:shade val="15000"/>
+            </a:schemeClr>
+          </a:lnRef>
+          <a:fillRef idx="1">
+            <a:schemeClr val="accent1"/>
+          </a:fillRef>
+          <a:effectRef idx="0">
+            <a:schemeClr val="accent1"/>
+          </a:effectRef>
+          <a:fontRef idx="minor">
+            <a:schemeClr val="lt1"/>
+          </a:fontRef>
+        </p:style>
+        <p:txBody>
+          <a:bodyPr rtlCol="0" anchor="ctr"/>
+          <a:lstStyle/>
+          <a:p>
+            <a:pPr algn="ctr"/>
+            <a:endParaRPr lang="de-DE"/>
+          </a:p>
+        </p:txBody>
+      </p:sp>
+      <p:sp>
+        <p:nvSpPr>
+          <p:cNvPr id="4" name="Rechteck 3">
+            <a:extLst>
+              <a:ext uri="{FF2B5EF4-FFF2-40B4-BE49-F238E27FC236}">
+                <a16:creationId xmlns:a16="http://schemas.microsoft.com/office/drawing/2014/main" id="{4772A877-3FDC-6C96-2723-A1022F0913CA}"/>
+              </a:ext>
+            </a:extLst>
+          </p:cNvPr>
+          <p:cNvSpPr/>
+          <p:nvPr/>
+        </p:nvSpPr>
+        <p:spPr>
+          <a:xfrm>
+            <a:off x="10172700" y="3398520"/>
+            <a:ext cx="830580" cy="464820"/>
+          </a:xfrm>
+          <a:prstGeom prst="rect">
+            <a:avLst/>
+          </a:prstGeom>
+        </p:spPr>
+        <p:style>
+          <a:lnRef idx="2">
+            <a:schemeClr val="accent1">
+              <a:shade val="15000"/>
+            </a:schemeClr>
+          </a:lnRef>
+          <a:fillRef idx="1">
+            <a:schemeClr val="accent1"/>
+          </a:fillRef>
+          <a:effectRef idx="0">
+            <a:schemeClr val="accent1"/>
+          </a:effectRef>
+          <a:fontRef idx="minor">
+            <a:schemeClr val="lt1"/>
+          </a:fontRef>
+        </p:style>
+        <p:txBody>
+          <a:bodyPr rtlCol="0" anchor="ctr"/>
+          <a:lstStyle/>
+          <a:p>
+            <a:pPr algn="ctr"/>
+            <a:endParaRPr lang="de-DE"/>
+          </a:p>
+        </p:txBody>
+      </p:sp>
+      <p:sp>
+        <p:nvSpPr>
+          <p:cNvPr id="5" name="Rechteck 4">
+            <a:extLst>
+              <a:ext uri="{FF2B5EF4-FFF2-40B4-BE49-F238E27FC236}">
+                <a16:creationId xmlns:a16="http://schemas.microsoft.com/office/drawing/2014/main" id="{FB54169F-B176-CF55-0C3A-5CD440DB463A}"/>
+              </a:ext>
+            </a:extLst>
+          </p:cNvPr>
+          <p:cNvSpPr/>
+          <p:nvPr/>
+        </p:nvSpPr>
+        <p:spPr>
+          <a:xfrm>
+            <a:off x="8740140" y="4267200"/>
+            <a:ext cx="830580" cy="464820"/>
+          </a:xfrm>
+          <a:prstGeom prst="rect">
+            <a:avLst/>
+          </a:prstGeom>
+        </p:spPr>
+        <p:style>
+          <a:lnRef idx="2">
+            <a:schemeClr val="accent6">
+              <a:shade val="15000"/>
+            </a:schemeClr>
+          </a:lnRef>
+          <a:fillRef idx="1">
+            <a:schemeClr val="accent6"/>
+          </a:fillRef>
+          <a:effectRef idx="0">
+            <a:schemeClr val="accent6"/>
+          </a:effectRef>
+          <a:fontRef idx="minor">
+            <a:schemeClr val="lt1"/>
+          </a:fontRef>
+        </p:style>
+        <p:txBody>
+          <a:bodyPr rtlCol="0" anchor="ctr"/>
+          <a:lstStyle/>
+          <a:p>
+            <a:pPr algn="ctr"/>
+            <a:endParaRPr lang="de-DE"/>
+          </a:p>
+        </p:txBody>
+      </p:sp>
+      <p:sp>
+        <p:nvSpPr>
+          <p:cNvPr id="6" name="Rechteck 5">
+            <a:extLst>
+              <a:ext uri="{FF2B5EF4-FFF2-40B4-BE49-F238E27FC236}">
+                <a16:creationId xmlns:a16="http://schemas.microsoft.com/office/drawing/2014/main" id="{F6906F06-0FCF-DFAB-00C7-5F2F324F0D43}"/>
+              </a:ext>
+            </a:extLst>
+          </p:cNvPr>
+          <p:cNvSpPr/>
+          <p:nvPr/>
+        </p:nvSpPr>
+        <p:spPr>
+          <a:xfrm>
+            <a:off x="1706880" y="1211580"/>
+            <a:ext cx="2209800" cy="861060"/>
+          </a:xfrm>
+          <a:prstGeom prst="rect">
+            <a:avLst/>
+          </a:prstGeom>
+        </p:spPr>
+        <p:style>
+          <a:lnRef idx="2">
+            <a:schemeClr val="accent6">
+              <a:shade val="15000"/>
+            </a:schemeClr>
+          </a:lnRef>
+          <a:fillRef idx="1">
+            <a:schemeClr val="accent6"/>
+          </a:fillRef>
+          <a:effectRef idx="0">
+            <a:schemeClr val="accent6"/>
+          </a:effectRef>
+          <a:fontRef idx="minor">
+            <a:schemeClr val="lt1"/>
+          </a:fontRef>
+        </p:style>
+        <p:txBody>
+          <a:bodyPr rtlCol="0" anchor="ctr"/>
+          <a:lstStyle/>
+          <a:p>
+            <a:pPr algn="ctr"/>
+            <a:r>
+              <a:rPr lang="de-DE"/>
+              <a:t>#1</a:t>
+            </a:r>
+          </a:p>
+        </p:txBody>
+      </p:sp>
+      <p:sp>
+        <p:nvSpPr>
+          <p:cNvPr id="7" name="Rechteck 6">
+            <a:extLst>
+              <a:ext uri="{FF2B5EF4-FFF2-40B4-BE49-F238E27FC236}">
+                <a16:creationId xmlns:a16="http://schemas.microsoft.com/office/drawing/2014/main" id="{ADE4EE70-9C7A-3C4D-F68F-08E57B85C418}"/>
+              </a:ext>
+            </a:extLst>
+          </p:cNvPr>
+          <p:cNvSpPr/>
+          <p:nvPr/>
+        </p:nvSpPr>
+        <p:spPr>
+          <a:xfrm>
+            <a:off x="3139440" y="2545080"/>
+            <a:ext cx="830580" cy="464820"/>
+          </a:xfrm>
+          <a:prstGeom prst="rect">
+            <a:avLst/>
+          </a:prstGeom>
+        </p:spPr>
+        <p:style>
+          <a:lnRef idx="2">
+            <a:schemeClr val="accent6">
+              <a:shade val="15000"/>
+            </a:schemeClr>
+          </a:lnRef>
+          <a:fillRef idx="1">
+            <a:schemeClr val="accent6"/>
+          </a:fillRef>
+          <a:effectRef idx="0">
+            <a:schemeClr val="accent6"/>
+          </a:effectRef>
+          <a:fontRef idx="minor">
+            <a:schemeClr val="lt1"/>
+          </a:fontRef>
+        </p:style>
+        <p:txBody>
+          <a:bodyPr rtlCol="0" anchor="ctr"/>
+          <a:lstStyle/>
+          <a:p>
+            <a:pPr algn="ctr"/>
+            <a:endParaRPr lang="de-DE"/>
+          </a:p>
+        </p:txBody>
+      </p:sp>
+      <p:cxnSp>
+        <p:nvCxnSpPr>
+          <p:cNvPr id="11" name="Gerader Verbinder 10">
+            <a:extLst>
+              <a:ext uri="{FF2B5EF4-FFF2-40B4-BE49-F238E27FC236}">
+                <a16:creationId xmlns:a16="http://schemas.microsoft.com/office/drawing/2014/main" id="{5399D1A4-BB49-7095-51B8-39280FA8DE61}"/>
+              </a:ext>
+            </a:extLst>
+          </p:cNvPr>
+          <p:cNvCxnSpPr>
+            <a:stCxn id="3" idx="3"/>
+          </p:cNvCxnSpPr>
+          <p:nvPr/>
+        </p:nvCxnSpPr>
+        <p:spPr>
+          <a:xfrm flipV="1">
+            <a:off x="11003280" y="2545080"/>
+            <a:ext cx="3726180" cy="232410"/>
+          </a:xfrm>
+          <a:prstGeom prst="line">
+            <a:avLst/>
+          </a:prstGeom>
+        </p:spPr>
+        <p:style>
+          <a:lnRef idx="2">
+            <a:schemeClr val="accent1"/>
+          </a:lnRef>
+          <a:fillRef idx="0">
+            <a:schemeClr val="accent1"/>
+          </a:fillRef>
+          <a:effectRef idx="1">
+            <a:schemeClr val="accent1"/>
+          </a:effectRef>
+          <a:fontRef idx="minor">
+            <a:schemeClr val="tx1"/>
+          </a:fontRef>
+        </p:style>
+      </p:cxnSp>
+      <p:cxnSp>
+        <p:nvCxnSpPr>
+          <p:cNvPr id="12" name="Gerader Verbinder 11">
+            <a:extLst>
+              <a:ext uri="{FF2B5EF4-FFF2-40B4-BE49-F238E27FC236}">
+                <a16:creationId xmlns:a16="http://schemas.microsoft.com/office/drawing/2014/main" id="{AA4345C1-3D73-65DB-1695-ED7E2D6FE0B1}"/>
+              </a:ext>
+            </a:extLst>
+          </p:cNvPr>
+          <p:cNvCxnSpPr/>
+          <p:nvPr/>
+        </p:nvCxnSpPr>
+        <p:spPr>
+          <a:xfrm flipV="1">
+            <a:off x="10998835" y="3366135"/>
+            <a:ext cx="3726180" cy="232410"/>
+          </a:xfrm>
+          <a:prstGeom prst="line">
+            <a:avLst/>
+          </a:prstGeom>
+        </p:spPr>
+        <p:style>
+          <a:lnRef idx="2">
+            <a:schemeClr val="accent1"/>
+          </a:lnRef>
+          <a:fillRef idx="0">
+            <a:schemeClr val="accent1"/>
+          </a:fillRef>
+          <a:effectRef idx="1">
+            <a:schemeClr val="accent1"/>
+          </a:effectRef>
+          <a:fontRef idx="minor">
+            <a:schemeClr val="tx1"/>
+          </a:fontRef>
+        </p:style>
+      </p:cxnSp>
+      <p:cxnSp>
+        <p:nvCxnSpPr>
+          <p:cNvPr id="13" name="Gerader Verbinder 12">
+            <a:extLst>
+              <a:ext uri="{FF2B5EF4-FFF2-40B4-BE49-F238E27FC236}">
+                <a16:creationId xmlns:a16="http://schemas.microsoft.com/office/drawing/2014/main" id="{36864117-26E9-436C-1064-A50C1455DA40}"/>
+              </a:ext>
+            </a:extLst>
+          </p:cNvPr>
+          <p:cNvCxnSpPr>
+            <a:cxnSpLocks/>
+            <a:endCxn id="2" idx="1"/>
+          </p:cNvCxnSpPr>
+          <p:nvPr/>
+        </p:nvCxnSpPr>
+        <p:spPr>
+          <a:xfrm>
+            <a:off x="3916680" y="1621155"/>
+            <a:ext cx="4823460" cy="20955"/>
+          </a:xfrm>
+          <a:prstGeom prst="line">
+            <a:avLst/>
+          </a:prstGeom>
+        </p:spPr>
+        <p:style>
+          <a:lnRef idx="2">
+            <a:schemeClr val="accent6"/>
+          </a:lnRef>
+          <a:fillRef idx="0">
+            <a:schemeClr val="accent6"/>
+          </a:fillRef>
+          <a:effectRef idx="1">
+            <a:schemeClr val="accent6"/>
+          </a:effectRef>
+          <a:fontRef idx="minor">
+            <a:schemeClr val="tx1"/>
+          </a:fontRef>
+        </p:style>
+      </p:cxnSp>
+      <p:cxnSp>
+        <p:nvCxnSpPr>
+          <p:cNvPr id="15" name="Gerader Verbinder 14">
+            <a:extLst>
+              <a:ext uri="{FF2B5EF4-FFF2-40B4-BE49-F238E27FC236}">
+                <a16:creationId xmlns:a16="http://schemas.microsoft.com/office/drawing/2014/main" id="{2009753A-AD17-33B6-230E-38A6FDFF1E05}"/>
+              </a:ext>
+            </a:extLst>
+          </p:cNvPr>
+          <p:cNvCxnSpPr>
+            <a:cxnSpLocks/>
+          </p:cNvCxnSpPr>
+          <p:nvPr/>
+        </p:nvCxnSpPr>
+        <p:spPr>
+          <a:xfrm>
+            <a:off x="10949940" y="1643062"/>
+            <a:ext cx="4823460" cy="20955"/>
+          </a:xfrm>
+          <a:prstGeom prst="line">
+            <a:avLst/>
+          </a:prstGeom>
+        </p:spPr>
+        <p:style>
+          <a:lnRef idx="2">
+            <a:schemeClr val="accent1"/>
+          </a:lnRef>
+          <a:fillRef idx="0">
+            <a:schemeClr val="accent1"/>
+          </a:fillRef>
+          <a:effectRef idx="1">
+            <a:schemeClr val="accent1"/>
+          </a:effectRef>
+          <a:fontRef idx="minor">
+            <a:schemeClr val="tx1"/>
+          </a:fontRef>
+        </p:style>
+      </p:cxnSp>
+      <p:sp>
+        <p:nvSpPr>
+          <p:cNvPr id="16" name="Textfeld 15">
+            <a:extLst>
+              <a:ext uri="{FF2B5EF4-FFF2-40B4-BE49-F238E27FC236}">
+                <a16:creationId xmlns:a16="http://schemas.microsoft.com/office/drawing/2014/main" id="{18BEF5AD-AB51-9D75-65FB-9B1EE7FC9C01}"/>
+              </a:ext>
+            </a:extLst>
+          </p:cNvPr>
+          <p:cNvSpPr txBox="1"/>
+          <p:nvPr/>
+        </p:nvSpPr>
+        <p:spPr>
+          <a:xfrm flipH="1">
+            <a:off x="5509258" y="1322190"/>
+            <a:ext cx="723901" cy="369332"/>
+          </a:xfrm>
+          <a:prstGeom prst="rect">
+            <a:avLst/>
+          </a:prstGeom>
+          <a:noFill/>
+        </p:spPr>
+        <p:txBody>
+          <a:bodyPr wrap="square" rtlCol="0">
+            <a:spAutoFit/>
+          </a:bodyPr>
+          <a:lstStyle/>
+          <a:p>
+            <a:r>
+              <a:rPr lang="de-DE"/>
+              <a:t>FC</a:t>
+            </a:r>
+          </a:p>
+        </p:txBody>
+      </p:sp>
+      <p:cxnSp>
+        <p:nvCxnSpPr>
+          <p:cNvPr id="17" name="Gerader Verbinder 16">
+            <a:extLst>
+              <a:ext uri="{FF2B5EF4-FFF2-40B4-BE49-F238E27FC236}">
+                <a16:creationId xmlns:a16="http://schemas.microsoft.com/office/drawing/2014/main" id="{EC7C2953-97A8-1379-1729-3E3B1C824339}"/>
+              </a:ext>
+            </a:extLst>
+          </p:cNvPr>
+          <p:cNvCxnSpPr>
+            <a:cxnSpLocks/>
+            <a:stCxn id="7" idx="3"/>
+            <a:endCxn id="5" idx="1"/>
+          </p:cNvCxnSpPr>
+          <p:nvPr/>
+        </p:nvCxnSpPr>
+        <p:spPr>
+          <a:xfrm>
+            <a:off x="3970020" y="2777490"/>
+            <a:ext cx="4770120" cy="1722120"/>
+          </a:xfrm>
+          <a:prstGeom prst="line">
+            <a:avLst/>
+          </a:prstGeom>
+        </p:spPr>
+        <p:style>
+          <a:lnRef idx="2">
+            <a:schemeClr val="accent6"/>
+          </a:lnRef>
+          <a:fillRef idx="0">
+            <a:schemeClr val="accent6"/>
+          </a:fillRef>
+          <a:effectRef idx="1">
+            <a:schemeClr val="accent6"/>
+          </a:effectRef>
+          <a:fontRef idx="minor">
+            <a:schemeClr val="tx1"/>
+          </a:fontRef>
+        </p:style>
+      </p:cxnSp>
+      <p:sp>
+        <p:nvSpPr>
+          <p:cNvPr id="20" name="Textfeld 19">
+            <a:extLst>
+              <a:ext uri="{FF2B5EF4-FFF2-40B4-BE49-F238E27FC236}">
+                <a16:creationId xmlns:a16="http://schemas.microsoft.com/office/drawing/2014/main" id="{4574A593-CCAE-BE75-0924-36A1D752DBD3}"/>
+              </a:ext>
+            </a:extLst>
+          </p:cNvPr>
+          <p:cNvSpPr txBox="1"/>
+          <p:nvPr/>
+        </p:nvSpPr>
+        <p:spPr>
+          <a:xfrm flipH="1">
+            <a:off x="5871208" y="3113008"/>
+            <a:ext cx="723901" cy="369332"/>
+          </a:xfrm>
+          <a:prstGeom prst="rect">
+            <a:avLst/>
+          </a:prstGeom>
+          <a:noFill/>
+        </p:spPr>
+        <p:txBody>
+          <a:bodyPr wrap="square" rtlCol="0">
+            <a:spAutoFit/>
+          </a:bodyPr>
+          <a:lstStyle/>
+          <a:p>
+            <a:r>
+              <a:rPr lang="de-DE"/>
+              <a:t>linkId</a:t>
+            </a:r>
+          </a:p>
+        </p:txBody>
+      </p:sp>
+      <p:sp>
+        <p:nvSpPr>
+          <p:cNvPr id="21" name="Textfeld 20">
+            <a:extLst>
+              <a:ext uri="{FF2B5EF4-FFF2-40B4-BE49-F238E27FC236}">
+                <a16:creationId xmlns:a16="http://schemas.microsoft.com/office/drawing/2014/main" id="{C05B3F96-D6C1-5468-E91A-DE20FB4502EB}"/>
+              </a:ext>
+            </a:extLst>
+          </p:cNvPr>
+          <p:cNvSpPr txBox="1"/>
+          <p:nvPr/>
+        </p:nvSpPr>
+        <p:spPr>
+          <a:xfrm flipH="1">
+            <a:off x="3299458" y="2661285"/>
+            <a:ext cx="723901" cy="369332"/>
+          </a:xfrm>
+          <a:prstGeom prst="rect">
+            <a:avLst/>
+          </a:prstGeom>
+          <a:noFill/>
+        </p:spPr>
+        <p:txBody>
+          <a:bodyPr wrap="square" rtlCol="0">
+            <a:spAutoFit/>
+          </a:bodyPr>
+          <a:lstStyle/>
+          <a:p>
+            <a:r>
+              <a:rPr lang="de-DE"/>
+              <a:t>linkId</a:t>
+            </a:r>
+          </a:p>
+        </p:txBody>
+      </p:sp>
+      <p:sp>
+        <p:nvSpPr>
+          <p:cNvPr id="22" name="Textfeld 21">
+            <a:extLst>
+              <a:ext uri="{FF2B5EF4-FFF2-40B4-BE49-F238E27FC236}">
+                <a16:creationId xmlns:a16="http://schemas.microsoft.com/office/drawing/2014/main" id="{FBEE1E61-27C1-E3CF-E754-8023DEA052E3}"/>
+              </a:ext>
+            </a:extLst>
+          </p:cNvPr>
+          <p:cNvSpPr txBox="1"/>
+          <p:nvPr/>
+        </p:nvSpPr>
+        <p:spPr>
+          <a:xfrm flipH="1">
+            <a:off x="8793479" y="4364593"/>
+            <a:ext cx="723901" cy="369332"/>
+          </a:xfrm>
+          <a:prstGeom prst="rect">
+            <a:avLst/>
+          </a:prstGeom>
+          <a:noFill/>
+        </p:spPr>
+        <p:txBody>
+          <a:bodyPr wrap="square" rtlCol="0">
+            <a:spAutoFit/>
+          </a:bodyPr>
+          <a:lstStyle/>
+          <a:p>
+            <a:r>
+              <a:rPr lang="de-DE"/>
+              <a:t>linkId</a:t>
+            </a:r>
+          </a:p>
+        </p:txBody>
+      </p:sp>
+      <p:sp>
+        <p:nvSpPr>
+          <p:cNvPr id="23" name="Textfeld 22">
+            <a:extLst>
+              <a:ext uri="{FF2B5EF4-FFF2-40B4-BE49-F238E27FC236}">
+                <a16:creationId xmlns:a16="http://schemas.microsoft.com/office/drawing/2014/main" id="{82AE61ED-C254-C6C4-0FFF-E847F1299C42}"/>
+              </a:ext>
+            </a:extLst>
+          </p:cNvPr>
+          <p:cNvSpPr txBox="1"/>
+          <p:nvPr/>
+        </p:nvSpPr>
+        <p:spPr>
+          <a:xfrm flipH="1">
+            <a:off x="1946906" y="1138477"/>
+            <a:ext cx="1714502" cy="369332"/>
+          </a:xfrm>
+          <a:prstGeom prst="rect">
+            <a:avLst/>
+          </a:prstGeom>
+          <a:noFill/>
+        </p:spPr>
+        <p:txBody>
+          <a:bodyPr wrap="square" rtlCol="0">
+            <a:spAutoFit/>
+          </a:bodyPr>
+          <a:lstStyle/>
+          <a:p>
+            <a:r>
+              <a:rPr lang="de-DE"/>
+              <a:t>mountName</a:t>
+            </a:r>
+          </a:p>
+        </p:txBody>
+      </p:sp>
+      <p:sp>
+        <p:nvSpPr>
+          <p:cNvPr id="26" name="Textfeld 25">
+            <a:extLst>
+              <a:ext uri="{FF2B5EF4-FFF2-40B4-BE49-F238E27FC236}">
+                <a16:creationId xmlns:a16="http://schemas.microsoft.com/office/drawing/2014/main" id="{AEBDC1F1-222E-72B5-CDB6-55A812BA56A1}"/>
+              </a:ext>
+            </a:extLst>
+          </p:cNvPr>
+          <p:cNvSpPr txBox="1"/>
+          <p:nvPr/>
+        </p:nvSpPr>
+        <p:spPr>
+          <a:xfrm flipH="1">
+            <a:off x="8850625" y="1138477"/>
+            <a:ext cx="1714502" cy="369332"/>
+          </a:xfrm>
+          <a:prstGeom prst="rect">
+            <a:avLst/>
+          </a:prstGeom>
+          <a:noFill/>
+        </p:spPr>
+        <p:txBody>
+          <a:bodyPr wrap="square" rtlCol="0">
+            <a:spAutoFit/>
+          </a:bodyPr>
+          <a:lstStyle/>
+          <a:p>
+            <a:r>
+              <a:rPr lang="de-DE"/>
+              <a:t>mountName</a:t>
+            </a:r>
+          </a:p>
+        </p:txBody>
+      </p:sp>
+      <p:sp>
+        <p:nvSpPr>
+          <p:cNvPr id="37" name="Ellipse 36">
+            <a:extLst>
+              <a:ext uri="{FF2B5EF4-FFF2-40B4-BE49-F238E27FC236}">
+                <a16:creationId xmlns:a16="http://schemas.microsoft.com/office/drawing/2014/main" id="{50860111-5B65-DEAC-DCB8-260660CBA2BF}"/>
+              </a:ext>
+            </a:extLst>
+          </p:cNvPr>
+          <p:cNvSpPr/>
+          <p:nvPr/>
+        </p:nvSpPr>
+        <p:spPr>
+          <a:xfrm>
+            <a:off x="3230879" y="6337697"/>
+            <a:ext cx="1371602" cy="525779"/>
+          </a:xfrm>
+          <a:prstGeom prst="ellipse">
+            <a:avLst/>
+          </a:prstGeom>
+        </p:spPr>
+        <p:style>
+          <a:lnRef idx="2">
+            <a:schemeClr val="accent1">
+              <a:shade val="15000"/>
+            </a:schemeClr>
+          </a:lnRef>
+          <a:fillRef idx="1">
+            <a:schemeClr val="accent1"/>
+          </a:fillRef>
+          <a:effectRef idx="0">
+            <a:schemeClr val="accent1"/>
+          </a:effectRef>
+          <a:fontRef idx="minor">
+            <a:schemeClr val="lt1"/>
+          </a:fontRef>
+        </p:style>
+        <p:txBody>
+          <a:bodyPr rtlCol="0" anchor="ctr"/>
+          <a:lstStyle/>
+          <a:p>
+            <a:pPr algn="ctr"/>
+            <a:r>
+              <a:rPr lang="de-DE"/>
+              <a:t>target state</a:t>
+            </a:r>
+          </a:p>
+        </p:txBody>
+      </p:sp>
+      <p:sp>
+        <p:nvSpPr>
+          <p:cNvPr id="38" name="Ellipse 37">
+            <a:extLst>
+              <a:ext uri="{FF2B5EF4-FFF2-40B4-BE49-F238E27FC236}">
+                <a16:creationId xmlns:a16="http://schemas.microsoft.com/office/drawing/2014/main" id="{51AB10A0-CB0C-BE7A-416D-B5B67D49DCA5}"/>
+              </a:ext>
+            </a:extLst>
+          </p:cNvPr>
+          <p:cNvSpPr/>
+          <p:nvPr/>
+        </p:nvSpPr>
+        <p:spPr>
+          <a:xfrm>
+            <a:off x="6088379" y="6337697"/>
+            <a:ext cx="1371602" cy="525779"/>
+          </a:xfrm>
+          <a:prstGeom prst="ellipse">
+            <a:avLst/>
+          </a:prstGeom>
+        </p:spPr>
+        <p:style>
+          <a:lnRef idx="2">
+            <a:schemeClr val="accent1">
+              <a:shade val="15000"/>
+            </a:schemeClr>
+          </a:lnRef>
+          <a:fillRef idx="1">
+            <a:schemeClr val="accent1"/>
+          </a:fillRef>
+          <a:effectRef idx="0">
+            <a:schemeClr val="accent1"/>
+          </a:effectRef>
+          <a:fontRef idx="minor">
+            <a:schemeClr val="lt1"/>
+          </a:fontRef>
+        </p:style>
+        <p:txBody>
+          <a:bodyPr rtlCol="0" anchor="ctr"/>
+          <a:lstStyle/>
+          <a:p>
+            <a:pPr algn="ctr"/>
+            <a:r>
+              <a:rPr lang="de-DE"/>
+              <a:t>implementatio</a:t>
+            </a:r>
+          </a:p>
+        </p:txBody>
+      </p:sp>
+      <p:cxnSp>
+        <p:nvCxnSpPr>
+          <p:cNvPr id="40" name="Gerade Verbindung mit Pfeil 39">
+            <a:extLst>
+              <a:ext uri="{FF2B5EF4-FFF2-40B4-BE49-F238E27FC236}">
+                <a16:creationId xmlns:a16="http://schemas.microsoft.com/office/drawing/2014/main" id="{77A561C7-95ED-C6C8-6B49-97068022C0A4}"/>
+              </a:ext>
+            </a:extLst>
+          </p:cNvPr>
+          <p:cNvCxnSpPr>
+            <a:cxnSpLocks/>
+          </p:cNvCxnSpPr>
+          <p:nvPr/>
+        </p:nvCxnSpPr>
+        <p:spPr>
+          <a:xfrm>
+            <a:off x="2398395" y="4673024"/>
+            <a:ext cx="1638301" cy="1642110"/>
+          </a:xfrm>
+          <a:prstGeom prst="straightConnector1">
+            <a:avLst/>
+          </a:prstGeom>
+          <a:ln>
+            <a:tailEnd type="triangle"/>
+          </a:ln>
+        </p:spPr>
+        <p:style>
+          <a:lnRef idx="2">
+            <a:schemeClr val="accent1"/>
+          </a:lnRef>
+          <a:fillRef idx="0">
+            <a:schemeClr val="accent1"/>
+          </a:fillRef>
+          <a:effectRef idx="1">
+            <a:schemeClr val="accent1"/>
+          </a:effectRef>
+          <a:fontRef idx="minor">
+            <a:schemeClr val="tx1"/>
+          </a:fontRef>
+        </p:style>
+      </p:cxnSp>
+      <p:cxnSp>
+        <p:nvCxnSpPr>
+          <p:cNvPr id="41" name="Gerade Verbindung mit Pfeil 40">
+            <a:extLst>
+              <a:ext uri="{FF2B5EF4-FFF2-40B4-BE49-F238E27FC236}">
+                <a16:creationId xmlns:a16="http://schemas.microsoft.com/office/drawing/2014/main" id="{BC82B8FD-F2EE-DF14-ACDC-8E9C1D142946}"/>
+              </a:ext>
+            </a:extLst>
+          </p:cNvPr>
+          <p:cNvCxnSpPr/>
+          <p:nvPr/>
+        </p:nvCxnSpPr>
+        <p:spPr>
+          <a:xfrm>
+            <a:off x="2125981" y="4650461"/>
+            <a:ext cx="1638301" cy="1642110"/>
+          </a:xfrm>
+          <a:prstGeom prst="straightConnector1">
+            <a:avLst/>
+          </a:prstGeom>
+          <a:ln>
+            <a:tailEnd type="triangle"/>
+          </a:ln>
+        </p:spPr>
+        <p:style>
+          <a:lnRef idx="2">
+            <a:schemeClr val="accent1"/>
+          </a:lnRef>
+          <a:fillRef idx="0">
+            <a:schemeClr val="accent1"/>
+          </a:fillRef>
+          <a:effectRef idx="1">
+            <a:schemeClr val="accent1"/>
+          </a:effectRef>
+          <a:fontRef idx="minor">
+            <a:schemeClr val="tx1"/>
+          </a:fontRef>
+        </p:style>
+      </p:cxnSp>
+      <p:cxnSp>
+        <p:nvCxnSpPr>
+          <p:cNvPr id="42" name="Gerade Verbindung mit Pfeil 41">
+            <a:extLst>
+              <a:ext uri="{FF2B5EF4-FFF2-40B4-BE49-F238E27FC236}">
+                <a16:creationId xmlns:a16="http://schemas.microsoft.com/office/drawing/2014/main" id="{D87108AD-61E2-6595-B627-DDBDE4F6A5D4}"/>
+              </a:ext>
+            </a:extLst>
+          </p:cNvPr>
+          <p:cNvCxnSpPr/>
+          <p:nvPr/>
+        </p:nvCxnSpPr>
+        <p:spPr>
+          <a:xfrm>
+            <a:off x="1844040" y="4762500"/>
+            <a:ext cx="1638301" cy="1642110"/>
+          </a:xfrm>
+          <a:prstGeom prst="straightConnector1">
+            <a:avLst/>
+          </a:prstGeom>
+          <a:ln>
+            <a:tailEnd type="triangle"/>
+          </a:ln>
+        </p:spPr>
+        <p:style>
+          <a:lnRef idx="2">
+            <a:schemeClr val="accent1"/>
+          </a:lnRef>
+          <a:fillRef idx="0">
+            <a:schemeClr val="accent1"/>
+          </a:fillRef>
+          <a:effectRef idx="1">
+            <a:schemeClr val="accent1"/>
+          </a:effectRef>
+          <a:fontRef idx="minor">
+            <a:schemeClr val="tx1"/>
+          </a:fontRef>
+        </p:style>
+      </p:cxnSp>
+      <p:cxnSp>
+        <p:nvCxnSpPr>
+          <p:cNvPr id="43" name="Gerade Verbindung mit Pfeil 42">
+            <a:extLst>
+              <a:ext uri="{FF2B5EF4-FFF2-40B4-BE49-F238E27FC236}">
+                <a16:creationId xmlns:a16="http://schemas.microsoft.com/office/drawing/2014/main" id="{2258B905-29B8-23A2-6454-BD2EDBBE144C}"/>
+              </a:ext>
+            </a:extLst>
+          </p:cNvPr>
+          <p:cNvCxnSpPr/>
+          <p:nvPr/>
+        </p:nvCxnSpPr>
+        <p:spPr>
+          <a:xfrm>
+            <a:off x="1565911" y="4893945"/>
+            <a:ext cx="1638301" cy="1642110"/>
+          </a:xfrm>
+          <a:prstGeom prst="straightConnector1">
+            <a:avLst/>
+          </a:prstGeom>
+          <a:ln>
+            <a:tailEnd type="triangle"/>
+          </a:ln>
+        </p:spPr>
+        <p:style>
+          <a:lnRef idx="2">
+            <a:schemeClr val="accent1"/>
+          </a:lnRef>
+          <a:fillRef idx="0">
+            <a:schemeClr val="accent1"/>
+          </a:fillRef>
+          <a:effectRef idx="1">
+            <a:schemeClr val="accent1"/>
+          </a:effectRef>
+          <a:fontRef idx="minor">
+            <a:schemeClr val="tx1"/>
+          </a:fontRef>
+        </p:style>
+      </p:cxnSp>
+    </p:spTree>
+    <p:extLst>
+      <p:ext uri="{BB962C8B-B14F-4D97-AF65-F5344CB8AC3E}">
+        <p14:creationId xmlns:p14="http://schemas.microsoft.com/office/powerpoint/2010/main" val="1989516858"/>
+      </p:ext>
+    </p:extLst>
+  </p:cSld>
+  <p:clrMapOvr>
+    <a:masterClrMapping/>
+  </p:clrMapOvr>
+</p:sld>
+</file>
+
+<file path=ppt/slides/slide7.xml><?xml version="1.0" encoding="utf-8"?>
+<p:sld xmlns:a="http://schemas.openxmlformats.org/drawingml/2006/main" xmlns:r="http://schemas.openxmlformats.org/officeDocument/2006/relationships" xmlns:p="http://schemas.openxmlformats.org/presentationml/2006/main">
+  <p:cSld>
+    <p:spTree>
+      <p:nvGrpSpPr>
+        <p:cNvPr id="1" name=""/>
+        <p:cNvGrpSpPr/>
+        <p:nvPr/>
+      </p:nvGrpSpPr>
+      <p:grpSpPr>
+        <a:xfrm>
+          <a:off x="0" y="0"/>
+          <a:ext cx="0" cy="0"/>
+          <a:chOff x="0" y="0"/>
+          <a:chExt cx="0" cy="0"/>
+        </a:xfrm>
+      </p:grpSpPr>
+      <p:sp>
+        <p:nvSpPr>
+          <p:cNvPr id="2" name="Textfeld 1">
+            <a:extLst>
+              <a:ext uri="{FF2B5EF4-FFF2-40B4-BE49-F238E27FC236}">
+                <a16:creationId xmlns:a16="http://schemas.microsoft.com/office/drawing/2014/main" id="{48697A11-9A3A-CE48-CFDD-088C81665358}"/>
+              </a:ext>
+            </a:extLst>
+          </p:cNvPr>
+          <p:cNvSpPr txBox="1"/>
+          <p:nvPr/>
+        </p:nvSpPr>
+        <p:spPr>
+          <a:xfrm>
+            <a:off x="1577340" y="449580"/>
+            <a:ext cx="11643360" cy="1754326"/>
+          </a:xfrm>
+          <a:prstGeom prst="rect">
+            <a:avLst/>
+          </a:prstGeom>
+          <a:noFill/>
+        </p:spPr>
+        <p:txBody>
+          <a:bodyPr wrap="square" rtlCol="0">
+            <a:spAutoFit/>
+          </a:bodyPr>
+          <a:lstStyle/>
+          <a:p>
+            <a:r>
+              <a:rPr lang="de-DE"/>
+              <a:t>Situation:</a:t>
+            </a:r>
+          </a:p>
+          <a:p>
+            <a:pPr marL="285750" indent="-285750">
+              <a:buFontTx/>
+              <a:buChar char="-"/>
+            </a:pPr>
+            <a:r>
+              <a:rPr lang="de-DE"/>
+              <a:t>two links between same two devices</a:t>
+            </a:r>
+          </a:p>
+          <a:p>
+            <a:pPr marL="285750" indent="-285750">
+              <a:buFontTx/>
+              <a:buChar char="-"/>
+            </a:pPr>
+            <a:r>
+              <a:rPr lang="de-DE"/>
+              <a:t>first round of calculation of distribution of LinkID lead to wrong result</a:t>
+            </a:r>
+          </a:p>
+          <a:p>
+            <a:pPr marL="285750" indent="-285750">
+              <a:buFontTx/>
+              <a:buChar char="-"/>
+            </a:pPr>
+            <a:r>
+              <a:rPr lang="de-DE"/>
+              <a:t>LinkIDs in LTP::externalLabel habe to be flipped</a:t>
+            </a:r>
+          </a:p>
+          <a:p>
+            <a:pPr marL="285750" indent="-285750">
+              <a:buFontTx/>
+              <a:buChar char="-"/>
+            </a:pPr>
+            <a:r>
+              <a:rPr lang="de-DE"/>
+              <a:t>Validation of writing one correct value into one LTP fails, because same LinkID being configured twice</a:t>
+            </a:r>
+          </a:p>
+          <a:p>
+            <a:pPr marL="285750" indent="-285750">
+              <a:buFontTx/>
+              <a:buChar char="-"/>
+            </a:pPr>
+            <a:endParaRPr lang="de-DE"/>
+          </a:p>
+        </p:txBody>
+      </p:sp>
+      <p:sp>
+        <p:nvSpPr>
+          <p:cNvPr id="3" name="Textfeld 2">
+            <a:extLst>
+              <a:ext uri="{FF2B5EF4-FFF2-40B4-BE49-F238E27FC236}">
+                <a16:creationId xmlns:a16="http://schemas.microsoft.com/office/drawing/2014/main" id="{E315B8D1-214B-B974-A7B7-4D92E2AD8D50}"/>
+              </a:ext>
+            </a:extLst>
+          </p:cNvPr>
+          <p:cNvSpPr txBox="1"/>
+          <p:nvPr/>
+        </p:nvSpPr>
+        <p:spPr>
+          <a:xfrm>
+            <a:off x="1851660" y="2788920"/>
+            <a:ext cx="12285992" cy="1200329"/>
+          </a:xfrm>
+          <a:prstGeom prst="rect">
+            <a:avLst/>
+          </a:prstGeom>
+          <a:noFill/>
+        </p:spPr>
+        <p:txBody>
+          <a:bodyPr wrap="none" rtlCol="0">
+            <a:spAutoFit/>
+          </a:bodyPr>
+          <a:lstStyle/>
+          <a:p>
+            <a:r>
+              <a:rPr lang="de-DE"/>
+              <a:t>If ErrorCode 111 says that LinkID from Link::calculatedLinkId has to be written to LTP::externalLabel, this leads to deadlock</a:t>
+            </a:r>
+          </a:p>
+          <a:p>
+            <a:endParaRPr lang="de-DE"/>
+          </a:p>
+          <a:p>
+            <a:r>
+              <a:rPr lang="de-DE"/>
+              <a:t>If ErrorCode 111 says that LinkID in LTP::externalLabel is different from Link::calculatedLinkId and needs to be deleted </a:t>
+            </a:r>
+          </a:p>
+          <a:p>
+            <a:r>
+              <a:rPr lang="de-DE"/>
+              <a:t>and ErrorCode 222 says that Link::calculatedLinkId is missing in LTP::externalLabel</a:t>
+            </a:r>
+          </a:p>
+        </p:txBody>
+      </p:sp>
+    </p:spTree>
+    <p:extLst>
+      <p:ext uri="{BB962C8B-B14F-4D97-AF65-F5344CB8AC3E}">
+        <p14:creationId xmlns:p14="http://schemas.microsoft.com/office/powerpoint/2010/main" val="276810150"/>
       </p:ext>
     </p:extLst>
   </p:cSld>
